--- a/Documents/화면설계서_귀기울임.pptx
+++ b/Documents/화면설계서_귀기울임.pptx
@@ -13705,7 +13705,7 @@
                 <a:cs typeface="Calibri"/>
                 <a:sym typeface="Calibri"/>
               </a:rPr>
-              <a:t>2026. 07. 2</a:t>
+              <a:t>2026. 07. 30</a:t>
             </a:r>
             <a:r>
               <a:rPr lang="en-US" altLang="ko-KR" sz="1800" b="1" i="0" u="none" strike="noStrike">
@@ -13717,7 +13717,7 @@
                 <a:cs typeface="Calibri"/>
                 <a:sym typeface="Calibri"/>
               </a:rPr>
-              <a:t>9</a:t>
+              <a:t/>
             </a:r>
             <a:endParaRPr lang="en-US" altLang="ko-KR" sz="1800" b="1" i="0" u="none" strike="noStrike">
               <a:solidFill>
@@ -13980,18 +13980,6 @@
                   <a:srgbClr val="31333f"/>
                 </a:solidFill>
                 <a:latin typeface="맑은 고딕"/>
-                <a:ea typeface="맑은 고딕"/>
-                <a:cs typeface="맑은 고딕"/>
-                <a:sym typeface="맑은 고딕"/>
-              </a:rPr>
-              <a:t>-</a:t>
-            </a:r>
-            <a:r>
-              <a:rPr lang="ko-KR" sz="1200" b="0" i="0">
-                <a:solidFill>
-                  <a:srgbClr val="31333f"/>
-                </a:solidFill>
-                <a:latin typeface="맑은 고딕"/>
                 <a:cs typeface="맑은 고딕"/>
                 <a:sym typeface="맑은 고딕"/>
               </a:rPr>
@@ -14007,7 +13995,7 @@
                 <a:cs typeface="맑은 고딕"/>
                 <a:sym typeface="맑은 고딕"/>
               </a:rPr>
-              <a:t> 계정 정보 입력: </a:t>
+              <a:t> 가입 완료 안내 및 수집 항목: 필수(활동량·수면)와 선택(체성분) 구분 표시</a:t>
             </a:r>
             <a:r>
               <a:rPr lang="ko-KR" altLang="en-US" sz="1200" b="0" i="0">
@@ -14019,7 +14007,7 @@
                 <a:cs typeface="맑은 고딕"/>
                 <a:sym typeface="맑은 고딕"/>
               </a:rPr>
-              <a:t>이메일</a:t>
+              <a:t/>
             </a:r>
             <a:r>
               <a:rPr lang="ko-KR" sz="1200" b="0" i="0">
@@ -14031,7 +14019,7 @@
                 <a:cs typeface="맑은 고딕"/>
                 <a:sym typeface="맑은 고딕"/>
               </a:rPr>
-              <a:t> 및 비밀번호/비밀번호 확인 입력 </a:t>
+              <a:t/>
             </a:r>
             <a:endParaRPr lang="ko-KR" sz="1200" b="0" i="0">
               <a:solidFill>
@@ -14065,18 +14053,6 @@
                   <a:srgbClr val="31333f"/>
                 </a:solidFill>
                 <a:latin typeface="맑은 고딕"/>
-                <a:ea typeface="맑은 고딕"/>
-                <a:cs typeface="맑은 고딕"/>
-                <a:sym typeface="맑은 고딕"/>
-              </a:rPr>
-              <a:t>-</a:t>
-            </a:r>
-            <a:r>
-              <a:rPr lang="ko-KR" sz="1200" b="0" i="0">
-                <a:solidFill>
-                  <a:srgbClr val="31333f"/>
-                </a:solidFill>
-                <a:latin typeface="맑은 고딕"/>
                 <a:cs typeface="맑은 고딕"/>
                 <a:sym typeface="맑은 고딕"/>
               </a:rPr>
@@ -14092,7 +14068,7 @@
                 <a:cs typeface="맑은 고딕"/>
                 <a:sym typeface="맑은 고딕"/>
               </a:rPr>
-              <a:t> 사용자 인적사항: 이름, 생년월일, 성별 입력</a:t>
+              <a:t> 항목별 동의 체크박스: 필수·선택 항목에 대해 개별 동의를 받음</a:t>
             </a:r>
             <a:endParaRPr lang="ko-KR" sz="1200" b="0" i="0">
               <a:solidFill>
@@ -14126,18 +14102,6 @@
                   <a:srgbClr val="31333f"/>
                 </a:solidFill>
                 <a:latin typeface="맑은 고딕"/>
-                <a:ea typeface="맑은 고딕"/>
-                <a:cs typeface="맑은 고딕"/>
-                <a:sym typeface="맑은 고딕"/>
-              </a:rPr>
-              <a:t>-</a:t>
-            </a:r>
-            <a:r>
-              <a:rPr lang="ko-KR" sz="1200" b="0" i="0">
-                <a:solidFill>
-                  <a:srgbClr val="31333f"/>
-                </a:solidFill>
-                <a:latin typeface="맑은 고딕"/>
                 <a:cs typeface="맑은 고딕"/>
                 <a:sym typeface="맑은 고딕"/>
               </a:rPr>
@@ -14153,7 +14117,7 @@
                 <a:cs typeface="맑은 고딕"/>
                 <a:sym typeface="맑은 고딕"/>
               </a:rPr>
-              <a:t> 중복 확인 버튼: 입력한 </a:t>
+              <a:t> 연동하기 버튼: Health Connect 권한 요청 창 호출 후 연동 상태 저장</a:t>
             </a:r>
             <a:r>
               <a:rPr lang="ko-KR" altLang="en-US" sz="1200" b="0" i="0">
@@ -14165,7 +14129,7 @@
                 <a:cs typeface="맑은 고딕"/>
                 <a:sym typeface="맑은 고딕"/>
               </a:rPr>
-              <a:t>이메일을</a:t>
+              <a:t/>
             </a:r>
             <a:r>
               <a:rPr lang="ko-KR" sz="1200" b="0" i="0">
@@ -14177,7 +14141,7 @@
                 <a:cs typeface="맑은 고딕"/>
                 <a:sym typeface="맑은 고딕"/>
               </a:rPr>
-              <a:t> DB와 대조해서 중복하는 </a:t>
+              <a:t/>
             </a:r>
             <a:r>
               <a:rPr lang="ko-KR" altLang="en-US" sz="1200" b="0" i="0">
@@ -14189,7 +14153,7 @@
                 <a:cs typeface="맑은 고딕"/>
                 <a:sym typeface="맑은 고딕"/>
               </a:rPr>
-              <a:t>이메일이</a:t>
+              <a:t/>
             </a:r>
             <a:r>
               <a:rPr lang="ko-KR" sz="1200" b="0" i="0">
@@ -14201,7 +14165,7 @@
                 <a:cs typeface="맑은 고딕"/>
                 <a:sym typeface="맑은 고딕"/>
               </a:rPr>
-              <a:t> 있는지 확인</a:t>
+              <a:t/>
             </a:r>
             <a:endParaRPr lang="ko-KR" sz="1200" b="0" i="0">
               <a:solidFill>
@@ -14235,18 +14199,6 @@
                   <a:srgbClr val="31333f"/>
                 </a:solidFill>
                 <a:latin typeface="맑은 고딕"/>
-                <a:ea typeface="맑은 고딕"/>
-                <a:cs typeface="맑은 고딕"/>
-                <a:sym typeface="맑은 고딕"/>
-              </a:rPr>
-              <a:t>-</a:t>
-            </a:r>
-            <a:r>
-              <a:rPr lang="ko-KR" sz="1200" b="0" i="0">
-                <a:solidFill>
-                  <a:srgbClr val="31333f"/>
-                </a:solidFill>
-                <a:latin typeface="맑은 고딕"/>
                 <a:cs typeface="맑은 고딕"/>
                 <a:sym typeface="맑은 고딕"/>
               </a:rPr>
@@ -14262,7 +14214,7 @@
                 <a:cs typeface="맑은 고딕"/>
                 <a:sym typeface="맑은 고딕"/>
               </a:rPr>
-              <a:t> 회원가입 완료 버튼: 정보 유효성 검증 후 홈 화면으로 이동</a:t>
+              <a:t> 건너뛰기: 연동 없이 홈으로 이동. 이후 설정(MAIN_SETTING_01)에서 연동 가능</a:t>
             </a:r>
             <a:endParaRPr lang="ko-KR" sz="1200" b="0" i="0">
               <a:solidFill>
@@ -14639,7 +14591,7 @@
                   <a:cs typeface="Calibri"/>
                   <a:sym typeface="Calibri"/>
                 </a:rPr>
-                <a:t>회원가입 </a:t>
+                <a:t>웨어러블 연동 </a:t>
               </a:r>
               <a:r>
                 <a:rPr lang="ko-KR" altLang="en-US" sz="1200">
@@ -14651,7 +14603,7 @@
                   <a:cs typeface="Calibri"/>
                   <a:sym typeface="Calibri"/>
                 </a:rPr>
-                <a:t>완료 화면</a:t>
+                <a:t>설정 화면</a:t>
               </a:r>
               <a:endParaRPr lang="ko-KR" altLang="en-US" sz="1200">
                 <a:solidFill>
@@ -14792,7 +14744,7 @@
                   <a:cs typeface="Calibri"/>
                   <a:sym typeface="Calibri"/>
                 </a:rPr>
-                <a:t>MLCM_10</a:t>
+                <a:t>MLCM_110</a:t>
               </a:r>
               <a:r>
                 <a:rPr lang="en-US" altLang="ko-KR" sz="1200">
@@ -14804,7 +14756,7 @@
                   <a:cs typeface="Calibri"/>
                   <a:sym typeface="Calibri"/>
                 </a:rPr>
-                <a:t>0</a:t>
+                <a:t/>
               </a:r>
               <a:endParaRPr lang="en-US" altLang="ko-KR" sz="1200">
                 <a:solidFill>
@@ -15116,7 +15068,7 @@
                   <a:cs typeface="Calibri"/>
                   <a:sym typeface="Calibri"/>
                 </a:rPr>
-                <a:t>회원가입 완료와 동시에</a:t>
+                <a:t>회원가입 완료 후 스마트워치·체성분계 수집 항목에 동의하고 </a:t>
               </a:r>
               <a:endParaRPr lang="ko-KR" altLang="en-US" sz="1200">
                 <a:solidFill>
@@ -15154,7 +15106,7 @@
                   <a:cs typeface="Calibri"/>
                   <a:sym typeface="Calibri"/>
                 </a:rPr>
-                <a:t>웨어러블 기기를 연동할 수 있는 페이지</a:t>
+                <a:t>Health Connect 연동 권한을 설정하는 화면</a:t>
               </a:r>
               <a:endParaRPr lang="ko-KR" altLang="en-US" sz="1200">
                 <a:solidFill>
@@ -15297,7 +15249,7 @@
                   <a:cs typeface="Calibri"/>
                   <a:sym typeface="Calibri"/>
                 </a:rPr>
-                <a:t>로그인/약관동의/회원가입 정보 입력</a:t>
+                <a:t>로그인/약관동의/회원가입 정보 입력/웨어러블 연동</a:t>
               </a:r>
               <a:endParaRPr sz="1200">
                 <a:solidFill>
@@ -15716,18 +15668,6 @@
                   <a:srgbClr val="31333f"/>
                 </a:solidFill>
                 <a:latin typeface="맑은 고딕"/>
-                <a:ea typeface="맑은 고딕"/>
-                <a:cs typeface="맑은 고딕"/>
-                <a:sym typeface="맑은 고딕"/>
-              </a:rPr>
-              <a:t>-</a:t>
-            </a:r>
-            <a:r>
-              <a:rPr lang="ko-KR" sz="1200" b="0" i="0">
-                <a:solidFill>
-                  <a:srgbClr val="31333f"/>
-                </a:solidFill>
-                <a:latin typeface="맑은 고딕"/>
                 <a:cs typeface="맑은 고딕"/>
                 <a:sym typeface="맑은 고딕"/>
               </a:rPr>
@@ -15837,18 +15777,6 @@
                   <a:srgbClr val="31333f"/>
                 </a:solidFill>
                 <a:latin typeface="맑은 고딕"/>
-                <a:ea typeface="맑은 고딕"/>
-                <a:cs typeface="맑은 고딕"/>
-                <a:sym typeface="맑은 고딕"/>
-              </a:rPr>
-              <a:t>-</a:t>
-            </a:r>
-            <a:r>
-              <a:rPr lang="ko-KR" sz="1200" b="0" i="0">
-                <a:solidFill>
-                  <a:srgbClr val="31333f"/>
-                </a:solidFill>
-                <a:latin typeface="맑은 고딕"/>
                 <a:cs typeface="맑은 고딕"/>
                 <a:sym typeface="맑은 고딕"/>
               </a:rPr>
@@ -15952,18 +15880,6 @@
               <a:buNone/>
               <a:defRPr/>
             </a:pPr>
-            <a:r>
-              <a:rPr lang="ko-KR" sz="1200" b="0" i="0">
-                <a:solidFill>
-                  <a:srgbClr val="31333f"/>
-                </a:solidFill>
-                <a:latin typeface="맑은 고딕"/>
-                <a:ea typeface="맑은 고딕"/>
-                <a:cs typeface="맑은 고딕"/>
-                <a:sym typeface="맑은 고딕"/>
-              </a:rPr>
-              <a:t>-</a:t>
-            </a:r>
             <a:r>
               <a:rPr lang="ko-KR" sz="1200" b="0" i="0">
                 <a:solidFill>
@@ -17407,18 +17323,6 @@
               <a:defRPr/>
             </a:pPr>
             <a:r>
-              <a:rPr lang="ko-KR" sz="1200">
-                <a:solidFill>
-                  <a:schemeClr val="dk1"/>
-                </a:solidFill>
-                <a:latin typeface="맑은 고딕"/>
-                <a:ea typeface="맑은 고딕"/>
-                <a:cs typeface="Calibri"/>
-                <a:sym typeface="Calibri"/>
-              </a:rPr>
-              <a:t>-</a:t>
-            </a:r>
-            <a:r>
               <a:rPr lang="ko-KR" sz="1200" b="0" i="0">
                 <a:solidFill>
                   <a:srgbClr val="31333f"/>
@@ -17468,18 +17372,6 @@
               <a:defRPr/>
             </a:pPr>
             <a:r>
-              <a:rPr lang="ko-KR" sz="1200">
-                <a:solidFill>
-                  <a:schemeClr val="dk1"/>
-                </a:solidFill>
-                <a:latin typeface="맑은 고딕"/>
-                <a:ea typeface="맑은 고딕"/>
-                <a:cs typeface="Calibri"/>
-                <a:sym typeface="Calibri"/>
-              </a:rPr>
-              <a:t>-</a:t>
-            </a:r>
-            <a:r>
               <a:rPr lang="ko-KR" sz="1200" b="0" i="0">
                 <a:solidFill>
                   <a:srgbClr val="31333f"/>
@@ -17529,18 +17421,6 @@
               <a:defRPr/>
             </a:pPr>
             <a:r>
-              <a:rPr lang="ko-KR" sz="1200">
-                <a:solidFill>
-                  <a:schemeClr val="dk1"/>
-                </a:solidFill>
-                <a:latin typeface="맑은 고딕"/>
-                <a:ea typeface="맑은 고딕"/>
-                <a:cs typeface="Calibri"/>
-                <a:sym typeface="Calibri"/>
-              </a:rPr>
-              <a:t>-</a:t>
-            </a:r>
-            <a:r>
               <a:rPr lang="ko-KR" sz="1200" b="0" i="0">
                 <a:solidFill>
                   <a:srgbClr val="31333f"/>
@@ -17589,18 +17469,6 @@
               <a:buNone/>
               <a:defRPr/>
             </a:pPr>
-            <a:r>
-              <a:rPr lang="ko-KR" sz="1200">
-                <a:solidFill>
-                  <a:schemeClr val="dk1"/>
-                </a:solidFill>
-                <a:latin typeface="맑은 고딕"/>
-                <a:ea typeface="맑은 고딕"/>
-                <a:cs typeface="Calibri"/>
-                <a:sym typeface="Calibri"/>
-              </a:rPr>
-              <a:t>-</a:t>
-            </a:r>
             <a:r>
               <a:rPr lang="ko-KR" sz="1200" b="0" i="0">
                 <a:solidFill>
@@ -19172,18 +19040,6 @@
                   <a:schemeClr val="dk1"/>
                 </a:solidFill>
                 <a:latin typeface="맑은 고딕"/>
-                <a:ea typeface="맑은 고딕"/>
-                <a:cs typeface="Calibri"/>
-                <a:sym typeface="Calibri"/>
-              </a:rPr>
-              <a:t>-</a:t>
-            </a:r>
-            <a:r>
-              <a:rPr lang="ko-KR" sz="1200">
-                <a:solidFill>
-                  <a:schemeClr val="dk1"/>
-                </a:solidFill>
-                <a:latin typeface="맑은 고딕"/>
                 <a:cs typeface="Calibri"/>
                 <a:sym typeface="Calibri"/>
               </a:rPr>
@@ -19233,18 +19089,6 @@
                   <a:schemeClr val="dk1"/>
                 </a:solidFill>
                 <a:latin typeface="맑은 고딕"/>
-                <a:ea typeface="맑은 고딕"/>
-                <a:cs typeface="Calibri"/>
-                <a:sym typeface="Calibri"/>
-              </a:rPr>
-              <a:t>-</a:t>
-            </a:r>
-            <a:r>
-              <a:rPr lang="ko-KR" sz="1200">
-                <a:solidFill>
-                  <a:schemeClr val="dk1"/>
-                </a:solidFill>
-                <a:latin typeface="맑은 고딕"/>
                 <a:cs typeface="Calibri"/>
                 <a:sym typeface="Calibri"/>
               </a:rPr>
@@ -19294,18 +19138,6 @@
                   <a:schemeClr val="dk1"/>
                 </a:solidFill>
                 <a:latin typeface="맑은 고딕"/>
-                <a:ea typeface="맑은 고딕"/>
-                <a:cs typeface="Calibri"/>
-                <a:sym typeface="Calibri"/>
-              </a:rPr>
-              <a:t>-</a:t>
-            </a:r>
-            <a:r>
-              <a:rPr lang="ko-KR" sz="1200">
-                <a:solidFill>
-                  <a:schemeClr val="dk1"/>
-                </a:solidFill>
-                <a:latin typeface="맑은 고딕"/>
                 <a:cs typeface="Calibri"/>
                 <a:sym typeface="Calibri"/>
               </a:rPr>
@@ -19355,18 +19187,6 @@
                   <a:schemeClr val="dk1"/>
                 </a:solidFill>
                 <a:latin typeface="맑은 고딕"/>
-                <a:ea typeface="맑은 고딕"/>
-                <a:cs typeface="Calibri"/>
-                <a:sym typeface="Calibri"/>
-              </a:rPr>
-              <a:t>-</a:t>
-            </a:r>
-            <a:r>
-              <a:rPr lang="ko-KR" sz="1200">
-                <a:solidFill>
-                  <a:schemeClr val="dk1"/>
-                </a:solidFill>
-                <a:latin typeface="맑은 고딕"/>
                 <a:cs typeface="Calibri"/>
                 <a:sym typeface="Calibri"/>
               </a:rPr>
@@ -19410,18 +19230,6 @@
               <a:buNone/>
               <a:defRPr/>
             </a:pPr>
-            <a:r>
-              <a:rPr lang="ko-KR" sz="1200">
-                <a:solidFill>
-                  <a:schemeClr val="dk1"/>
-                </a:solidFill>
-                <a:latin typeface="맑은 고딕"/>
-                <a:ea typeface="맑은 고딕"/>
-                <a:cs typeface="Calibri"/>
-                <a:sym typeface="Calibri"/>
-              </a:rPr>
-              <a:t>-</a:t>
-            </a:r>
             <a:r>
               <a:rPr lang="ko-KR" sz="1200">
                 <a:solidFill>
@@ -19937,7 +19745,7 @@
                   <a:cs typeface="Calibri"/>
                   <a:sym typeface="Calibri"/>
                 </a:rPr>
-                <a:t>500</a:t>
+                <a:t>400</a:t>
               </a:r>
               <a:endParaRPr sz="1200">
                 <a:solidFill>
@@ -20638,18 +20446,6 @@
                   <a:schemeClr val="dk1"/>
                 </a:solidFill>
                 <a:latin typeface="맑은 고딕"/>
-                <a:ea typeface="맑은 고딕"/>
-                <a:cs typeface="Calibri"/>
-                <a:sym typeface="Calibri"/>
-              </a:rPr>
-              <a:t>-</a:t>
-            </a:r>
-            <a:r>
-              <a:rPr lang="ko-KR" sz="1200">
-                <a:solidFill>
-                  <a:schemeClr val="dk1"/>
-                </a:solidFill>
-                <a:latin typeface="맑은 고딕"/>
                 <a:cs typeface="Calibri"/>
                 <a:sym typeface="Calibri"/>
               </a:rPr>
@@ -20665,7 +20461,7 @@
                 <a:cs typeface="Calibri"/>
                 <a:sym typeface="Calibri"/>
               </a:rPr>
-              <a:t> 오늘의 감정: 대표 감정 이모지, 정서 점수 및 긍정/중립/부정 상태 분포</a:t>
+              <a:t> 조회 기간 선택: 일·주·월 단위 전환 및 최종 동기화 시각 표시</a:t>
             </a:r>
             <a:endParaRPr lang="ko-KR" sz="1200">
               <a:solidFill>
@@ -20699,18 +20495,6 @@
                   <a:schemeClr val="dk1"/>
                 </a:solidFill>
                 <a:latin typeface="맑은 고딕"/>
-                <a:ea typeface="맑은 고딕"/>
-                <a:cs typeface="Calibri"/>
-                <a:sym typeface="Calibri"/>
-              </a:rPr>
-              <a:t>-</a:t>
-            </a:r>
-            <a:r>
-              <a:rPr lang="ko-KR" sz="1200">
-                <a:solidFill>
-                  <a:schemeClr val="dk1"/>
-                </a:solidFill>
-                <a:latin typeface="맑은 고딕"/>
                 <a:cs typeface="Calibri"/>
                 <a:sym typeface="Calibri"/>
               </a:rPr>
@@ -20726,7 +20510,7 @@
                 <a:cs typeface="Calibri"/>
                 <a:sym typeface="Calibri"/>
               </a:rPr>
-              <a:t> 라이프로그 요약: 수면 시간, 걸음 수, HRV 스트레스 요약 지표</a:t>
+              <a:t> 활동량 차트: 걸음 수·이동 거리·소모 칼로리 기간별 추이</a:t>
             </a:r>
             <a:endParaRPr lang="ko-KR" sz="1200">
               <a:solidFill>
@@ -20760,18 +20544,6 @@
                   <a:schemeClr val="dk1"/>
                 </a:solidFill>
                 <a:latin typeface="맑은 고딕"/>
-                <a:ea typeface="맑은 고딕"/>
-                <a:cs typeface="Calibri"/>
-                <a:sym typeface="Calibri"/>
-              </a:rPr>
-              <a:t>-</a:t>
-            </a:r>
-            <a:r>
-              <a:rPr lang="ko-KR" sz="1200">
-                <a:solidFill>
-                  <a:schemeClr val="dk1"/>
-                </a:solidFill>
-                <a:latin typeface="맑은 고딕"/>
                 <a:cs typeface="Calibri"/>
                 <a:sym typeface="Calibri"/>
               </a:rPr>
@@ -20787,7 +20559,7 @@
                 <a:cs typeface="Calibri"/>
                 <a:sym typeface="Calibri"/>
               </a:rPr>
-              <a:t> AI 한줄 요약: LLM 기반 일일 감정 종합 리포트 및 반응 피드백</a:t>
+              <a:t> 수면 차트: 단계별(깊은수면·얕은수면·REM·각성) 구성과 수면 효율</a:t>
             </a:r>
             <a:endParaRPr lang="ko-KR" sz="1200">
               <a:solidFill>
@@ -20821,18 +20593,6 @@
                   <a:schemeClr val="dk1"/>
                 </a:solidFill>
                 <a:latin typeface="맑은 고딕"/>
-                <a:ea typeface="맑은 고딕"/>
-                <a:cs typeface="Calibri"/>
-                <a:sym typeface="Calibri"/>
-              </a:rPr>
-              <a:t>-</a:t>
-            </a:r>
-            <a:r>
-              <a:rPr lang="ko-KR" sz="1200">
-                <a:solidFill>
-                  <a:schemeClr val="dk1"/>
-                </a:solidFill>
-                <a:latin typeface="맑은 고딕"/>
                 <a:cs typeface="Calibri"/>
                 <a:sym typeface="Calibri"/>
               </a:rPr>
@@ -20848,7 +20608,7 @@
                 <a:cs typeface="Calibri"/>
                 <a:sym typeface="Calibri"/>
               </a:rPr>
-              <a:t> 추천 콘텐츠: 사용자 컨디션 맞춤형 영상(3-4-1), 음악(3-4-2), 운동(3-4-3)</a:t>
+              <a:t> 생체 지표 차트: 심박수·심박변이도(HRV) 기간별 추이</a:t>
             </a:r>
             <a:endParaRPr lang="ko-KR" sz="1200">
               <a:solidFill>
@@ -20882,18 +20642,6 @@
                   <a:schemeClr val="dk1"/>
                 </a:solidFill>
                 <a:latin typeface="맑은 고딕"/>
-                <a:ea typeface="맑은 고딕"/>
-                <a:cs typeface="Calibri"/>
-                <a:sym typeface="Calibri"/>
-              </a:rPr>
-              <a:t>-</a:t>
-            </a:r>
-            <a:r>
-              <a:rPr lang="ko-KR" sz="1200">
-                <a:solidFill>
-                  <a:schemeClr val="dk1"/>
-                </a:solidFill>
-                <a:latin typeface="맑은 고딕"/>
                 <a:cs typeface="Calibri"/>
                 <a:sym typeface="Calibri"/>
               </a:rPr>
@@ -20909,7 +20657,7 @@
                 <a:cs typeface="Calibri"/>
                 <a:sym typeface="Calibri"/>
               </a:rPr>
-              <a:t> 하단 네비게이션 바: [홈], [AI 챗봇], [라이프로그], [설정] 4개 고정 메뉴</a:t>
+              <a:t> 체성분 기록: 체중·체지방·근육량·기초대사량 측정 이력</a:t>
             </a:r>
             <a:endParaRPr sz="1200">
               <a:solidFill>
@@ -21425,7 +21173,7 @@
                   <a:cs typeface="Calibri"/>
                   <a:sym typeface="Calibri"/>
                 </a:rPr>
-                <a:t>500</a:t>
+                <a:t>200</a:t>
               </a:r>
               <a:endParaRPr sz="1200">
                 <a:solidFill>
@@ -21633,7 +21381,7 @@
                 <a:cs typeface="Calibri"/>
                 <a:sym typeface="Calibri"/>
               </a:rPr>
-              <a:t>나의 라이프로그 히스토리를 볼 수 있는 화면</a:t>
+              <a:t>수집된 라이프로그를 기간별로 조회하는 화면. 활동량·수면·생체 지표·체성분을 차트로 확인</a:t>
             </a:r>
             <a:endParaRPr lang="ko-KR" altLang="en-US" sz="1200">
               <a:solidFill>
@@ -21775,7 +21523,7 @@
                   <a:cs typeface="Calibri"/>
                   <a:sym typeface="Calibri"/>
                 </a:rPr>
-                <a:t>홈</a:t>
+                <a:t>라이프로그</a:t>
               </a:r>
               <a:endParaRPr sz="1200">
                 <a:solidFill>
@@ -22133,18 +21881,6 @@
                   <a:schemeClr val="dk1"/>
                 </a:solidFill>
                 <a:latin typeface="맑은 고딕"/>
-                <a:ea typeface="맑은 고딕"/>
-                <a:cs typeface="Calibri"/>
-                <a:sym typeface="Calibri"/>
-              </a:rPr>
-              <a:t>-</a:t>
-            </a:r>
-            <a:r>
-              <a:rPr lang="ko-KR" sz="1200">
-                <a:solidFill>
-                  <a:schemeClr val="dk1"/>
-                </a:solidFill>
-                <a:latin typeface="맑은 고딕"/>
                 <a:cs typeface="Calibri"/>
                 <a:sym typeface="Calibri"/>
               </a:rPr>
@@ -22160,7 +21896,7 @@
                 <a:cs typeface="Calibri"/>
                 <a:sym typeface="Calibri"/>
               </a:rPr>
-              <a:t> 오늘의 감정: 대표 감정 이모지, 정서 점수 및 긍정/중립/부정 상태 분포</a:t>
+              <a:t> 웨어러블 연동: 기기명·연동 여부 표시, 항목별(활동량·수면·체성분) 동의 개별 토글</a:t>
             </a:r>
             <a:endParaRPr lang="ko-KR" sz="1200">
               <a:solidFill>
@@ -22194,18 +21930,6 @@
                   <a:schemeClr val="dk1"/>
                 </a:solidFill>
                 <a:latin typeface="맑은 고딕"/>
-                <a:ea typeface="맑은 고딕"/>
-                <a:cs typeface="Calibri"/>
-                <a:sym typeface="Calibri"/>
-              </a:rPr>
-              <a:t>-</a:t>
-            </a:r>
-            <a:r>
-              <a:rPr lang="ko-KR" sz="1200">
-                <a:solidFill>
-                  <a:schemeClr val="dk1"/>
-                </a:solidFill>
-                <a:latin typeface="맑은 고딕"/>
                 <a:cs typeface="Calibri"/>
                 <a:sym typeface="Calibri"/>
               </a:rPr>
@@ -22221,7 +21945,7 @@
                 <a:cs typeface="Calibri"/>
                 <a:sym typeface="Calibri"/>
               </a:rPr>
-              <a:t> 라이프로그 요약: 수면 시간, 걸음 수, HRV 스트레스 요약 지표</a:t>
+              <a:t> 알림 설정: 맞춤 케어 알림 수신 토글. 해제 시 추천 푸시 미발송</a:t>
             </a:r>
             <a:endParaRPr lang="ko-KR" sz="1200">
               <a:solidFill>
@@ -22255,18 +21979,6 @@
                   <a:schemeClr val="dk1"/>
                 </a:solidFill>
                 <a:latin typeface="맑은 고딕"/>
-                <a:ea typeface="맑은 고딕"/>
-                <a:cs typeface="Calibri"/>
-                <a:sym typeface="Calibri"/>
-              </a:rPr>
-              <a:t>-</a:t>
-            </a:r>
-            <a:r>
-              <a:rPr lang="ko-KR" sz="1200">
-                <a:solidFill>
-                  <a:schemeClr val="dk1"/>
-                </a:solidFill>
-                <a:latin typeface="맑은 고딕"/>
                 <a:cs typeface="Calibri"/>
                 <a:sym typeface="Calibri"/>
               </a:rPr>
@@ -22282,7 +21994,7 @@
                 <a:cs typeface="Calibri"/>
                 <a:sym typeface="Calibri"/>
               </a:rPr>
-              <a:t> AI 한줄 요약: LLM 기반 일일 감정 종합 리포트 및 반응 피드백</a:t>
+              <a:t> 페르소나 변경: 현재 챗봇 성격 표시, 선택 시 성격 선택 화면(MAIN_CHAT_01) 이동</a:t>
             </a:r>
             <a:endParaRPr lang="ko-KR" sz="1200">
               <a:solidFill>
@@ -22316,18 +22028,6 @@
                   <a:schemeClr val="dk1"/>
                 </a:solidFill>
                 <a:latin typeface="맑은 고딕"/>
-                <a:ea typeface="맑은 고딕"/>
-                <a:cs typeface="Calibri"/>
-                <a:sym typeface="Calibri"/>
-              </a:rPr>
-              <a:t>-</a:t>
-            </a:r>
-            <a:r>
-              <a:rPr lang="ko-KR" sz="1200">
-                <a:solidFill>
-                  <a:schemeClr val="dk1"/>
-                </a:solidFill>
-                <a:latin typeface="맑은 고딕"/>
                 <a:cs typeface="Calibri"/>
                 <a:sym typeface="Calibri"/>
               </a:rPr>
@@ -22343,7 +22043,7 @@
                 <a:cs typeface="Calibri"/>
                 <a:sym typeface="Calibri"/>
               </a:rPr>
-              <a:t> 추천 콘텐츠: 사용자 컨디션 맞춤형 영상(3-4-1), 음악(3-4-2), 운동(3-4-3)</a:t>
+              <a:t> 계정 관리: 계정 관리·회원 탈퇴 화면(MAIN_SETTING_02)으로 이동</a:t>
             </a:r>
             <a:endParaRPr lang="ko-KR" sz="1200">
               <a:solidFill>
@@ -22377,18 +22077,6 @@
                   <a:schemeClr val="dk1"/>
                 </a:solidFill>
                 <a:latin typeface="맑은 고딕"/>
-                <a:ea typeface="맑은 고딕"/>
-                <a:cs typeface="Calibri"/>
-                <a:sym typeface="Calibri"/>
-              </a:rPr>
-              <a:t>-</a:t>
-            </a:r>
-            <a:r>
-              <a:rPr lang="ko-KR" sz="1200">
-                <a:solidFill>
-                  <a:schemeClr val="dk1"/>
-                </a:solidFill>
-                <a:latin typeface="맑은 고딕"/>
                 <a:cs typeface="Calibri"/>
                 <a:sym typeface="Calibri"/>
               </a:rPr>
@@ -22404,7 +22092,7 @@
                 <a:cs typeface="Calibri"/>
                 <a:sym typeface="Calibri"/>
               </a:rPr>
-              <a:t> 하단 네비게이션 바: [홈], [AI 챗봇], [라이프로그], [설정] 4개 고정 메뉴</a:t>
+              <a:t> 로그아웃 버튼: 세션(JWT) 무효화 후 로그인 화면(MAIN_LOGIN_01)으로 복귀</a:t>
             </a:r>
             <a:endParaRPr sz="1200">
               <a:solidFill>
@@ -22920,7 +22608,7 @@
                   <a:cs typeface="Calibri"/>
                   <a:sym typeface="Calibri"/>
                 </a:rPr>
-                <a:t>500</a:t>
+                <a:t>110 / MLCM_101</a:t>
               </a:r>
               <a:endParaRPr sz="1200">
                 <a:solidFill>
@@ -23128,7 +22816,7 @@
                 <a:cs typeface="Calibri"/>
                 <a:sym typeface="Calibri"/>
               </a:rPr>
-              <a:t>알림과 워치연동 등 </a:t>
+              <a:t/>
             </a:r>
             <a:endParaRPr lang="ko-KR" altLang="en-US" sz="1200">
               <a:solidFill>
@@ -23166,7 +22854,7 @@
                 <a:cs typeface="Calibri"/>
                 <a:sym typeface="Calibri"/>
               </a:rPr>
-              <a:t>앱 사용 전반에 대해 설정할 수 있는 화면</a:t>
+              <a:t>웨어러블 연동과 항목별 수집 동의, 알림, 페르소나를 설정하고 계정 기능으로 진입하는 화면</a:t>
             </a:r>
             <a:endParaRPr lang="ko-KR" altLang="en-US" sz="1200">
               <a:solidFill>
@@ -23308,7 +22996,7 @@
                   <a:cs typeface="Calibri"/>
                   <a:sym typeface="Calibri"/>
                 </a:rPr>
-                <a:t>홈</a:t>
+                <a:t>설정</a:t>
               </a:r>
               <a:endParaRPr sz="1200">
                 <a:solidFill>
@@ -25510,7 +25198,7 @@
                             <a:schemeClr val="dk1"/>
                           </a:solidFill>
                         </a:rPr>
-                        <a:t>2026.07.2</a:t>
+                        <a:t>2026.07.28</a:t>
                       </a:r>
                       <a:r>
                         <a:rPr lang="en-US" altLang="ko-KR" sz="1400" u="none" strike="noStrike">
@@ -25518,7 +25206,7 @@
                             <a:schemeClr val="dk1"/>
                           </a:solidFill>
                         </a:rPr>
-                        <a:t>8</a:t>
+                        <a:t/>
                       </a:r>
                       <a:endParaRPr sz="1400" u="none" strike="noStrike">
                         <a:solidFill>
@@ -36420,18 +36108,6 @@
                   <a:srgbClr val="31333f"/>
                 </a:solidFill>
                 <a:latin typeface="맑은 고딕"/>
-                <a:ea typeface="맑은 고딕"/>
-                <a:cs typeface="맑은 고딕"/>
-                <a:sym typeface="맑은 고딕"/>
-              </a:rPr>
-              <a:t>-</a:t>
-            </a:r>
-            <a:r>
-              <a:rPr lang="ko-KR" sz="1200" b="0" i="0">
-                <a:solidFill>
-                  <a:srgbClr val="31333f"/>
-                </a:solidFill>
-                <a:latin typeface="맑은 고딕"/>
                 <a:cs typeface="맑은 고딕"/>
                 <a:sym typeface="맑은 고딕"/>
               </a:rPr>
@@ -36481,18 +36157,6 @@
                   <a:srgbClr val="31333f"/>
                 </a:solidFill>
                 <a:latin typeface="맑은 고딕"/>
-                <a:ea typeface="맑은 고딕"/>
-                <a:cs typeface="맑은 고딕"/>
-                <a:sym typeface="맑은 고딕"/>
-              </a:rPr>
-              <a:t>-</a:t>
-            </a:r>
-            <a:r>
-              <a:rPr lang="ko-KR" sz="1200" b="0" i="0">
-                <a:solidFill>
-                  <a:srgbClr val="31333f"/>
-                </a:solidFill>
-                <a:latin typeface="맑은 고딕"/>
                 <a:cs typeface="맑은 고딕"/>
                 <a:sym typeface="맑은 고딕"/>
               </a:rPr>
@@ -36565,18 +36229,6 @@
                   <a:srgbClr val="31333f"/>
                 </a:solidFill>
                 <a:latin typeface="맑은 고딕"/>
-                <a:ea typeface="맑은 고딕"/>
-                <a:cs typeface="맑은 고딕"/>
-                <a:sym typeface="맑은 고딕"/>
-              </a:rPr>
-              <a:t>-</a:t>
-            </a:r>
-            <a:r>
-              <a:rPr lang="ko-KR" sz="1200" b="0" i="0">
-                <a:solidFill>
-                  <a:srgbClr val="31333f"/>
-                </a:solidFill>
-                <a:latin typeface="맑은 고딕"/>
                 <a:cs typeface="맑은 고딕"/>
                 <a:sym typeface="맑은 고딕"/>
               </a:rPr>
@@ -36626,18 +36278,6 @@
                   <a:srgbClr val="31333f"/>
                 </a:solidFill>
                 <a:latin typeface="맑은 고딕"/>
-                <a:ea typeface="맑은 고딕"/>
-                <a:cs typeface="맑은 고딕"/>
-                <a:sym typeface="맑은 고딕"/>
-              </a:rPr>
-              <a:t>-</a:t>
-            </a:r>
-            <a:r>
-              <a:rPr lang="ko-KR" sz="1200" b="0" i="0">
-                <a:solidFill>
-                  <a:srgbClr val="31333f"/>
-                </a:solidFill>
-                <a:latin typeface="맑은 고딕"/>
                 <a:cs typeface="맑은 고딕"/>
                 <a:sym typeface="맑은 고딕"/>
               </a:rPr>
@@ -36681,18 +36321,6 @@
               <a:buNone/>
               <a:defRPr/>
             </a:pPr>
-            <a:r>
-              <a:rPr lang="ko-KR" sz="1200" b="0" i="0">
-                <a:solidFill>
-                  <a:srgbClr val="31333f"/>
-                </a:solidFill>
-                <a:latin typeface="맑은 고딕"/>
-                <a:ea typeface="맑은 고딕"/>
-                <a:cs typeface="맑은 고딕"/>
-                <a:sym typeface="맑은 고딕"/>
-              </a:rPr>
-              <a:t>-</a:t>
-            </a:r>
             <a:r>
               <a:rPr lang="ko-KR" sz="1200" b="0" i="0">
                 <a:solidFill>
@@ -38360,18 +37988,6 @@
                   <a:srgbClr val="31333f"/>
                 </a:solidFill>
                 <a:latin typeface="맑은 고딕"/>
-                <a:ea typeface="맑은 고딕"/>
-                <a:cs typeface="맑은 고딕"/>
-                <a:sym typeface="맑은 고딕"/>
-              </a:rPr>
-              <a:t>-</a:t>
-            </a:r>
-            <a:r>
-              <a:rPr lang="ko-KR" sz="1200" b="0" i="0">
-                <a:solidFill>
-                  <a:srgbClr val="31333f"/>
-                </a:solidFill>
-                <a:latin typeface="맑은 고딕"/>
                 <a:cs typeface="맑은 고딕"/>
                 <a:sym typeface="맑은 고딕"/>
               </a:rPr>
@@ -38467,18 +38083,6 @@
                   <a:srgbClr val="31333f"/>
                 </a:solidFill>
                 <a:latin typeface="맑은 고딕"/>
-                <a:ea typeface="맑은 고딕"/>
-                <a:cs typeface="맑은 고딕"/>
-                <a:sym typeface="맑은 고딕"/>
-              </a:rPr>
-              <a:t>-</a:t>
-            </a:r>
-            <a:r>
-              <a:rPr lang="ko-KR" sz="1200" b="0" i="0">
-                <a:solidFill>
-                  <a:srgbClr val="31333f"/>
-                </a:solidFill>
-                <a:latin typeface="맑은 고딕"/>
                 <a:cs typeface="맑은 고딕"/>
                 <a:sym typeface="맑은 고딕"/>
               </a:rPr>
@@ -38582,17 +38186,6 @@
               <a:defRPr/>
             </a:pPr>
             <a:r>
-              <a:rPr lang="en-US" altLang="ko-KR" sz="1200" b="0" i="0">
-                <a:solidFill>
-                  <a:srgbClr val="31333f"/>
-                </a:solidFill>
-                <a:latin typeface="맑은 고딕"/>
-                <a:cs typeface="맑은 고딕"/>
-                <a:sym typeface="맑은 고딕"/>
-              </a:rPr>
-              <a:t>-</a:t>
-            </a:r>
-            <a:r>
               <a:rPr lang="ko-KR" sz="1200" b="0" i="0">
                 <a:solidFill>
                   <a:srgbClr val="31333f"/>
@@ -38669,18 +38262,6 @@
                   <a:srgbClr val="31333f"/>
                 </a:solidFill>
                 <a:latin typeface="맑은 고딕"/>
-                <a:ea typeface="맑은 고딕"/>
-                <a:cs typeface="맑은 고딕"/>
-                <a:sym typeface="맑은 고딕"/>
-              </a:rPr>
-              <a:t>-</a:t>
-            </a:r>
-            <a:r>
-              <a:rPr lang="ko-KR" sz="1200" b="0" i="0">
-                <a:solidFill>
-                  <a:srgbClr val="31333f"/>
-                </a:solidFill>
-                <a:latin typeface="맑은 고딕"/>
                 <a:cs typeface="맑은 고딕"/>
                 <a:sym typeface="맑은 고딕"/>
               </a:rPr>
@@ -38771,18 +38352,6 @@
               <a:buNone/>
               <a:defRPr/>
             </a:pPr>
-            <a:r>
-              <a:rPr lang="ko-KR" sz="1200" b="0" i="0">
-                <a:solidFill>
-                  <a:srgbClr val="31333f"/>
-                </a:solidFill>
-                <a:latin typeface="맑은 고딕"/>
-                <a:ea typeface="맑은 고딕"/>
-                <a:cs typeface="맑은 고딕"/>
-                <a:sym typeface="맑은 고딕"/>
-              </a:rPr>
-              <a:t>-</a:t>
-            </a:r>
             <a:r>
               <a:rPr lang="ko-KR" sz="1200">
                 <a:solidFill>

--- a/Documents/화면설계서_귀기울임.pptx
+++ b/Documents/화면설계서_귀기울임.pptx
@@ -15,6 +15,7 @@
     <p:sldId id="259" r:id="rId6"/>
     <p:sldId id="267" r:id="rId7"/>
     <p:sldId id="260" r:id="rId8"/>
+    <p:sldId id="272" r:id="rId22"/>
     <p:sldId id="261" r:id="rId9"/>
     <p:sldId id="262" r:id="rId10"/>
     <p:sldId id="271" r:id="rId11"/>
@@ -22,7 +23,12 @@
     <p:sldId id="264" r:id="rId13"/>
     <p:sldId id="265" r:id="rId14"/>
     <p:sldId id="269" r:id="rId15"/>
+    <p:sldId id="273" r:id="rId23"/>
     <p:sldId id="270" r:id="rId16"/>
+    <p:sldId id="274" r:id="rId24"/>
+    <p:sldId id="275" r:id="rId25"/>
+    <p:sldId id="276" r:id="rId26"/>
+    <p:sldId id="277" r:id="rId27"/>
   </p:sldIdLst>
   <p:sldSz cx="9906000" cy="6858000" type="A4"/>
   <p:notesSz cx="6858000" cy="9144000"/>
@@ -19244,7 +19250,7 @@
                 <a:cs typeface="Calibri"/>
                 <a:sym typeface="Calibri"/>
               </a:rPr>
-              <a:t>➎</a:t>
+              <a:t>❺</a:t>
             </a:r>
             <a:r>
               <a:rPr lang="ko-KR" sz="1200">
@@ -20614,7 +20620,7 @@
                 <a:cs typeface="Calibri"/>
                 <a:sym typeface="Calibri"/>
               </a:rPr>
-              <a:t>➎</a:t>
+              <a:t>❺</a:t>
             </a:r>
             <a:r>
               <a:rPr lang="ko-KR" sz="1200">
@@ -21989,7 +21995,7 @@
                 <a:cs typeface="Calibri"/>
                 <a:sym typeface="Calibri"/>
               </a:rPr>
-              <a:t>➎</a:t>
+              <a:t>❺</a:t>
             </a:r>
             <a:r>
               <a:rPr lang="ko-KR" sz="1200">
@@ -22869,6 +22875,5610 @@
                   <a:sym typeface="Calibri"/>
                 </a:rPr>
                 <a:t>설정</a:t>
+              </a:r>
+              <a:endParaRPr sz="1200">
+                <a:solidFill>
+                  <a:schemeClr val="lt1"/>
+                </a:solidFill>
+                <a:latin typeface="Calibri"/>
+                <a:ea typeface="Calibri"/>
+                <a:cs typeface="Calibri"/>
+                <a:sym typeface="Calibri"/>
+              </a:endParaRPr>
+            </a:p>
+          </p:txBody>
+        </p:sp>
+      </p:grpSp>
+      <p:sp>
+        <p:nvSpPr>
+          <p:cNvPr id="365" name="Google Shape;365;p10"/>
+          <p:cNvSpPr txBox="1"/>
+          <p:nvPr/>
+        </p:nvSpPr>
+        <p:spPr>
+          <a:xfrm>
+            <a:off x="285750" y="2981960"/>
+            <a:ext cx="1005840" cy="338455"/>
+          </a:xfrm>
+          <a:prstGeom prst="rect">
+            <a:avLst/>
+          </a:prstGeom>
+          <a:noFill/>
+          <a:ln>
+            <a:noFill/>
+          </a:ln>
+        </p:spPr>
+        <p:txBody>
+          <a:bodyPr wrap="square" lIns="91425" tIns="45700" rIns="91425" bIns="45700" anchor="t" anchorCtr="0">
+            <a:spAutoFit/>
+          </a:bodyPr>
+          <a:lstStyle/>
+          <a:p>
+            <a:pPr marL="0" marR="0" lvl="0" indent="0" algn="l" rtl="0">
+              <a:spcBef>
+                <a:spcPts val="0"/>
+              </a:spcBef>
+              <a:spcAft>
+                <a:spcPts val="0"/>
+              </a:spcAft>
+              <a:buClr>
+                <a:schemeClr val="lt1"/>
+              </a:buClr>
+              <a:buSzPct val="25000"/>
+              <a:buFont typeface="Calibri"/>
+              <a:buNone/>
+              <a:defRPr/>
+            </a:pPr>
+            <a:r>
+              <a:rPr lang="ko-KR" sz="1600" b="1">
+                <a:solidFill>
+                  <a:schemeClr val="lt1"/>
+                </a:solidFill>
+                <a:latin typeface="Calibri"/>
+                <a:ea typeface="Calibri"/>
+                <a:cs typeface="Calibri"/>
+                <a:sym typeface="Calibri"/>
+              </a:rPr>
+              <a:t>화면개요</a:t>
+            </a:r>
+            <a:endParaRPr sz="1600" b="1">
+              <a:solidFill>
+                <a:schemeClr val="lt1"/>
+              </a:solidFill>
+              <a:latin typeface="Calibri"/>
+              <a:ea typeface="Calibri"/>
+              <a:cs typeface="Calibri"/>
+              <a:sym typeface="Calibri"/>
+            </a:endParaRPr>
+          </a:p>
+        </p:txBody>
+      </p:sp>
+      <p:pic>
+        <p:nvPicPr>
+          <p:cNvPr id="370" name="그림 369"/>
+          <p:cNvPicPr>
+            <a:picLocks noChangeAspect="1"/>
+          </p:cNvPicPr>
+          <p:nvPr/>
+        </p:nvPicPr>
+        <p:blipFill rotWithShape="1">
+          <a:blip r:embed="rId3"/>
+          <a:stretch>
+            <a:fillRect/>
+          </a:stretch>
+        </p:blipFill>
+        <p:spPr>
+          <a:xfrm>
+            <a:off x="5135035" y="0"/>
+            <a:ext cx="2379765" cy="5150055"/>
+          </a:xfrm>
+          <a:prstGeom prst="rect">
+            <a:avLst/>
+          </a:prstGeom>
+        </p:spPr>
+      </p:pic>
+    </p:spTree>
+    <p:extLst>
+      <p:ext uri="{BB962C8B-B14F-4D97-AF65-F5344CB8AC3E}">
+        <p14:creationId xmlns:p14="http://schemas.microsoft.com/office/powerpoint/2010/main" val="2759204891"/>
+      </p:ext>
+    </p:extLst>
+  </p:cSld>
+  <p:clrMapOvr>
+    <a:masterClrMapping/>
+  </p:clrMapOvr>
+</p:sld>
+</file>
+
+<file path=ppt/slides/slide16.xml><?xml version="1.0" encoding="utf-8"?>
+<p:sld xmlns:a="http://schemas.openxmlformats.org/drawingml/2006/main" xmlns:r="http://schemas.openxmlformats.org/officeDocument/2006/relationships" xmlns:p="http://schemas.openxmlformats.org/presentationml/2006/main">
+  <p:cSld>
+    <p:bg>
+      <p:bgPr>
+        <a:solidFill>
+          <a:srgbClr val="C0CDEF"/>
+        </a:solidFill>
+        <a:effectLst/>
+      </p:bgPr>
+    </p:bg>
+    <p:spTree>
+      <p:nvGrpSpPr>
+        <p:cNvPr id="1" name=""/>
+        <p:cNvGrpSpPr/>
+        <p:nvPr/>
+      </p:nvGrpSpPr>
+      <p:grpSpPr>
+        <a:xfrm>
+          <a:off x="0" y="0"/>
+          <a:ext cx="0" cy="0"/>
+          <a:chOff x="0" y="0"/>
+          <a:chExt cx="0" cy="0"/>
+        </a:xfrm>
+      </p:grpSpPr>
+      <p:sp>
+        <p:nvSpPr>
+          <p:cNvPr id="344" name="Google Shape;344;p10"/>
+          <p:cNvSpPr/>
+          <p:nvPr/>
+        </p:nvSpPr>
+        <p:spPr>
+          <a:xfrm>
+            <a:off x="0" y="0"/>
+            <a:ext cx="2743835" cy="6858635"/>
+          </a:xfrm>
+          <a:prstGeom prst="rect">
+            <a:avLst/>
+          </a:prstGeom>
+          <a:solidFill>
+            <a:srgbClr val="0090D0"/>
+          </a:solidFill>
+          <a:ln>
+            <a:noFill/>
+          </a:ln>
+        </p:spPr>
+        <p:txBody>
+          <a:bodyPr wrap="square" lIns="91425" tIns="45700" rIns="91425" bIns="45700" anchor="ctr" anchorCtr="0">
+            <a:noAutofit/>
+          </a:bodyPr>
+          <a:lstStyle/>
+          <a:p>
+            <a:pPr marL="0" marR="0" lvl="0" indent="0" algn="ctr" rtl="0">
+              <a:spcBef>
+                <a:spcPts val="0"/>
+              </a:spcBef>
+              <a:spcAft>
+                <a:spcPts val="0"/>
+              </a:spcAft>
+              <a:buClr>
+                <a:schemeClr val="lt1"/>
+              </a:buClr>
+              <a:buSzPct val="25000"/>
+              <a:buFont typeface="Calibri"/>
+              <a:buNone/>
+              <a:defRPr/>
+            </a:pPr>
+            <a:endParaRPr sz="1600">
+              <a:solidFill>
+                <a:schemeClr val="lt1"/>
+              </a:solidFill>
+              <a:latin typeface="Calibri"/>
+              <a:ea typeface="Calibri"/>
+              <a:cs typeface="Calibri"/>
+              <a:sym typeface="Calibri"/>
+            </a:endParaRPr>
+          </a:p>
+        </p:txBody>
+      </p:sp>
+      <p:sp>
+        <p:nvSpPr>
+          <p:cNvPr id="345" name="Google Shape;345;p10"/>
+          <p:cNvSpPr/>
+          <p:nvPr/>
+        </p:nvSpPr>
+        <p:spPr>
+          <a:xfrm>
+            <a:off x="2743200" y="5172075"/>
+            <a:ext cx="7163435" cy="1686560"/>
+          </a:xfrm>
+          <a:prstGeom prst="rect">
+            <a:avLst/>
+          </a:prstGeom>
+          <a:solidFill>
+            <a:srgbClr val="F2F2F2"/>
+          </a:solidFill>
+          <a:ln>
+            <a:noFill/>
+          </a:ln>
+        </p:spPr>
+        <p:txBody>
+          <a:bodyPr wrap="square" lIns="91425" tIns="45700" rIns="91425" bIns="45700" anchor="ctr" anchorCtr="0">
+            <a:noAutofit/>
+          </a:bodyPr>
+          <a:lstStyle/>
+          <a:p>
+            <a:pPr marL="0" marR="0" lvl="0" indent="0" algn="ctr" rtl="0">
+              <a:spcBef>
+                <a:spcPts val="0"/>
+              </a:spcBef>
+              <a:spcAft>
+                <a:spcPts val="0"/>
+              </a:spcAft>
+              <a:buClr>
+                <a:schemeClr val="lt1"/>
+              </a:buClr>
+              <a:buSzPct val="25000"/>
+              <a:buFont typeface="Calibri"/>
+              <a:buNone/>
+              <a:defRPr/>
+            </a:pPr>
+            <a:endParaRPr sz="1600">
+              <a:solidFill>
+                <a:schemeClr val="lt1"/>
+              </a:solidFill>
+              <a:latin typeface="Calibri"/>
+              <a:ea typeface="Calibri"/>
+              <a:cs typeface="Calibri"/>
+              <a:sym typeface="Calibri"/>
+            </a:endParaRPr>
+          </a:p>
+        </p:txBody>
+      </p:sp>
+      <p:sp>
+        <p:nvSpPr>
+          <p:cNvPr id="346" name="Google Shape;346;p10"/>
+          <p:cNvSpPr txBox="1"/>
+          <p:nvPr/>
+        </p:nvSpPr>
+        <p:spPr>
+          <a:xfrm>
+            <a:off x="3020060" y="5412740"/>
+            <a:ext cx="1005840" cy="339090"/>
+          </a:xfrm>
+          <a:prstGeom prst="rect">
+            <a:avLst/>
+          </a:prstGeom>
+          <a:noFill/>
+          <a:ln>
+            <a:noFill/>
+          </a:ln>
+        </p:spPr>
+        <p:txBody>
+          <a:bodyPr wrap="square" lIns="91425" tIns="45700" rIns="91425" bIns="45700" anchor="t" anchorCtr="0">
+            <a:spAutoFit/>
+          </a:bodyPr>
+          <a:lstStyle/>
+          <a:p>
+            <a:pPr marL="0" marR="0" lvl="0" indent="0" algn="l" rtl="0">
+              <a:spcBef>
+                <a:spcPts val="0"/>
+              </a:spcBef>
+              <a:spcAft>
+                <a:spcPts val="0"/>
+              </a:spcAft>
+              <a:buClr>
+                <a:schemeClr val="dk1"/>
+              </a:buClr>
+              <a:buSzPct val="25000"/>
+              <a:buFont typeface="Calibri"/>
+              <a:buNone/>
+              <a:defRPr/>
+            </a:pPr>
+            <a:r>
+              <a:rPr lang="ko-KR" sz="1600" b="1">
+                <a:solidFill>
+                  <a:schemeClr val="dk1"/>
+                </a:solidFill>
+                <a:latin typeface="맑은 고딕"/>
+                <a:ea typeface="맑은 고딕"/>
+                <a:cs typeface="Calibri"/>
+                <a:sym typeface="Calibri"/>
+              </a:rPr>
+              <a:t>화면설명</a:t>
+            </a:r>
+            <a:endParaRPr sz="1600" b="1">
+              <a:solidFill>
+                <a:schemeClr val="dk1"/>
+              </a:solidFill>
+              <a:latin typeface="맑은 고딕"/>
+              <a:ea typeface="맑은 고딕"/>
+              <a:cs typeface="Calibri"/>
+              <a:sym typeface="Calibri"/>
+            </a:endParaRPr>
+          </a:p>
+        </p:txBody>
+      </p:sp>
+      <p:sp>
+        <p:nvSpPr>
+          <p:cNvPr id="347" name="Google Shape;347;p10"/>
+          <p:cNvSpPr txBox="1"/>
+          <p:nvPr/>
+        </p:nvSpPr>
+        <p:spPr>
+          <a:xfrm>
+            <a:off x="3020060" y="5781675"/>
+            <a:ext cx="6688455" cy="998219"/>
+          </a:xfrm>
+          <a:prstGeom prst="rect">
+            <a:avLst/>
+          </a:prstGeom>
+          <a:noFill/>
+          <a:ln>
+            <a:noFill/>
+          </a:ln>
+        </p:spPr>
+        <p:txBody>
+          <a:bodyPr wrap="square" lIns="91425" tIns="45700" rIns="91425" bIns="45700" anchor="t" anchorCtr="0">
+            <a:spAutoFit/>
+          </a:bodyPr>
+          <a:lstStyle/>
+          <a:p>
+            <a:pPr marL="0" marR="0" lvl="0" indent="0" algn="l" rtl="0">
+              <a:spcBef>
+                <a:spcPts val="0"/>
+              </a:spcBef>
+              <a:spcAft>
+                <a:spcPts val="0"/>
+              </a:spcAft>
+              <a:buClr>
+                <a:schemeClr val="dk1"/>
+              </a:buClr>
+              <a:buSzPct val="25000"/>
+              <a:buFont typeface="Calibri"/>
+              <a:buNone/>
+              <a:defRPr/>
+            </a:pPr>
+            <a:r>
+              <a:rPr lang="ko-KR" sz="1200">
+                <a:solidFill>
+                  <a:schemeClr val="dk1"/>
+                </a:solidFill>
+                <a:latin typeface="맑은 고딕"/>
+                <a:cs typeface="Calibri"/>
+                <a:sym typeface="Calibri"/>
+              </a:rPr>
+              <a:t>❶</a:t>
+            </a:r>
+            <a:r>
+              <a:rPr lang="ko-KR" sz="1200">
+                <a:solidFill>
+                  <a:schemeClr val="dk1"/>
+                </a:solidFill>
+                <a:latin typeface="맑은 고딕"/>
+                <a:ea typeface="맑은 고딕"/>
+                <a:cs typeface="Calibri"/>
+                <a:sym typeface="Calibri"/>
+              </a:rPr>
+              <a:t> 이메일 입력창: 가입 시 사용한 이메일 입력</a:t>
+            </a:r>
+          </a:p>
+          <a:p>
+            <a:pPr marL="0" marR="0" lvl="0" indent="0" algn="l" rtl="0">
+              <a:spcBef>
+                <a:spcPts val="0"/>
+              </a:spcBef>
+              <a:spcAft>
+                <a:spcPts val="0"/>
+              </a:spcAft>
+              <a:buClr>
+                <a:schemeClr val="dk1"/>
+              </a:buClr>
+              <a:buSzPct val="25000"/>
+              <a:buFont typeface="Calibri"/>
+              <a:buNone/>
+              <a:defRPr/>
+            </a:pPr>
+            <a:r>
+              <a:rPr lang="ko-KR" sz="1200">
+                <a:solidFill>
+                  <a:schemeClr val="dk1"/>
+                </a:solidFill>
+                <a:latin typeface="맑은 고딕"/>
+                <a:cs typeface="Calibri"/>
+                <a:sym typeface="Calibri"/>
+              </a:rPr>
+              <a:t>❷</a:t>
+            </a:r>
+            <a:r>
+              <a:rPr lang="ko-KR" sz="1200">
+                <a:solidFill>
+                  <a:schemeClr val="dk1"/>
+                </a:solidFill>
+                <a:latin typeface="맑은 고딕"/>
+                <a:ea typeface="맑은 고딕"/>
+                <a:cs typeface="Calibri"/>
+                <a:sym typeface="Calibri"/>
+              </a:rPr>
+              <a:t> 인증 메일 발송: 재설정 링크·인증 코드 발송</a:t>
+            </a:r>
+          </a:p>
+          <a:p>
+            <a:pPr marL="0" marR="0" lvl="0" indent="0" algn="l" rtl="0">
+              <a:spcBef>
+                <a:spcPts val="0"/>
+              </a:spcBef>
+              <a:spcAft>
+                <a:spcPts val="0"/>
+              </a:spcAft>
+              <a:buClr>
+                <a:schemeClr val="dk1"/>
+              </a:buClr>
+              <a:buSzPct val="25000"/>
+              <a:buFont typeface="Calibri"/>
+              <a:buNone/>
+              <a:defRPr/>
+            </a:pPr>
+            <a:r>
+              <a:rPr lang="ko-KR" sz="1200">
+                <a:solidFill>
+                  <a:schemeClr val="dk1"/>
+                </a:solidFill>
+                <a:latin typeface="맑은 고딕"/>
+                <a:cs typeface="Calibri"/>
+                <a:sym typeface="Calibri"/>
+              </a:rPr>
+              <a:t>❸</a:t>
+            </a:r>
+            <a:r>
+              <a:rPr lang="ko-KR" sz="1200">
+                <a:solidFill>
+                  <a:schemeClr val="dk1"/>
+                </a:solidFill>
+                <a:latin typeface="맑은 고딕"/>
+                <a:ea typeface="맑은 고딕"/>
+                <a:cs typeface="Calibri"/>
+                <a:sym typeface="Calibri"/>
+              </a:rPr>
+              <a:t> 발송 안내: 미가입 이메일도 동일 문구, 실제 미발송</a:t>
+            </a:r>
+          </a:p>
+          <a:p>
+            <a:pPr marL="0" marR="0" lvl="0" indent="0" algn="l" rtl="0">
+              <a:spcBef>
+                <a:spcPts val="0"/>
+              </a:spcBef>
+              <a:spcAft>
+                <a:spcPts val="0"/>
+              </a:spcAft>
+              <a:buClr>
+                <a:schemeClr val="dk1"/>
+              </a:buClr>
+              <a:buSzPct val="25000"/>
+              <a:buFont typeface="Calibri"/>
+              <a:buNone/>
+              <a:defRPr/>
+            </a:pPr>
+            <a:r>
+              <a:rPr lang="ko-KR" sz="1200">
+                <a:solidFill>
+                  <a:schemeClr val="dk1"/>
+                </a:solidFill>
+                <a:latin typeface="맑은 고딕"/>
+                <a:cs typeface="Calibri"/>
+                <a:sym typeface="Calibri"/>
+              </a:rPr>
+              <a:t>❹</a:t>
+            </a:r>
+            <a:r>
+              <a:rPr lang="ko-KR" sz="1200">
+                <a:solidFill>
+                  <a:schemeClr val="dk1"/>
+                </a:solidFill>
+                <a:latin typeface="맑은 고딕"/>
+                <a:ea typeface="맑은 고딕"/>
+                <a:cs typeface="Calibri"/>
+                <a:sym typeface="Calibri"/>
+              </a:rPr>
+              <a:t> 새 비밀번호 입력창: 새 비밀번호·확인 입력</a:t>
+            </a:r>
+          </a:p>
+          <a:p>
+            <a:pPr marL="0" marR="0" lvl="0" indent="0" algn="l" rtl="0">
+              <a:spcBef>
+                <a:spcPts val="0"/>
+              </a:spcBef>
+              <a:spcAft>
+                <a:spcPts val="0"/>
+              </a:spcAft>
+              <a:buClr>
+                <a:schemeClr val="dk1"/>
+              </a:buClr>
+              <a:buSzPct val="25000"/>
+              <a:buFont typeface="Calibri"/>
+              <a:buNone/>
+              <a:defRPr/>
+            </a:pPr>
+            <a:r>
+              <a:rPr lang="ko-KR" sz="1200">
+                <a:solidFill>
+                  <a:schemeClr val="dk1"/>
+                </a:solidFill>
+                <a:latin typeface="맑은 고딕"/>
+                <a:cs typeface="Calibri"/>
+                <a:sym typeface="Calibri"/>
+              </a:rPr>
+              <a:t>❺</a:t>
+            </a:r>
+            <a:r>
+              <a:rPr lang="ko-KR" sz="1200">
+                <a:solidFill>
+                  <a:schemeClr val="dk1"/>
+                </a:solidFill>
+                <a:latin typeface="맑은 고딕"/>
+                <a:ea typeface="맑은 고딕"/>
+                <a:cs typeface="Calibri"/>
+                <a:sym typeface="Calibri"/>
+              </a:rPr>
+              <a:t> 재설정 완료: 비밀번호 갱신 후 MAIN_LOGIN_01 이동</a:t>
+            </a:r>
+            <a:endParaRPr sz="1200">
+              <a:solidFill>
+                <a:schemeClr val="dk1"/>
+              </a:solidFill>
+              <a:latin typeface="맑은 고딕"/>
+              <a:ea typeface="맑은 고딕"/>
+              <a:cs typeface="Calibri"/>
+              <a:sym typeface="Calibri"/>
+            </a:endParaRPr>
+          </a:p>
+        </p:txBody>
+      </p:sp>
+      <p:sp>
+        <p:nvSpPr>
+          <p:cNvPr id="348" name="Google Shape;348;p10"/>
+          <p:cNvSpPr/>
+          <p:nvPr/>
+        </p:nvSpPr>
+        <p:spPr>
+          <a:xfrm>
+            <a:off x="0" y="0"/>
+            <a:ext cx="2743835" cy="6858635"/>
+          </a:xfrm>
+          <a:prstGeom prst="rect">
+            <a:avLst/>
+          </a:prstGeom>
+          <a:solidFill>
+            <a:srgbClr val="A5A5A5"/>
+          </a:solidFill>
+          <a:ln>
+            <a:noFill/>
+          </a:ln>
+        </p:spPr>
+        <p:txBody>
+          <a:bodyPr wrap="square" lIns="91425" tIns="45700" rIns="91425" bIns="45700" anchor="ctr" anchorCtr="0">
+            <a:noAutofit/>
+          </a:bodyPr>
+          <a:lstStyle/>
+          <a:p>
+            <a:pPr marL="0" marR="0" lvl="0" indent="0" algn="ctr" rtl="0">
+              <a:spcBef>
+                <a:spcPts val="0"/>
+              </a:spcBef>
+              <a:spcAft>
+                <a:spcPts val="0"/>
+              </a:spcAft>
+              <a:buClr>
+                <a:schemeClr val="lt1"/>
+              </a:buClr>
+              <a:buSzPct val="25000"/>
+              <a:buFont typeface="Calibri"/>
+              <a:buNone/>
+              <a:defRPr/>
+            </a:pPr>
+            <a:endParaRPr sz="1600">
+              <a:solidFill>
+                <a:schemeClr val="lt1"/>
+              </a:solidFill>
+              <a:latin typeface="Calibri"/>
+              <a:ea typeface="Calibri"/>
+              <a:cs typeface="Calibri"/>
+              <a:sym typeface="Calibri"/>
+            </a:endParaRPr>
+          </a:p>
+        </p:txBody>
+      </p:sp>
+      <p:grpSp>
+        <p:nvGrpSpPr>
+          <p:cNvPr id="349" name="Google Shape;349;p10"/>
+          <p:cNvGrpSpPr/>
+          <p:nvPr/>
+        </p:nvGrpSpPr>
+        <p:grpSpPr>
+          <a:xfrm>
+            <a:off x="285750" y="435610"/>
+            <a:ext cx="2171700" cy="607695"/>
+            <a:chOff x="285750" y="435610"/>
+            <a:chExt cx="2171700" cy="607695"/>
+          </a:xfrm>
+        </p:grpSpPr>
+        <p:sp>
+          <p:nvSpPr>
+            <p:cNvPr id="350" name="Google Shape;350;p10"/>
+            <p:cNvSpPr txBox="1"/>
+            <p:nvPr/>
+          </p:nvSpPr>
+          <p:spPr>
+            <a:xfrm>
+              <a:off x="285750" y="435610"/>
+              <a:ext cx="873125" cy="338455"/>
+            </a:xfrm>
+            <a:prstGeom prst="rect">
+              <a:avLst/>
+            </a:prstGeom>
+            <a:noFill/>
+            <a:ln>
+              <a:noFill/>
+            </a:ln>
+          </p:spPr>
+          <p:txBody>
+            <a:bodyPr wrap="square" lIns="91425" tIns="45700" rIns="91425" bIns="45700" anchor="t" anchorCtr="0">
+              <a:spAutoFit/>
+            </a:bodyPr>
+            <a:lstStyle/>
+            <a:p>
+              <a:pPr marL="0" marR="0" lvl="0" indent="0" algn="l" rtl="0">
+                <a:spcBef>
+                  <a:spcPts val="0"/>
+                </a:spcBef>
+                <a:spcAft>
+                  <a:spcPts val="0"/>
+                </a:spcAft>
+                <a:buClr>
+                  <a:schemeClr val="lt1"/>
+                </a:buClr>
+                <a:buSzPct val="25000"/>
+                <a:buFont typeface="Calibri"/>
+                <a:buNone/>
+                <a:defRPr/>
+              </a:pPr>
+              <a:r>
+                <a:rPr lang="ko-KR" sz="1600" b="1">
+                  <a:solidFill>
+                    <a:schemeClr val="lt1"/>
+                  </a:solidFill>
+                  <a:latin typeface="Calibri"/>
+                  <a:ea typeface="Calibri"/>
+                  <a:cs typeface="Calibri"/>
+                  <a:sym typeface="Calibri"/>
+                </a:rPr>
+                <a:t>화면 ID </a:t>
+              </a:r>
+              <a:endParaRPr sz="1600" b="1">
+                <a:solidFill>
+                  <a:schemeClr val="lt1"/>
+                </a:solidFill>
+                <a:latin typeface="Calibri"/>
+                <a:ea typeface="Calibri"/>
+                <a:cs typeface="Calibri"/>
+                <a:sym typeface="Calibri"/>
+              </a:endParaRPr>
+            </a:p>
+          </p:txBody>
+        </p:sp>
+        <p:sp>
+          <p:nvSpPr>
+            <p:cNvPr id="351" name="Google Shape;351;p10"/>
+            <p:cNvSpPr txBox="1"/>
+            <p:nvPr/>
+          </p:nvSpPr>
+          <p:spPr>
+            <a:xfrm>
+              <a:off x="285750" y="766445"/>
+              <a:ext cx="2171700" cy="276860"/>
+            </a:xfrm>
+            <a:prstGeom prst="rect">
+              <a:avLst/>
+            </a:prstGeom>
+            <a:noFill/>
+            <a:ln>
+              <a:noFill/>
+            </a:ln>
+          </p:spPr>
+          <p:txBody>
+            <a:bodyPr wrap="square" lIns="91425" tIns="45700" rIns="91425" bIns="45700" anchor="t" anchorCtr="0">
+              <a:spAutoFit/>
+            </a:bodyPr>
+            <a:lstStyle/>
+            <a:p>
+              <a:pPr marL="0" marR="0" lvl="0" indent="0" algn="l" rtl="0">
+                <a:spcBef>
+                  <a:spcPts val="0"/>
+                </a:spcBef>
+                <a:spcAft>
+                  <a:spcPts val="0"/>
+                </a:spcAft>
+                <a:buClr>
+                  <a:schemeClr val="lt1"/>
+                </a:buClr>
+                <a:buSzPct val="25000"/>
+                <a:buFont typeface="Calibri"/>
+                <a:buNone/>
+                <a:defRPr/>
+              </a:pPr>
+              <a:r>
+                <a:rPr lang="ko-KR" sz="1200">
+                  <a:solidFill>
+                    <a:schemeClr val="lt1"/>
+                  </a:solidFill>
+                  <a:latin typeface="Calibri"/>
+                  <a:ea typeface="Calibri"/>
+                  <a:cs typeface="Calibri"/>
+                  <a:sym typeface="Calibri"/>
+                </a:rPr>
+                <a:t>MAIN_LOGIN_02</a:t>
+              </a:r>
+              <a:r>
+                <a:rPr lang="en-US" altLang="ko-KR" sz="1200">
+                  <a:solidFill>
+                    <a:schemeClr val="lt1"/>
+                  </a:solidFill>
+                  <a:latin typeface="Calibri"/>
+                  <a:ea typeface="Calibri"/>
+                  <a:cs typeface="Calibri"/>
+                  <a:sym typeface="Calibri"/>
+                </a:rPr>
+                <a:t/>
+              </a:r>
+              <a:r>
+                <a:rPr lang="ko-KR" sz="1200">
+                  <a:solidFill>
+                    <a:schemeClr val="lt1"/>
+                  </a:solidFill>
+                  <a:latin typeface="Calibri"/>
+                  <a:ea typeface="Calibri"/>
+                  <a:cs typeface="Calibri"/>
+                  <a:sym typeface="Calibri"/>
+                </a:rPr>
+                <a:t/>
+              </a:r>
+            </a:p>
+          </p:txBody>
+        </p:sp>
+      </p:grpSp>
+      <p:grpSp>
+        <p:nvGrpSpPr>
+          <p:cNvPr id="352" name="Google Shape;352;p10"/>
+          <p:cNvGrpSpPr/>
+          <p:nvPr/>
+        </p:nvGrpSpPr>
+        <p:grpSpPr>
+          <a:xfrm>
+            <a:off x="285750" y="1318260"/>
+            <a:ext cx="2171700" cy="594340"/>
+            <a:chOff x="285750" y="1318260"/>
+            <a:chExt cx="2171700" cy="594340"/>
+          </a:xfrm>
+        </p:grpSpPr>
+        <p:sp>
+          <p:nvSpPr>
+            <p:cNvPr id="353" name="Google Shape;353;p10"/>
+            <p:cNvSpPr txBox="1"/>
+            <p:nvPr/>
+          </p:nvSpPr>
+          <p:spPr>
+            <a:xfrm>
+              <a:off x="285750" y="1318260"/>
+              <a:ext cx="1005840" cy="338455"/>
+            </a:xfrm>
+            <a:prstGeom prst="rect">
+              <a:avLst/>
+            </a:prstGeom>
+            <a:noFill/>
+            <a:ln>
+              <a:noFill/>
+            </a:ln>
+          </p:spPr>
+          <p:txBody>
+            <a:bodyPr wrap="square" lIns="91425" tIns="45700" rIns="91425" bIns="45700" anchor="t" anchorCtr="0">
+              <a:spAutoFit/>
+            </a:bodyPr>
+            <a:lstStyle/>
+            <a:p>
+              <a:pPr marL="0" marR="0" lvl="0" indent="0" algn="l" rtl="0">
+                <a:spcBef>
+                  <a:spcPts val="0"/>
+                </a:spcBef>
+                <a:spcAft>
+                  <a:spcPts val="0"/>
+                </a:spcAft>
+                <a:buClr>
+                  <a:schemeClr val="lt1"/>
+                </a:buClr>
+                <a:buSzPct val="25000"/>
+                <a:buFont typeface="Calibri"/>
+                <a:buNone/>
+                <a:defRPr/>
+              </a:pPr>
+              <a:r>
+                <a:rPr lang="ko-KR" sz="1600" b="1">
+                  <a:solidFill>
+                    <a:schemeClr val="lt1"/>
+                  </a:solidFill>
+                  <a:latin typeface="Calibri"/>
+                  <a:ea typeface="Calibri"/>
+                  <a:cs typeface="Calibri"/>
+                  <a:sym typeface="Calibri"/>
+                </a:rPr>
+                <a:t>화면이름</a:t>
+              </a:r>
+              <a:endParaRPr sz="1600" b="1">
+                <a:solidFill>
+                  <a:schemeClr val="lt1"/>
+                </a:solidFill>
+                <a:latin typeface="Calibri"/>
+                <a:ea typeface="Calibri"/>
+                <a:cs typeface="Calibri"/>
+                <a:sym typeface="Calibri"/>
+              </a:endParaRPr>
+            </a:p>
+          </p:txBody>
+        </p:sp>
+        <p:sp>
+          <p:nvSpPr>
+            <p:cNvPr id="354" name="Google Shape;354;p10"/>
+            <p:cNvSpPr txBox="1"/>
+            <p:nvPr/>
+          </p:nvSpPr>
+          <p:spPr>
+            <a:xfrm>
+              <a:off x="285750" y="1649730"/>
+              <a:ext cx="2171700" cy="262870"/>
+            </a:xfrm>
+            <a:prstGeom prst="rect">
+              <a:avLst/>
+            </a:prstGeom>
+            <a:noFill/>
+            <a:ln>
+              <a:noFill/>
+            </a:ln>
+          </p:spPr>
+          <p:txBody>
+            <a:bodyPr wrap="square" lIns="91425" tIns="45700" rIns="91425" bIns="45700" anchor="t" anchorCtr="0">
+              <a:spAutoFit/>
+            </a:bodyPr>
+            <a:lstStyle/>
+            <a:p>
+              <a:pPr marL="0" marR="0" lvl="0" indent="0" algn="l" rtl="0">
+                <a:spcBef>
+                  <a:spcPts val="0"/>
+                </a:spcBef>
+                <a:spcAft>
+                  <a:spcPts val="0"/>
+                </a:spcAft>
+                <a:buClr>
+                  <a:schemeClr val="lt1"/>
+                </a:buClr>
+                <a:buSzPct val="25000"/>
+                <a:buFont typeface="Calibri"/>
+                <a:buNone/>
+                <a:defRPr/>
+              </a:pPr>
+              <a:r>
+                <a:rPr lang="ko-KR" altLang="en-US" sz="1200">
+                  <a:solidFill>
+                    <a:schemeClr val="lt1"/>
+                  </a:solidFill>
+                  <a:latin typeface="Calibri"/>
+                  <a:ea typeface="Calibri"/>
+                  <a:cs typeface="Calibri"/>
+                  <a:sym typeface="Calibri"/>
+                </a:rPr>
+                <a:t>비밀번호 재설정 화면</a:t>
+              </a:r>
+            </a:p>
+          </p:txBody>
+        </p:sp>
+      </p:grpSp>
+      <p:grpSp>
+        <p:nvGrpSpPr>
+          <p:cNvPr id="355" name="Google Shape;355;p10"/>
+          <p:cNvGrpSpPr/>
+          <p:nvPr/>
+        </p:nvGrpSpPr>
+        <p:grpSpPr>
+          <a:xfrm>
+            <a:off x="285750" y="2148205"/>
+            <a:ext cx="2171700" cy="607695"/>
+            <a:chOff x="285750" y="2386330"/>
+            <a:chExt cx="2171700" cy="607695"/>
+          </a:xfrm>
+        </p:grpSpPr>
+        <p:sp>
+          <p:nvSpPr>
+            <p:cNvPr id="356" name="Google Shape;356;p10"/>
+            <p:cNvSpPr txBox="1"/>
+            <p:nvPr/>
+          </p:nvSpPr>
+          <p:spPr>
+            <a:xfrm>
+              <a:off x="285750" y="2386330"/>
+              <a:ext cx="1898650" cy="338455"/>
+            </a:xfrm>
+            <a:prstGeom prst="rect">
+              <a:avLst/>
+            </a:prstGeom>
+            <a:noFill/>
+            <a:ln>
+              <a:noFill/>
+            </a:ln>
+          </p:spPr>
+          <p:txBody>
+            <a:bodyPr wrap="square" lIns="91425" tIns="45700" rIns="91425" bIns="45700" anchor="t" anchorCtr="0">
+              <a:spAutoFit/>
+            </a:bodyPr>
+            <a:lstStyle/>
+            <a:p>
+              <a:pPr marL="0" marR="0" lvl="0" indent="0" algn="l" rtl="0">
+                <a:spcBef>
+                  <a:spcPts val="0"/>
+                </a:spcBef>
+                <a:spcAft>
+                  <a:spcPts val="0"/>
+                </a:spcAft>
+                <a:buClr>
+                  <a:schemeClr val="lt1"/>
+                </a:buClr>
+                <a:buSzPct val="25000"/>
+                <a:buFont typeface="Calibri"/>
+                <a:buNone/>
+                <a:defRPr/>
+              </a:pPr>
+              <a:r>
+                <a:rPr lang="ko-KR" sz="1600" b="1">
+                  <a:solidFill>
+                    <a:schemeClr val="lt1"/>
+                  </a:solidFill>
+                  <a:latin typeface="Calibri"/>
+                  <a:ea typeface="Calibri"/>
+                  <a:cs typeface="Calibri"/>
+                  <a:sym typeface="Calibri"/>
+                </a:rPr>
+                <a:t>관련 유스케이스 ID</a:t>
+              </a:r>
+              <a:endParaRPr sz="1600" b="1">
+                <a:solidFill>
+                  <a:schemeClr val="lt1"/>
+                </a:solidFill>
+                <a:latin typeface="Calibri"/>
+                <a:ea typeface="Calibri"/>
+                <a:cs typeface="Calibri"/>
+                <a:sym typeface="Calibri"/>
+              </a:endParaRPr>
+            </a:p>
+          </p:txBody>
+        </p:sp>
+        <p:sp>
+          <p:nvSpPr>
+            <p:cNvPr id="357" name="Google Shape;357;p10"/>
+            <p:cNvSpPr txBox="1"/>
+            <p:nvPr/>
+          </p:nvSpPr>
+          <p:spPr>
+            <a:xfrm>
+              <a:off x="285750" y="2717165"/>
+              <a:ext cx="2171700" cy="274320"/>
+            </a:xfrm>
+            <a:prstGeom prst="rect">
+              <a:avLst/>
+            </a:prstGeom>
+            <a:noFill/>
+            <a:ln>
+              <a:noFill/>
+            </a:ln>
+          </p:spPr>
+          <p:txBody>
+            <a:bodyPr wrap="square" lIns="91425" tIns="45700" rIns="91425" bIns="45700" anchor="t" anchorCtr="0">
+              <a:spAutoFit/>
+            </a:bodyPr>
+            <a:lstStyle/>
+            <a:p>
+              <a:pPr marL="0" marR="0" lvl="0" indent="0" algn="l" rtl="0">
+                <a:spcBef>
+                  <a:spcPts val="0"/>
+                </a:spcBef>
+                <a:spcAft>
+                  <a:spcPts val="0"/>
+                </a:spcAft>
+                <a:buClr>
+                  <a:schemeClr val="lt1"/>
+                </a:buClr>
+                <a:buSzPct val="25000"/>
+                <a:buFont typeface="Calibri"/>
+                <a:buNone/>
+                <a:defRPr/>
+              </a:pPr>
+              <a:r>
+                <a:rPr lang="ko-KR" sz="1200">
+                  <a:solidFill>
+                    <a:schemeClr val="lt1"/>
+                  </a:solidFill>
+                  <a:latin typeface="Calibri"/>
+                  <a:ea typeface="Calibri"/>
+                  <a:cs typeface="Calibri"/>
+                  <a:sym typeface="Calibri"/>
+                </a:rPr>
+                <a:t>MLCM_102</a:t>
+              </a:r>
+              <a:r>
+                <a:rPr lang="en-US" altLang="ko-KR" sz="1200">
+                  <a:solidFill>
+                    <a:schemeClr val="lt1"/>
+                  </a:solidFill>
+                  <a:latin typeface="Calibri"/>
+                  <a:ea typeface="Calibri"/>
+                  <a:cs typeface="Calibri"/>
+                  <a:sym typeface="Calibri"/>
+                </a:rPr>
+                <a:t/>
+              </a:r>
+              <a:endParaRPr sz="1200">
+                <a:solidFill>
+                  <a:schemeClr val="lt1"/>
+                </a:solidFill>
+                <a:latin typeface="Calibri"/>
+                <a:ea typeface="Calibri"/>
+                <a:cs typeface="Calibri"/>
+                <a:sym typeface="Calibri"/>
+              </a:endParaRPr>
+            </a:p>
+          </p:txBody>
+        </p:sp>
+      </p:grpSp>
+      <p:grpSp>
+        <p:nvGrpSpPr>
+          <p:cNvPr id="358" name="Google Shape;358;p10"/>
+          <p:cNvGrpSpPr/>
+          <p:nvPr/>
+        </p:nvGrpSpPr>
+        <p:grpSpPr>
+          <a:xfrm>
+            <a:off x="285750" y="5814695"/>
+            <a:ext cx="2171700" cy="607695"/>
+            <a:chOff x="285750" y="5814695"/>
+            <a:chExt cx="2171700" cy="607695"/>
+          </a:xfrm>
+        </p:grpSpPr>
+        <p:sp>
+          <p:nvSpPr>
+            <p:cNvPr id="359" name="Google Shape;359;p10"/>
+            <p:cNvSpPr txBox="1"/>
+            <p:nvPr/>
+          </p:nvSpPr>
+          <p:spPr>
+            <a:xfrm>
+              <a:off x="285750" y="5814695"/>
+              <a:ext cx="800735" cy="338455"/>
+            </a:xfrm>
+            <a:prstGeom prst="rect">
+              <a:avLst/>
+            </a:prstGeom>
+            <a:noFill/>
+            <a:ln>
+              <a:noFill/>
+            </a:ln>
+          </p:spPr>
+          <p:txBody>
+            <a:bodyPr wrap="square" lIns="91425" tIns="45700" rIns="91425" bIns="45700" anchor="t" anchorCtr="0">
+              <a:spAutoFit/>
+            </a:bodyPr>
+            <a:lstStyle/>
+            <a:p>
+              <a:pPr marL="0" marR="0" lvl="0" indent="0" algn="l" rtl="0">
+                <a:spcBef>
+                  <a:spcPts val="0"/>
+                </a:spcBef>
+                <a:spcAft>
+                  <a:spcPts val="0"/>
+                </a:spcAft>
+                <a:buClr>
+                  <a:schemeClr val="lt1"/>
+                </a:buClr>
+                <a:buSzPct val="25000"/>
+                <a:buFont typeface="Calibri"/>
+                <a:buNone/>
+                <a:defRPr/>
+              </a:pPr>
+              <a:r>
+                <a:rPr lang="ko-KR" sz="1600" b="1">
+                  <a:solidFill>
+                    <a:schemeClr val="lt1"/>
+                  </a:solidFill>
+                  <a:latin typeface="Calibri"/>
+                  <a:ea typeface="Calibri"/>
+                  <a:cs typeface="Calibri"/>
+                  <a:sym typeface="Calibri"/>
+                </a:rPr>
+                <a:t>작성자</a:t>
+              </a:r>
+              <a:endParaRPr sz="1600" b="1">
+                <a:solidFill>
+                  <a:schemeClr val="lt1"/>
+                </a:solidFill>
+                <a:latin typeface="Calibri"/>
+                <a:ea typeface="Calibri"/>
+                <a:cs typeface="Calibri"/>
+                <a:sym typeface="Calibri"/>
+              </a:endParaRPr>
+            </a:p>
+          </p:txBody>
+        </p:sp>
+        <p:sp>
+          <p:nvSpPr>
+            <p:cNvPr id="360" name="Google Shape;360;p10"/>
+            <p:cNvSpPr txBox="1"/>
+            <p:nvPr/>
+          </p:nvSpPr>
+          <p:spPr>
+            <a:xfrm>
+              <a:off x="285750" y="6145530"/>
+              <a:ext cx="2171700" cy="276860"/>
+            </a:xfrm>
+            <a:prstGeom prst="rect">
+              <a:avLst/>
+            </a:prstGeom>
+            <a:noFill/>
+            <a:ln>
+              <a:noFill/>
+            </a:ln>
+          </p:spPr>
+          <p:txBody>
+            <a:bodyPr wrap="square" lIns="91425" tIns="45700" rIns="91425" bIns="45700" anchor="t" anchorCtr="0">
+              <a:spAutoFit/>
+            </a:bodyPr>
+            <a:lstStyle/>
+            <a:p>
+              <a:pPr marL="0" marR="0" lvl="0" indent="0" algn="l" rtl="0">
+                <a:spcBef>
+                  <a:spcPts val="0"/>
+                </a:spcBef>
+                <a:spcAft>
+                  <a:spcPts val="0"/>
+                </a:spcAft>
+                <a:buClr>
+                  <a:schemeClr val="lt1"/>
+                </a:buClr>
+                <a:buSzPct val="25000"/>
+                <a:buFont typeface="Calibri"/>
+                <a:buNone/>
+                <a:defRPr/>
+              </a:pPr>
+              <a:r>
+                <a:rPr lang="ko-KR" sz="1200">
+                  <a:solidFill>
+                    <a:schemeClr val="lt1"/>
+                  </a:solidFill>
+                  <a:latin typeface="Calibri"/>
+                  <a:ea typeface="Calibri"/>
+                  <a:cs typeface="Calibri"/>
+                  <a:sym typeface="Calibri"/>
+                </a:rPr>
+                <a:t>팀장 – 이응균 / 팀원 - 함은선</a:t>
+              </a:r>
+              <a:endParaRPr sz="1200">
+                <a:solidFill>
+                  <a:schemeClr val="lt1"/>
+                </a:solidFill>
+                <a:latin typeface="Calibri"/>
+                <a:ea typeface="Calibri"/>
+                <a:cs typeface="Calibri"/>
+                <a:sym typeface="Calibri"/>
+              </a:endParaRPr>
+            </a:p>
+          </p:txBody>
+        </p:sp>
+      </p:grpSp>
+      <p:sp>
+        <p:nvSpPr>
+          <p:cNvPr id="361" name="Google Shape;361;p10"/>
+          <p:cNvSpPr txBox="1"/>
+          <p:nvPr/>
+        </p:nvSpPr>
+        <p:spPr>
+          <a:xfrm>
+            <a:off x="285750" y="3316605"/>
+            <a:ext cx="2380615" cy="634345"/>
+          </a:xfrm>
+          <a:prstGeom prst="rect">
+            <a:avLst/>
+          </a:prstGeom>
+          <a:noFill/>
+          <a:ln>
+            <a:noFill/>
+          </a:ln>
+        </p:spPr>
+        <p:txBody>
+          <a:bodyPr wrap="square" lIns="91425" tIns="45700" rIns="91425" bIns="45700" anchor="t" anchorCtr="0">
+            <a:spAutoFit/>
+          </a:bodyPr>
+          <a:lstStyle/>
+          <a:p>
+            <a:pPr marL="0" marR="0" lvl="0" indent="0" algn="l" rtl="0">
+              <a:spcBef>
+                <a:spcPts val="0"/>
+              </a:spcBef>
+              <a:spcAft>
+                <a:spcPts val="0"/>
+              </a:spcAft>
+              <a:buClr>
+                <a:schemeClr val="lt1"/>
+              </a:buClr>
+              <a:buSzPct val="25000"/>
+              <a:buFont typeface="Calibri"/>
+              <a:buNone/>
+              <a:defRPr/>
+            </a:pPr>
+            <a:endParaRPr lang="ko-KR" altLang="en-US" sz="1200">
+              <a:solidFill>
+                <a:schemeClr val="lt1"/>
+              </a:solidFill>
+              <a:latin typeface="Calibri"/>
+              <a:ea typeface="Calibri"/>
+              <a:cs typeface="Calibri"/>
+              <a:sym typeface="Calibri"/>
+            </a:endParaRPr>
+          </a:p>
+          <a:p>
+            <a:pPr marL="0" marR="0" lvl="0" indent="0" algn="l" rtl="0">
+              <a:spcBef>
+                <a:spcPts val="0"/>
+              </a:spcBef>
+              <a:spcAft>
+                <a:spcPts val="0"/>
+              </a:spcAft>
+              <a:buClr>
+                <a:schemeClr val="lt1"/>
+              </a:buClr>
+              <a:buSzPct val="25000"/>
+              <a:buFont typeface="Calibri"/>
+              <a:buNone/>
+              <a:defRPr/>
+            </a:pPr>
+            <a:r>
+              <a:rPr lang="ko-KR" altLang="en-US" sz="1200">
+                <a:solidFill>
+                  <a:schemeClr val="lt1"/>
+                </a:solidFill>
+                <a:latin typeface="Calibri"/>
+                <a:ea typeface="Calibri"/>
+                <a:cs typeface="Calibri"/>
+                <a:sym typeface="Calibri"/>
+              </a:rPr>
+              <a:t>비밀번호 분실 시 이메일 인증을 통해 새 비밀번호로 재설정하는 화면</a:t>
+            </a:r>
+          </a:p>
+        </p:txBody>
+      </p:sp>
+      <p:grpSp>
+        <p:nvGrpSpPr>
+          <p:cNvPr id="362" name="Google Shape;362;p10"/>
+          <p:cNvGrpSpPr/>
+          <p:nvPr/>
+        </p:nvGrpSpPr>
+        <p:grpSpPr>
+          <a:xfrm>
+            <a:off x="285750" y="4504055"/>
+            <a:ext cx="2372360" cy="599440"/>
+            <a:chOff x="285750" y="4504055"/>
+            <a:chExt cx="2372360" cy="599440"/>
+          </a:xfrm>
+        </p:grpSpPr>
+        <p:sp>
+          <p:nvSpPr>
+            <p:cNvPr id="363" name="Google Shape;363;p10"/>
+            <p:cNvSpPr txBox="1"/>
+            <p:nvPr/>
+          </p:nvSpPr>
+          <p:spPr>
+            <a:xfrm>
+              <a:off x="285750" y="4504055"/>
+              <a:ext cx="1098550" cy="338455"/>
+            </a:xfrm>
+            <a:prstGeom prst="rect">
+              <a:avLst/>
+            </a:prstGeom>
+            <a:noFill/>
+            <a:ln>
+              <a:noFill/>
+            </a:ln>
+          </p:spPr>
+          <p:txBody>
+            <a:bodyPr wrap="square" lIns="91425" tIns="45700" rIns="91425" bIns="45700" anchor="t" anchorCtr="0">
+              <a:spAutoFit/>
+            </a:bodyPr>
+            <a:lstStyle/>
+            <a:p>
+              <a:pPr marL="0" marR="0" lvl="0" indent="0" algn="l" rtl="0">
+                <a:spcBef>
+                  <a:spcPts val="0"/>
+                </a:spcBef>
+                <a:spcAft>
+                  <a:spcPts val="0"/>
+                </a:spcAft>
+                <a:buClr>
+                  <a:schemeClr val="lt1"/>
+                </a:buClr>
+                <a:buSzPct val="25000"/>
+                <a:buFont typeface="Calibri"/>
+                <a:buNone/>
+                <a:defRPr/>
+              </a:pPr>
+              <a:r>
+                <a:rPr lang="ko-KR" sz="1600" b="1">
+                  <a:solidFill>
+                    <a:schemeClr val="lt1"/>
+                  </a:solidFill>
+                  <a:latin typeface="Calibri"/>
+                  <a:ea typeface="Calibri"/>
+                  <a:cs typeface="Calibri"/>
+                  <a:sym typeface="Calibri"/>
+                </a:rPr>
+                <a:t>메뉴경로</a:t>
+              </a:r>
+              <a:endParaRPr sz="1600" b="1">
+                <a:solidFill>
+                  <a:schemeClr val="lt1"/>
+                </a:solidFill>
+                <a:latin typeface="Calibri"/>
+                <a:ea typeface="Calibri"/>
+                <a:cs typeface="Calibri"/>
+                <a:sym typeface="Calibri"/>
+              </a:endParaRPr>
+            </a:p>
+          </p:txBody>
+        </p:sp>
+        <p:sp>
+          <p:nvSpPr>
+            <p:cNvPr id="364" name="Google Shape;364;p10"/>
+            <p:cNvSpPr txBox="1"/>
+            <p:nvPr/>
+          </p:nvSpPr>
+          <p:spPr>
+            <a:xfrm>
+              <a:off x="285750" y="4835525"/>
+              <a:ext cx="2372360" cy="267970"/>
+            </a:xfrm>
+            <a:prstGeom prst="rect">
+              <a:avLst/>
+            </a:prstGeom>
+            <a:noFill/>
+            <a:ln>
+              <a:noFill/>
+            </a:ln>
+          </p:spPr>
+          <p:txBody>
+            <a:bodyPr wrap="square" lIns="91425" tIns="45700" rIns="91425" bIns="45700" anchor="t" anchorCtr="0">
+              <a:spAutoFit/>
+            </a:bodyPr>
+            <a:lstStyle/>
+            <a:p>
+              <a:pPr marL="0" marR="0" lvl="0" indent="0" algn="l" rtl="0">
+                <a:spcBef>
+                  <a:spcPts val="0"/>
+                </a:spcBef>
+                <a:spcAft>
+                  <a:spcPts val="0"/>
+                </a:spcAft>
+                <a:buClr>
+                  <a:schemeClr val="lt1"/>
+                </a:buClr>
+                <a:buSzPct val="25000"/>
+                <a:buFont typeface="Calibri"/>
+                <a:buNone/>
+                <a:defRPr/>
+              </a:pPr>
+              <a:r>
+                <a:rPr lang="ko-KR" sz="1200">
+                  <a:solidFill>
+                    <a:schemeClr val="lt1"/>
+                  </a:solidFill>
+                  <a:latin typeface="Calibri"/>
+                  <a:ea typeface="Calibri"/>
+                  <a:cs typeface="Calibri"/>
+                  <a:sym typeface="Calibri"/>
+                </a:rPr>
+                <a:t>로그인/비밀번호 찾기</a:t>
+              </a:r>
+              <a:endParaRPr sz="1200">
+                <a:solidFill>
+                  <a:schemeClr val="lt1"/>
+                </a:solidFill>
+                <a:latin typeface="Calibri"/>
+                <a:ea typeface="Calibri"/>
+                <a:cs typeface="Calibri"/>
+                <a:sym typeface="Calibri"/>
+              </a:endParaRPr>
+            </a:p>
+          </p:txBody>
+        </p:sp>
+      </p:grpSp>
+      <p:sp>
+        <p:nvSpPr>
+          <p:cNvPr id="365" name="Google Shape;365;p10"/>
+          <p:cNvSpPr txBox="1"/>
+          <p:nvPr/>
+        </p:nvSpPr>
+        <p:spPr>
+          <a:xfrm>
+            <a:off x="285750" y="2981960"/>
+            <a:ext cx="1005840" cy="338455"/>
+          </a:xfrm>
+          <a:prstGeom prst="rect">
+            <a:avLst/>
+          </a:prstGeom>
+          <a:noFill/>
+          <a:ln>
+            <a:noFill/>
+          </a:ln>
+        </p:spPr>
+        <p:txBody>
+          <a:bodyPr wrap="square" lIns="91425" tIns="45700" rIns="91425" bIns="45700" anchor="t" anchorCtr="0">
+            <a:spAutoFit/>
+          </a:bodyPr>
+          <a:lstStyle/>
+          <a:p>
+            <a:pPr marL="0" marR="0" lvl="0" indent="0" algn="l" rtl="0">
+              <a:spcBef>
+                <a:spcPts val="0"/>
+              </a:spcBef>
+              <a:spcAft>
+                <a:spcPts val="0"/>
+              </a:spcAft>
+              <a:buClr>
+                <a:schemeClr val="lt1"/>
+              </a:buClr>
+              <a:buSzPct val="25000"/>
+              <a:buFont typeface="Calibri"/>
+              <a:buNone/>
+              <a:defRPr/>
+            </a:pPr>
+            <a:r>
+              <a:rPr lang="ko-KR" sz="1600" b="1">
+                <a:solidFill>
+                  <a:schemeClr val="lt1"/>
+                </a:solidFill>
+                <a:latin typeface="Calibri"/>
+                <a:ea typeface="Calibri"/>
+                <a:cs typeface="Calibri"/>
+                <a:sym typeface="Calibri"/>
+              </a:rPr>
+              <a:t>화면개요</a:t>
+            </a:r>
+            <a:endParaRPr sz="1600" b="1">
+              <a:solidFill>
+                <a:schemeClr val="lt1"/>
+              </a:solidFill>
+              <a:latin typeface="Calibri"/>
+              <a:ea typeface="Calibri"/>
+              <a:cs typeface="Calibri"/>
+              <a:sym typeface="Calibri"/>
+            </a:endParaRPr>
+          </a:p>
+        </p:txBody>
+      </p:sp>
+      <p:pic>
+        <p:nvPicPr>
+          <p:cNvPr id="370" name="그림 369"/>
+          <p:cNvPicPr>
+            <a:picLocks noChangeAspect="1"/>
+          </p:cNvPicPr>
+          <p:nvPr/>
+        </p:nvPicPr>
+        <p:blipFill rotWithShape="1">
+          <a:blip r:embed="rId3"/>
+          <a:stretch>
+            <a:fillRect/>
+          </a:stretch>
+        </p:blipFill>
+        <p:spPr>
+          <a:xfrm>
+            <a:off x="5135035" y="0"/>
+            <a:ext cx="2379765" cy="5150055"/>
+          </a:xfrm>
+          <a:prstGeom prst="rect">
+            <a:avLst/>
+          </a:prstGeom>
+        </p:spPr>
+      </p:pic>
+    </p:spTree>
+    <p:extLst>
+      <p:ext uri="{BB962C8B-B14F-4D97-AF65-F5344CB8AC3E}">
+        <p14:creationId xmlns:p14="http://schemas.microsoft.com/office/powerpoint/2010/main" val="2759204891"/>
+      </p:ext>
+    </p:extLst>
+  </p:cSld>
+  <p:clrMapOvr>
+    <a:masterClrMapping/>
+  </p:clrMapOvr>
+</p:sld>
+</file>
+
+<file path=ppt/slides/slide17.xml><?xml version="1.0" encoding="utf-8"?>
+<p:sld xmlns:a="http://schemas.openxmlformats.org/drawingml/2006/main" xmlns:r="http://schemas.openxmlformats.org/officeDocument/2006/relationships" xmlns:p="http://schemas.openxmlformats.org/presentationml/2006/main">
+  <p:cSld>
+    <p:bg>
+      <p:bgPr>
+        <a:solidFill>
+          <a:srgbClr val="C0CDEF"/>
+        </a:solidFill>
+        <a:effectLst/>
+      </p:bgPr>
+    </p:bg>
+    <p:spTree>
+      <p:nvGrpSpPr>
+        <p:cNvPr id="1" name=""/>
+        <p:cNvGrpSpPr/>
+        <p:nvPr/>
+      </p:nvGrpSpPr>
+      <p:grpSpPr>
+        <a:xfrm>
+          <a:off x="0" y="0"/>
+          <a:ext cx="0" cy="0"/>
+          <a:chOff x="0" y="0"/>
+          <a:chExt cx="0" cy="0"/>
+        </a:xfrm>
+      </p:grpSpPr>
+      <p:sp>
+        <p:nvSpPr>
+          <p:cNvPr id="344" name="Google Shape;344;p10"/>
+          <p:cNvSpPr/>
+          <p:nvPr/>
+        </p:nvSpPr>
+        <p:spPr>
+          <a:xfrm>
+            <a:off x="0" y="0"/>
+            <a:ext cx="2743835" cy="6858635"/>
+          </a:xfrm>
+          <a:prstGeom prst="rect">
+            <a:avLst/>
+          </a:prstGeom>
+          <a:solidFill>
+            <a:srgbClr val="0090D0"/>
+          </a:solidFill>
+          <a:ln>
+            <a:noFill/>
+          </a:ln>
+        </p:spPr>
+        <p:txBody>
+          <a:bodyPr wrap="square" lIns="91425" tIns="45700" rIns="91425" bIns="45700" anchor="ctr" anchorCtr="0">
+            <a:noAutofit/>
+          </a:bodyPr>
+          <a:lstStyle/>
+          <a:p>
+            <a:pPr marL="0" marR="0" lvl="0" indent="0" algn="ctr" rtl="0">
+              <a:spcBef>
+                <a:spcPts val="0"/>
+              </a:spcBef>
+              <a:spcAft>
+                <a:spcPts val="0"/>
+              </a:spcAft>
+              <a:buClr>
+                <a:schemeClr val="lt1"/>
+              </a:buClr>
+              <a:buSzPct val="25000"/>
+              <a:buFont typeface="Calibri"/>
+              <a:buNone/>
+              <a:defRPr/>
+            </a:pPr>
+            <a:endParaRPr sz="1600">
+              <a:solidFill>
+                <a:schemeClr val="lt1"/>
+              </a:solidFill>
+              <a:latin typeface="Calibri"/>
+              <a:ea typeface="Calibri"/>
+              <a:cs typeface="Calibri"/>
+              <a:sym typeface="Calibri"/>
+            </a:endParaRPr>
+          </a:p>
+        </p:txBody>
+      </p:sp>
+      <p:sp>
+        <p:nvSpPr>
+          <p:cNvPr id="345" name="Google Shape;345;p10"/>
+          <p:cNvSpPr/>
+          <p:nvPr/>
+        </p:nvSpPr>
+        <p:spPr>
+          <a:xfrm>
+            <a:off x="2743200" y="5172075"/>
+            <a:ext cx="7163435" cy="1686560"/>
+          </a:xfrm>
+          <a:prstGeom prst="rect">
+            <a:avLst/>
+          </a:prstGeom>
+          <a:solidFill>
+            <a:srgbClr val="F2F2F2"/>
+          </a:solidFill>
+          <a:ln>
+            <a:noFill/>
+          </a:ln>
+        </p:spPr>
+        <p:txBody>
+          <a:bodyPr wrap="square" lIns="91425" tIns="45700" rIns="91425" bIns="45700" anchor="ctr" anchorCtr="0">
+            <a:noAutofit/>
+          </a:bodyPr>
+          <a:lstStyle/>
+          <a:p>
+            <a:pPr marL="0" marR="0" lvl="0" indent="0" algn="ctr" rtl="0">
+              <a:spcBef>
+                <a:spcPts val="0"/>
+              </a:spcBef>
+              <a:spcAft>
+                <a:spcPts val="0"/>
+              </a:spcAft>
+              <a:buClr>
+                <a:schemeClr val="lt1"/>
+              </a:buClr>
+              <a:buSzPct val="25000"/>
+              <a:buFont typeface="Calibri"/>
+              <a:buNone/>
+              <a:defRPr/>
+            </a:pPr>
+            <a:endParaRPr sz="1600">
+              <a:solidFill>
+                <a:schemeClr val="lt1"/>
+              </a:solidFill>
+              <a:latin typeface="Calibri"/>
+              <a:ea typeface="Calibri"/>
+              <a:cs typeface="Calibri"/>
+              <a:sym typeface="Calibri"/>
+            </a:endParaRPr>
+          </a:p>
+        </p:txBody>
+      </p:sp>
+      <p:sp>
+        <p:nvSpPr>
+          <p:cNvPr id="346" name="Google Shape;346;p10"/>
+          <p:cNvSpPr txBox="1"/>
+          <p:nvPr/>
+        </p:nvSpPr>
+        <p:spPr>
+          <a:xfrm>
+            <a:off x="3020060" y="5412740"/>
+            <a:ext cx="1005840" cy="339090"/>
+          </a:xfrm>
+          <a:prstGeom prst="rect">
+            <a:avLst/>
+          </a:prstGeom>
+          <a:noFill/>
+          <a:ln>
+            <a:noFill/>
+          </a:ln>
+        </p:spPr>
+        <p:txBody>
+          <a:bodyPr wrap="square" lIns="91425" tIns="45700" rIns="91425" bIns="45700" anchor="t" anchorCtr="0">
+            <a:spAutoFit/>
+          </a:bodyPr>
+          <a:lstStyle/>
+          <a:p>
+            <a:pPr marL="0" marR="0" lvl="0" indent="0" algn="l" rtl="0">
+              <a:spcBef>
+                <a:spcPts val="0"/>
+              </a:spcBef>
+              <a:spcAft>
+                <a:spcPts val="0"/>
+              </a:spcAft>
+              <a:buClr>
+                <a:schemeClr val="dk1"/>
+              </a:buClr>
+              <a:buSzPct val="25000"/>
+              <a:buFont typeface="Calibri"/>
+              <a:buNone/>
+              <a:defRPr/>
+            </a:pPr>
+            <a:r>
+              <a:rPr lang="ko-KR" sz="1600" b="1">
+                <a:solidFill>
+                  <a:schemeClr val="dk1"/>
+                </a:solidFill>
+                <a:latin typeface="맑은 고딕"/>
+                <a:ea typeface="맑은 고딕"/>
+                <a:cs typeface="Calibri"/>
+                <a:sym typeface="Calibri"/>
+              </a:rPr>
+              <a:t>화면설명</a:t>
+            </a:r>
+            <a:endParaRPr sz="1600" b="1">
+              <a:solidFill>
+                <a:schemeClr val="dk1"/>
+              </a:solidFill>
+              <a:latin typeface="맑은 고딕"/>
+              <a:ea typeface="맑은 고딕"/>
+              <a:cs typeface="Calibri"/>
+              <a:sym typeface="Calibri"/>
+            </a:endParaRPr>
+          </a:p>
+        </p:txBody>
+      </p:sp>
+      <p:sp>
+        <p:nvSpPr>
+          <p:cNvPr id="347" name="Google Shape;347;p10"/>
+          <p:cNvSpPr txBox="1"/>
+          <p:nvPr/>
+        </p:nvSpPr>
+        <p:spPr>
+          <a:xfrm>
+            <a:off x="3020060" y="5781675"/>
+            <a:ext cx="6688455" cy="998219"/>
+          </a:xfrm>
+          <a:prstGeom prst="rect">
+            <a:avLst/>
+          </a:prstGeom>
+          <a:noFill/>
+          <a:ln>
+            <a:noFill/>
+          </a:ln>
+        </p:spPr>
+        <p:txBody>
+          <a:bodyPr wrap="square" lIns="91425" tIns="45700" rIns="91425" bIns="45700" anchor="t" anchorCtr="0">
+            <a:spAutoFit/>
+          </a:bodyPr>
+          <a:lstStyle/>
+          <a:p>
+            <a:pPr marL="0" marR="0" lvl="0" indent="0" algn="l" rtl="0">
+              <a:spcBef>
+                <a:spcPts val="0"/>
+              </a:spcBef>
+              <a:spcAft>
+                <a:spcPts val="0"/>
+              </a:spcAft>
+              <a:buClr>
+                <a:schemeClr val="dk1"/>
+              </a:buClr>
+              <a:buSzPct val="25000"/>
+              <a:buFont typeface="Calibri"/>
+              <a:buNone/>
+              <a:defRPr/>
+            </a:pPr>
+            <a:r>
+              <a:rPr lang="ko-KR" sz="1200">
+                <a:solidFill>
+                  <a:schemeClr val="dk1"/>
+                </a:solidFill>
+                <a:latin typeface="맑은 고딕"/>
+                <a:cs typeface="Calibri"/>
+                <a:sym typeface="Calibri"/>
+              </a:rPr>
+              <a:t>❶</a:t>
+            </a:r>
+            <a:r>
+              <a:rPr lang="ko-KR" sz="1200">
+                <a:solidFill>
+                  <a:schemeClr val="dk1"/>
+                </a:solidFill>
+                <a:latin typeface="맑은 고딕"/>
+                <a:ea typeface="맑은 고딕"/>
+                <a:cs typeface="Calibri"/>
+                <a:sym typeface="Calibri"/>
+              </a:rPr>
+              <a:t> 조회 기간: 주·월·직접 지정 전환. 변경 시 재조회</a:t>
+            </a:r>
+          </a:p>
+          <a:p>
+            <a:pPr marL="0" marR="0" lvl="0" indent="0" algn="l" rtl="0">
+              <a:spcBef>
+                <a:spcPts val="0"/>
+              </a:spcBef>
+              <a:spcAft>
+                <a:spcPts val="0"/>
+              </a:spcAft>
+              <a:buClr>
+                <a:schemeClr val="dk1"/>
+              </a:buClr>
+              <a:buSzPct val="25000"/>
+              <a:buFont typeface="Calibri"/>
+              <a:buNone/>
+              <a:defRPr/>
+            </a:pPr>
+            <a:r>
+              <a:rPr lang="ko-KR" sz="1200">
+                <a:solidFill>
+                  <a:schemeClr val="dk1"/>
+                </a:solidFill>
+                <a:latin typeface="맑은 고딕"/>
+                <a:cs typeface="Calibri"/>
+                <a:sym typeface="Calibri"/>
+              </a:rPr>
+              <a:t>❷</a:t>
+            </a:r>
+            <a:r>
+              <a:rPr lang="ko-KR" sz="1200">
+                <a:solidFill>
+                  <a:schemeClr val="dk1"/>
+                </a:solidFill>
+                <a:latin typeface="맑은 고딕"/>
+                <a:ea typeface="맑은 고딕"/>
+                <a:cs typeface="Calibri"/>
+                <a:sym typeface="Calibri"/>
+              </a:rPr>
+              <a:t> 감정 변화 곡선: 기간별 감정 스코어 추이 표시</a:t>
+            </a:r>
+          </a:p>
+          <a:p>
+            <a:pPr marL="0" marR="0" lvl="0" indent="0" algn="l" rtl="0">
+              <a:spcBef>
+                <a:spcPts val="0"/>
+              </a:spcBef>
+              <a:spcAft>
+                <a:spcPts val="0"/>
+              </a:spcAft>
+              <a:buClr>
+                <a:schemeClr val="dk1"/>
+              </a:buClr>
+              <a:buSzPct val="25000"/>
+              <a:buFont typeface="Calibri"/>
+              <a:buNone/>
+              <a:defRPr/>
+            </a:pPr>
+            <a:r>
+              <a:rPr lang="ko-KR" sz="1200">
+                <a:solidFill>
+                  <a:schemeClr val="dk1"/>
+                </a:solidFill>
+                <a:latin typeface="맑은 고딕"/>
+                <a:cs typeface="Calibri"/>
+                <a:sym typeface="Calibri"/>
+              </a:rPr>
+              <a:t>❸</a:t>
+            </a:r>
+            <a:r>
+              <a:rPr lang="ko-KR" sz="1200">
+                <a:solidFill>
+                  <a:schemeClr val="dk1"/>
+                </a:solidFill>
+                <a:latin typeface="맑은 고딕"/>
+                <a:ea typeface="맑은 고딕"/>
+                <a:cs typeface="Calibri"/>
+                <a:sym typeface="Calibri"/>
+              </a:rPr>
+              <a:t> 위험 단계 분포: 안정·주의·심각 단계 비율 표시</a:t>
+            </a:r>
+          </a:p>
+          <a:p>
+            <a:pPr marL="0" marR="0" lvl="0" indent="0" algn="l" rtl="0">
+              <a:spcBef>
+                <a:spcPts val="0"/>
+              </a:spcBef>
+              <a:spcAft>
+                <a:spcPts val="0"/>
+              </a:spcAft>
+              <a:buClr>
+                <a:schemeClr val="dk1"/>
+              </a:buClr>
+              <a:buSzPct val="25000"/>
+              <a:buFont typeface="Calibri"/>
+              <a:buNone/>
+              <a:defRPr/>
+            </a:pPr>
+            <a:r>
+              <a:rPr lang="ko-KR" sz="1200">
+                <a:solidFill>
+                  <a:schemeClr val="dk1"/>
+                </a:solidFill>
+                <a:latin typeface="맑은 고딕"/>
+                <a:cs typeface="Calibri"/>
+                <a:sym typeface="Calibri"/>
+              </a:rPr>
+              <a:t>❹</a:t>
+            </a:r>
+            <a:r>
+              <a:rPr lang="ko-KR" sz="1200">
+                <a:solidFill>
+                  <a:schemeClr val="dk1"/>
+                </a:solidFill>
+                <a:latin typeface="맑은 고딕"/>
+                <a:ea typeface="맑은 고딕"/>
+                <a:cs typeface="Calibri"/>
+                <a:sym typeface="Calibri"/>
+              </a:rPr>
+              <a:t> 결합 차트: 감정 추이와 수면·활동량 동일 시간축</a:t>
+            </a:r>
+          </a:p>
+          <a:p>
+            <a:pPr marL="0" marR="0" lvl="0" indent="0" algn="l" rtl="0">
+              <a:spcBef>
+                <a:spcPts val="0"/>
+              </a:spcBef>
+              <a:spcAft>
+                <a:spcPts val="0"/>
+              </a:spcAft>
+              <a:buClr>
+                <a:schemeClr val="dk1"/>
+              </a:buClr>
+              <a:buSzPct val="25000"/>
+              <a:buFont typeface="Calibri"/>
+              <a:buNone/>
+              <a:defRPr/>
+            </a:pPr>
+            <a:r>
+              <a:rPr lang="ko-KR" sz="1200">
+                <a:solidFill>
+                  <a:schemeClr val="dk1"/>
+                </a:solidFill>
+                <a:latin typeface="맑은 고딕"/>
+                <a:cs typeface="Calibri"/>
+                <a:sym typeface="Calibri"/>
+              </a:rPr>
+              <a:t>❺</a:t>
+            </a:r>
+            <a:r>
+              <a:rPr lang="ko-KR" sz="1200">
+                <a:solidFill>
+                  <a:schemeClr val="dk1"/>
+                </a:solidFill>
+                <a:latin typeface="맑은 고딕"/>
+                <a:ea typeface="맑은 고딕"/>
+                <a:cs typeface="Calibri"/>
+                <a:sym typeface="Calibri"/>
+              </a:rPr>
+              <a:t> 종합 요약 문구·PDF 내보내기 버튼 제공</a:t>
+            </a:r>
+            <a:endParaRPr sz="1200">
+              <a:solidFill>
+                <a:schemeClr val="dk1"/>
+              </a:solidFill>
+              <a:latin typeface="맑은 고딕"/>
+              <a:ea typeface="맑은 고딕"/>
+              <a:cs typeface="Calibri"/>
+              <a:sym typeface="Calibri"/>
+            </a:endParaRPr>
+          </a:p>
+        </p:txBody>
+      </p:sp>
+      <p:sp>
+        <p:nvSpPr>
+          <p:cNvPr id="348" name="Google Shape;348;p10"/>
+          <p:cNvSpPr/>
+          <p:nvPr/>
+        </p:nvSpPr>
+        <p:spPr>
+          <a:xfrm>
+            <a:off x="0" y="0"/>
+            <a:ext cx="2743835" cy="6858635"/>
+          </a:xfrm>
+          <a:prstGeom prst="rect">
+            <a:avLst/>
+          </a:prstGeom>
+          <a:solidFill>
+            <a:srgbClr val="A5A5A5"/>
+          </a:solidFill>
+          <a:ln>
+            <a:noFill/>
+          </a:ln>
+        </p:spPr>
+        <p:txBody>
+          <a:bodyPr wrap="square" lIns="91425" tIns="45700" rIns="91425" bIns="45700" anchor="ctr" anchorCtr="0">
+            <a:noAutofit/>
+          </a:bodyPr>
+          <a:lstStyle/>
+          <a:p>
+            <a:pPr marL="0" marR="0" lvl="0" indent="0" algn="ctr" rtl="0">
+              <a:spcBef>
+                <a:spcPts val="0"/>
+              </a:spcBef>
+              <a:spcAft>
+                <a:spcPts val="0"/>
+              </a:spcAft>
+              <a:buClr>
+                <a:schemeClr val="lt1"/>
+              </a:buClr>
+              <a:buSzPct val="25000"/>
+              <a:buFont typeface="Calibri"/>
+              <a:buNone/>
+              <a:defRPr/>
+            </a:pPr>
+            <a:endParaRPr sz="1600">
+              <a:solidFill>
+                <a:schemeClr val="lt1"/>
+              </a:solidFill>
+              <a:latin typeface="Calibri"/>
+              <a:ea typeface="Calibri"/>
+              <a:cs typeface="Calibri"/>
+              <a:sym typeface="Calibri"/>
+            </a:endParaRPr>
+          </a:p>
+        </p:txBody>
+      </p:sp>
+      <p:grpSp>
+        <p:nvGrpSpPr>
+          <p:cNvPr id="349" name="Google Shape;349;p10"/>
+          <p:cNvGrpSpPr/>
+          <p:nvPr/>
+        </p:nvGrpSpPr>
+        <p:grpSpPr>
+          <a:xfrm>
+            <a:off x="285750" y="435610"/>
+            <a:ext cx="2171700" cy="607695"/>
+            <a:chOff x="285750" y="435610"/>
+            <a:chExt cx="2171700" cy="607695"/>
+          </a:xfrm>
+        </p:grpSpPr>
+        <p:sp>
+          <p:nvSpPr>
+            <p:cNvPr id="350" name="Google Shape;350;p10"/>
+            <p:cNvSpPr txBox="1"/>
+            <p:nvPr/>
+          </p:nvSpPr>
+          <p:spPr>
+            <a:xfrm>
+              <a:off x="285750" y="435610"/>
+              <a:ext cx="873125" cy="338455"/>
+            </a:xfrm>
+            <a:prstGeom prst="rect">
+              <a:avLst/>
+            </a:prstGeom>
+            <a:noFill/>
+            <a:ln>
+              <a:noFill/>
+            </a:ln>
+          </p:spPr>
+          <p:txBody>
+            <a:bodyPr wrap="square" lIns="91425" tIns="45700" rIns="91425" bIns="45700" anchor="t" anchorCtr="0">
+              <a:spAutoFit/>
+            </a:bodyPr>
+            <a:lstStyle/>
+            <a:p>
+              <a:pPr marL="0" marR="0" lvl="0" indent="0" algn="l" rtl="0">
+                <a:spcBef>
+                  <a:spcPts val="0"/>
+                </a:spcBef>
+                <a:spcAft>
+                  <a:spcPts val="0"/>
+                </a:spcAft>
+                <a:buClr>
+                  <a:schemeClr val="lt1"/>
+                </a:buClr>
+                <a:buSzPct val="25000"/>
+                <a:buFont typeface="Calibri"/>
+                <a:buNone/>
+                <a:defRPr/>
+              </a:pPr>
+              <a:r>
+                <a:rPr lang="ko-KR" sz="1600" b="1">
+                  <a:solidFill>
+                    <a:schemeClr val="lt1"/>
+                  </a:solidFill>
+                  <a:latin typeface="Calibri"/>
+                  <a:ea typeface="Calibri"/>
+                  <a:cs typeface="Calibri"/>
+                  <a:sym typeface="Calibri"/>
+                </a:rPr>
+                <a:t>화면 ID </a:t>
+              </a:r>
+              <a:endParaRPr sz="1600" b="1">
+                <a:solidFill>
+                  <a:schemeClr val="lt1"/>
+                </a:solidFill>
+                <a:latin typeface="Calibri"/>
+                <a:ea typeface="Calibri"/>
+                <a:cs typeface="Calibri"/>
+                <a:sym typeface="Calibri"/>
+              </a:endParaRPr>
+            </a:p>
+          </p:txBody>
+        </p:sp>
+        <p:sp>
+          <p:nvSpPr>
+            <p:cNvPr id="351" name="Google Shape;351;p10"/>
+            <p:cNvSpPr txBox="1"/>
+            <p:nvPr/>
+          </p:nvSpPr>
+          <p:spPr>
+            <a:xfrm>
+              <a:off x="285750" y="766445"/>
+              <a:ext cx="2171700" cy="276860"/>
+            </a:xfrm>
+            <a:prstGeom prst="rect">
+              <a:avLst/>
+            </a:prstGeom>
+            <a:noFill/>
+            <a:ln>
+              <a:noFill/>
+            </a:ln>
+          </p:spPr>
+          <p:txBody>
+            <a:bodyPr wrap="square" lIns="91425" tIns="45700" rIns="91425" bIns="45700" anchor="t" anchorCtr="0">
+              <a:spAutoFit/>
+            </a:bodyPr>
+            <a:lstStyle/>
+            <a:p>
+              <a:pPr marL="0" marR="0" lvl="0" indent="0" algn="l" rtl="0">
+                <a:spcBef>
+                  <a:spcPts val="0"/>
+                </a:spcBef>
+                <a:spcAft>
+                  <a:spcPts val="0"/>
+                </a:spcAft>
+                <a:buClr>
+                  <a:schemeClr val="lt1"/>
+                </a:buClr>
+                <a:buSzPct val="25000"/>
+                <a:buFont typeface="Calibri"/>
+                <a:buNone/>
+                <a:defRPr/>
+              </a:pPr>
+              <a:r>
+                <a:rPr lang="ko-KR" sz="1200">
+                  <a:solidFill>
+                    <a:schemeClr val="lt1"/>
+                  </a:solidFill>
+                  <a:latin typeface="Calibri"/>
+                  <a:ea typeface="Calibri"/>
+                  <a:cs typeface="Calibri"/>
+                  <a:sym typeface="Calibri"/>
+                </a:rPr>
+                <a:t>MAIN_REPORT_01</a:t>
+              </a:r>
+              <a:r>
+                <a:rPr lang="en-US" altLang="ko-KR" sz="1200">
+                  <a:solidFill>
+                    <a:schemeClr val="lt1"/>
+                  </a:solidFill>
+                  <a:latin typeface="Calibri"/>
+                  <a:ea typeface="Calibri"/>
+                  <a:cs typeface="Calibri"/>
+                  <a:sym typeface="Calibri"/>
+                </a:rPr>
+                <a:t/>
+              </a:r>
+              <a:r>
+                <a:rPr lang="ko-KR" sz="1200">
+                  <a:solidFill>
+                    <a:schemeClr val="lt1"/>
+                  </a:solidFill>
+                  <a:latin typeface="Calibri"/>
+                  <a:ea typeface="Calibri"/>
+                  <a:cs typeface="Calibri"/>
+                  <a:sym typeface="Calibri"/>
+                </a:rPr>
+                <a:t/>
+              </a:r>
+            </a:p>
+          </p:txBody>
+        </p:sp>
+      </p:grpSp>
+      <p:grpSp>
+        <p:nvGrpSpPr>
+          <p:cNvPr id="352" name="Google Shape;352;p10"/>
+          <p:cNvGrpSpPr/>
+          <p:nvPr/>
+        </p:nvGrpSpPr>
+        <p:grpSpPr>
+          <a:xfrm>
+            <a:off x="285750" y="1318260"/>
+            <a:ext cx="2171700" cy="594340"/>
+            <a:chOff x="285750" y="1318260"/>
+            <a:chExt cx="2171700" cy="594340"/>
+          </a:xfrm>
+        </p:grpSpPr>
+        <p:sp>
+          <p:nvSpPr>
+            <p:cNvPr id="353" name="Google Shape;353;p10"/>
+            <p:cNvSpPr txBox="1"/>
+            <p:nvPr/>
+          </p:nvSpPr>
+          <p:spPr>
+            <a:xfrm>
+              <a:off x="285750" y="1318260"/>
+              <a:ext cx="1005840" cy="338455"/>
+            </a:xfrm>
+            <a:prstGeom prst="rect">
+              <a:avLst/>
+            </a:prstGeom>
+            <a:noFill/>
+            <a:ln>
+              <a:noFill/>
+            </a:ln>
+          </p:spPr>
+          <p:txBody>
+            <a:bodyPr wrap="square" lIns="91425" tIns="45700" rIns="91425" bIns="45700" anchor="t" anchorCtr="0">
+              <a:spAutoFit/>
+            </a:bodyPr>
+            <a:lstStyle/>
+            <a:p>
+              <a:pPr marL="0" marR="0" lvl="0" indent="0" algn="l" rtl="0">
+                <a:spcBef>
+                  <a:spcPts val="0"/>
+                </a:spcBef>
+                <a:spcAft>
+                  <a:spcPts val="0"/>
+                </a:spcAft>
+                <a:buClr>
+                  <a:schemeClr val="lt1"/>
+                </a:buClr>
+                <a:buSzPct val="25000"/>
+                <a:buFont typeface="Calibri"/>
+                <a:buNone/>
+                <a:defRPr/>
+              </a:pPr>
+              <a:r>
+                <a:rPr lang="ko-KR" sz="1600" b="1">
+                  <a:solidFill>
+                    <a:schemeClr val="lt1"/>
+                  </a:solidFill>
+                  <a:latin typeface="Calibri"/>
+                  <a:ea typeface="Calibri"/>
+                  <a:cs typeface="Calibri"/>
+                  <a:sym typeface="Calibri"/>
+                </a:rPr>
+                <a:t>화면이름</a:t>
+              </a:r>
+              <a:endParaRPr sz="1600" b="1">
+                <a:solidFill>
+                  <a:schemeClr val="lt1"/>
+                </a:solidFill>
+                <a:latin typeface="Calibri"/>
+                <a:ea typeface="Calibri"/>
+                <a:cs typeface="Calibri"/>
+                <a:sym typeface="Calibri"/>
+              </a:endParaRPr>
+            </a:p>
+          </p:txBody>
+        </p:sp>
+        <p:sp>
+          <p:nvSpPr>
+            <p:cNvPr id="354" name="Google Shape;354;p10"/>
+            <p:cNvSpPr txBox="1"/>
+            <p:nvPr/>
+          </p:nvSpPr>
+          <p:spPr>
+            <a:xfrm>
+              <a:off x="285750" y="1649730"/>
+              <a:ext cx="2171700" cy="262870"/>
+            </a:xfrm>
+            <a:prstGeom prst="rect">
+              <a:avLst/>
+            </a:prstGeom>
+            <a:noFill/>
+            <a:ln>
+              <a:noFill/>
+            </a:ln>
+          </p:spPr>
+          <p:txBody>
+            <a:bodyPr wrap="square" lIns="91425" tIns="45700" rIns="91425" bIns="45700" anchor="t" anchorCtr="0">
+              <a:spAutoFit/>
+            </a:bodyPr>
+            <a:lstStyle/>
+            <a:p>
+              <a:pPr marL="0" marR="0" lvl="0" indent="0" algn="l" rtl="0">
+                <a:spcBef>
+                  <a:spcPts val="0"/>
+                </a:spcBef>
+                <a:spcAft>
+                  <a:spcPts val="0"/>
+                </a:spcAft>
+                <a:buClr>
+                  <a:schemeClr val="lt1"/>
+                </a:buClr>
+                <a:buSzPct val="25000"/>
+                <a:buFont typeface="Calibri"/>
+                <a:buNone/>
+                <a:defRPr/>
+              </a:pPr>
+              <a:r>
+                <a:rPr lang="ko-KR" altLang="en-US" sz="1200">
+                  <a:solidFill>
+                    <a:schemeClr val="lt1"/>
+                  </a:solidFill>
+                  <a:latin typeface="Calibri"/>
+                  <a:ea typeface="Calibri"/>
+                  <a:cs typeface="Calibri"/>
+                  <a:sym typeface="Calibri"/>
+                </a:rPr>
+                <a:t>정서 리포트 화면</a:t>
+              </a:r>
+            </a:p>
+          </p:txBody>
+        </p:sp>
+      </p:grpSp>
+      <p:grpSp>
+        <p:nvGrpSpPr>
+          <p:cNvPr id="355" name="Google Shape;355;p10"/>
+          <p:cNvGrpSpPr/>
+          <p:nvPr/>
+        </p:nvGrpSpPr>
+        <p:grpSpPr>
+          <a:xfrm>
+            <a:off x="285750" y="2148205"/>
+            <a:ext cx="2171700" cy="607695"/>
+            <a:chOff x="285750" y="2386330"/>
+            <a:chExt cx="2171700" cy="607695"/>
+          </a:xfrm>
+        </p:grpSpPr>
+        <p:sp>
+          <p:nvSpPr>
+            <p:cNvPr id="356" name="Google Shape;356;p10"/>
+            <p:cNvSpPr txBox="1"/>
+            <p:nvPr/>
+          </p:nvSpPr>
+          <p:spPr>
+            <a:xfrm>
+              <a:off x="285750" y="2386330"/>
+              <a:ext cx="1898650" cy="338455"/>
+            </a:xfrm>
+            <a:prstGeom prst="rect">
+              <a:avLst/>
+            </a:prstGeom>
+            <a:noFill/>
+            <a:ln>
+              <a:noFill/>
+            </a:ln>
+          </p:spPr>
+          <p:txBody>
+            <a:bodyPr wrap="square" lIns="91425" tIns="45700" rIns="91425" bIns="45700" anchor="t" anchorCtr="0">
+              <a:spAutoFit/>
+            </a:bodyPr>
+            <a:lstStyle/>
+            <a:p>
+              <a:pPr marL="0" marR="0" lvl="0" indent="0" algn="l" rtl="0">
+                <a:spcBef>
+                  <a:spcPts val="0"/>
+                </a:spcBef>
+                <a:spcAft>
+                  <a:spcPts val="0"/>
+                </a:spcAft>
+                <a:buClr>
+                  <a:schemeClr val="lt1"/>
+                </a:buClr>
+                <a:buSzPct val="25000"/>
+                <a:buFont typeface="Calibri"/>
+                <a:buNone/>
+                <a:defRPr/>
+              </a:pPr>
+              <a:r>
+                <a:rPr lang="ko-KR" sz="1600" b="1">
+                  <a:solidFill>
+                    <a:schemeClr val="lt1"/>
+                  </a:solidFill>
+                  <a:latin typeface="Calibri"/>
+                  <a:ea typeface="Calibri"/>
+                  <a:cs typeface="Calibri"/>
+                  <a:sym typeface="Calibri"/>
+                </a:rPr>
+                <a:t>관련 유스케이스 ID</a:t>
+              </a:r>
+              <a:endParaRPr sz="1600" b="1">
+                <a:solidFill>
+                  <a:schemeClr val="lt1"/>
+                </a:solidFill>
+                <a:latin typeface="Calibri"/>
+                <a:ea typeface="Calibri"/>
+                <a:cs typeface="Calibri"/>
+                <a:sym typeface="Calibri"/>
+              </a:endParaRPr>
+            </a:p>
+          </p:txBody>
+        </p:sp>
+        <p:sp>
+          <p:nvSpPr>
+            <p:cNvPr id="357" name="Google Shape;357;p10"/>
+            <p:cNvSpPr txBox="1"/>
+            <p:nvPr/>
+          </p:nvSpPr>
+          <p:spPr>
+            <a:xfrm>
+              <a:off x="285750" y="2717165"/>
+              <a:ext cx="2171700" cy="274320"/>
+            </a:xfrm>
+            <a:prstGeom prst="rect">
+              <a:avLst/>
+            </a:prstGeom>
+            <a:noFill/>
+            <a:ln>
+              <a:noFill/>
+            </a:ln>
+          </p:spPr>
+          <p:txBody>
+            <a:bodyPr wrap="square" lIns="91425" tIns="45700" rIns="91425" bIns="45700" anchor="t" anchorCtr="0">
+              <a:spAutoFit/>
+            </a:bodyPr>
+            <a:lstStyle/>
+            <a:p>
+              <a:pPr marL="0" marR="0" lvl="0" indent="0" algn="l" rtl="0">
+                <a:spcBef>
+                  <a:spcPts val="0"/>
+                </a:spcBef>
+                <a:spcAft>
+                  <a:spcPts val="0"/>
+                </a:spcAft>
+                <a:buClr>
+                  <a:schemeClr val="lt1"/>
+                </a:buClr>
+                <a:buSzPct val="25000"/>
+                <a:buFont typeface="Calibri"/>
+                <a:buNone/>
+                <a:defRPr/>
+              </a:pPr>
+              <a:r>
+                <a:rPr lang="ko-KR" sz="1200">
+                  <a:solidFill>
+                    <a:schemeClr val="lt1"/>
+                  </a:solidFill>
+                  <a:latin typeface="Calibri"/>
+                  <a:ea typeface="Calibri"/>
+                  <a:cs typeface="Calibri"/>
+                  <a:sym typeface="Calibri"/>
+                </a:rPr>
+                <a:t>MLCM_500</a:t>
+              </a:r>
+              <a:r>
+                <a:rPr lang="en-US" altLang="ko-KR" sz="1200">
+                  <a:solidFill>
+                    <a:schemeClr val="lt1"/>
+                  </a:solidFill>
+                  <a:latin typeface="Calibri"/>
+                  <a:ea typeface="Calibri"/>
+                  <a:cs typeface="Calibri"/>
+                  <a:sym typeface="Calibri"/>
+                </a:rPr>
+                <a:t/>
+              </a:r>
+              <a:endParaRPr sz="1200">
+                <a:solidFill>
+                  <a:schemeClr val="lt1"/>
+                </a:solidFill>
+                <a:latin typeface="Calibri"/>
+                <a:ea typeface="Calibri"/>
+                <a:cs typeface="Calibri"/>
+                <a:sym typeface="Calibri"/>
+              </a:endParaRPr>
+            </a:p>
+          </p:txBody>
+        </p:sp>
+      </p:grpSp>
+      <p:grpSp>
+        <p:nvGrpSpPr>
+          <p:cNvPr id="358" name="Google Shape;358;p10"/>
+          <p:cNvGrpSpPr/>
+          <p:nvPr/>
+        </p:nvGrpSpPr>
+        <p:grpSpPr>
+          <a:xfrm>
+            <a:off x="285750" y="5814695"/>
+            <a:ext cx="2171700" cy="607695"/>
+            <a:chOff x="285750" y="5814695"/>
+            <a:chExt cx="2171700" cy="607695"/>
+          </a:xfrm>
+        </p:grpSpPr>
+        <p:sp>
+          <p:nvSpPr>
+            <p:cNvPr id="359" name="Google Shape;359;p10"/>
+            <p:cNvSpPr txBox="1"/>
+            <p:nvPr/>
+          </p:nvSpPr>
+          <p:spPr>
+            <a:xfrm>
+              <a:off x="285750" y="5814695"/>
+              <a:ext cx="800735" cy="338455"/>
+            </a:xfrm>
+            <a:prstGeom prst="rect">
+              <a:avLst/>
+            </a:prstGeom>
+            <a:noFill/>
+            <a:ln>
+              <a:noFill/>
+            </a:ln>
+          </p:spPr>
+          <p:txBody>
+            <a:bodyPr wrap="square" lIns="91425" tIns="45700" rIns="91425" bIns="45700" anchor="t" anchorCtr="0">
+              <a:spAutoFit/>
+            </a:bodyPr>
+            <a:lstStyle/>
+            <a:p>
+              <a:pPr marL="0" marR="0" lvl="0" indent="0" algn="l" rtl="0">
+                <a:spcBef>
+                  <a:spcPts val="0"/>
+                </a:spcBef>
+                <a:spcAft>
+                  <a:spcPts val="0"/>
+                </a:spcAft>
+                <a:buClr>
+                  <a:schemeClr val="lt1"/>
+                </a:buClr>
+                <a:buSzPct val="25000"/>
+                <a:buFont typeface="Calibri"/>
+                <a:buNone/>
+                <a:defRPr/>
+              </a:pPr>
+              <a:r>
+                <a:rPr lang="ko-KR" sz="1600" b="1">
+                  <a:solidFill>
+                    <a:schemeClr val="lt1"/>
+                  </a:solidFill>
+                  <a:latin typeface="Calibri"/>
+                  <a:ea typeface="Calibri"/>
+                  <a:cs typeface="Calibri"/>
+                  <a:sym typeface="Calibri"/>
+                </a:rPr>
+                <a:t>작성자</a:t>
+              </a:r>
+              <a:endParaRPr sz="1600" b="1">
+                <a:solidFill>
+                  <a:schemeClr val="lt1"/>
+                </a:solidFill>
+                <a:latin typeface="Calibri"/>
+                <a:ea typeface="Calibri"/>
+                <a:cs typeface="Calibri"/>
+                <a:sym typeface="Calibri"/>
+              </a:endParaRPr>
+            </a:p>
+          </p:txBody>
+        </p:sp>
+        <p:sp>
+          <p:nvSpPr>
+            <p:cNvPr id="360" name="Google Shape;360;p10"/>
+            <p:cNvSpPr txBox="1"/>
+            <p:nvPr/>
+          </p:nvSpPr>
+          <p:spPr>
+            <a:xfrm>
+              <a:off x="285750" y="6145530"/>
+              <a:ext cx="2171700" cy="276860"/>
+            </a:xfrm>
+            <a:prstGeom prst="rect">
+              <a:avLst/>
+            </a:prstGeom>
+            <a:noFill/>
+            <a:ln>
+              <a:noFill/>
+            </a:ln>
+          </p:spPr>
+          <p:txBody>
+            <a:bodyPr wrap="square" lIns="91425" tIns="45700" rIns="91425" bIns="45700" anchor="t" anchorCtr="0">
+              <a:spAutoFit/>
+            </a:bodyPr>
+            <a:lstStyle/>
+            <a:p>
+              <a:pPr marL="0" marR="0" lvl="0" indent="0" algn="l" rtl="0">
+                <a:spcBef>
+                  <a:spcPts val="0"/>
+                </a:spcBef>
+                <a:spcAft>
+                  <a:spcPts val="0"/>
+                </a:spcAft>
+                <a:buClr>
+                  <a:schemeClr val="lt1"/>
+                </a:buClr>
+                <a:buSzPct val="25000"/>
+                <a:buFont typeface="Calibri"/>
+                <a:buNone/>
+                <a:defRPr/>
+              </a:pPr>
+              <a:r>
+                <a:rPr lang="ko-KR" sz="1200">
+                  <a:solidFill>
+                    <a:schemeClr val="lt1"/>
+                  </a:solidFill>
+                  <a:latin typeface="Calibri"/>
+                  <a:ea typeface="Calibri"/>
+                  <a:cs typeface="Calibri"/>
+                  <a:sym typeface="Calibri"/>
+                </a:rPr>
+                <a:t>팀장 – 이응균 / 팀원 - 함은선</a:t>
+              </a:r>
+              <a:endParaRPr sz="1200">
+                <a:solidFill>
+                  <a:schemeClr val="lt1"/>
+                </a:solidFill>
+                <a:latin typeface="Calibri"/>
+                <a:ea typeface="Calibri"/>
+                <a:cs typeface="Calibri"/>
+                <a:sym typeface="Calibri"/>
+              </a:endParaRPr>
+            </a:p>
+          </p:txBody>
+        </p:sp>
+      </p:grpSp>
+      <p:sp>
+        <p:nvSpPr>
+          <p:cNvPr id="361" name="Google Shape;361;p10"/>
+          <p:cNvSpPr txBox="1"/>
+          <p:nvPr/>
+        </p:nvSpPr>
+        <p:spPr>
+          <a:xfrm>
+            <a:off x="285750" y="3316605"/>
+            <a:ext cx="2380615" cy="634345"/>
+          </a:xfrm>
+          <a:prstGeom prst="rect">
+            <a:avLst/>
+          </a:prstGeom>
+          <a:noFill/>
+          <a:ln>
+            <a:noFill/>
+          </a:ln>
+        </p:spPr>
+        <p:txBody>
+          <a:bodyPr wrap="square" lIns="91425" tIns="45700" rIns="91425" bIns="45700" anchor="t" anchorCtr="0">
+            <a:spAutoFit/>
+          </a:bodyPr>
+          <a:lstStyle/>
+          <a:p>
+            <a:pPr marL="0" marR="0" lvl="0" indent="0" algn="l" rtl="0">
+              <a:spcBef>
+                <a:spcPts val="0"/>
+              </a:spcBef>
+              <a:spcAft>
+                <a:spcPts val="0"/>
+              </a:spcAft>
+              <a:buClr>
+                <a:schemeClr val="lt1"/>
+              </a:buClr>
+              <a:buSzPct val="25000"/>
+              <a:buFont typeface="Calibri"/>
+              <a:buNone/>
+              <a:defRPr/>
+            </a:pPr>
+            <a:endParaRPr lang="ko-KR" altLang="en-US" sz="1200">
+              <a:solidFill>
+                <a:schemeClr val="lt1"/>
+              </a:solidFill>
+              <a:latin typeface="Calibri"/>
+              <a:ea typeface="Calibri"/>
+              <a:cs typeface="Calibri"/>
+              <a:sym typeface="Calibri"/>
+            </a:endParaRPr>
+          </a:p>
+          <a:p>
+            <a:pPr marL="0" marR="0" lvl="0" indent="0" algn="l" rtl="0">
+              <a:spcBef>
+                <a:spcPts val="0"/>
+              </a:spcBef>
+              <a:spcAft>
+                <a:spcPts val="0"/>
+              </a:spcAft>
+              <a:buClr>
+                <a:schemeClr val="lt1"/>
+              </a:buClr>
+              <a:buSzPct val="25000"/>
+              <a:buFont typeface="Calibri"/>
+              <a:buNone/>
+              <a:defRPr/>
+            </a:pPr>
+            <a:r>
+              <a:rPr lang="ko-KR" altLang="en-US" sz="1200">
+                <a:solidFill>
+                  <a:schemeClr val="lt1"/>
+                </a:solidFill>
+                <a:latin typeface="Calibri"/>
+                <a:ea typeface="Calibri"/>
+                <a:cs typeface="Calibri"/>
+                <a:sym typeface="Calibri"/>
+              </a:rPr>
+              <a:t>본인의 기간별 감정 위험도 스코어 추이와 라이프로그 변화를 대시보드로 조회하고 PDF로 내보내는 화면</a:t>
+            </a:r>
+          </a:p>
+        </p:txBody>
+      </p:sp>
+      <p:grpSp>
+        <p:nvGrpSpPr>
+          <p:cNvPr id="362" name="Google Shape;362;p10"/>
+          <p:cNvGrpSpPr/>
+          <p:nvPr/>
+        </p:nvGrpSpPr>
+        <p:grpSpPr>
+          <a:xfrm>
+            <a:off x="285750" y="4504055"/>
+            <a:ext cx="2372360" cy="599440"/>
+            <a:chOff x="285750" y="4504055"/>
+            <a:chExt cx="2372360" cy="599440"/>
+          </a:xfrm>
+        </p:grpSpPr>
+        <p:sp>
+          <p:nvSpPr>
+            <p:cNvPr id="363" name="Google Shape;363;p10"/>
+            <p:cNvSpPr txBox="1"/>
+            <p:nvPr/>
+          </p:nvSpPr>
+          <p:spPr>
+            <a:xfrm>
+              <a:off x="285750" y="4504055"/>
+              <a:ext cx="1098550" cy="338455"/>
+            </a:xfrm>
+            <a:prstGeom prst="rect">
+              <a:avLst/>
+            </a:prstGeom>
+            <a:noFill/>
+            <a:ln>
+              <a:noFill/>
+            </a:ln>
+          </p:spPr>
+          <p:txBody>
+            <a:bodyPr wrap="square" lIns="91425" tIns="45700" rIns="91425" bIns="45700" anchor="t" anchorCtr="0">
+              <a:spAutoFit/>
+            </a:bodyPr>
+            <a:lstStyle/>
+            <a:p>
+              <a:pPr marL="0" marR="0" lvl="0" indent="0" algn="l" rtl="0">
+                <a:spcBef>
+                  <a:spcPts val="0"/>
+                </a:spcBef>
+                <a:spcAft>
+                  <a:spcPts val="0"/>
+                </a:spcAft>
+                <a:buClr>
+                  <a:schemeClr val="lt1"/>
+                </a:buClr>
+                <a:buSzPct val="25000"/>
+                <a:buFont typeface="Calibri"/>
+                <a:buNone/>
+                <a:defRPr/>
+              </a:pPr>
+              <a:r>
+                <a:rPr lang="ko-KR" sz="1600" b="1">
+                  <a:solidFill>
+                    <a:schemeClr val="lt1"/>
+                  </a:solidFill>
+                  <a:latin typeface="Calibri"/>
+                  <a:ea typeface="Calibri"/>
+                  <a:cs typeface="Calibri"/>
+                  <a:sym typeface="Calibri"/>
+                </a:rPr>
+                <a:t>메뉴경로</a:t>
+              </a:r>
+              <a:endParaRPr sz="1600" b="1">
+                <a:solidFill>
+                  <a:schemeClr val="lt1"/>
+                </a:solidFill>
+                <a:latin typeface="Calibri"/>
+                <a:ea typeface="Calibri"/>
+                <a:cs typeface="Calibri"/>
+                <a:sym typeface="Calibri"/>
+              </a:endParaRPr>
+            </a:p>
+          </p:txBody>
+        </p:sp>
+        <p:sp>
+          <p:nvSpPr>
+            <p:cNvPr id="364" name="Google Shape;364;p10"/>
+            <p:cNvSpPr txBox="1"/>
+            <p:nvPr/>
+          </p:nvSpPr>
+          <p:spPr>
+            <a:xfrm>
+              <a:off x="285750" y="4835525"/>
+              <a:ext cx="2372360" cy="267970"/>
+            </a:xfrm>
+            <a:prstGeom prst="rect">
+              <a:avLst/>
+            </a:prstGeom>
+            <a:noFill/>
+            <a:ln>
+              <a:noFill/>
+            </a:ln>
+          </p:spPr>
+          <p:txBody>
+            <a:bodyPr wrap="square" lIns="91425" tIns="45700" rIns="91425" bIns="45700" anchor="t" anchorCtr="0">
+              <a:spAutoFit/>
+            </a:bodyPr>
+            <a:lstStyle/>
+            <a:p>
+              <a:pPr marL="0" marR="0" lvl="0" indent="0" algn="l" rtl="0">
+                <a:spcBef>
+                  <a:spcPts val="0"/>
+                </a:spcBef>
+                <a:spcAft>
+                  <a:spcPts val="0"/>
+                </a:spcAft>
+                <a:buClr>
+                  <a:schemeClr val="lt1"/>
+                </a:buClr>
+                <a:buSzPct val="25000"/>
+                <a:buFont typeface="Calibri"/>
+                <a:buNone/>
+                <a:defRPr/>
+              </a:pPr>
+              <a:r>
+                <a:rPr lang="ko-KR" sz="1200">
+                  <a:solidFill>
+                    <a:schemeClr val="lt1"/>
+                  </a:solidFill>
+                  <a:latin typeface="Calibri"/>
+                  <a:ea typeface="Calibri"/>
+                  <a:cs typeface="Calibri"/>
+                  <a:sym typeface="Calibri"/>
+                </a:rPr>
+                <a:t>라이프로그/정서 리포트</a:t>
+              </a:r>
+              <a:endParaRPr sz="1200">
+                <a:solidFill>
+                  <a:schemeClr val="lt1"/>
+                </a:solidFill>
+                <a:latin typeface="Calibri"/>
+                <a:ea typeface="Calibri"/>
+                <a:cs typeface="Calibri"/>
+                <a:sym typeface="Calibri"/>
+              </a:endParaRPr>
+            </a:p>
+          </p:txBody>
+        </p:sp>
+      </p:grpSp>
+      <p:sp>
+        <p:nvSpPr>
+          <p:cNvPr id="365" name="Google Shape;365;p10"/>
+          <p:cNvSpPr txBox="1"/>
+          <p:nvPr/>
+        </p:nvSpPr>
+        <p:spPr>
+          <a:xfrm>
+            <a:off x="285750" y="2981960"/>
+            <a:ext cx="1005840" cy="338455"/>
+          </a:xfrm>
+          <a:prstGeom prst="rect">
+            <a:avLst/>
+          </a:prstGeom>
+          <a:noFill/>
+          <a:ln>
+            <a:noFill/>
+          </a:ln>
+        </p:spPr>
+        <p:txBody>
+          <a:bodyPr wrap="square" lIns="91425" tIns="45700" rIns="91425" bIns="45700" anchor="t" anchorCtr="0">
+            <a:spAutoFit/>
+          </a:bodyPr>
+          <a:lstStyle/>
+          <a:p>
+            <a:pPr marL="0" marR="0" lvl="0" indent="0" algn="l" rtl="0">
+              <a:spcBef>
+                <a:spcPts val="0"/>
+              </a:spcBef>
+              <a:spcAft>
+                <a:spcPts val="0"/>
+              </a:spcAft>
+              <a:buClr>
+                <a:schemeClr val="lt1"/>
+              </a:buClr>
+              <a:buSzPct val="25000"/>
+              <a:buFont typeface="Calibri"/>
+              <a:buNone/>
+              <a:defRPr/>
+            </a:pPr>
+            <a:r>
+              <a:rPr lang="ko-KR" sz="1600" b="1">
+                <a:solidFill>
+                  <a:schemeClr val="lt1"/>
+                </a:solidFill>
+                <a:latin typeface="Calibri"/>
+                <a:ea typeface="Calibri"/>
+                <a:cs typeface="Calibri"/>
+                <a:sym typeface="Calibri"/>
+              </a:rPr>
+              <a:t>화면개요</a:t>
+            </a:r>
+            <a:endParaRPr sz="1600" b="1">
+              <a:solidFill>
+                <a:schemeClr val="lt1"/>
+              </a:solidFill>
+              <a:latin typeface="Calibri"/>
+              <a:ea typeface="Calibri"/>
+              <a:cs typeface="Calibri"/>
+              <a:sym typeface="Calibri"/>
+            </a:endParaRPr>
+          </a:p>
+        </p:txBody>
+      </p:sp>
+      <p:pic>
+        <p:nvPicPr>
+          <p:cNvPr id="370" name="그림 369"/>
+          <p:cNvPicPr>
+            <a:picLocks noChangeAspect="1"/>
+          </p:cNvPicPr>
+          <p:nvPr/>
+        </p:nvPicPr>
+        <p:blipFill rotWithShape="1">
+          <a:blip r:embed="rId3"/>
+          <a:stretch>
+            <a:fillRect/>
+          </a:stretch>
+        </p:blipFill>
+        <p:spPr>
+          <a:xfrm>
+            <a:off x="5135035" y="0"/>
+            <a:ext cx="2379765" cy="5150055"/>
+          </a:xfrm>
+          <a:prstGeom prst="rect">
+            <a:avLst/>
+          </a:prstGeom>
+        </p:spPr>
+      </p:pic>
+    </p:spTree>
+    <p:extLst>
+      <p:ext uri="{BB962C8B-B14F-4D97-AF65-F5344CB8AC3E}">
+        <p14:creationId xmlns:p14="http://schemas.microsoft.com/office/powerpoint/2010/main" val="2759204891"/>
+      </p:ext>
+    </p:extLst>
+  </p:cSld>
+  <p:clrMapOvr>
+    <a:masterClrMapping/>
+  </p:clrMapOvr>
+</p:sld>
+</file>
+
+<file path=ppt/slides/slide18.xml><?xml version="1.0" encoding="utf-8"?>
+<p:sld xmlns:a="http://schemas.openxmlformats.org/drawingml/2006/main" xmlns:r="http://schemas.openxmlformats.org/officeDocument/2006/relationships" xmlns:p="http://schemas.openxmlformats.org/presentationml/2006/main">
+  <p:cSld>
+    <p:bg>
+      <p:bgPr>
+        <a:solidFill>
+          <a:srgbClr val="C0CDEF"/>
+        </a:solidFill>
+        <a:effectLst/>
+      </p:bgPr>
+    </p:bg>
+    <p:spTree>
+      <p:nvGrpSpPr>
+        <p:cNvPr id="1" name=""/>
+        <p:cNvGrpSpPr/>
+        <p:nvPr/>
+      </p:nvGrpSpPr>
+      <p:grpSpPr>
+        <a:xfrm>
+          <a:off x="0" y="0"/>
+          <a:ext cx="0" cy="0"/>
+          <a:chOff x="0" y="0"/>
+          <a:chExt cx="0" cy="0"/>
+        </a:xfrm>
+      </p:grpSpPr>
+      <p:sp>
+        <p:nvSpPr>
+          <p:cNvPr id="344" name="Google Shape;344;p10"/>
+          <p:cNvSpPr/>
+          <p:nvPr/>
+        </p:nvSpPr>
+        <p:spPr>
+          <a:xfrm>
+            <a:off x="0" y="0"/>
+            <a:ext cx="2743835" cy="6858635"/>
+          </a:xfrm>
+          <a:prstGeom prst="rect">
+            <a:avLst/>
+          </a:prstGeom>
+          <a:solidFill>
+            <a:srgbClr val="0090D0"/>
+          </a:solidFill>
+          <a:ln>
+            <a:noFill/>
+          </a:ln>
+        </p:spPr>
+        <p:txBody>
+          <a:bodyPr wrap="square" lIns="91425" tIns="45700" rIns="91425" bIns="45700" anchor="ctr" anchorCtr="0">
+            <a:noAutofit/>
+          </a:bodyPr>
+          <a:lstStyle/>
+          <a:p>
+            <a:pPr marL="0" marR="0" lvl="0" indent="0" algn="ctr" rtl="0">
+              <a:spcBef>
+                <a:spcPts val="0"/>
+              </a:spcBef>
+              <a:spcAft>
+                <a:spcPts val="0"/>
+              </a:spcAft>
+              <a:buClr>
+                <a:schemeClr val="lt1"/>
+              </a:buClr>
+              <a:buSzPct val="25000"/>
+              <a:buFont typeface="Calibri"/>
+              <a:buNone/>
+              <a:defRPr/>
+            </a:pPr>
+            <a:endParaRPr sz="1600">
+              <a:solidFill>
+                <a:schemeClr val="lt1"/>
+              </a:solidFill>
+              <a:latin typeface="Calibri"/>
+              <a:ea typeface="Calibri"/>
+              <a:cs typeface="Calibri"/>
+              <a:sym typeface="Calibri"/>
+            </a:endParaRPr>
+          </a:p>
+        </p:txBody>
+      </p:sp>
+      <p:sp>
+        <p:nvSpPr>
+          <p:cNvPr id="345" name="Google Shape;345;p10"/>
+          <p:cNvSpPr/>
+          <p:nvPr/>
+        </p:nvSpPr>
+        <p:spPr>
+          <a:xfrm>
+            <a:off x="2743200" y="5172075"/>
+            <a:ext cx="7163435" cy="1686560"/>
+          </a:xfrm>
+          <a:prstGeom prst="rect">
+            <a:avLst/>
+          </a:prstGeom>
+          <a:solidFill>
+            <a:srgbClr val="F2F2F2"/>
+          </a:solidFill>
+          <a:ln>
+            <a:noFill/>
+          </a:ln>
+        </p:spPr>
+        <p:txBody>
+          <a:bodyPr wrap="square" lIns="91425" tIns="45700" rIns="91425" bIns="45700" anchor="ctr" anchorCtr="0">
+            <a:noAutofit/>
+          </a:bodyPr>
+          <a:lstStyle/>
+          <a:p>
+            <a:pPr marL="0" marR="0" lvl="0" indent="0" algn="ctr" rtl="0">
+              <a:spcBef>
+                <a:spcPts val="0"/>
+              </a:spcBef>
+              <a:spcAft>
+                <a:spcPts val="0"/>
+              </a:spcAft>
+              <a:buClr>
+                <a:schemeClr val="lt1"/>
+              </a:buClr>
+              <a:buSzPct val="25000"/>
+              <a:buFont typeface="Calibri"/>
+              <a:buNone/>
+              <a:defRPr/>
+            </a:pPr>
+            <a:endParaRPr sz="1600">
+              <a:solidFill>
+                <a:schemeClr val="lt1"/>
+              </a:solidFill>
+              <a:latin typeface="Calibri"/>
+              <a:ea typeface="Calibri"/>
+              <a:cs typeface="Calibri"/>
+              <a:sym typeface="Calibri"/>
+            </a:endParaRPr>
+          </a:p>
+        </p:txBody>
+      </p:sp>
+      <p:sp>
+        <p:nvSpPr>
+          <p:cNvPr id="346" name="Google Shape;346;p10"/>
+          <p:cNvSpPr txBox="1"/>
+          <p:nvPr/>
+        </p:nvSpPr>
+        <p:spPr>
+          <a:xfrm>
+            <a:off x="3020060" y="5412740"/>
+            <a:ext cx="1005840" cy="339090"/>
+          </a:xfrm>
+          <a:prstGeom prst="rect">
+            <a:avLst/>
+          </a:prstGeom>
+          <a:noFill/>
+          <a:ln>
+            <a:noFill/>
+          </a:ln>
+        </p:spPr>
+        <p:txBody>
+          <a:bodyPr wrap="square" lIns="91425" tIns="45700" rIns="91425" bIns="45700" anchor="t" anchorCtr="0">
+            <a:spAutoFit/>
+          </a:bodyPr>
+          <a:lstStyle/>
+          <a:p>
+            <a:pPr marL="0" marR="0" lvl="0" indent="0" algn="l" rtl="0">
+              <a:spcBef>
+                <a:spcPts val="0"/>
+              </a:spcBef>
+              <a:spcAft>
+                <a:spcPts val="0"/>
+              </a:spcAft>
+              <a:buClr>
+                <a:schemeClr val="dk1"/>
+              </a:buClr>
+              <a:buSzPct val="25000"/>
+              <a:buFont typeface="Calibri"/>
+              <a:buNone/>
+              <a:defRPr/>
+            </a:pPr>
+            <a:r>
+              <a:rPr lang="ko-KR" sz="1600" b="1">
+                <a:solidFill>
+                  <a:schemeClr val="dk1"/>
+                </a:solidFill>
+                <a:latin typeface="맑은 고딕"/>
+                <a:ea typeface="맑은 고딕"/>
+                <a:cs typeface="Calibri"/>
+                <a:sym typeface="Calibri"/>
+              </a:rPr>
+              <a:t>화면설명</a:t>
+            </a:r>
+            <a:endParaRPr sz="1600" b="1">
+              <a:solidFill>
+                <a:schemeClr val="dk1"/>
+              </a:solidFill>
+              <a:latin typeface="맑은 고딕"/>
+              <a:ea typeface="맑은 고딕"/>
+              <a:cs typeface="Calibri"/>
+              <a:sym typeface="Calibri"/>
+            </a:endParaRPr>
+          </a:p>
+        </p:txBody>
+      </p:sp>
+      <p:sp>
+        <p:nvSpPr>
+          <p:cNvPr id="347" name="Google Shape;347;p10"/>
+          <p:cNvSpPr txBox="1"/>
+          <p:nvPr/>
+        </p:nvSpPr>
+        <p:spPr>
+          <a:xfrm>
+            <a:off x="3020060" y="5781675"/>
+            <a:ext cx="6688455" cy="998219"/>
+          </a:xfrm>
+          <a:prstGeom prst="rect">
+            <a:avLst/>
+          </a:prstGeom>
+          <a:noFill/>
+          <a:ln>
+            <a:noFill/>
+          </a:ln>
+        </p:spPr>
+        <p:txBody>
+          <a:bodyPr wrap="square" lIns="91425" tIns="45700" rIns="91425" bIns="45700" anchor="t" anchorCtr="0">
+            <a:spAutoFit/>
+          </a:bodyPr>
+          <a:lstStyle/>
+          <a:p>
+            <a:pPr marL="0" marR="0" lvl="0" indent="0" algn="l" rtl="0">
+              <a:spcBef>
+                <a:spcPts val="0"/>
+              </a:spcBef>
+              <a:spcAft>
+                <a:spcPts val="0"/>
+              </a:spcAft>
+              <a:buClr>
+                <a:schemeClr val="dk1"/>
+              </a:buClr>
+              <a:buSzPct val="25000"/>
+              <a:buFont typeface="Calibri"/>
+              <a:buNone/>
+              <a:defRPr/>
+            </a:pPr>
+            <a:r>
+              <a:rPr lang="ko-KR" sz="1200">
+                <a:solidFill>
+                  <a:schemeClr val="dk1"/>
+                </a:solidFill>
+                <a:latin typeface="맑은 고딕"/>
+                <a:cs typeface="Calibri"/>
+                <a:sym typeface="Calibri"/>
+              </a:rPr>
+              <a:t>❶</a:t>
+            </a:r>
+            <a:r>
+              <a:rPr lang="ko-KR" sz="1200">
+                <a:solidFill>
+                  <a:schemeClr val="dk1"/>
+                </a:solidFill>
+                <a:latin typeface="맑은 고딕"/>
+                <a:ea typeface="맑은 고딕"/>
+                <a:cs typeface="Calibri"/>
+                <a:sym typeface="Calibri"/>
+              </a:rPr>
+              <a:t> 계정 정보: 이메일, 이름, 가입일 표시</a:t>
+            </a:r>
+          </a:p>
+          <a:p>
+            <a:pPr marL="0" marR="0" lvl="0" indent="0" algn="l" rtl="0">
+              <a:spcBef>
+                <a:spcPts val="0"/>
+              </a:spcBef>
+              <a:spcAft>
+                <a:spcPts val="0"/>
+              </a:spcAft>
+              <a:buClr>
+                <a:schemeClr val="dk1"/>
+              </a:buClr>
+              <a:buSzPct val="25000"/>
+              <a:buFont typeface="Calibri"/>
+              <a:buNone/>
+              <a:defRPr/>
+            </a:pPr>
+            <a:r>
+              <a:rPr lang="ko-KR" sz="1200">
+                <a:solidFill>
+                  <a:schemeClr val="dk1"/>
+                </a:solidFill>
+                <a:latin typeface="맑은 고딕"/>
+                <a:cs typeface="Calibri"/>
+                <a:sym typeface="Calibri"/>
+              </a:rPr>
+              <a:t>❷</a:t>
+            </a:r>
+            <a:r>
+              <a:rPr lang="ko-KR" sz="1200">
+                <a:solidFill>
+                  <a:schemeClr val="dk1"/>
+                </a:solidFill>
+                <a:latin typeface="맑은 고딕"/>
+                <a:ea typeface="맑은 고딕"/>
+                <a:cs typeface="Calibri"/>
+                <a:sym typeface="Calibri"/>
+              </a:rPr>
+              <a:t> 비밀번호 변경: 현재 비밀번호 확인 후 변경</a:t>
+            </a:r>
+          </a:p>
+          <a:p>
+            <a:pPr marL="0" marR="0" lvl="0" indent="0" algn="l" rtl="0">
+              <a:spcBef>
+                <a:spcPts val="0"/>
+              </a:spcBef>
+              <a:spcAft>
+                <a:spcPts val="0"/>
+              </a:spcAft>
+              <a:buClr>
+                <a:schemeClr val="dk1"/>
+              </a:buClr>
+              <a:buSzPct val="25000"/>
+              <a:buFont typeface="Calibri"/>
+              <a:buNone/>
+              <a:defRPr/>
+            </a:pPr>
+            <a:r>
+              <a:rPr lang="ko-KR" sz="1200">
+                <a:solidFill>
+                  <a:schemeClr val="dk1"/>
+                </a:solidFill>
+                <a:latin typeface="맑은 고딕"/>
+                <a:cs typeface="Calibri"/>
+                <a:sym typeface="Calibri"/>
+              </a:rPr>
+              <a:t>❸</a:t>
+            </a:r>
+            <a:r>
+              <a:rPr lang="ko-KR" sz="1200">
+                <a:solidFill>
+                  <a:schemeClr val="dk1"/>
+                </a:solidFill>
+                <a:latin typeface="맑은 고딕"/>
+                <a:ea typeface="맑은 고딕"/>
+                <a:cs typeface="Calibri"/>
+                <a:sym typeface="Calibri"/>
+              </a:rPr>
+              <a:t> 회원 탈퇴: 탈퇴 절차 시작. 비밀번호 재입력 확인</a:t>
+            </a:r>
+          </a:p>
+          <a:p>
+            <a:pPr marL="0" marR="0" lvl="0" indent="0" algn="l" rtl="0">
+              <a:spcBef>
+                <a:spcPts val="0"/>
+              </a:spcBef>
+              <a:spcAft>
+                <a:spcPts val="0"/>
+              </a:spcAft>
+              <a:buClr>
+                <a:schemeClr val="dk1"/>
+              </a:buClr>
+              <a:buSzPct val="25000"/>
+              <a:buFont typeface="Calibri"/>
+              <a:buNone/>
+              <a:defRPr/>
+            </a:pPr>
+            <a:r>
+              <a:rPr lang="ko-KR" sz="1200">
+                <a:solidFill>
+                  <a:schemeClr val="dk1"/>
+                </a:solidFill>
+                <a:latin typeface="맑은 고딕"/>
+                <a:cs typeface="Calibri"/>
+                <a:sym typeface="Calibri"/>
+              </a:rPr>
+              <a:t>❹</a:t>
+            </a:r>
+            <a:r>
+              <a:rPr lang="ko-KR" sz="1200">
+                <a:solidFill>
+                  <a:schemeClr val="dk1"/>
+                </a:solidFill>
+                <a:latin typeface="맑은 고딕"/>
+                <a:ea typeface="맑은 고딕"/>
+                <a:cs typeface="Calibri"/>
+                <a:sym typeface="Calibri"/>
+              </a:rPr>
+              <a:t> 삭제 범위 안내: 라이프로그·체성분·대화·분석·기기</a:t>
+            </a:r>
+          </a:p>
+          <a:p>
+            <a:pPr marL="0" marR="0" lvl="0" indent="0" algn="l" rtl="0">
+              <a:spcBef>
+                <a:spcPts val="0"/>
+              </a:spcBef>
+              <a:spcAft>
+                <a:spcPts val="0"/>
+              </a:spcAft>
+              <a:buClr>
+                <a:schemeClr val="dk1"/>
+              </a:buClr>
+              <a:buSzPct val="25000"/>
+              <a:buFont typeface="Calibri"/>
+              <a:buNone/>
+              <a:defRPr/>
+            </a:pPr>
+            <a:r>
+              <a:rPr lang="ko-KR" sz="1200">
+                <a:solidFill>
+                  <a:schemeClr val="dk1"/>
+                </a:solidFill>
+                <a:latin typeface="맑은 고딕"/>
+                <a:cs typeface="Calibri"/>
+                <a:sym typeface="Calibri"/>
+              </a:rPr>
+              <a:t>❺</a:t>
+            </a:r>
+            <a:r>
+              <a:rPr lang="ko-KR" sz="1200">
+                <a:solidFill>
+                  <a:schemeClr val="dk1"/>
+                </a:solidFill>
+                <a:latin typeface="맑은 고딕"/>
+                <a:ea typeface="맑은 고딕"/>
+                <a:cs typeface="Calibri"/>
+                <a:sym typeface="Calibri"/>
+              </a:rPr>
+              <a:t> 최종 확인 후 탈퇴 처리, MAIN_LOGIN_01 복귀</a:t>
+            </a:r>
+            <a:endParaRPr sz="1200">
+              <a:solidFill>
+                <a:schemeClr val="dk1"/>
+              </a:solidFill>
+              <a:latin typeface="맑은 고딕"/>
+              <a:ea typeface="맑은 고딕"/>
+              <a:cs typeface="Calibri"/>
+              <a:sym typeface="Calibri"/>
+            </a:endParaRPr>
+          </a:p>
+        </p:txBody>
+      </p:sp>
+      <p:sp>
+        <p:nvSpPr>
+          <p:cNvPr id="348" name="Google Shape;348;p10"/>
+          <p:cNvSpPr/>
+          <p:nvPr/>
+        </p:nvSpPr>
+        <p:spPr>
+          <a:xfrm>
+            <a:off x="0" y="0"/>
+            <a:ext cx="2743835" cy="6858635"/>
+          </a:xfrm>
+          <a:prstGeom prst="rect">
+            <a:avLst/>
+          </a:prstGeom>
+          <a:solidFill>
+            <a:srgbClr val="A5A5A5"/>
+          </a:solidFill>
+          <a:ln>
+            <a:noFill/>
+          </a:ln>
+        </p:spPr>
+        <p:txBody>
+          <a:bodyPr wrap="square" lIns="91425" tIns="45700" rIns="91425" bIns="45700" anchor="ctr" anchorCtr="0">
+            <a:noAutofit/>
+          </a:bodyPr>
+          <a:lstStyle/>
+          <a:p>
+            <a:pPr marL="0" marR="0" lvl="0" indent="0" algn="ctr" rtl="0">
+              <a:spcBef>
+                <a:spcPts val="0"/>
+              </a:spcBef>
+              <a:spcAft>
+                <a:spcPts val="0"/>
+              </a:spcAft>
+              <a:buClr>
+                <a:schemeClr val="lt1"/>
+              </a:buClr>
+              <a:buSzPct val="25000"/>
+              <a:buFont typeface="Calibri"/>
+              <a:buNone/>
+              <a:defRPr/>
+            </a:pPr>
+            <a:endParaRPr sz="1600">
+              <a:solidFill>
+                <a:schemeClr val="lt1"/>
+              </a:solidFill>
+              <a:latin typeface="Calibri"/>
+              <a:ea typeface="Calibri"/>
+              <a:cs typeface="Calibri"/>
+              <a:sym typeface="Calibri"/>
+            </a:endParaRPr>
+          </a:p>
+        </p:txBody>
+      </p:sp>
+      <p:grpSp>
+        <p:nvGrpSpPr>
+          <p:cNvPr id="349" name="Google Shape;349;p10"/>
+          <p:cNvGrpSpPr/>
+          <p:nvPr/>
+        </p:nvGrpSpPr>
+        <p:grpSpPr>
+          <a:xfrm>
+            <a:off x="285750" y="435610"/>
+            <a:ext cx="2171700" cy="607695"/>
+            <a:chOff x="285750" y="435610"/>
+            <a:chExt cx="2171700" cy="607695"/>
+          </a:xfrm>
+        </p:grpSpPr>
+        <p:sp>
+          <p:nvSpPr>
+            <p:cNvPr id="350" name="Google Shape;350;p10"/>
+            <p:cNvSpPr txBox="1"/>
+            <p:nvPr/>
+          </p:nvSpPr>
+          <p:spPr>
+            <a:xfrm>
+              <a:off x="285750" y="435610"/>
+              <a:ext cx="873125" cy="338455"/>
+            </a:xfrm>
+            <a:prstGeom prst="rect">
+              <a:avLst/>
+            </a:prstGeom>
+            <a:noFill/>
+            <a:ln>
+              <a:noFill/>
+            </a:ln>
+          </p:spPr>
+          <p:txBody>
+            <a:bodyPr wrap="square" lIns="91425" tIns="45700" rIns="91425" bIns="45700" anchor="t" anchorCtr="0">
+              <a:spAutoFit/>
+            </a:bodyPr>
+            <a:lstStyle/>
+            <a:p>
+              <a:pPr marL="0" marR="0" lvl="0" indent="0" algn="l" rtl="0">
+                <a:spcBef>
+                  <a:spcPts val="0"/>
+                </a:spcBef>
+                <a:spcAft>
+                  <a:spcPts val="0"/>
+                </a:spcAft>
+                <a:buClr>
+                  <a:schemeClr val="lt1"/>
+                </a:buClr>
+                <a:buSzPct val="25000"/>
+                <a:buFont typeface="Calibri"/>
+                <a:buNone/>
+                <a:defRPr/>
+              </a:pPr>
+              <a:r>
+                <a:rPr lang="ko-KR" sz="1600" b="1">
+                  <a:solidFill>
+                    <a:schemeClr val="lt1"/>
+                  </a:solidFill>
+                  <a:latin typeface="Calibri"/>
+                  <a:ea typeface="Calibri"/>
+                  <a:cs typeface="Calibri"/>
+                  <a:sym typeface="Calibri"/>
+                </a:rPr>
+                <a:t>화면 ID </a:t>
+              </a:r>
+              <a:endParaRPr sz="1600" b="1">
+                <a:solidFill>
+                  <a:schemeClr val="lt1"/>
+                </a:solidFill>
+                <a:latin typeface="Calibri"/>
+                <a:ea typeface="Calibri"/>
+                <a:cs typeface="Calibri"/>
+                <a:sym typeface="Calibri"/>
+              </a:endParaRPr>
+            </a:p>
+          </p:txBody>
+        </p:sp>
+        <p:sp>
+          <p:nvSpPr>
+            <p:cNvPr id="351" name="Google Shape;351;p10"/>
+            <p:cNvSpPr txBox="1"/>
+            <p:nvPr/>
+          </p:nvSpPr>
+          <p:spPr>
+            <a:xfrm>
+              <a:off x="285750" y="766445"/>
+              <a:ext cx="2171700" cy="276860"/>
+            </a:xfrm>
+            <a:prstGeom prst="rect">
+              <a:avLst/>
+            </a:prstGeom>
+            <a:noFill/>
+            <a:ln>
+              <a:noFill/>
+            </a:ln>
+          </p:spPr>
+          <p:txBody>
+            <a:bodyPr wrap="square" lIns="91425" tIns="45700" rIns="91425" bIns="45700" anchor="t" anchorCtr="0">
+              <a:spAutoFit/>
+            </a:bodyPr>
+            <a:lstStyle/>
+            <a:p>
+              <a:pPr marL="0" marR="0" lvl="0" indent="0" algn="l" rtl="0">
+                <a:spcBef>
+                  <a:spcPts val="0"/>
+                </a:spcBef>
+                <a:spcAft>
+                  <a:spcPts val="0"/>
+                </a:spcAft>
+                <a:buClr>
+                  <a:schemeClr val="lt1"/>
+                </a:buClr>
+                <a:buSzPct val="25000"/>
+                <a:buFont typeface="Calibri"/>
+                <a:buNone/>
+                <a:defRPr/>
+              </a:pPr>
+              <a:r>
+                <a:rPr lang="ko-KR" sz="1200">
+                  <a:solidFill>
+                    <a:schemeClr val="lt1"/>
+                  </a:solidFill>
+                  <a:latin typeface="Calibri"/>
+                  <a:ea typeface="Calibri"/>
+                  <a:cs typeface="Calibri"/>
+                  <a:sym typeface="Calibri"/>
+                </a:rPr>
+                <a:t>MAIN_SETTING_02</a:t>
+              </a:r>
+              <a:r>
+                <a:rPr lang="en-US" altLang="ko-KR" sz="1200">
+                  <a:solidFill>
+                    <a:schemeClr val="lt1"/>
+                  </a:solidFill>
+                  <a:latin typeface="Calibri"/>
+                  <a:ea typeface="Calibri"/>
+                  <a:cs typeface="Calibri"/>
+                  <a:sym typeface="Calibri"/>
+                </a:rPr>
+                <a:t/>
+              </a:r>
+              <a:r>
+                <a:rPr lang="ko-KR" sz="1200">
+                  <a:solidFill>
+                    <a:schemeClr val="lt1"/>
+                  </a:solidFill>
+                  <a:latin typeface="Calibri"/>
+                  <a:ea typeface="Calibri"/>
+                  <a:cs typeface="Calibri"/>
+                  <a:sym typeface="Calibri"/>
+                </a:rPr>
+                <a:t/>
+              </a:r>
+            </a:p>
+          </p:txBody>
+        </p:sp>
+      </p:grpSp>
+      <p:grpSp>
+        <p:nvGrpSpPr>
+          <p:cNvPr id="352" name="Google Shape;352;p10"/>
+          <p:cNvGrpSpPr/>
+          <p:nvPr/>
+        </p:nvGrpSpPr>
+        <p:grpSpPr>
+          <a:xfrm>
+            <a:off x="285750" y="1318260"/>
+            <a:ext cx="2171700" cy="594340"/>
+            <a:chOff x="285750" y="1318260"/>
+            <a:chExt cx="2171700" cy="594340"/>
+          </a:xfrm>
+        </p:grpSpPr>
+        <p:sp>
+          <p:nvSpPr>
+            <p:cNvPr id="353" name="Google Shape;353;p10"/>
+            <p:cNvSpPr txBox="1"/>
+            <p:nvPr/>
+          </p:nvSpPr>
+          <p:spPr>
+            <a:xfrm>
+              <a:off x="285750" y="1318260"/>
+              <a:ext cx="1005840" cy="338455"/>
+            </a:xfrm>
+            <a:prstGeom prst="rect">
+              <a:avLst/>
+            </a:prstGeom>
+            <a:noFill/>
+            <a:ln>
+              <a:noFill/>
+            </a:ln>
+          </p:spPr>
+          <p:txBody>
+            <a:bodyPr wrap="square" lIns="91425" tIns="45700" rIns="91425" bIns="45700" anchor="t" anchorCtr="0">
+              <a:spAutoFit/>
+            </a:bodyPr>
+            <a:lstStyle/>
+            <a:p>
+              <a:pPr marL="0" marR="0" lvl="0" indent="0" algn="l" rtl="0">
+                <a:spcBef>
+                  <a:spcPts val="0"/>
+                </a:spcBef>
+                <a:spcAft>
+                  <a:spcPts val="0"/>
+                </a:spcAft>
+                <a:buClr>
+                  <a:schemeClr val="lt1"/>
+                </a:buClr>
+                <a:buSzPct val="25000"/>
+                <a:buFont typeface="Calibri"/>
+                <a:buNone/>
+                <a:defRPr/>
+              </a:pPr>
+              <a:r>
+                <a:rPr lang="ko-KR" sz="1600" b="1">
+                  <a:solidFill>
+                    <a:schemeClr val="lt1"/>
+                  </a:solidFill>
+                  <a:latin typeface="Calibri"/>
+                  <a:ea typeface="Calibri"/>
+                  <a:cs typeface="Calibri"/>
+                  <a:sym typeface="Calibri"/>
+                </a:rPr>
+                <a:t>화면이름</a:t>
+              </a:r>
+              <a:endParaRPr sz="1600" b="1">
+                <a:solidFill>
+                  <a:schemeClr val="lt1"/>
+                </a:solidFill>
+                <a:latin typeface="Calibri"/>
+                <a:ea typeface="Calibri"/>
+                <a:cs typeface="Calibri"/>
+                <a:sym typeface="Calibri"/>
+              </a:endParaRPr>
+            </a:p>
+          </p:txBody>
+        </p:sp>
+        <p:sp>
+          <p:nvSpPr>
+            <p:cNvPr id="354" name="Google Shape;354;p10"/>
+            <p:cNvSpPr txBox="1"/>
+            <p:nvPr/>
+          </p:nvSpPr>
+          <p:spPr>
+            <a:xfrm>
+              <a:off x="285750" y="1649730"/>
+              <a:ext cx="2171700" cy="262870"/>
+            </a:xfrm>
+            <a:prstGeom prst="rect">
+              <a:avLst/>
+            </a:prstGeom>
+            <a:noFill/>
+            <a:ln>
+              <a:noFill/>
+            </a:ln>
+          </p:spPr>
+          <p:txBody>
+            <a:bodyPr wrap="square" lIns="91425" tIns="45700" rIns="91425" bIns="45700" anchor="t" anchorCtr="0">
+              <a:spAutoFit/>
+            </a:bodyPr>
+            <a:lstStyle/>
+            <a:p>
+              <a:pPr marL="0" marR="0" lvl="0" indent="0" algn="l" rtl="0">
+                <a:spcBef>
+                  <a:spcPts val="0"/>
+                </a:spcBef>
+                <a:spcAft>
+                  <a:spcPts val="0"/>
+                </a:spcAft>
+                <a:buClr>
+                  <a:schemeClr val="lt1"/>
+                </a:buClr>
+                <a:buSzPct val="25000"/>
+                <a:buFont typeface="Calibri"/>
+                <a:buNone/>
+                <a:defRPr/>
+              </a:pPr>
+              <a:r>
+                <a:rPr lang="ko-KR" altLang="en-US" sz="1200">
+                  <a:solidFill>
+                    <a:schemeClr val="lt1"/>
+                  </a:solidFill>
+                  <a:latin typeface="Calibri"/>
+                  <a:ea typeface="Calibri"/>
+                  <a:cs typeface="Calibri"/>
+                  <a:sym typeface="Calibri"/>
+                </a:rPr>
+                <a:t>계정 관리 화면</a:t>
+              </a:r>
+            </a:p>
+          </p:txBody>
+        </p:sp>
+      </p:grpSp>
+      <p:grpSp>
+        <p:nvGrpSpPr>
+          <p:cNvPr id="355" name="Google Shape;355;p10"/>
+          <p:cNvGrpSpPr/>
+          <p:nvPr/>
+        </p:nvGrpSpPr>
+        <p:grpSpPr>
+          <a:xfrm>
+            <a:off x="285750" y="2148205"/>
+            <a:ext cx="2171700" cy="607695"/>
+            <a:chOff x="285750" y="2386330"/>
+            <a:chExt cx="2171700" cy="607695"/>
+          </a:xfrm>
+        </p:grpSpPr>
+        <p:sp>
+          <p:nvSpPr>
+            <p:cNvPr id="356" name="Google Shape;356;p10"/>
+            <p:cNvSpPr txBox="1"/>
+            <p:nvPr/>
+          </p:nvSpPr>
+          <p:spPr>
+            <a:xfrm>
+              <a:off x="285750" y="2386330"/>
+              <a:ext cx="1898650" cy="338455"/>
+            </a:xfrm>
+            <a:prstGeom prst="rect">
+              <a:avLst/>
+            </a:prstGeom>
+            <a:noFill/>
+            <a:ln>
+              <a:noFill/>
+            </a:ln>
+          </p:spPr>
+          <p:txBody>
+            <a:bodyPr wrap="square" lIns="91425" tIns="45700" rIns="91425" bIns="45700" anchor="t" anchorCtr="0">
+              <a:spAutoFit/>
+            </a:bodyPr>
+            <a:lstStyle/>
+            <a:p>
+              <a:pPr marL="0" marR="0" lvl="0" indent="0" algn="l" rtl="0">
+                <a:spcBef>
+                  <a:spcPts val="0"/>
+                </a:spcBef>
+                <a:spcAft>
+                  <a:spcPts val="0"/>
+                </a:spcAft>
+                <a:buClr>
+                  <a:schemeClr val="lt1"/>
+                </a:buClr>
+                <a:buSzPct val="25000"/>
+                <a:buFont typeface="Calibri"/>
+                <a:buNone/>
+                <a:defRPr/>
+              </a:pPr>
+              <a:r>
+                <a:rPr lang="ko-KR" sz="1600" b="1">
+                  <a:solidFill>
+                    <a:schemeClr val="lt1"/>
+                  </a:solidFill>
+                  <a:latin typeface="Calibri"/>
+                  <a:ea typeface="Calibri"/>
+                  <a:cs typeface="Calibri"/>
+                  <a:sym typeface="Calibri"/>
+                </a:rPr>
+                <a:t>관련 유스케이스 ID</a:t>
+              </a:r>
+              <a:endParaRPr sz="1600" b="1">
+                <a:solidFill>
+                  <a:schemeClr val="lt1"/>
+                </a:solidFill>
+                <a:latin typeface="Calibri"/>
+                <a:ea typeface="Calibri"/>
+                <a:cs typeface="Calibri"/>
+                <a:sym typeface="Calibri"/>
+              </a:endParaRPr>
+            </a:p>
+          </p:txBody>
+        </p:sp>
+        <p:sp>
+          <p:nvSpPr>
+            <p:cNvPr id="357" name="Google Shape;357;p10"/>
+            <p:cNvSpPr txBox="1"/>
+            <p:nvPr/>
+          </p:nvSpPr>
+          <p:spPr>
+            <a:xfrm>
+              <a:off x="285750" y="2717165"/>
+              <a:ext cx="2171700" cy="274320"/>
+            </a:xfrm>
+            <a:prstGeom prst="rect">
+              <a:avLst/>
+            </a:prstGeom>
+            <a:noFill/>
+            <a:ln>
+              <a:noFill/>
+            </a:ln>
+          </p:spPr>
+          <p:txBody>
+            <a:bodyPr wrap="square" lIns="91425" tIns="45700" rIns="91425" bIns="45700" anchor="t" anchorCtr="0">
+              <a:spAutoFit/>
+            </a:bodyPr>
+            <a:lstStyle/>
+            <a:p>
+              <a:pPr marL="0" marR="0" lvl="0" indent="0" algn="l" rtl="0">
+                <a:spcBef>
+                  <a:spcPts val="0"/>
+                </a:spcBef>
+                <a:spcAft>
+                  <a:spcPts val="0"/>
+                </a:spcAft>
+                <a:buClr>
+                  <a:schemeClr val="lt1"/>
+                </a:buClr>
+                <a:buSzPct val="25000"/>
+                <a:buFont typeface="Calibri"/>
+                <a:buNone/>
+                <a:defRPr/>
+              </a:pPr>
+              <a:r>
+                <a:rPr lang="ko-KR" sz="1200">
+                  <a:solidFill>
+                    <a:schemeClr val="lt1"/>
+                  </a:solidFill>
+                  <a:latin typeface="Calibri"/>
+                  <a:ea typeface="Calibri"/>
+                  <a:cs typeface="Calibri"/>
+                  <a:sym typeface="Calibri"/>
+                </a:rPr>
+                <a:t>MLCM_103</a:t>
+              </a:r>
+              <a:r>
+                <a:rPr lang="en-US" altLang="ko-KR" sz="1200">
+                  <a:solidFill>
+                    <a:schemeClr val="lt1"/>
+                  </a:solidFill>
+                  <a:latin typeface="Calibri"/>
+                  <a:ea typeface="Calibri"/>
+                  <a:cs typeface="Calibri"/>
+                  <a:sym typeface="Calibri"/>
+                </a:rPr>
+                <a:t/>
+              </a:r>
+              <a:endParaRPr sz="1200">
+                <a:solidFill>
+                  <a:schemeClr val="lt1"/>
+                </a:solidFill>
+                <a:latin typeface="Calibri"/>
+                <a:ea typeface="Calibri"/>
+                <a:cs typeface="Calibri"/>
+                <a:sym typeface="Calibri"/>
+              </a:endParaRPr>
+            </a:p>
+          </p:txBody>
+        </p:sp>
+      </p:grpSp>
+      <p:grpSp>
+        <p:nvGrpSpPr>
+          <p:cNvPr id="358" name="Google Shape;358;p10"/>
+          <p:cNvGrpSpPr/>
+          <p:nvPr/>
+        </p:nvGrpSpPr>
+        <p:grpSpPr>
+          <a:xfrm>
+            <a:off x="285750" y="5814695"/>
+            <a:ext cx="2171700" cy="607695"/>
+            <a:chOff x="285750" y="5814695"/>
+            <a:chExt cx="2171700" cy="607695"/>
+          </a:xfrm>
+        </p:grpSpPr>
+        <p:sp>
+          <p:nvSpPr>
+            <p:cNvPr id="359" name="Google Shape;359;p10"/>
+            <p:cNvSpPr txBox="1"/>
+            <p:nvPr/>
+          </p:nvSpPr>
+          <p:spPr>
+            <a:xfrm>
+              <a:off x="285750" y="5814695"/>
+              <a:ext cx="800735" cy="338455"/>
+            </a:xfrm>
+            <a:prstGeom prst="rect">
+              <a:avLst/>
+            </a:prstGeom>
+            <a:noFill/>
+            <a:ln>
+              <a:noFill/>
+            </a:ln>
+          </p:spPr>
+          <p:txBody>
+            <a:bodyPr wrap="square" lIns="91425" tIns="45700" rIns="91425" bIns="45700" anchor="t" anchorCtr="0">
+              <a:spAutoFit/>
+            </a:bodyPr>
+            <a:lstStyle/>
+            <a:p>
+              <a:pPr marL="0" marR="0" lvl="0" indent="0" algn="l" rtl="0">
+                <a:spcBef>
+                  <a:spcPts val="0"/>
+                </a:spcBef>
+                <a:spcAft>
+                  <a:spcPts val="0"/>
+                </a:spcAft>
+                <a:buClr>
+                  <a:schemeClr val="lt1"/>
+                </a:buClr>
+                <a:buSzPct val="25000"/>
+                <a:buFont typeface="Calibri"/>
+                <a:buNone/>
+                <a:defRPr/>
+              </a:pPr>
+              <a:r>
+                <a:rPr lang="ko-KR" sz="1600" b="1">
+                  <a:solidFill>
+                    <a:schemeClr val="lt1"/>
+                  </a:solidFill>
+                  <a:latin typeface="Calibri"/>
+                  <a:ea typeface="Calibri"/>
+                  <a:cs typeface="Calibri"/>
+                  <a:sym typeface="Calibri"/>
+                </a:rPr>
+                <a:t>작성자</a:t>
+              </a:r>
+              <a:endParaRPr sz="1600" b="1">
+                <a:solidFill>
+                  <a:schemeClr val="lt1"/>
+                </a:solidFill>
+                <a:latin typeface="Calibri"/>
+                <a:ea typeface="Calibri"/>
+                <a:cs typeface="Calibri"/>
+                <a:sym typeface="Calibri"/>
+              </a:endParaRPr>
+            </a:p>
+          </p:txBody>
+        </p:sp>
+        <p:sp>
+          <p:nvSpPr>
+            <p:cNvPr id="360" name="Google Shape;360;p10"/>
+            <p:cNvSpPr txBox="1"/>
+            <p:nvPr/>
+          </p:nvSpPr>
+          <p:spPr>
+            <a:xfrm>
+              <a:off x="285750" y="6145530"/>
+              <a:ext cx="2171700" cy="276860"/>
+            </a:xfrm>
+            <a:prstGeom prst="rect">
+              <a:avLst/>
+            </a:prstGeom>
+            <a:noFill/>
+            <a:ln>
+              <a:noFill/>
+            </a:ln>
+          </p:spPr>
+          <p:txBody>
+            <a:bodyPr wrap="square" lIns="91425" tIns="45700" rIns="91425" bIns="45700" anchor="t" anchorCtr="0">
+              <a:spAutoFit/>
+            </a:bodyPr>
+            <a:lstStyle/>
+            <a:p>
+              <a:pPr marL="0" marR="0" lvl="0" indent="0" algn="l" rtl="0">
+                <a:spcBef>
+                  <a:spcPts val="0"/>
+                </a:spcBef>
+                <a:spcAft>
+                  <a:spcPts val="0"/>
+                </a:spcAft>
+                <a:buClr>
+                  <a:schemeClr val="lt1"/>
+                </a:buClr>
+                <a:buSzPct val="25000"/>
+                <a:buFont typeface="Calibri"/>
+                <a:buNone/>
+                <a:defRPr/>
+              </a:pPr>
+              <a:r>
+                <a:rPr lang="ko-KR" sz="1200">
+                  <a:solidFill>
+                    <a:schemeClr val="lt1"/>
+                  </a:solidFill>
+                  <a:latin typeface="Calibri"/>
+                  <a:ea typeface="Calibri"/>
+                  <a:cs typeface="Calibri"/>
+                  <a:sym typeface="Calibri"/>
+                </a:rPr>
+                <a:t>팀장 – 이응균 / 팀원 - 함은선</a:t>
+              </a:r>
+              <a:endParaRPr sz="1200">
+                <a:solidFill>
+                  <a:schemeClr val="lt1"/>
+                </a:solidFill>
+                <a:latin typeface="Calibri"/>
+                <a:ea typeface="Calibri"/>
+                <a:cs typeface="Calibri"/>
+                <a:sym typeface="Calibri"/>
+              </a:endParaRPr>
+            </a:p>
+          </p:txBody>
+        </p:sp>
+      </p:grpSp>
+      <p:sp>
+        <p:nvSpPr>
+          <p:cNvPr id="361" name="Google Shape;361;p10"/>
+          <p:cNvSpPr txBox="1"/>
+          <p:nvPr/>
+        </p:nvSpPr>
+        <p:spPr>
+          <a:xfrm>
+            <a:off x="285750" y="3316605"/>
+            <a:ext cx="2380615" cy="634345"/>
+          </a:xfrm>
+          <a:prstGeom prst="rect">
+            <a:avLst/>
+          </a:prstGeom>
+          <a:noFill/>
+          <a:ln>
+            <a:noFill/>
+          </a:ln>
+        </p:spPr>
+        <p:txBody>
+          <a:bodyPr wrap="square" lIns="91425" tIns="45700" rIns="91425" bIns="45700" anchor="t" anchorCtr="0">
+            <a:spAutoFit/>
+          </a:bodyPr>
+          <a:lstStyle/>
+          <a:p>
+            <a:pPr marL="0" marR="0" lvl="0" indent="0" algn="l" rtl="0">
+              <a:spcBef>
+                <a:spcPts val="0"/>
+              </a:spcBef>
+              <a:spcAft>
+                <a:spcPts val="0"/>
+              </a:spcAft>
+              <a:buClr>
+                <a:schemeClr val="lt1"/>
+              </a:buClr>
+              <a:buSzPct val="25000"/>
+              <a:buFont typeface="Calibri"/>
+              <a:buNone/>
+              <a:defRPr/>
+            </a:pPr>
+            <a:endParaRPr lang="ko-KR" altLang="en-US" sz="1200">
+              <a:solidFill>
+                <a:schemeClr val="lt1"/>
+              </a:solidFill>
+              <a:latin typeface="Calibri"/>
+              <a:ea typeface="Calibri"/>
+              <a:cs typeface="Calibri"/>
+              <a:sym typeface="Calibri"/>
+            </a:endParaRPr>
+          </a:p>
+          <a:p>
+            <a:pPr marL="0" marR="0" lvl="0" indent="0" algn="l" rtl="0">
+              <a:spcBef>
+                <a:spcPts val="0"/>
+              </a:spcBef>
+              <a:spcAft>
+                <a:spcPts val="0"/>
+              </a:spcAft>
+              <a:buClr>
+                <a:schemeClr val="lt1"/>
+              </a:buClr>
+              <a:buSzPct val="25000"/>
+              <a:buFont typeface="Calibri"/>
+              <a:buNone/>
+              <a:defRPr/>
+            </a:pPr>
+            <a:r>
+              <a:rPr lang="ko-KR" altLang="en-US" sz="1200">
+                <a:solidFill>
+                  <a:schemeClr val="lt1"/>
+                </a:solidFill>
+                <a:latin typeface="Calibri"/>
+                <a:ea typeface="Calibri"/>
+                <a:cs typeface="Calibri"/>
+                <a:sym typeface="Calibri"/>
+              </a:rPr>
+              <a:t>계정 정보를 확인하고 회원 탈퇴를 처리하는 화면</a:t>
+            </a:r>
+          </a:p>
+        </p:txBody>
+      </p:sp>
+      <p:grpSp>
+        <p:nvGrpSpPr>
+          <p:cNvPr id="362" name="Google Shape;362;p10"/>
+          <p:cNvGrpSpPr/>
+          <p:nvPr/>
+        </p:nvGrpSpPr>
+        <p:grpSpPr>
+          <a:xfrm>
+            <a:off x="285750" y="4504055"/>
+            <a:ext cx="2372360" cy="599440"/>
+            <a:chOff x="285750" y="4504055"/>
+            <a:chExt cx="2372360" cy="599440"/>
+          </a:xfrm>
+        </p:grpSpPr>
+        <p:sp>
+          <p:nvSpPr>
+            <p:cNvPr id="363" name="Google Shape;363;p10"/>
+            <p:cNvSpPr txBox="1"/>
+            <p:nvPr/>
+          </p:nvSpPr>
+          <p:spPr>
+            <a:xfrm>
+              <a:off x="285750" y="4504055"/>
+              <a:ext cx="1098550" cy="338455"/>
+            </a:xfrm>
+            <a:prstGeom prst="rect">
+              <a:avLst/>
+            </a:prstGeom>
+            <a:noFill/>
+            <a:ln>
+              <a:noFill/>
+            </a:ln>
+          </p:spPr>
+          <p:txBody>
+            <a:bodyPr wrap="square" lIns="91425" tIns="45700" rIns="91425" bIns="45700" anchor="t" anchorCtr="0">
+              <a:spAutoFit/>
+            </a:bodyPr>
+            <a:lstStyle/>
+            <a:p>
+              <a:pPr marL="0" marR="0" lvl="0" indent="0" algn="l" rtl="0">
+                <a:spcBef>
+                  <a:spcPts val="0"/>
+                </a:spcBef>
+                <a:spcAft>
+                  <a:spcPts val="0"/>
+                </a:spcAft>
+                <a:buClr>
+                  <a:schemeClr val="lt1"/>
+                </a:buClr>
+                <a:buSzPct val="25000"/>
+                <a:buFont typeface="Calibri"/>
+                <a:buNone/>
+                <a:defRPr/>
+              </a:pPr>
+              <a:r>
+                <a:rPr lang="ko-KR" sz="1600" b="1">
+                  <a:solidFill>
+                    <a:schemeClr val="lt1"/>
+                  </a:solidFill>
+                  <a:latin typeface="Calibri"/>
+                  <a:ea typeface="Calibri"/>
+                  <a:cs typeface="Calibri"/>
+                  <a:sym typeface="Calibri"/>
+                </a:rPr>
+                <a:t>메뉴경로</a:t>
+              </a:r>
+              <a:endParaRPr sz="1600" b="1">
+                <a:solidFill>
+                  <a:schemeClr val="lt1"/>
+                </a:solidFill>
+                <a:latin typeface="Calibri"/>
+                <a:ea typeface="Calibri"/>
+                <a:cs typeface="Calibri"/>
+                <a:sym typeface="Calibri"/>
+              </a:endParaRPr>
+            </a:p>
+          </p:txBody>
+        </p:sp>
+        <p:sp>
+          <p:nvSpPr>
+            <p:cNvPr id="364" name="Google Shape;364;p10"/>
+            <p:cNvSpPr txBox="1"/>
+            <p:nvPr/>
+          </p:nvSpPr>
+          <p:spPr>
+            <a:xfrm>
+              <a:off x="285750" y="4835525"/>
+              <a:ext cx="2372360" cy="267970"/>
+            </a:xfrm>
+            <a:prstGeom prst="rect">
+              <a:avLst/>
+            </a:prstGeom>
+            <a:noFill/>
+            <a:ln>
+              <a:noFill/>
+            </a:ln>
+          </p:spPr>
+          <p:txBody>
+            <a:bodyPr wrap="square" lIns="91425" tIns="45700" rIns="91425" bIns="45700" anchor="t" anchorCtr="0">
+              <a:spAutoFit/>
+            </a:bodyPr>
+            <a:lstStyle/>
+            <a:p>
+              <a:pPr marL="0" marR="0" lvl="0" indent="0" algn="l" rtl="0">
+                <a:spcBef>
+                  <a:spcPts val="0"/>
+                </a:spcBef>
+                <a:spcAft>
+                  <a:spcPts val="0"/>
+                </a:spcAft>
+                <a:buClr>
+                  <a:schemeClr val="lt1"/>
+                </a:buClr>
+                <a:buSzPct val="25000"/>
+                <a:buFont typeface="Calibri"/>
+                <a:buNone/>
+                <a:defRPr/>
+              </a:pPr>
+              <a:r>
+                <a:rPr lang="ko-KR" sz="1200">
+                  <a:solidFill>
+                    <a:schemeClr val="lt1"/>
+                  </a:solidFill>
+                  <a:latin typeface="Calibri"/>
+                  <a:ea typeface="Calibri"/>
+                  <a:cs typeface="Calibri"/>
+                  <a:sym typeface="Calibri"/>
+                </a:rPr>
+                <a:t>설정/계정 관리</a:t>
+              </a:r>
+              <a:endParaRPr sz="1200">
+                <a:solidFill>
+                  <a:schemeClr val="lt1"/>
+                </a:solidFill>
+                <a:latin typeface="Calibri"/>
+                <a:ea typeface="Calibri"/>
+                <a:cs typeface="Calibri"/>
+                <a:sym typeface="Calibri"/>
+              </a:endParaRPr>
+            </a:p>
+          </p:txBody>
+        </p:sp>
+      </p:grpSp>
+      <p:sp>
+        <p:nvSpPr>
+          <p:cNvPr id="365" name="Google Shape;365;p10"/>
+          <p:cNvSpPr txBox="1"/>
+          <p:nvPr/>
+        </p:nvSpPr>
+        <p:spPr>
+          <a:xfrm>
+            <a:off x="285750" y="2981960"/>
+            <a:ext cx="1005840" cy="338455"/>
+          </a:xfrm>
+          <a:prstGeom prst="rect">
+            <a:avLst/>
+          </a:prstGeom>
+          <a:noFill/>
+          <a:ln>
+            <a:noFill/>
+          </a:ln>
+        </p:spPr>
+        <p:txBody>
+          <a:bodyPr wrap="square" lIns="91425" tIns="45700" rIns="91425" bIns="45700" anchor="t" anchorCtr="0">
+            <a:spAutoFit/>
+          </a:bodyPr>
+          <a:lstStyle/>
+          <a:p>
+            <a:pPr marL="0" marR="0" lvl="0" indent="0" algn="l" rtl="0">
+              <a:spcBef>
+                <a:spcPts val="0"/>
+              </a:spcBef>
+              <a:spcAft>
+                <a:spcPts val="0"/>
+              </a:spcAft>
+              <a:buClr>
+                <a:schemeClr val="lt1"/>
+              </a:buClr>
+              <a:buSzPct val="25000"/>
+              <a:buFont typeface="Calibri"/>
+              <a:buNone/>
+              <a:defRPr/>
+            </a:pPr>
+            <a:r>
+              <a:rPr lang="ko-KR" sz="1600" b="1">
+                <a:solidFill>
+                  <a:schemeClr val="lt1"/>
+                </a:solidFill>
+                <a:latin typeface="Calibri"/>
+                <a:ea typeface="Calibri"/>
+                <a:cs typeface="Calibri"/>
+                <a:sym typeface="Calibri"/>
+              </a:rPr>
+              <a:t>화면개요</a:t>
+            </a:r>
+            <a:endParaRPr sz="1600" b="1">
+              <a:solidFill>
+                <a:schemeClr val="lt1"/>
+              </a:solidFill>
+              <a:latin typeface="Calibri"/>
+              <a:ea typeface="Calibri"/>
+              <a:cs typeface="Calibri"/>
+              <a:sym typeface="Calibri"/>
+            </a:endParaRPr>
+          </a:p>
+        </p:txBody>
+      </p:sp>
+      <p:pic>
+        <p:nvPicPr>
+          <p:cNvPr id="370" name="그림 369"/>
+          <p:cNvPicPr>
+            <a:picLocks noChangeAspect="1"/>
+          </p:cNvPicPr>
+          <p:nvPr/>
+        </p:nvPicPr>
+        <p:blipFill rotWithShape="1">
+          <a:blip r:embed="rId3"/>
+          <a:stretch>
+            <a:fillRect/>
+          </a:stretch>
+        </p:blipFill>
+        <p:spPr>
+          <a:xfrm>
+            <a:off x="5135035" y="0"/>
+            <a:ext cx="2379765" cy="5150055"/>
+          </a:xfrm>
+          <a:prstGeom prst="rect">
+            <a:avLst/>
+          </a:prstGeom>
+        </p:spPr>
+      </p:pic>
+    </p:spTree>
+    <p:extLst>
+      <p:ext uri="{BB962C8B-B14F-4D97-AF65-F5344CB8AC3E}">
+        <p14:creationId xmlns:p14="http://schemas.microsoft.com/office/powerpoint/2010/main" val="2759204891"/>
+      </p:ext>
+    </p:extLst>
+  </p:cSld>
+  <p:clrMapOvr>
+    <a:masterClrMapping/>
+  </p:clrMapOvr>
+</p:sld>
+</file>
+
+<file path=ppt/slides/slide19.xml><?xml version="1.0" encoding="utf-8"?>
+<p:sld xmlns:a="http://schemas.openxmlformats.org/drawingml/2006/main" xmlns:r="http://schemas.openxmlformats.org/officeDocument/2006/relationships" xmlns:p="http://schemas.openxmlformats.org/presentationml/2006/main">
+  <p:cSld>
+    <p:bg>
+      <p:bgPr>
+        <a:solidFill>
+          <a:srgbClr val="C0CDEF"/>
+        </a:solidFill>
+        <a:effectLst/>
+      </p:bgPr>
+    </p:bg>
+    <p:spTree>
+      <p:nvGrpSpPr>
+        <p:cNvPr id="1" name=""/>
+        <p:cNvGrpSpPr/>
+        <p:nvPr/>
+      </p:nvGrpSpPr>
+      <p:grpSpPr>
+        <a:xfrm>
+          <a:off x="0" y="0"/>
+          <a:ext cx="0" cy="0"/>
+          <a:chOff x="0" y="0"/>
+          <a:chExt cx="0" cy="0"/>
+        </a:xfrm>
+      </p:grpSpPr>
+      <p:sp>
+        <p:nvSpPr>
+          <p:cNvPr id="344" name="Google Shape;344;p10"/>
+          <p:cNvSpPr/>
+          <p:nvPr/>
+        </p:nvSpPr>
+        <p:spPr>
+          <a:xfrm>
+            <a:off x="0" y="0"/>
+            <a:ext cx="2743835" cy="6858635"/>
+          </a:xfrm>
+          <a:prstGeom prst="rect">
+            <a:avLst/>
+          </a:prstGeom>
+          <a:solidFill>
+            <a:srgbClr val="0090D0"/>
+          </a:solidFill>
+          <a:ln>
+            <a:noFill/>
+          </a:ln>
+        </p:spPr>
+        <p:txBody>
+          <a:bodyPr wrap="square" lIns="91425" tIns="45700" rIns="91425" bIns="45700" anchor="ctr" anchorCtr="0">
+            <a:noAutofit/>
+          </a:bodyPr>
+          <a:lstStyle/>
+          <a:p>
+            <a:pPr marL="0" marR="0" lvl="0" indent="0" algn="ctr" rtl="0">
+              <a:spcBef>
+                <a:spcPts val="0"/>
+              </a:spcBef>
+              <a:spcAft>
+                <a:spcPts val="0"/>
+              </a:spcAft>
+              <a:buClr>
+                <a:schemeClr val="lt1"/>
+              </a:buClr>
+              <a:buSzPct val="25000"/>
+              <a:buFont typeface="Calibri"/>
+              <a:buNone/>
+              <a:defRPr/>
+            </a:pPr>
+            <a:endParaRPr sz="1600">
+              <a:solidFill>
+                <a:schemeClr val="lt1"/>
+              </a:solidFill>
+              <a:latin typeface="Calibri"/>
+              <a:ea typeface="Calibri"/>
+              <a:cs typeface="Calibri"/>
+              <a:sym typeface="Calibri"/>
+            </a:endParaRPr>
+          </a:p>
+        </p:txBody>
+      </p:sp>
+      <p:sp>
+        <p:nvSpPr>
+          <p:cNvPr id="345" name="Google Shape;345;p10"/>
+          <p:cNvSpPr/>
+          <p:nvPr/>
+        </p:nvSpPr>
+        <p:spPr>
+          <a:xfrm>
+            <a:off x="2743200" y="5172075"/>
+            <a:ext cx="7163435" cy="1686560"/>
+          </a:xfrm>
+          <a:prstGeom prst="rect">
+            <a:avLst/>
+          </a:prstGeom>
+          <a:solidFill>
+            <a:srgbClr val="F2F2F2"/>
+          </a:solidFill>
+          <a:ln>
+            <a:noFill/>
+          </a:ln>
+        </p:spPr>
+        <p:txBody>
+          <a:bodyPr wrap="square" lIns="91425" tIns="45700" rIns="91425" bIns="45700" anchor="ctr" anchorCtr="0">
+            <a:noAutofit/>
+          </a:bodyPr>
+          <a:lstStyle/>
+          <a:p>
+            <a:pPr marL="0" marR="0" lvl="0" indent="0" algn="ctr" rtl="0">
+              <a:spcBef>
+                <a:spcPts val="0"/>
+              </a:spcBef>
+              <a:spcAft>
+                <a:spcPts val="0"/>
+              </a:spcAft>
+              <a:buClr>
+                <a:schemeClr val="lt1"/>
+              </a:buClr>
+              <a:buSzPct val="25000"/>
+              <a:buFont typeface="Calibri"/>
+              <a:buNone/>
+              <a:defRPr/>
+            </a:pPr>
+            <a:endParaRPr sz="1600">
+              <a:solidFill>
+                <a:schemeClr val="lt1"/>
+              </a:solidFill>
+              <a:latin typeface="Calibri"/>
+              <a:ea typeface="Calibri"/>
+              <a:cs typeface="Calibri"/>
+              <a:sym typeface="Calibri"/>
+            </a:endParaRPr>
+          </a:p>
+        </p:txBody>
+      </p:sp>
+      <p:sp>
+        <p:nvSpPr>
+          <p:cNvPr id="346" name="Google Shape;346;p10"/>
+          <p:cNvSpPr txBox="1"/>
+          <p:nvPr/>
+        </p:nvSpPr>
+        <p:spPr>
+          <a:xfrm>
+            <a:off x="3020060" y="5412740"/>
+            <a:ext cx="1005840" cy="339090"/>
+          </a:xfrm>
+          <a:prstGeom prst="rect">
+            <a:avLst/>
+          </a:prstGeom>
+          <a:noFill/>
+          <a:ln>
+            <a:noFill/>
+          </a:ln>
+        </p:spPr>
+        <p:txBody>
+          <a:bodyPr wrap="square" lIns="91425" tIns="45700" rIns="91425" bIns="45700" anchor="t" anchorCtr="0">
+            <a:spAutoFit/>
+          </a:bodyPr>
+          <a:lstStyle/>
+          <a:p>
+            <a:pPr marL="0" marR="0" lvl="0" indent="0" algn="l" rtl="0">
+              <a:spcBef>
+                <a:spcPts val="0"/>
+              </a:spcBef>
+              <a:spcAft>
+                <a:spcPts val="0"/>
+              </a:spcAft>
+              <a:buClr>
+                <a:schemeClr val="dk1"/>
+              </a:buClr>
+              <a:buSzPct val="25000"/>
+              <a:buFont typeface="Calibri"/>
+              <a:buNone/>
+              <a:defRPr/>
+            </a:pPr>
+            <a:r>
+              <a:rPr lang="ko-KR" sz="1600" b="1">
+                <a:solidFill>
+                  <a:schemeClr val="dk1"/>
+                </a:solidFill>
+                <a:latin typeface="맑은 고딕"/>
+                <a:ea typeface="맑은 고딕"/>
+                <a:cs typeface="Calibri"/>
+                <a:sym typeface="Calibri"/>
+              </a:rPr>
+              <a:t>화면설명</a:t>
+            </a:r>
+            <a:endParaRPr sz="1600" b="1">
+              <a:solidFill>
+                <a:schemeClr val="dk1"/>
+              </a:solidFill>
+              <a:latin typeface="맑은 고딕"/>
+              <a:ea typeface="맑은 고딕"/>
+              <a:cs typeface="Calibri"/>
+              <a:sym typeface="Calibri"/>
+            </a:endParaRPr>
+          </a:p>
+        </p:txBody>
+      </p:sp>
+      <p:sp>
+        <p:nvSpPr>
+          <p:cNvPr id="347" name="Google Shape;347;p10"/>
+          <p:cNvSpPr txBox="1"/>
+          <p:nvPr/>
+        </p:nvSpPr>
+        <p:spPr>
+          <a:xfrm>
+            <a:off x="3020060" y="5781675"/>
+            <a:ext cx="6688455" cy="998219"/>
+          </a:xfrm>
+          <a:prstGeom prst="rect">
+            <a:avLst/>
+          </a:prstGeom>
+          <a:noFill/>
+          <a:ln>
+            <a:noFill/>
+          </a:ln>
+        </p:spPr>
+        <p:txBody>
+          <a:bodyPr wrap="square" lIns="91425" tIns="45700" rIns="91425" bIns="45700" anchor="t" anchorCtr="0">
+            <a:spAutoFit/>
+          </a:bodyPr>
+          <a:lstStyle/>
+          <a:p>
+            <a:pPr marL="0" marR="0" lvl="0" indent="0" algn="l" rtl="0">
+              <a:spcBef>
+                <a:spcPts val="0"/>
+              </a:spcBef>
+              <a:spcAft>
+                <a:spcPts val="0"/>
+              </a:spcAft>
+              <a:buClr>
+                <a:schemeClr val="dk1"/>
+              </a:buClr>
+              <a:buSzPct val="25000"/>
+              <a:buFont typeface="Calibri"/>
+              <a:buNone/>
+              <a:defRPr/>
+            </a:pPr>
+            <a:r>
+              <a:rPr lang="ko-KR" sz="1200">
+                <a:solidFill>
+                  <a:schemeClr val="dk1"/>
+                </a:solidFill>
+                <a:latin typeface="맑은 고딕"/>
+                <a:cs typeface="Calibri"/>
+                <a:sym typeface="Calibri"/>
+              </a:rPr>
+              <a:t>❶</a:t>
+            </a:r>
+            <a:r>
+              <a:rPr lang="ko-KR" sz="1200">
+                <a:solidFill>
+                  <a:schemeClr val="dk1"/>
+                </a:solidFill>
+                <a:latin typeface="맑은 고딕"/>
+                <a:ea typeface="맑은 고딕"/>
+                <a:cs typeface="Calibri"/>
+                <a:sym typeface="Calibri"/>
+              </a:rPr>
+              <a:t> 상태 안내: 도움이 필요한 신호가 감지되었음을 안내</a:t>
+            </a:r>
+          </a:p>
+          <a:p>
+            <a:pPr marL="0" marR="0" lvl="0" indent="0" algn="l" rtl="0">
+              <a:spcBef>
+                <a:spcPts val="0"/>
+              </a:spcBef>
+              <a:spcAft>
+                <a:spcPts val="0"/>
+              </a:spcAft>
+              <a:buClr>
+                <a:schemeClr val="dk1"/>
+              </a:buClr>
+              <a:buSzPct val="25000"/>
+              <a:buFont typeface="Calibri"/>
+              <a:buNone/>
+              <a:defRPr/>
+            </a:pPr>
+            <a:r>
+              <a:rPr lang="ko-KR" sz="1200">
+                <a:solidFill>
+                  <a:schemeClr val="dk1"/>
+                </a:solidFill>
+                <a:latin typeface="맑은 고딕"/>
+                <a:cs typeface="Calibri"/>
+                <a:sym typeface="Calibri"/>
+              </a:rPr>
+              <a:t>❷</a:t>
+            </a:r>
+            <a:r>
+              <a:rPr lang="ko-KR" sz="1200">
+                <a:solidFill>
+                  <a:schemeClr val="dk1"/>
+                </a:solidFill>
+                <a:latin typeface="맑은 고딕"/>
+                <a:ea typeface="맑은 고딕"/>
+                <a:cs typeface="Calibri"/>
+                <a:sym typeface="Calibri"/>
+              </a:rPr>
+              <a:t> 긴급 상담 연결: 109 자살예방상담전화 통화 연결</a:t>
+            </a:r>
+          </a:p>
+          <a:p>
+            <a:pPr marL="0" marR="0" lvl="0" indent="0" algn="l" rtl="0">
+              <a:spcBef>
+                <a:spcPts val="0"/>
+              </a:spcBef>
+              <a:spcAft>
+                <a:spcPts val="0"/>
+              </a:spcAft>
+              <a:buClr>
+                <a:schemeClr val="dk1"/>
+              </a:buClr>
+              <a:buSzPct val="25000"/>
+              <a:buFont typeface="Calibri"/>
+              <a:buNone/>
+              <a:defRPr/>
+            </a:pPr>
+            <a:r>
+              <a:rPr lang="ko-KR" sz="1200">
+                <a:solidFill>
+                  <a:schemeClr val="dk1"/>
+                </a:solidFill>
+                <a:latin typeface="맑은 고딕"/>
+                <a:cs typeface="Calibri"/>
+                <a:sym typeface="Calibri"/>
+              </a:rPr>
+              <a:t>❸</a:t>
+            </a:r>
+            <a:r>
+              <a:rPr lang="ko-KR" sz="1200">
+                <a:solidFill>
+                  <a:schemeClr val="dk1"/>
+                </a:solidFill>
+                <a:latin typeface="맑은 고딕"/>
+                <a:ea typeface="맑은 고딕"/>
+                <a:cs typeface="Calibri"/>
+                <a:sym typeface="Calibri"/>
+              </a:rPr>
+              <a:t> 개인정보 안내: 전화 앱만 실행, 분석 데이터 미전송</a:t>
+            </a:r>
+          </a:p>
+          <a:p>
+            <a:pPr marL="0" marR="0" lvl="0" indent="0" algn="l" rtl="0">
+              <a:spcBef>
+                <a:spcPts val="0"/>
+              </a:spcBef>
+              <a:spcAft>
+                <a:spcPts val="0"/>
+              </a:spcAft>
+              <a:buClr>
+                <a:schemeClr val="dk1"/>
+              </a:buClr>
+              <a:buSzPct val="25000"/>
+              <a:buFont typeface="Calibri"/>
+              <a:buNone/>
+              <a:defRPr/>
+            </a:pPr>
+            <a:r>
+              <a:rPr lang="ko-KR" sz="1200">
+                <a:solidFill>
+                  <a:schemeClr val="dk1"/>
+                </a:solidFill>
+                <a:latin typeface="맑은 고딕"/>
+                <a:cs typeface="Calibri"/>
+                <a:sym typeface="Calibri"/>
+              </a:rPr>
+              <a:t>❹</a:t>
+            </a:r>
+            <a:r>
+              <a:rPr lang="ko-KR" sz="1200">
+                <a:solidFill>
+                  <a:schemeClr val="dk1"/>
+                </a:solidFill>
+                <a:latin typeface="맑은 고딕"/>
+                <a:ea typeface="맑은 고딕"/>
+                <a:cs typeface="Calibri"/>
+                <a:sym typeface="Calibri"/>
+              </a:rPr>
+              <a:t> 닫기: 이전 화면 복귀. 판정 이력은 기록됨</a:t>
+            </a:r>
+          </a:p>
+          <a:p>
+            <a:pPr marL="0" marR="0" lvl="0" indent="0" algn="l" rtl="0">
+              <a:spcBef>
+                <a:spcPts val="0"/>
+              </a:spcBef>
+              <a:spcAft>
+                <a:spcPts val="0"/>
+              </a:spcAft>
+              <a:buClr>
+                <a:schemeClr val="dk1"/>
+              </a:buClr>
+              <a:buSzPct val="25000"/>
+              <a:buFont typeface="Calibri"/>
+              <a:buNone/>
+              <a:defRPr/>
+            </a:pPr>
+            <a:r>
+              <a:rPr lang="ko-KR" sz="1200">
+                <a:solidFill>
+                  <a:schemeClr val="dk1"/>
+                </a:solidFill>
+                <a:latin typeface="맑은 고딕"/>
+                <a:cs typeface="Calibri"/>
+                <a:sym typeface="Calibri"/>
+              </a:rPr>
+              <a:t>❺</a:t>
+            </a:r>
+            <a:r>
+              <a:rPr lang="ko-KR" sz="1200">
+                <a:solidFill>
+                  <a:schemeClr val="dk1"/>
+                </a:solidFill>
+                <a:latin typeface="맑은 고딕"/>
+                <a:ea typeface="맑은 고딕"/>
+                <a:cs typeface="Calibri"/>
+                <a:sym typeface="Calibri"/>
+              </a:rPr>
+              <a:t> 노출 중 힐링 콘텐츠 추천은 표시하지 않음</a:t>
+            </a:r>
+            <a:endParaRPr sz="1200">
+              <a:solidFill>
+                <a:schemeClr val="dk1"/>
+              </a:solidFill>
+              <a:latin typeface="맑은 고딕"/>
+              <a:ea typeface="맑은 고딕"/>
+              <a:cs typeface="Calibri"/>
+              <a:sym typeface="Calibri"/>
+            </a:endParaRPr>
+          </a:p>
+        </p:txBody>
+      </p:sp>
+      <p:sp>
+        <p:nvSpPr>
+          <p:cNvPr id="348" name="Google Shape;348;p10"/>
+          <p:cNvSpPr/>
+          <p:nvPr/>
+        </p:nvSpPr>
+        <p:spPr>
+          <a:xfrm>
+            <a:off x="0" y="0"/>
+            <a:ext cx="2743835" cy="6858635"/>
+          </a:xfrm>
+          <a:prstGeom prst="rect">
+            <a:avLst/>
+          </a:prstGeom>
+          <a:solidFill>
+            <a:srgbClr val="A5A5A5"/>
+          </a:solidFill>
+          <a:ln>
+            <a:noFill/>
+          </a:ln>
+        </p:spPr>
+        <p:txBody>
+          <a:bodyPr wrap="square" lIns="91425" tIns="45700" rIns="91425" bIns="45700" anchor="ctr" anchorCtr="0">
+            <a:noAutofit/>
+          </a:bodyPr>
+          <a:lstStyle/>
+          <a:p>
+            <a:pPr marL="0" marR="0" lvl="0" indent="0" algn="ctr" rtl="0">
+              <a:spcBef>
+                <a:spcPts val="0"/>
+              </a:spcBef>
+              <a:spcAft>
+                <a:spcPts val="0"/>
+              </a:spcAft>
+              <a:buClr>
+                <a:schemeClr val="lt1"/>
+              </a:buClr>
+              <a:buSzPct val="25000"/>
+              <a:buFont typeface="Calibri"/>
+              <a:buNone/>
+              <a:defRPr/>
+            </a:pPr>
+            <a:endParaRPr sz="1600">
+              <a:solidFill>
+                <a:schemeClr val="lt1"/>
+              </a:solidFill>
+              <a:latin typeface="Calibri"/>
+              <a:ea typeface="Calibri"/>
+              <a:cs typeface="Calibri"/>
+              <a:sym typeface="Calibri"/>
+            </a:endParaRPr>
+          </a:p>
+        </p:txBody>
+      </p:sp>
+      <p:grpSp>
+        <p:nvGrpSpPr>
+          <p:cNvPr id="349" name="Google Shape;349;p10"/>
+          <p:cNvGrpSpPr/>
+          <p:nvPr/>
+        </p:nvGrpSpPr>
+        <p:grpSpPr>
+          <a:xfrm>
+            <a:off x="285750" y="435610"/>
+            <a:ext cx="2171700" cy="607695"/>
+            <a:chOff x="285750" y="435610"/>
+            <a:chExt cx="2171700" cy="607695"/>
+          </a:xfrm>
+        </p:grpSpPr>
+        <p:sp>
+          <p:nvSpPr>
+            <p:cNvPr id="350" name="Google Shape;350;p10"/>
+            <p:cNvSpPr txBox="1"/>
+            <p:nvPr/>
+          </p:nvSpPr>
+          <p:spPr>
+            <a:xfrm>
+              <a:off x="285750" y="435610"/>
+              <a:ext cx="873125" cy="338455"/>
+            </a:xfrm>
+            <a:prstGeom prst="rect">
+              <a:avLst/>
+            </a:prstGeom>
+            <a:noFill/>
+            <a:ln>
+              <a:noFill/>
+            </a:ln>
+          </p:spPr>
+          <p:txBody>
+            <a:bodyPr wrap="square" lIns="91425" tIns="45700" rIns="91425" bIns="45700" anchor="t" anchorCtr="0">
+              <a:spAutoFit/>
+            </a:bodyPr>
+            <a:lstStyle/>
+            <a:p>
+              <a:pPr marL="0" marR="0" lvl="0" indent="0" algn="l" rtl="0">
+                <a:spcBef>
+                  <a:spcPts val="0"/>
+                </a:spcBef>
+                <a:spcAft>
+                  <a:spcPts val="0"/>
+                </a:spcAft>
+                <a:buClr>
+                  <a:schemeClr val="lt1"/>
+                </a:buClr>
+                <a:buSzPct val="25000"/>
+                <a:buFont typeface="Calibri"/>
+                <a:buNone/>
+                <a:defRPr/>
+              </a:pPr>
+              <a:r>
+                <a:rPr lang="ko-KR" sz="1600" b="1">
+                  <a:solidFill>
+                    <a:schemeClr val="lt1"/>
+                  </a:solidFill>
+                  <a:latin typeface="Calibri"/>
+                  <a:ea typeface="Calibri"/>
+                  <a:cs typeface="Calibri"/>
+                  <a:sym typeface="Calibri"/>
+                </a:rPr>
+                <a:t>화면 ID </a:t>
+              </a:r>
+              <a:endParaRPr sz="1600" b="1">
+                <a:solidFill>
+                  <a:schemeClr val="lt1"/>
+                </a:solidFill>
+                <a:latin typeface="Calibri"/>
+                <a:ea typeface="Calibri"/>
+                <a:cs typeface="Calibri"/>
+                <a:sym typeface="Calibri"/>
+              </a:endParaRPr>
+            </a:p>
+          </p:txBody>
+        </p:sp>
+        <p:sp>
+          <p:nvSpPr>
+            <p:cNvPr id="351" name="Google Shape;351;p10"/>
+            <p:cNvSpPr txBox="1"/>
+            <p:nvPr/>
+          </p:nvSpPr>
+          <p:spPr>
+            <a:xfrm>
+              <a:off x="285750" y="766445"/>
+              <a:ext cx="2171700" cy="276860"/>
+            </a:xfrm>
+            <a:prstGeom prst="rect">
+              <a:avLst/>
+            </a:prstGeom>
+            <a:noFill/>
+            <a:ln>
+              <a:noFill/>
+            </a:ln>
+          </p:spPr>
+          <p:txBody>
+            <a:bodyPr wrap="square" lIns="91425" tIns="45700" rIns="91425" bIns="45700" anchor="t" anchorCtr="0">
+              <a:spAutoFit/>
+            </a:bodyPr>
+            <a:lstStyle/>
+            <a:p>
+              <a:pPr marL="0" marR="0" lvl="0" indent="0" algn="l" rtl="0">
+                <a:spcBef>
+                  <a:spcPts val="0"/>
+                </a:spcBef>
+                <a:spcAft>
+                  <a:spcPts val="0"/>
+                </a:spcAft>
+                <a:buClr>
+                  <a:schemeClr val="lt1"/>
+                </a:buClr>
+                <a:buSzPct val="25000"/>
+                <a:buFont typeface="Calibri"/>
+                <a:buNone/>
+                <a:defRPr/>
+              </a:pPr>
+              <a:r>
+                <a:rPr lang="ko-KR" sz="1200">
+                  <a:solidFill>
+                    <a:schemeClr val="lt1"/>
+                  </a:solidFill>
+                  <a:latin typeface="Calibri"/>
+                  <a:ea typeface="Calibri"/>
+                  <a:cs typeface="Calibri"/>
+                  <a:sym typeface="Calibri"/>
+                </a:rPr>
+                <a:t>MAIN_EMERGENCY_01</a:t>
+              </a:r>
+              <a:r>
+                <a:rPr lang="en-US" altLang="ko-KR" sz="1200">
+                  <a:solidFill>
+                    <a:schemeClr val="lt1"/>
+                  </a:solidFill>
+                  <a:latin typeface="Calibri"/>
+                  <a:ea typeface="Calibri"/>
+                  <a:cs typeface="Calibri"/>
+                  <a:sym typeface="Calibri"/>
+                </a:rPr>
+                <a:t/>
+              </a:r>
+              <a:r>
+                <a:rPr lang="ko-KR" sz="1200">
+                  <a:solidFill>
+                    <a:schemeClr val="lt1"/>
+                  </a:solidFill>
+                  <a:latin typeface="Calibri"/>
+                  <a:ea typeface="Calibri"/>
+                  <a:cs typeface="Calibri"/>
+                  <a:sym typeface="Calibri"/>
+                </a:rPr>
+                <a:t/>
+              </a:r>
+            </a:p>
+          </p:txBody>
+        </p:sp>
+      </p:grpSp>
+      <p:grpSp>
+        <p:nvGrpSpPr>
+          <p:cNvPr id="352" name="Google Shape;352;p10"/>
+          <p:cNvGrpSpPr/>
+          <p:nvPr/>
+        </p:nvGrpSpPr>
+        <p:grpSpPr>
+          <a:xfrm>
+            <a:off x="285750" y="1318260"/>
+            <a:ext cx="2171700" cy="594340"/>
+            <a:chOff x="285750" y="1318260"/>
+            <a:chExt cx="2171700" cy="594340"/>
+          </a:xfrm>
+        </p:grpSpPr>
+        <p:sp>
+          <p:nvSpPr>
+            <p:cNvPr id="353" name="Google Shape;353;p10"/>
+            <p:cNvSpPr txBox="1"/>
+            <p:nvPr/>
+          </p:nvSpPr>
+          <p:spPr>
+            <a:xfrm>
+              <a:off x="285750" y="1318260"/>
+              <a:ext cx="1005840" cy="338455"/>
+            </a:xfrm>
+            <a:prstGeom prst="rect">
+              <a:avLst/>
+            </a:prstGeom>
+            <a:noFill/>
+            <a:ln>
+              <a:noFill/>
+            </a:ln>
+          </p:spPr>
+          <p:txBody>
+            <a:bodyPr wrap="square" lIns="91425" tIns="45700" rIns="91425" bIns="45700" anchor="t" anchorCtr="0">
+              <a:spAutoFit/>
+            </a:bodyPr>
+            <a:lstStyle/>
+            <a:p>
+              <a:pPr marL="0" marR="0" lvl="0" indent="0" algn="l" rtl="0">
+                <a:spcBef>
+                  <a:spcPts val="0"/>
+                </a:spcBef>
+                <a:spcAft>
+                  <a:spcPts val="0"/>
+                </a:spcAft>
+                <a:buClr>
+                  <a:schemeClr val="lt1"/>
+                </a:buClr>
+                <a:buSzPct val="25000"/>
+                <a:buFont typeface="Calibri"/>
+                <a:buNone/>
+                <a:defRPr/>
+              </a:pPr>
+              <a:r>
+                <a:rPr lang="ko-KR" sz="1600" b="1">
+                  <a:solidFill>
+                    <a:schemeClr val="lt1"/>
+                  </a:solidFill>
+                  <a:latin typeface="Calibri"/>
+                  <a:ea typeface="Calibri"/>
+                  <a:cs typeface="Calibri"/>
+                  <a:sym typeface="Calibri"/>
+                </a:rPr>
+                <a:t>화면이름</a:t>
+              </a:r>
+              <a:endParaRPr sz="1600" b="1">
+                <a:solidFill>
+                  <a:schemeClr val="lt1"/>
+                </a:solidFill>
+                <a:latin typeface="Calibri"/>
+                <a:ea typeface="Calibri"/>
+                <a:cs typeface="Calibri"/>
+                <a:sym typeface="Calibri"/>
+              </a:endParaRPr>
+            </a:p>
+          </p:txBody>
+        </p:sp>
+        <p:sp>
+          <p:nvSpPr>
+            <p:cNvPr id="354" name="Google Shape;354;p10"/>
+            <p:cNvSpPr txBox="1"/>
+            <p:nvPr/>
+          </p:nvSpPr>
+          <p:spPr>
+            <a:xfrm>
+              <a:off x="285750" y="1649730"/>
+              <a:ext cx="2171700" cy="262870"/>
+            </a:xfrm>
+            <a:prstGeom prst="rect">
+              <a:avLst/>
+            </a:prstGeom>
+            <a:noFill/>
+            <a:ln>
+              <a:noFill/>
+            </a:ln>
+          </p:spPr>
+          <p:txBody>
+            <a:bodyPr wrap="square" lIns="91425" tIns="45700" rIns="91425" bIns="45700" anchor="t" anchorCtr="0">
+              <a:spAutoFit/>
+            </a:bodyPr>
+            <a:lstStyle/>
+            <a:p>
+              <a:pPr marL="0" marR="0" lvl="0" indent="0" algn="l" rtl="0">
+                <a:spcBef>
+                  <a:spcPts val="0"/>
+                </a:spcBef>
+                <a:spcAft>
+                  <a:spcPts val="0"/>
+                </a:spcAft>
+                <a:buClr>
+                  <a:schemeClr val="lt1"/>
+                </a:buClr>
+                <a:buSzPct val="25000"/>
+                <a:buFont typeface="Calibri"/>
+                <a:buNone/>
+                <a:defRPr/>
+              </a:pPr>
+              <a:r>
+                <a:rPr lang="ko-KR" altLang="en-US" sz="1200">
+                  <a:solidFill>
+                    <a:schemeClr val="lt1"/>
+                  </a:solidFill>
+                  <a:latin typeface="Calibri"/>
+                  <a:ea typeface="Calibri"/>
+                  <a:cs typeface="Calibri"/>
+                  <a:sym typeface="Calibri"/>
+                </a:rPr>
+                <a:t>긴급 상담 연결 화면</a:t>
+              </a:r>
+            </a:p>
+          </p:txBody>
+        </p:sp>
+      </p:grpSp>
+      <p:grpSp>
+        <p:nvGrpSpPr>
+          <p:cNvPr id="355" name="Google Shape;355;p10"/>
+          <p:cNvGrpSpPr/>
+          <p:nvPr/>
+        </p:nvGrpSpPr>
+        <p:grpSpPr>
+          <a:xfrm>
+            <a:off x="285750" y="2148205"/>
+            <a:ext cx="2171700" cy="607695"/>
+            <a:chOff x="285750" y="2386330"/>
+            <a:chExt cx="2171700" cy="607695"/>
+          </a:xfrm>
+        </p:grpSpPr>
+        <p:sp>
+          <p:nvSpPr>
+            <p:cNvPr id="356" name="Google Shape;356;p10"/>
+            <p:cNvSpPr txBox="1"/>
+            <p:nvPr/>
+          </p:nvSpPr>
+          <p:spPr>
+            <a:xfrm>
+              <a:off x="285750" y="2386330"/>
+              <a:ext cx="1898650" cy="338455"/>
+            </a:xfrm>
+            <a:prstGeom prst="rect">
+              <a:avLst/>
+            </a:prstGeom>
+            <a:noFill/>
+            <a:ln>
+              <a:noFill/>
+            </a:ln>
+          </p:spPr>
+          <p:txBody>
+            <a:bodyPr wrap="square" lIns="91425" tIns="45700" rIns="91425" bIns="45700" anchor="t" anchorCtr="0">
+              <a:spAutoFit/>
+            </a:bodyPr>
+            <a:lstStyle/>
+            <a:p>
+              <a:pPr marL="0" marR="0" lvl="0" indent="0" algn="l" rtl="0">
+                <a:spcBef>
+                  <a:spcPts val="0"/>
+                </a:spcBef>
+                <a:spcAft>
+                  <a:spcPts val="0"/>
+                </a:spcAft>
+                <a:buClr>
+                  <a:schemeClr val="lt1"/>
+                </a:buClr>
+                <a:buSzPct val="25000"/>
+                <a:buFont typeface="Calibri"/>
+                <a:buNone/>
+                <a:defRPr/>
+              </a:pPr>
+              <a:r>
+                <a:rPr lang="ko-KR" sz="1600" b="1">
+                  <a:solidFill>
+                    <a:schemeClr val="lt1"/>
+                  </a:solidFill>
+                  <a:latin typeface="Calibri"/>
+                  <a:ea typeface="Calibri"/>
+                  <a:cs typeface="Calibri"/>
+                  <a:sym typeface="Calibri"/>
+                </a:rPr>
+                <a:t>관련 유스케이스 ID</a:t>
+              </a:r>
+              <a:endParaRPr sz="1600" b="1">
+                <a:solidFill>
+                  <a:schemeClr val="lt1"/>
+                </a:solidFill>
+                <a:latin typeface="Calibri"/>
+                <a:ea typeface="Calibri"/>
+                <a:cs typeface="Calibri"/>
+                <a:sym typeface="Calibri"/>
+              </a:endParaRPr>
+            </a:p>
+          </p:txBody>
+        </p:sp>
+        <p:sp>
+          <p:nvSpPr>
+            <p:cNvPr id="357" name="Google Shape;357;p10"/>
+            <p:cNvSpPr txBox="1"/>
+            <p:nvPr/>
+          </p:nvSpPr>
+          <p:spPr>
+            <a:xfrm>
+              <a:off x="285750" y="2717165"/>
+              <a:ext cx="2171700" cy="274320"/>
+            </a:xfrm>
+            <a:prstGeom prst="rect">
+              <a:avLst/>
+            </a:prstGeom>
+            <a:noFill/>
+            <a:ln>
+              <a:noFill/>
+            </a:ln>
+          </p:spPr>
+          <p:txBody>
+            <a:bodyPr wrap="square" lIns="91425" tIns="45700" rIns="91425" bIns="45700" anchor="t" anchorCtr="0">
+              <a:spAutoFit/>
+            </a:bodyPr>
+            <a:lstStyle/>
+            <a:p>
+              <a:pPr marL="0" marR="0" lvl="0" indent="0" algn="l" rtl="0">
+                <a:spcBef>
+                  <a:spcPts val="0"/>
+                </a:spcBef>
+                <a:spcAft>
+                  <a:spcPts val="0"/>
+                </a:spcAft>
+                <a:buClr>
+                  <a:schemeClr val="lt1"/>
+                </a:buClr>
+                <a:buSzPct val="25000"/>
+                <a:buFont typeface="Calibri"/>
+                <a:buNone/>
+                <a:defRPr/>
+              </a:pPr>
+              <a:r>
+                <a:rPr lang="ko-KR" sz="1200">
+                  <a:solidFill>
+                    <a:schemeClr val="lt1"/>
+                  </a:solidFill>
+                  <a:latin typeface="Calibri"/>
+                  <a:ea typeface="Calibri"/>
+                  <a:cs typeface="Calibri"/>
+                  <a:sym typeface="Calibri"/>
+                </a:rPr>
+                <a:t>MLCM_510</a:t>
+              </a:r>
+              <a:r>
+                <a:rPr lang="en-US" altLang="ko-KR" sz="1200">
+                  <a:solidFill>
+                    <a:schemeClr val="lt1"/>
+                  </a:solidFill>
+                  <a:latin typeface="Calibri"/>
+                  <a:ea typeface="Calibri"/>
+                  <a:cs typeface="Calibri"/>
+                  <a:sym typeface="Calibri"/>
+                </a:rPr>
+                <a:t/>
+              </a:r>
+              <a:endParaRPr sz="1200">
+                <a:solidFill>
+                  <a:schemeClr val="lt1"/>
+                </a:solidFill>
+                <a:latin typeface="Calibri"/>
+                <a:ea typeface="Calibri"/>
+                <a:cs typeface="Calibri"/>
+                <a:sym typeface="Calibri"/>
+              </a:endParaRPr>
+            </a:p>
+          </p:txBody>
+        </p:sp>
+      </p:grpSp>
+      <p:grpSp>
+        <p:nvGrpSpPr>
+          <p:cNvPr id="358" name="Google Shape;358;p10"/>
+          <p:cNvGrpSpPr/>
+          <p:nvPr/>
+        </p:nvGrpSpPr>
+        <p:grpSpPr>
+          <a:xfrm>
+            <a:off x="285750" y="5814695"/>
+            <a:ext cx="2171700" cy="607695"/>
+            <a:chOff x="285750" y="5814695"/>
+            <a:chExt cx="2171700" cy="607695"/>
+          </a:xfrm>
+        </p:grpSpPr>
+        <p:sp>
+          <p:nvSpPr>
+            <p:cNvPr id="359" name="Google Shape;359;p10"/>
+            <p:cNvSpPr txBox="1"/>
+            <p:nvPr/>
+          </p:nvSpPr>
+          <p:spPr>
+            <a:xfrm>
+              <a:off x="285750" y="5814695"/>
+              <a:ext cx="800735" cy="338455"/>
+            </a:xfrm>
+            <a:prstGeom prst="rect">
+              <a:avLst/>
+            </a:prstGeom>
+            <a:noFill/>
+            <a:ln>
+              <a:noFill/>
+            </a:ln>
+          </p:spPr>
+          <p:txBody>
+            <a:bodyPr wrap="square" lIns="91425" tIns="45700" rIns="91425" bIns="45700" anchor="t" anchorCtr="0">
+              <a:spAutoFit/>
+            </a:bodyPr>
+            <a:lstStyle/>
+            <a:p>
+              <a:pPr marL="0" marR="0" lvl="0" indent="0" algn="l" rtl="0">
+                <a:spcBef>
+                  <a:spcPts val="0"/>
+                </a:spcBef>
+                <a:spcAft>
+                  <a:spcPts val="0"/>
+                </a:spcAft>
+                <a:buClr>
+                  <a:schemeClr val="lt1"/>
+                </a:buClr>
+                <a:buSzPct val="25000"/>
+                <a:buFont typeface="Calibri"/>
+                <a:buNone/>
+                <a:defRPr/>
+              </a:pPr>
+              <a:r>
+                <a:rPr lang="ko-KR" sz="1600" b="1">
+                  <a:solidFill>
+                    <a:schemeClr val="lt1"/>
+                  </a:solidFill>
+                  <a:latin typeface="Calibri"/>
+                  <a:ea typeface="Calibri"/>
+                  <a:cs typeface="Calibri"/>
+                  <a:sym typeface="Calibri"/>
+                </a:rPr>
+                <a:t>작성자</a:t>
+              </a:r>
+              <a:endParaRPr sz="1600" b="1">
+                <a:solidFill>
+                  <a:schemeClr val="lt1"/>
+                </a:solidFill>
+                <a:latin typeface="Calibri"/>
+                <a:ea typeface="Calibri"/>
+                <a:cs typeface="Calibri"/>
+                <a:sym typeface="Calibri"/>
+              </a:endParaRPr>
+            </a:p>
+          </p:txBody>
+        </p:sp>
+        <p:sp>
+          <p:nvSpPr>
+            <p:cNvPr id="360" name="Google Shape;360;p10"/>
+            <p:cNvSpPr txBox="1"/>
+            <p:nvPr/>
+          </p:nvSpPr>
+          <p:spPr>
+            <a:xfrm>
+              <a:off x="285750" y="6145530"/>
+              <a:ext cx="2171700" cy="276860"/>
+            </a:xfrm>
+            <a:prstGeom prst="rect">
+              <a:avLst/>
+            </a:prstGeom>
+            <a:noFill/>
+            <a:ln>
+              <a:noFill/>
+            </a:ln>
+          </p:spPr>
+          <p:txBody>
+            <a:bodyPr wrap="square" lIns="91425" tIns="45700" rIns="91425" bIns="45700" anchor="t" anchorCtr="0">
+              <a:spAutoFit/>
+            </a:bodyPr>
+            <a:lstStyle/>
+            <a:p>
+              <a:pPr marL="0" marR="0" lvl="0" indent="0" algn="l" rtl="0">
+                <a:spcBef>
+                  <a:spcPts val="0"/>
+                </a:spcBef>
+                <a:spcAft>
+                  <a:spcPts val="0"/>
+                </a:spcAft>
+                <a:buClr>
+                  <a:schemeClr val="lt1"/>
+                </a:buClr>
+                <a:buSzPct val="25000"/>
+                <a:buFont typeface="Calibri"/>
+                <a:buNone/>
+                <a:defRPr/>
+              </a:pPr>
+              <a:r>
+                <a:rPr lang="ko-KR" sz="1200">
+                  <a:solidFill>
+                    <a:schemeClr val="lt1"/>
+                  </a:solidFill>
+                  <a:latin typeface="Calibri"/>
+                  <a:ea typeface="Calibri"/>
+                  <a:cs typeface="Calibri"/>
+                  <a:sym typeface="Calibri"/>
+                </a:rPr>
+                <a:t>팀장 – 이응균 / 팀원 - 함은선</a:t>
+              </a:r>
+              <a:endParaRPr sz="1200">
+                <a:solidFill>
+                  <a:schemeClr val="lt1"/>
+                </a:solidFill>
+                <a:latin typeface="Calibri"/>
+                <a:ea typeface="Calibri"/>
+                <a:cs typeface="Calibri"/>
+                <a:sym typeface="Calibri"/>
+              </a:endParaRPr>
+            </a:p>
+          </p:txBody>
+        </p:sp>
+      </p:grpSp>
+      <p:sp>
+        <p:nvSpPr>
+          <p:cNvPr id="361" name="Google Shape;361;p10"/>
+          <p:cNvSpPr txBox="1"/>
+          <p:nvPr/>
+        </p:nvSpPr>
+        <p:spPr>
+          <a:xfrm>
+            <a:off x="285750" y="3316605"/>
+            <a:ext cx="2380615" cy="634345"/>
+          </a:xfrm>
+          <a:prstGeom prst="rect">
+            <a:avLst/>
+          </a:prstGeom>
+          <a:noFill/>
+          <a:ln>
+            <a:noFill/>
+          </a:ln>
+        </p:spPr>
+        <p:txBody>
+          <a:bodyPr wrap="square" lIns="91425" tIns="45700" rIns="91425" bIns="45700" anchor="t" anchorCtr="0">
+            <a:spAutoFit/>
+          </a:bodyPr>
+          <a:lstStyle/>
+          <a:p>
+            <a:pPr marL="0" marR="0" lvl="0" indent="0" algn="l" rtl="0">
+              <a:spcBef>
+                <a:spcPts val="0"/>
+              </a:spcBef>
+              <a:spcAft>
+                <a:spcPts val="0"/>
+              </a:spcAft>
+              <a:buClr>
+                <a:schemeClr val="lt1"/>
+              </a:buClr>
+              <a:buSzPct val="25000"/>
+              <a:buFont typeface="Calibri"/>
+              <a:buNone/>
+              <a:defRPr/>
+            </a:pPr>
+            <a:endParaRPr lang="ko-KR" altLang="en-US" sz="1200">
+              <a:solidFill>
+                <a:schemeClr val="lt1"/>
+              </a:solidFill>
+              <a:latin typeface="Calibri"/>
+              <a:ea typeface="Calibri"/>
+              <a:cs typeface="Calibri"/>
+              <a:sym typeface="Calibri"/>
+            </a:endParaRPr>
+          </a:p>
+          <a:p>
+            <a:pPr marL="0" marR="0" lvl="0" indent="0" algn="l" rtl="0">
+              <a:spcBef>
+                <a:spcPts val="0"/>
+              </a:spcBef>
+              <a:spcAft>
+                <a:spcPts val="0"/>
+              </a:spcAft>
+              <a:buClr>
+                <a:schemeClr val="lt1"/>
+              </a:buClr>
+              <a:buSzPct val="25000"/>
+              <a:buFont typeface="Calibri"/>
+              <a:buNone/>
+              <a:defRPr/>
+            </a:pPr>
+            <a:r>
+              <a:rPr lang="ko-KR" altLang="en-US" sz="1200">
+                <a:solidFill>
+                  <a:schemeClr val="lt1"/>
+                </a:solidFill>
+                <a:latin typeface="Calibri"/>
+                <a:ea typeface="Calibri"/>
+                <a:cs typeface="Calibri"/>
+                <a:sym typeface="Calibri"/>
+              </a:rPr>
+              <a:t>정서 위험도가 CRITICAL로 판정된 경우 콘텐츠 추천을 중단하고 전문 상담기관 직통 연결을 안내하는 화면</a:t>
+            </a:r>
+          </a:p>
+        </p:txBody>
+      </p:sp>
+      <p:grpSp>
+        <p:nvGrpSpPr>
+          <p:cNvPr id="362" name="Google Shape;362;p10"/>
+          <p:cNvGrpSpPr/>
+          <p:nvPr/>
+        </p:nvGrpSpPr>
+        <p:grpSpPr>
+          <a:xfrm>
+            <a:off x="285750" y="4504055"/>
+            <a:ext cx="2372360" cy="599440"/>
+            <a:chOff x="285750" y="4504055"/>
+            <a:chExt cx="2372360" cy="599440"/>
+          </a:xfrm>
+        </p:grpSpPr>
+        <p:sp>
+          <p:nvSpPr>
+            <p:cNvPr id="363" name="Google Shape;363;p10"/>
+            <p:cNvSpPr txBox="1"/>
+            <p:nvPr/>
+          </p:nvSpPr>
+          <p:spPr>
+            <a:xfrm>
+              <a:off x="285750" y="4504055"/>
+              <a:ext cx="1098550" cy="338455"/>
+            </a:xfrm>
+            <a:prstGeom prst="rect">
+              <a:avLst/>
+            </a:prstGeom>
+            <a:noFill/>
+            <a:ln>
+              <a:noFill/>
+            </a:ln>
+          </p:spPr>
+          <p:txBody>
+            <a:bodyPr wrap="square" lIns="91425" tIns="45700" rIns="91425" bIns="45700" anchor="t" anchorCtr="0">
+              <a:spAutoFit/>
+            </a:bodyPr>
+            <a:lstStyle/>
+            <a:p>
+              <a:pPr marL="0" marR="0" lvl="0" indent="0" algn="l" rtl="0">
+                <a:spcBef>
+                  <a:spcPts val="0"/>
+                </a:spcBef>
+                <a:spcAft>
+                  <a:spcPts val="0"/>
+                </a:spcAft>
+                <a:buClr>
+                  <a:schemeClr val="lt1"/>
+                </a:buClr>
+                <a:buSzPct val="25000"/>
+                <a:buFont typeface="Calibri"/>
+                <a:buNone/>
+                <a:defRPr/>
+              </a:pPr>
+              <a:r>
+                <a:rPr lang="ko-KR" sz="1600" b="1">
+                  <a:solidFill>
+                    <a:schemeClr val="lt1"/>
+                  </a:solidFill>
+                  <a:latin typeface="Calibri"/>
+                  <a:ea typeface="Calibri"/>
+                  <a:cs typeface="Calibri"/>
+                  <a:sym typeface="Calibri"/>
+                </a:rPr>
+                <a:t>메뉴경로</a:t>
+              </a:r>
+              <a:endParaRPr sz="1600" b="1">
+                <a:solidFill>
+                  <a:schemeClr val="lt1"/>
+                </a:solidFill>
+                <a:latin typeface="Calibri"/>
+                <a:ea typeface="Calibri"/>
+                <a:cs typeface="Calibri"/>
+                <a:sym typeface="Calibri"/>
+              </a:endParaRPr>
+            </a:p>
+          </p:txBody>
+        </p:sp>
+        <p:sp>
+          <p:nvSpPr>
+            <p:cNvPr id="364" name="Google Shape;364;p10"/>
+            <p:cNvSpPr txBox="1"/>
+            <p:nvPr/>
+          </p:nvSpPr>
+          <p:spPr>
+            <a:xfrm>
+              <a:off x="285750" y="4835525"/>
+              <a:ext cx="2372360" cy="267970"/>
+            </a:xfrm>
+            <a:prstGeom prst="rect">
+              <a:avLst/>
+            </a:prstGeom>
+            <a:noFill/>
+            <a:ln>
+              <a:noFill/>
+            </a:ln>
+          </p:spPr>
+          <p:txBody>
+            <a:bodyPr wrap="square" lIns="91425" tIns="45700" rIns="91425" bIns="45700" anchor="t" anchorCtr="0">
+              <a:spAutoFit/>
+            </a:bodyPr>
+            <a:lstStyle/>
+            <a:p>
+              <a:pPr marL="0" marR="0" lvl="0" indent="0" algn="l" rtl="0">
+                <a:spcBef>
+                  <a:spcPts val="0"/>
+                </a:spcBef>
+                <a:spcAft>
+                  <a:spcPts val="0"/>
+                </a:spcAft>
+                <a:buClr>
+                  <a:schemeClr val="lt1"/>
+                </a:buClr>
+                <a:buSzPct val="25000"/>
+                <a:buFont typeface="Calibri"/>
+                <a:buNone/>
+                <a:defRPr/>
+              </a:pPr>
+              <a:r>
+                <a:rPr lang="ko-KR" sz="1200">
+                  <a:solidFill>
+                    <a:schemeClr val="lt1"/>
+                  </a:solidFill>
+                  <a:latin typeface="Calibri"/>
+                  <a:ea typeface="Calibri"/>
+                  <a:cs typeface="Calibri"/>
+                  <a:sym typeface="Calibri"/>
+                </a:rPr>
+                <a:t>(전역 · CRITICAL 판정 시 자동 노출)</a:t>
               </a:r>
               <a:endParaRPr sz="1200">
                 <a:solidFill>
@@ -26119,6 +31729,2808 @@
 </p:sld>
 </file>
 
+<file path=ppt/slides/slide20.xml><?xml version="1.0" encoding="utf-8"?>
+<p:sld xmlns:a="http://schemas.openxmlformats.org/drawingml/2006/main" xmlns:r="http://schemas.openxmlformats.org/officeDocument/2006/relationships" xmlns:p="http://schemas.openxmlformats.org/presentationml/2006/main">
+  <p:cSld>
+    <p:bg>
+      <p:bgPr>
+        <a:solidFill>
+          <a:srgbClr val="C0CDEF"/>
+        </a:solidFill>
+        <a:effectLst/>
+      </p:bgPr>
+    </p:bg>
+    <p:spTree>
+      <p:nvGrpSpPr>
+        <p:cNvPr id="1" name=""/>
+        <p:cNvGrpSpPr/>
+        <p:nvPr/>
+      </p:nvGrpSpPr>
+      <p:grpSpPr>
+        <a:xfrm>
+          <a:off x="0" y="0"/>
+          <a:ext cx="0" cy="0"/>
+          <a:chOff x="0" y="0"/>
+          <a:chExt cx="0" cy="0"/>
+        </a:xfrm>
+      </p:grpSpPr>
+      <p:sp>
+        <p:nvSpPr>
+          <p:cNvPr id="344" name="Google Shape;344;p10"/>
+          <p:cNvSpPr/>
+          <p:nvPr/>
+        </p:nvSpPr>
+        <p:spPr>
+          <a:xfrm>
+            <a:off x="0" y="0"/>
+            <a:ext cx="2743835" cy="6858635"/>
+          </a:xfrm>
+          <a:prstGeom prst="rect">
+            <a:avLst/>
+          </a:prstGeom>
+          <a:solidFill>
+            <a:srgbClr val="0090D0"/>
+          </a:solidFill>
+          <a:ln>
+            <a:noFill/>
+          </a:ln>
+        </p:spPr>
+        <p:txBody>
+          <a:bodyPr wrap="square" lIns="91425" tIns="45700" rIns="91425" bIns="45700" anchor="ctr" anchorCtr="0">
+            <a:noAutofit/>
+          </a:bodyPr>
+          <a:lstStyle/>
+          <a:p>
+            <a:pPr marL="0" marR="0" lvl="0" indent="0" algn="ctr" rtl="0">
+              <a:spcBef>
+                <a:spcPts val="0"/>
+              </a:spcBef>
+              <a:spcAft>
+                <a:spcPts val="0"/>
+              </a:spcAft>
+              <a:buClr>
+                <a:schemeClr val="lt1"/>
+              </a:buClr>
+              <a:buSzPct val="25000"/>
+              <a:buFont typeface="Calibri"/>
+              <a:buNone/>
+              <a:defRPr/>
+            </a:pPr>
+            <a:endParaRPr sz="1600">
+              <a:solidFill>
+                <a:schemeClr val="lt1"/>
+              </a:solidFill>
+              <a:latin typeface="Calibri"/>
+              <a:ea typeface="Calibri"/>
+              <a:cs typeface="Calibri"/>
+              <a:sym typeface="Calibri"/>
+            </a:endParaRPr>
+          </a:p>
+        </p:txBody>
+      </p:sp>
+      <p:sp>
+        <p:nvSpPr>
+          <p:cNvPr id="345" name="Google Shape;345;p10"/>
+          <p:cNvSpPr/>
+          <p:nvPr/>
+        </p:nvSpPr>
+        <p:spPr>
+          <a:xfrm>
+            <a:off x="2743200" y="5172075"/>
+            <a:ext cx="7163435" cy="1686560"/>
+          </a:xfrm>
+          <a:prstGeom prst="rect">
+            <a:avLst/>
+          </a:prstGeom>
+          <a:solidFill>
+            <a:srgbClr val="F2F2F2"/>
+          </a:solidFill>
+          <a:ln>
+            <a:noFill/>
+          </a:ln>
+        </p:spPr>
+        <p:txBody>
+          <a:bodyPr wrap="square" lIns="91425" tIns="45700" rIns="91425" bIns="45700" anchor="ctr" anchorCtr="0">
+            <a:noAutofit/>
+          </a:bodyPr>
+          <a:lstStyle/>
+          <a:p>
+            <a:pPr marL="0" marR="0" lvl="0" indent="0" algn="ctr" rtl="0">
+              <a:spcBef>
+                <a:spcPts val="0"/>
+              </a:spcBef>
+              <a:spcAft>
+                <a:spcPts val="0"/>
+              </a:spcAft>
+              <a:buClr>
+                <a:schemeClr val="lt1"/>
+              </a:buClr>
+              <a:buSzPct val="25000"/>
+              <a:buFont typeface="Calibri"/>
+              <a:buNone/>
+              <a:defRPr/>
+            </a:pPr>
+            <a:endParaRPr sz="1600">
+              <a:solidFill>
+                <a:schemeClr val="lt1"/>
+              </a:solidFill>
+              <a:latin typeface="Calibri"/>
+              <a:ea typeface="Calibri"/>
+              <a:cs typeface="Calibri"/>
+              <a:sym typeface="Calibri"/>
+            </a:endParaRPr>
+          </a:p>
+        </p:txBody>
+      </p:sp>
+      <p:sp>
+        <p:nvSpPr>
+          <p:cNvPr id="346" name="Google Shape;346;p10"/>
+          <p:cNvSpPr txBox="1"/>
+          <p:nvPr/>
+        </p:nvSpPr>
+        <p:spPr>
+          <a:xfrm>
+            <a:off x="3020060" y="5412740"/>
+            <a:ext cx="1005840" cy="339090"/>
+          </a:xfrm>
+          <a:prstGeom prst="rect">
+            <a:avLst/>
+          </a:prstGeom>
+          <a:noFill/>
+          <a:ln>
+            <a:noFill/>
+          </a:ln>
+        </p:spPr>
+        <p:txBody>
+          <a:bodyPr wrap="square" lIns="91425" tIns="45700" rIns="91425" bIns="45700" anchor="t" anchorCtr="0">
+            <a:spAutoFit/>
+          </a:bodyPr>
+          <a:lstStyle/>
+          <a:p>
+            <a:pPr marL="0" marR="0" lvl="0" indent="0" algn="l" rtl="0">
+              <a:spcBef>
+                <a:spcPts val="0"/>
+              </a:spcBef>
+              <a:spcAft>
+                <a:spcPts val="0"/>
+              </a:spcAft>
+              <a:buClr>
+                <a:schemeClr val="dk1"/>
+              </a:buClr>
+              <a:buSzPct val="25000"/>
+              <a:buFont typeface="Calibri"/>
+              <a:buNone/>
+              <a:defRPr/>
+            </a:pPr>
+            <a:r>
+              <a:rPr lang="ko-KR" sz="1600" b="1">
+                <a:solidFill>
+                  <a:schemeClr val="dk1"/>
+                </a:solidFill>
+                <a:latin typeface="맑은 고딕"/>
+                <a:ea typeface="맑은 고딕"/>
+                <a:cs typeface="Calibri"/>
+                <a:sym typeface="Calibri"/>
+              </a:rPr>
+              <a:t>화면설명</a:t>
+            </a:r>
+            <a:endParaRPr sz="1600" b="1">
+              <a:solidFill>
+                <a:schemeClr val="dk1"/>
+              </a:solidFill>
+              <a:latin typeface="맑은 고딕"/>
+              <a:ea typeface="맑은 고딕"/>
+              <a:cs typeface="Calibri"/>
+              <a:sym typeface="Calibri"/>
+            </a:endParaRPr>
+          </a:p>
+        </p:txBody>
+      </p:sp>
+      <p:sp>
+        <p:nvSpPr>
+          <p:cNvPr id="347" name="Google Shape;347;p10"/>
+          <p:cNvSpPr txBox="1"/>
+          <p:nvPr/>
+        </p:nvSpPr>
+        <p:spPr>
+          <a:xfrm>
+            <a:off x="3020060" y="5781675"/>
+            <a:ext cx="6688455" cy="998219"/>
+          </a:xfrm>
+          <a:prstGeom prst="rect">
+            <a:avLst/>
+          </a:prstGeom>
+          <a:noFill/>
+          <a:ln>
+            <a:noFill/>
+          </a:ln>
+        </p:spPr>
+        <p:txBody>
+          <a:bodyPr wrap="square" lIns="91425" tIns="45700" rIns="91425" bIns="45700" anchor="t" anchorCtr="0">
+            <a:spAutoFit/>
+          </a:bodyPr>
+          <a:lstStyle/>
+          <a:p>
+            <a:pPr marL="0" marR="0" lvl="0" indent="0" algn="l" rtl="0">
+              <a:spcBef>
+                <a:spcPts val="0"/>
+              </a:spcBef>
+              <a:spcAft>
+                <a:spcPts val="0"/>
+              </a:spcAft>
+              <a:buClr>
+                <a:schemeClr val="dk1"/>
+              </a:buClr>
+              <a:buSzPct val="25000"/>
+              <a:buFont typeface="Calibri"/>
+              <a:buNone/>
+              <a:defRPr/>
+            </a:pPr>
+            <a:r>
+              <a:rPr lang="ko-KR" sz="1200">
+                <a:solidFill>
+                  <a:schemeClr val="dk1"/>
+                </a:solidFill>
+                <a:latin typeface="맑은 고딕"/>
+                <a:cs typeface="Calibri"/>
+                <a:sym typeface="Calibri"/>
+              </a:rPr>
+              <a:t>❶</a:t>
+            </a:r>
+            <a:r>
+              <a:rPr lang="ko-KR" sz="1200">
+                <a:solidFill>
+                  <a:schemeClr val="dk1"/>
+                </a:solidFill>
+                <a:latin typeface="맑은 고딕"/>
+                <a:ea typeface="맑은 고딕"/>
+                <a:cs typeface="Calibri"/>
+                <a:sym typeface="Calibri"/>
+              </a:rPr>
+              <a:t> 이메일 입력창: 관리자 계정 이메일 입력</a:t>
+            </a:r>
+          </a:p>
+          <a:p>
+            <a:pPr marL="0" marR="0" lvl="0" indent="0" algn="l" rtl="0">
+              <a:spcBef>
+                <a:spcPts val="0"/>
+              </a:spcBef>
+              <a:spcAft>
+                <a:spcPts val="0"/>
+              </a:spcAft>
+              <a:buClr>
+                <a:schemeClr val="dk1"/>
+              </a:buClr>
+              <a:buSzPct val="25000"/>
+              <a:buFont typeface="Calibri"/>
+              <a:buNone/>
+              <a:defRPr/>
+            </a:pPr>
+            <a:r>
+              <a:rPr lang="ko-KR" sz="1200">
+                <a:solidFill>
+                  <a:schemeClr val="dk1"/>
+                </a:solidFill>
+                <a:latin typeface="맑은 고딕"/>
+                <a:cs typeface="Calibri"/>
+                <a:sym typeface="Calibri"/>
+              </a:rPr>
+              <a:t>❷</a:t>
+            </a:r>
+            <a:r>
+              <a:rPr lang="ko-KR" sz="1200">
+                <a:solidFill>
+                  <a:schemeClr val="dk1"/>
+                </a:solidFill>
+                <a:latin typeface="맑은 고딕"/>
+                <a:ea typeface="맑은 고딕"/>
+                <a:cs typeface="Calibri"/>
+                <a:sym typeface="Calibri"/>
+              </a:rPr>
+              <a:t> 비밀번호 입력창: 마스킹 처리 입력</a:t>
+            </a:r>
+          </a:p>
+          <a:p>
+            <a:pPr marL="0" marR="0" lvl="0" indent="0" algn="l" rtl="0">
+              <a:spcBef>
+                <a:spcPts val="0"/>
+              </a:spcBef>
+              <a:spcAft>
+                <a:spcPts val="0"/>
+              </a:spcAft>
+              <a:buClr>
+                <a:schemeClr val="dk1"/>
+              </a:buClr>
+              <a:buSzPct val="25000"/>
+              <a:buFont typeface="Calibri"/>
+              <a:buNone/>
+              <a:defRPr/>
+            </a:pPr>
+            <a:r>
+              <a:rPr lang="ko-KR" sz="1200">
+                <a:solidFill>
+                  <a:schemeClr val="dk1"/>
+                </a:solidFill>
+                <a:latin typeface="맑은 고딕"/>
+                <a:cs typeface="Calibri"/>
+                <a:sym typeface="Calibri"/>
+              </a:rPr>
+              <a:t>❸</a:t>
+            </a:r>
+            <a:r>
+              <a:rPr lang="ko-KR" sz="1200">
+                <a:solidFill>
+                  <a:schemeClr val="dk1"/>
+                </a:solidFill>
+                <a:latin typeface="맑은 고딕"/>
+                <a:ea typeface="맑은 고딕"/>
+                <a:cs typeface="Calibri"/>
+                <a:sym typeface="Calibri"/>
+              </a:rPr>
+              <a:t> 로그인 버튼: 인증 성공 시 ADMIN_DASH_01 이동</a:t>
+            </a:r>
+          </a:p>
+          <a:p>
+            <a:pPr marL="0" marR="0" lvl="0" indent="0" algn="l" rtl="0">
+              <a:spcBef>
+                <a:spcPts val="0"/>
+              </a:spcBef>
+              <a:spcAft>
+                <a:spcPts val="0"/>
+              </a:spcAft>
+              <a:buClr>
+                <a:schemeClr val="dk1"/>
+              </a:buClr>
+              <a:buSzPct val="25000"/>
+              <a:buFont typeface="Calibri"/>
+              <a:buNone/>
+              <a:defRPr/>
+            </a:pPr>
+            <a:r>
+              <a:rPr lang="ko-KR" sz="1200">
+                <a:solidFill>
+                  <a:schemeClr val="dk1"/>
+                </a:solidFill>
+                <a:latin typeface="맑은 고딕"/>
+                <a:cs typeface="Calibri"/>
+                <a:sym typeface="Calibri"/>
+              </a:rPr>
+              <a:t>❹</a:t>
+            </a:r>
+            <a:r>
+              <a:rPr lang="ko-KR" sz="1200">
+                <a:solidFill>
+                  <a:schemeClr val="dk1"/>
+                </a:solidFill>
+                <a:latin typeface="맑은 고딕"/>
+                <a:ea typeface="맑은 고딕"/>
+                <a:cs typeface="Calibri"/>
+                <a:sym typeface="Calibri"/>
+              </a:rPr>
+              <a:t> 관리자 권한이 아니면 접근 불가 안내 노출</a:t>
+            </a:r>
+          </a:p>
+          <a:p>
+            <a:pPr marL="0" marR="0" lvl="0" indent="0" algn="l" rtl="0">
+              <a:spcBef>
+                <a:spcPts val="0"/>
+              </a:spcBef>
+              <a:spcAft>
+                <a:spcPts val="0"/>
+              </a:spcAft>
+              <a:buClr>
+                <a:schemeClr val="dk1"/>
+              </a:buClr>
+              <a:buSzPct val="25000"/>
+              <a:buFont typeface="Calibri"/>
+              <a:buNone/>
+              <a:defRPr/>
+            </a:pPr>
+            <a:r>
+              <a:rPr lang="ko-KR" sz="1200">
+                <a:solidFill>
+                  <a:schemeClr val="dk1"/>
+                </a:solidFill>
+                <a:latin typeface="맑은 고딕"/>
+                <a:cs typeface="Calibri"/>
+                <a:sym typeface="Calibri"/>
+              </a:rPr>
+              <a:t/>
+            </a:r>
+            <a:r>
+              <a:rPr lang="ko-KR" sz="1200">
+                <a:solidFill>
+                  <a:schemeClr val="dk1"/>
+                </a:solidFill>
+                <a:latin typeface="맑은 고딕"/>
+                <a:ea typeface="맑은 고딕"/>
+                <a:cs typeface="Calibri"/>
+                <a:sym typeface="Calibri"/>
+              </a:rPr>
+              <a:t/>
+            </a:r>
+            <a:endParaRPr sz="1200">
+              <a:solidFill>
+                <a:schemeClr val="dk1"/>
+              </a:solidFill>
+              <a:latin typeface="맑은 고딕"/>
+              <a:ea typeface="맑은 고딕"/>
+              <a:cs typeface="Calibri"/>
+              <a:sym typeface="Calibri"/>
+            </a:endParaRPr>
+          </a:p>
+        </p:txBody>
+      </p:sp>
+      <p:sp>
+        <p:nvSpPr>
+          <p:cNvPr id="348" name="Google Shape;348;p10"/>
+          <p:cNvSpPr/>
+          <p:nvPr/>
+        </p:nvSpPr>
+        <p:spPr>
+          <a:xfrm>
+            <a:off x="0" y="0"/>
+            <a:ext cx="2743835" cy="6858635"/>
+          </a:xfrm>
+          <a:prstGeom prst="rect">
+            <a:avLst/>
+          </a:prstGeom>
+          <a:solidFill>
+            <a:srgbClr val="A5A5A5"/>
+          </a:solidFill>
+          <a:ln>
+            <a:noFill/>
+          </a:ln>
+        </p:spPr>
+        <p:txBody>
+          <a:bodyPr wrap="square" lIns="91425" tIns="45700" rIns="91425" bIns="45700" anchor="ctr" anchorCtr="0">
+            <a:noAutofit/>
+          </a:bodyPr>
+          <a:lstStyle/>
+          <a:p>
+            <a:pPr marL="0" marR="0" lvl="0" indent="0" algn="ctr" rtl="0">
+              <a:spcBef>
+                <a:spcPts val="0"/>
+              </a:spcBef>
+              <a:spcAft>
+                <a:spcPts val="0"/>
+              </a:spcAft>
+              <a:buClr>
+                <a:schemeClr val="lt1"/>
+              </a:buClr>
+              <a:buSzPct val="25000"/>
+              <a:buFont typeface="Calibri"/>
+              <a:buNone/>
+              <a:defRPr/>
+            </a:pPr>
+            <a:endParaRPr sz="1600">
+              <a:solidFill>
+                <a:schemeClr val="lt1"/>
+              </a:solidFill>
+              <a:latin typeface="Calibri"/>
+              <a:ea typeface="Calibri"/>
+              <a:cs typeface="Calibri"/>
+              <a:sym typeface="Calibri"/>
+            </a:endParaRPr>
+          </a:p>
+        </p:txBody>
+      </p:sp>
+      <p:grpSp>
+        <p:nvGrpSpPr>
+          <p:cNvPr id="349" name="Google Shape;349;p10"/>
+          <p:cNvGrpSpPr/>
+          <p:nvPr/>
+        </p:nvGrpSpPr>
+        <p:grpSpPr>
+          <a:xfrm>
+            <a:off x="285750" y="435610"/>
+            <a:ext cx="2171700" cy="607695"/>
+            <a:chOff x="285750" y="435610"/>
+            <a:chExt cx="2171700" cy="607695"/>
+          </a:xfrm>
+        </p:grpSpPr>
+        <p:sp>
+          <p:nvSpPr>
+            <p:cNvPr id="350" name="Google Shape;350;p10"/>
+            <p:cNvSpPr txBox="1"/>
+            <p:nvPr/>
+          </p:nvSpPr>
+          <p:spPr>
+            <a:xfrm>
+              <a:off x="285750" y="435610"/>
+              <a:ext cx="873125" cy="338455"/>
+            </a:xfrm>
+            <a:prstGeom prst="rect">
+              <a:avLst/>
+            </a:prstGeom>
+            <a:noFill/>
+            <a:ln>
+              <a:noFill/>
+            </a:ln>
+          </p:spPr>
+          <p:txBody>
+            <a:bodyPr wrap="square" lIns="91425" tIns="45700" rIns="91425" bIns="45700" anchor="t" anchorCtr="0">
+              <a:spAutoFit/>
+            </a:bodyPr>
+            <a:lstStyle/>
+            <a:p>
+              <a:pPr marL="0" marR="0" lvl="0" indent="0" algn="l" rtl="0">
+                <a:spcBef>
+                  <a:spcPts val="0"/>
+                </a:spcBef>
+                <a:spcAft>
+                  <a:spcPts val="0"/>
+                </a:spcAft>
+                <a:buClr>
+                  <a:schemeClr val="lt1"/>
+                </a:buClr>
+                <a:buSzPct val="25000"/>
+                <a:buFont typeface="Calibri"/>
+                <a:buNone/>
+                <a:defRPr/>
+              </a:pPr>
+              <a:r>
+                <a:rPr lang="ko-KR" sz="1600" b="1">
+                  <a:solidFill>
+                    <a:schemeClr val="lt1"/>
+                  </a:solidFill>
+                  <a:latin typeface="Calibri"/>
+                  <a:ea typeface="Calibri"/>
+                  <a:cs typeface="Calibri"/>
+                  <a:sym typeface="Calibri"/>
+                </a:rPr>
+                <a:t>화면 ID </a:t>
+              </a:r>
+              <a:endParaRPr sz="1600" b="1">
+                <a:solidFill>
+                  <a:schemeClr val="lt1"/>
+                </a:solidFill>
+                <a:latin typeface="Calibri"/>
+                <a:ea typeface="Calibri"/>
+                <a:cs typeface="Calibri"/>
+                <a:sym typeface="Calibri"/>
+              </a:endParaRPr>
+            </a:p>
+          </p:txBody>
+        </p:sp>
+        <p:sp>
+          <p:nvSpPr>
+            <p:cNvPr id="351" name="Google Shape;351;p10"/>
+            <p:cNvSpPr txBox="1"/>
+            <p:nvPr/>
+          </p:nvSpPr>
+          <p:spPr>
+            <a:xfrm>
+              <a:off x="285750" y="766445"/>
+              <a:ext cx="2171700" cy="276860"/>
+            </a:xfrm>
+            <a:prstGeom prst="rect">
+              <a:avLst/>
+            </a:prstGeom>
+            <a:noFill/>
+            <a:ln>
+              <a:noFill/>
+            </a:ln>
+          </p:spPr>
+          <p:txBody>
+            <a:bodyPr wrap="square" lIns="91425" tIns="45700" rIns="91425" bIns="45700" anchor="t" anchorCtr="0">
+              <a:spAutoFit/>
+            </a:bodyPr>
+            <a:lstStyle/>
+            <a:p>
+              <a:pPr marL="0" marR="0" lvl="0" indent="0" algn="l" rtl="0">
+                <a:spcBef>
+                  <a:spcPts val="0"/>
+                </a:spcBef>
+                <a:spcAft>
+                  <a:spcPts val="0"/>
+                </a:spcAft>
+                <a:buClr>
+                  <a:schemeClr val="lt1"/>
+                </a:buClr>
+                <a:buSzPct val="25000"/>
+                <a:buFont typeface="Calibri"/>
+                <a:buNone/>
+                <a:defRPr/>
+              </a:pPr>
+              <a:r>
+                <a:rPr lang="ko-KR" sz="1200">
+                  <a:solidFill>
+                    <a:schemeClr val="lt1"/>
+                  </a:solidFill>
+                  <a:latin typeface="Calibri"/>
+                  <a:ea typeface="Calibri"/>
+                  <a:cs typeface="Calibri"/>
+                  <a:sym typeface="Calibri"/>
+                </a:rPr>
+                <a:t>ADMIN_LOGIN_01</a:t>
+              </a:r>
+              <a:r>
+                <a:rPr lang="en-US" altLang="ko-KR" sz="1200">
+                  <a:solidFill>
+                    <a:schemeClr val="lt1"/>
+                  </a:solidFill>
+                  <a:latin typeface="Calibri"/>
+                  <a:ea typeface="Calibri"/>
+                  <a:cs typeface="Calibri"/>
+                  <a:sym typeface="Calibri"/>
+                </a:rPr>
+                <a:t/>
+              </a:r>
+              <a:r>
+                <a:rPr lang="ko-KR" sz="1200">
+                  <a:solidFill>
+                    <a:schemeClr val="lt1"/>
+                  </a:solidFill>
+                  <a:latin typeface="Calibri"/>
+                  <a:ea typeface="Calibri"/>
+                  <a:cs typeface="Calibri"/>
+                  <a:sym typeface="Calibri"/>
+                </a:rPr>
+                <a:t/>
+              </a:r>
+            </a:p>
+          </p:txBody>
+        </p:sp>
+      </p:grpSp>
+      <p:grpSp>
+        <p:nvGrpSpPr>
+          <p:cNvPr id="352" name="Google Shape;352;p10"/>
+          <p:cNvGrpSpPr/>
+          <p:nvPr/>
+        </p:nvGrpSpPr>
+        <p:grpSpPr>
+          <a:xfrm>
+            <a:off x="285750" y="1318260"/>
+            <a:ext cx="2171700" cy="594340"/>
+            <a:chOff x="285750" y="1318260"/>
+            <a:chExt cx="2171700" cy="594340"/>
+          </a:xfrm>
+        </p:grpSpPr>
+        <p:sp>
+          <p:nvSpPr>
+            <p:cNvPr id="353" name="Google Shape;353;p10"/>
+            <p:cNvSpPr txBox="1"/>
+            <p:nvPr/>
+          </p:nvSpPr>
+          <p:spPr>
+            <a:xfrm>
+              <a:off x="285750" y="1318260"/>
+              <a:ext cx="1005840" cy="338455"/>
+            </a:xfrm>
+            <a:prstGeom prst="rect">
+              <a:avLst/>
+            </a:prstGeom>
+            <a:noFill/>
+            <a:ln>
+              <a:noFill/>
+            </a:ln>
+          </p:spPr>
+          <p:txBody>
+            <a:bodyPr wrap="square" lIns="91425" tIns="45700" rIns="91425" bIns="45700" anchor="t" anchorCtr="0">
+              <a:spAutoFit/>
+            </a:bodyPr>
+            <a:lstStyle/>
+            <a:p>
+              <a:pPr marL="0" marR="0" lvl="0" indent="0" algn="l" rtl="0">
+                <a:spcBef>
+                  <a:spcPts val="0"/>
+                </a:spcBef>
+                <a:spcAft>
+                  <a:spcPts val="0"/>
+                </a:spcAft>
+                <a:buClr>
+                  <a:schemeClr val="lt1"/>
+                </a:buClr>
+                <a:buSzPct val="25000"/>
+                <a:buFont typeface="Calibri"/>
+                <a:buNone/>
+                <a:defRPr/>
+              </a:pPr>
+              <a:r>
+                <a:rPr lang="ko-KR" sz="1600" b="1">
+                  <a:solidFill>
+                    <a:schemeClr val="lt1"/>
+                  </a:solidFill>
+                  <a:latin typeface="Calibri"/>
+                  <a:ea typeface="Calibri"/>
+                  <a:cs typeface="Calibri"/>
+                  <a:sym typeface="Calibri"/>
+                </a:rPr>
+                <a:t>화면이름</a:t>
+              </a:r>
+              <a:endParaRPr sz="1600" b="1">
+                <a:solidFill>
+                  <a:schemeClr val="lt1"/>
+                </a:solidFill>
+                <a:latin typeface="Calibri"/>
+                <a:ea typeface="Calibri"/>
+                <a:cs typeface="Calibri"/>
+                <a:sym typeface="Calibri"/>
+              </a:endParaRPr>
+            </a:p>
+          </p:txBody>
+        </p:sp>
+        <p:sp>
+          <p:nvSpPr>
+            <p:cNvPr id="354" name="Google Shape;354;p10"/>
+            <p:cNvSpPr txBox="1"/>
+            <p:nvPr/>
+          </p:nvSpPr>
+          <p:spPr>
+            <a:xfrm>
+              <a:off x="285750" y="1649730"/>
+              <a:ext cx="2171700" cy="262870"/>
+            </a:xfrm>
+            <a:prstGeom prst="rect">
+              <a:avLst/>
+            </a:prstGeom>
+            <a:noFill/>
+            <a:ln>
+              <a:noFill/>
+            </a:ln>
+          </p:spPr>
+          <p:txBody>
+            <a:bodyPr wrap="square" lIns="91425" tIns="45700" rIns="91425" bIns="45700" anchor="t" anchorCtr="0">
+              <a:spAutoFit/>
+            </a:bodyPr>
+            <a:lstStyle/>
+            <a:p>
+              <a:pPr marL="0" marR="0" lvl="0" indent="0" algn="l" rtl="0">
+                <a:spcBef>
+                  <a:spcPts val="0"/>
+                </a:spcBef>
+                <a:spcAft>
+                  <a:spcPts val="0"/>
+                </a:spcAft>
+                <a:buClr>
+                  <a:schemeClr val="lt1"/>
+                </a:buClr>
+                <a:buSzPct val="25000"/>
+                <a:buFont typeface="Calibri"/>
+                <a:buNone/>
+                <a:defRPr/>
+              </a:pPr>
+              <a:r>
+                <a:rPr lang="ko-KR" altLang="en-US" sz="1200">
+                  <a:solidFill>
+                    <a:schemeClr val="lt1"/>
+                  </a:solidFill>
+                  <a:latin typeface="Calibri"/>
+                  <a:ea typeface="Calibri"/>
+                  <a:cs typeface="Calibri"/>
+                  <a:sym typeface="Calibri"/>
+                </a:rPr>
+                <a:t>관리자 로그인 화면</a:t>
+              </a:r>
+            </a:p>
+          </p:txBody>
+        </p:sp>
+      </p:grpSp>
+      <p:grpSp>
+        <p:nvGrpSpPr>
+          <p:cNvPr id="355" name="Google Shape;355;p10"/>
+          <p:cNvGrpSpPr/>
+          <p:nvPr/>
+        </p:nvGrpSpPr>
+        <p:grpSpPr>
+          <a:xfrm>
+            <a:off x="285750" y="2148205"/>
+            <a:ext cx="2171700" cy="607695"/>
+            <a:chOff x="285750" y="2386330"/>
+            <a:chExt cx="2171700" cy="607695"/>
+          </a:xfrm>
+        </p:grpSpPr>
+        <p:sp>
+          <p:nvSpPr>
+            <p:cNvPr id="356" name="Google Shape;356;p10"/>
+            <p:cNvSpPr txBox="1"/>
+            <p:nvPr/>
+          </p:nvSpPr>
+          <p:spPr>
+            <a:xfrm>
+              <a:off x="285750" y="2386330"/>
+              <a:ext cx="1898650" cy="338455"/>
+            </a:xfrm>
+            <a:prstGeom prst="rect">
+              <a:avLst/>
+            </a:prstGeom>
+            <a:noFill/>
+            <a:ln>
+              <a:noFill/>
+            </a:ln>
+          </p:spPr>
+          <p:txBody>
+            <a:bodyPr wrap="square" lIns="91425" tIns="45700" rIns="91425" bIns="45700" anchor="t" anchorCtr="0">
+              <a:spAutoFit/>
+            </a:bodyPr>
+            <a:lstStyle/>
+            <a:p>
+              <a:pPr marL="0" marR="0" lvl="0" indent="0" algn="l" rtl="0">
+                <a:spcBef>
+                  <a:spcPts val="0"/>
+                </a:spcBef>
+                <a:spcAft>
+                  <a:spcPts val="0"/>
+                </a:spcAft>
+                <a:buClr>
+                  <a:schemeClr val="lt1"/>
+                </a:buClr>
+                <a:buSzPct val="25000"/>
+                <a:buFont typeface="Calibri"/>
+                <a:buNone/>
+                <a:defRPr/>
+              </a:pPr>
+              <a:r>
+                <a:rPr lang="ko-KR" sz="1600" b="1">
+                  <a:solidFill>
+                    <a:schemeClr val="lt1"/>
+                  </a:solidFill>
+                  <a:latin typeface="Calibri"/>
+                  <a:ea typeface="Calibri"/>
+                  <a:cs typeface="Calibri"/>
+                  <a:sym typeface="Calibri"/>
+                </a:rPr>
+                <a:t>관련 유스케이스 ID</a:t>
+              </a:r>
+              <a:endParaRPr sz="1600" b="1">
+                <a:solidFill>
+                  <a:schemeClr val="lt1"/>
+                </a:solidFill>
+                <a:latin typeface="Calibri"/>
+                <a:ea typeface="Calibri"/>
+                <a:cs typeface="Calibri"/>
+                <a:sym typeface="Calibri"/>
+              </a:endParaRPr>
+            </a:p>
+          </p:txBody>
+        </p:sp>
+        <p:sp>
+          <p:nvSpPr>
+            <p:cNvPr id="357" name="Google Shape;357;p10"/>
+            <p:cNvSpPr txBox="1"/>
+            <p:nvPr/>
+          </p:nvSpPr>
+          <p:spPr>
+            <a:xfrm>
+              <a:off x="285750" y="2717165"/>
+              <a:ext cx="2171700" cy="274320"/>
+            </a:xfrm>
+            <a:prstGeom prst="rect">
+              <a:avLst/>
+            </a:prstGeom>
+            <a:noFill/>
+            <a:ln>
+              <a:noFill/>
+            </a:ln>
+          </p:spPr>
+          <p:txBody>
+            <a:bodyPr wrap="square" lIns="91425" tIns="45700" rIns="91425" bIns="45700" anchor="t" anchorCtr="0">
+              <a:spAutoFit/>
+            </a:bodyPr>
+            <a:lstStyle/>
+            <a:p>
+              <a:pPr marL="0" marR="0" lvl="0" indent="0" algn="l" rtl="0">
+                <a:spcBef>
+                  <a:spcPts val="0"/>
+                </a:spcBef>
+                <a:spcAft>
+                  <a:spcPts val="0"/>
+                </a:spcAft>
+                <a:buClr>
+                  <a:schemeClr val="lt1"/>
+                </a:buClr>
+                <a:buSzPct val="25000"/>
+                <a:buFont typeface="Calibri"/>
+                <a:buNone/>
+                <a:defRPr/>
+              </a:pPr>
+              <a:r>
+                <a:rPr lang="ko-KR" sz="1200">
+                  <a:solidFill>
+                    <a:schemeClr val="lt1"/>
+                  </a:solidFill>
+                  <a:latin typeface="Calibri"/>
+                  <a:ea typeface="Calibri"/>
+                  <a:cs typeface="Calibri"/>
+                  <a:sym typeface="Calibri"/>
+                </a:rPr>
+                <a:t>MLCM_100 / MLCM_501</a:t>
+              </a:r>
+              <a:r>
+                <a:rPr lang="en-US" altLang="ko-KR" sz="1200">
+                  <a:solidFill>
+                    <a:schemeClr val="lt1"/>
+                  </a:solidFill>
+                  <a:latin typeface="Calibri"/>
+                  <a:ea typeface="Calibri"/>
+                  <a:cs typeface="Calibri"/>
+                  <a:sym typeface="Calibri"/>
+                </a:rPr>
+                <a:t/>
+              </a:r>
+              <a:endParaRPr sz="1200">
+                <a:solidFill>
+                  <a:schemeClr val="lt1"/>
+                </a:solidFill>
+                <a:latin typeface="Calibri"/>
+                <a:ea typeface="Calibri"/>
+                <a:cs typeface="Calibri"/>
+                <a:sym typeface="Calibri"/>
+              </a:endParaRPr>
+            </a:p>
+          </p:txBody>
+        </p:sp>
+      </p:grpSp>
+      <p:grpSp>
+        <p:nvGrpSpPr>
+          <p:cNvPr id="358" name="Google Shape;358;p10"/>
+          <p:cNvGrpSpPr/>
+          <p:nvPr/>
+        </p:nvGrpSpPr>
+        <p:grpSpPr>
+          <a:xfrm>
+            <a:off x="285750" y="5814695"/>
+            <a:ext cx="2171700" cy="607695"/>
+            <a:chOff x="285750" y="5814695"/>
+            <a:chExt cx="2171700" cy="607695"/>
+          </a:xfrm>
+        </p:grpSpPr>
+        <p:sp>
+          <p:nvSpPr>
+            <p:cNvPr id="359" name="Google Shape;359;p10"/>
+            <p:cNvSpPr txBox="1"/>
+            <p:nvPr/>
+          </p:nvSpPr>
+          <p:spPr>
+            <a:xfrm>
+              <a:off x="285750" y="5814695"/>
+              <a:ext cx="800735" cy="338455"/>
+            </a:xfrm>
+            <a:prstGeom prst="rect">
+              <a:avLst/>
+            </a:prstGeom>
+            <a:noFill/>
+            <a:ln>
+              <a:noFill/>
+            </a:ln>
+          </p:spPr>
+          <p:txBody>
+            <a:bodyPr wrap="square" lIns="91425" tIns="45700" rIns="91425" bIns="45700" anchor="t" anchorCtr="0">
+              <a:spAutoFit/>
+            </a:bodyPr>
+            <a:lstStyle/>
+            <a:p>
+              <a:pPr marL="0" marR="0" lvl="0" indent="0" algn="l" rtl="0">
+                <a:spcBef>
+                  <a:spcPts val="0"/>
+                </a:spcBef>
+                <a:spcAft>
+                  <a:spcPts val="0"/>
+                </a:spcAft>
+                <a:buClr>
+                  <a:schemeClr val="lt1"/>
+                </a:buClr>
+                <a:buSzPct val="25000"/>
+                <a:buFont typeface="Calibri"/>
+                <a:buNone/>
+                <a:defRPr/>
+              </a:pPr>
+              <a:r>
+                <a:rPr lang="ko-KR" sz="1600" b="1">
+                  <a:solidFill>
+                    <a:schemeClr val="lt1"/>
+                  </a:solidFill>
+                  <a:latin typeface="Calibri"/>
+                  <a:ea typeface="Calibri"/>
+                  <a:cs typeface="Calibri"/>
+                  <a:sym typeface="Calibri"/>
+                </a:rPr>
+                <a:t>작성자</a:t>
+              </a:r>
+              <a:endParaRPr sz="1600" b="1">
+                <a:solidFill>
+                  <a:schemeClr val="lt1"/>
+                </a:solidFill>
+                <a:latin typeface="Calibri"/>
+                <a:ea typeface="Calibri"/>
+                <a:cs typeface="Calibri"/>
+                <a:sym typeface="Calibri"/>
+              </a:endParaRPr>
+            </a:p>
+          </p:txBody>
+        </p:sp>
+        <p:sp>
+          <p:nvSpPr>
+            <p:cNvPr id="360" name="Google Shape;360;p10"/>
+            <p:cNvSpPr txBox="1"/>
+            <p:nvPr/>
+          </p:nvSpPr>
+          <p:spPr>
+            <a:xfrm>
+              <a:off x="285750" y="6145530"/>
+              <a:ext cx="2171700" cy="276860"/>
+            </a:xfrm>
+            <a:prstGeom prst="rect">
+              <a:avLst/>
+            </a:prstGeom>
+            <a:noFill/>
+            <a:ln>
+              <a:noFill/>
+            </a:ln>
+          </p:spPr>
+          <p:txBody>
+            <a:bodyPr wrap="square" lIns="91425" tIns="45700" rIns="91425" bIns="45700" anchor="t" anchorCtr="0">
+              <a:spAutoFit/>
+            </a:bodyPr>
+            <a:lstStyle/>
+            <a:p>
+              <a:pPr marL="0" marR="0" lvl="0" indent="0" algn="l" rtl="0">
+                <a:spcBef>
+                  <a:spcPts val="0"/>
+                </a:spcBef>
+                <a:spcAft>
+                  <a:spcPts val="0"/>
+                </a:spcAft>
+                <a:buClr>
+                  <a:schemeClr val="lt1"/>
+                </a:buClr>
+                <a:buSzPct val="25000"/>
+                <a:buFont typeface="Calibri"/>
+                <a:buNone/>
+                <a:defRPr/>
+              </a:pPr>
+              <a:r>
+                <a:rPr lang="ko-KR" sz="1200">
+                  <a:solidFill>
+                    <a:schemeClr val="lt1"/>
+                  </a:solidFill>
+                  <a:latin typeface="Calibri"/>
+                  <a:ea typeface="Calibri"/>
+                  <a:cs typeface="Calibri"/>
+                  <a:sym typeface="Calibri"/>
+                </a:rPr>
+                <a:t>팀장 – 이응균 / 팀원 - 함은선</a:t>
+              </a:r>
+              <a:endParaRPr sz="1200">
+                <a:solidFill>
+                  <a:schemeClr val="lt1"/>
+                </a:solidFill>
+                <a:latin typeface="Calibri"/>
+                <a:ea typeface="Calibri"/>
+                <a:cs typeface="Calibri"/>
+                <a:sym typeface="Calibri"/>
+              </a:endParaRPr>
+            </a:p>
+          </p:txBody>
+        </p:sp>
+      </p:grpSp>
+      <p:sp>
+        <p:nvSpPr>
+          <p:cNvPr id="361" name="Google Shape;361;p10"/>
+          <p:cNvSpPr txBox="1"/>
+          <p:nvPr/>
+        </p:nvSpPr>
+        <p:spPr>
+          <a:xfrm>
+            <a:off x="285750" y="3316605"/>
+            <a:ext cx="2380615" cy="634345"/>
+          </a:xfrm>
+          <a:prstGeom prst="rect">
+            <a:avLst/>
+          </a:prstGeom>
+          <a:noFill/>
+          <a:ln>
+            <a:noFill/>
+          </a:ln>
+        </p:spPr>
+        <p:txBody>
+          <a:bodyPr wrap="square" lIns="91425" tIns="45700" rIns="91425" bIns="45700" anchor="t" anchorCtr="0">
+            <a:spAutoFit/>
+          </a:bodyPr>
+          <a:lstStyle/>
+          <a:p>
+            <a:pPr marL="0" marR="0" lvl="0" indent="0" algn="l" rtl="0">
+              <a:spcBef>
+                <a:spcPts val="0"/>
+              </a:spcBef>
+              <a:spcAft>
+                <a:spcPts val="0"/>
+              </a:spcAft>
+              <a:buClr>
+                <a:schemeClr val="lt1"/>
+              </a:buClr>
+              <a:buSzPct val="25000"/>
+              <a:buFont typeface="Calibri"/>
+              <a:buNone/>
+              <a:defRPr/>
+            </a:pPr>
+            <a:endParaRPr lang="ko-KR" altLang="en-US" sz="1200">
+              <a:solidFill>
+                <a:schemeClr val="lt1"/>
+              </a:solidFill>
+              <a:latin typeface="Calibri"/>
+              <a:ea typeface="Calibri"/>
+              <a:cs typeface="Calibri"/>
+              <a:sym typeface="Calibri"/>
+            </a:endParaRPr>
+          </a:p>
+          <a:p>
+            <a:pPr marL="0" marR="0" lvl="0" indent="0" algn="l" rtl="0">
+              <a:spcBef>
+                <a:spcPts val="0"/>
+              </a:spcBef>
+              <a:spcAft>
+                <a:spcPts val="0"/>
+              </a:spcAft>
+              <a:buClr>
+                <a:schemeClr val="lt1"/>
+              </a:buClr>
+              <a:buSzPct val="25000"/>
+              <a:buFont typeface="Calibri"/>
+              <a:buNone/>
+              <a:defRPr/>
+            </a:pPr>
+            <a:r>
+              <a:rPr lang="ko-KR" altLang="en-US" sz="1200">
+                <a:solidFill>
+                  <a:schemeClr val="lt1"/>
+                </a:solidFill>
+                <a:latin typeface="Calibri"/>
+                <a:ea typeface="Calibri"/>
+                <a:cs typeface="Calibri"/>
+                <a:sym typeface="Calibri"/>
+              </a:rPr>
+              <a:t>관리자가 관제 대시보드에 접근하기 위해 로그인하는 웹 화면</a:t>
+            </a:r>
+          </a:p>
+        </p:txBody>
+      </p:sp>
+      <p:grpSp>
+        <p:nvGrpSpPr>
+          <p:cNvPr id="362" name="Google Shape;362;p10"/>
+          <p:cNvGrpSpPr/>
+          <p:nvPr/>
+        </p:nvGrpSpPr>
+        <p:grpSpPr>
+          <a:xfrm>
+            <a:off x="285750" y="4504055"/>
+            <a:ext cx="2372360" cy="599440"/>
+            <a:chOff x="285750" y="4504055"/>
+            <a:chExt cx="2372360" cy="599440"/>
+          </a:xfrm>
+        </p:grpSpPr>
+        <p:sp>
+          <p:nvSpPr>
+            <p:cNvPr id="363" name="Google Shape;363;p10"/>
+            <p:cNvSpPr txBox="1"/>
+            <p:nvPr/>
+          </p:nvSpPr>
+          <p:spPr>
+            <a:xfrm>
+              <a:off x="285750" y="4504055"/>
+              <a:ext cx="1098550" cy="338455"/>
+            </a:xfrm>
+            <a:prstGeom prst="rect">
+              <a:avLst/>
+            </a:prstGeom>
+            <a:noFill/>
+            <a:ln>
+              <a:noFill/>
+            </a:ln>
+          </p:spPr>
+          <p:txBody>
+            <a:bodyPr wrap="square" lIns="91425" tIns="45700" rIns="91425" bIns="45700" anchor="t" anchorCtr="0">
+              <a:spAutoFit/>
+            </a:bodyPr>
+            <a:lstStyle/>
+            <a:p>
+              <a:pPr marL="0" marR="0" lvl="0" indent="0" algn="l" rtl="0">
+                <a:spcBef>
+                  <a:spcPts val="0"/>
+                </a:spcBef>
+                <a:spcAft>
+                  <a:spcPts val="0"/>
+                </a:spcAft>
+                <a:buClr>
+                  <a:schemeClr val="lt1"/>
+                </a:buClr>
+                <a:buSzPct val="25000"/>
+                <a:buFont typeface="Calibri"/>
+                <a:buNone/>
+                <a:defRPr/>
+              </a:pPr>
+              <a:r>
+                <a:rPr lang="ko-KR" sz="1600" b="1">
+                  <a:solidFill>
+                    <a:schemeClr val="lt1"/>
+                  </a:solidFill>
+                  <a:latin typeface="Calibri"/>
+                  <a:ea typeface="Calibri"/>
+                  <a:cs typeface="Calibri"/>
+                  <a:sym typeface="Calibri"/>
+                </a:rPr>
+                <a:t>메뉴경로</a:t>
+              </a:r>
+              <a:endParaRPr sz="1600" b="1">
+                <a:solidFill>
+                  <a:schemeClr val="lt1"/>
+                </a:solidFill>
+                <a:latin typeface="Calibri"/>
+                <a:ea typeface="Calibri"/>
+                <a:cs typeface="Calibri"/>
+                <a:sym typeface="Calibri"/>
+              </a:endParaRPr>
+            </a:p>
+          </p:txBody>
+        </p:sp>
+        <p:sp>
+          <p:nvSpPr>
+            <p:cNvPr id="364" name="Google Shape;364;p10"/>
+            <p:cNvSpPr txBox="1"/>
+            <p:nvPr/>
+          </p:nvSpPr>
+          <p:spPr>
+            <a:xfrm>
+              <a:off x="285750" y="4835525"/>
+              <a:ext cx="2372360" cy="267970"/>
+            </a:xfrm>
+            <a:prstGeom prst="rect">
+              <a:avLst/>
+            </a:prstGeom>
+            <a:noFill/>
+            <a:ln>
+              <a:noFill/>
+            </a:ln>
+          </p:spPr>
+          <p:txBody>
+            <a:bodyPr wrap="square" lIns="91425" tIns="45700" rIns="91425" bIns="45700" anchor="t" anchorCtr="0">
+              <a:spAutoFit/>
+            </a:bodyPr>
+            <a:lstStyle/>
+            <a:p>
+              <a:pPr marL="0" marR="0" lvl="0" indent="0" algn="l" rtl="0">
+                <a:spcBef>
+                  <a:spcPts val="0"/>
+                </a:spcBef>
+                <a:spcAft>
+                  <a:spcPts val="0"/>
+                </a:spcAft>
+                <a:buClr>
+                  <a:schemeClr val="lt1"/>
+                </a:buClr>
+                <a:buSzPct val="25000"/>
+                <a:buFont typeface="Calibri"/>
+                <a:buNone/>
+                <a:defRPr/>
+              </a:pPr>
+              <a:r>
+                <a:rPr lang="ko-KR" sz="1200">
+                  <a:solidFill>
+                    <a:schemeClr val="lt1"/>
+                  </a:solidFill>
+                  <a:latin typeface="Calibri"/>
+                  <a:ea typeface="Calibri"/>
+                  <a:cs typeface="Calibri"/>
+                  <a:sym typeface="Calibri"/>
+                </a:rPr>
+                <a:t>(관리자 웹) 로그인</a:t>
+              </a:r>
+              <a:endParaRPr sz="1200">
+                <a:solidFill>
+                  <a:schemeClr val="lt1"/>
+                </a:solidFill>
+                <a:latin typeface="Calibri"/>
+                <a:ea typeface="Calibri"/>
+                <a:cs typeface="Calibri"/>
+                <a:sym typeface="Calibri"/>
+              </a:endParaRPr>
+            </a:p>
+          </p:txBody>
+        </p:sp>
+      </p:grpSp>
+      <p:sp>
+        <p:nvSpPr>
+          <p:cNvPr id="365" name="Google Shape;365;p10"/>
+          <p:cNvSpPr txBox="1"/>
+          <p:nvPr/>
+        </p:nvSpPr>
+        <p:spPr>
+          <a:xfrm>
+            <a:off x="285750" y="2981960"/>
+            <a:ext cx="1005840" cy="338455"/>
+          </a:xfrm>
+          <a:prstGeom prst="rect">
+            <a:avLst/>
+          </a:prstGeom>
+          <a:noFill/>
+          <a:ln>
+            <a:noFill/>
+          </a:ln>
+        </p:spPr>
+        <p:txBody>
+          <a:bodyPr wrap="square" lIns="91425" tIns="45700" rIns="91425" bIns="45700" anchor="t" anchorCtr="0">
+            <a:spAutoFit/>
+          </a:bodyPr>
+          <a:lstStyle/>
+          <a:p>
+            <a:pPr marL="0" marR="0" lvl="0" indent="0" algn="l" rtl="0">
+              <a:spcBef>
+                <a:spcPts val="0"/>
+              </a:spcBef>
+              <a:spcAft>
+                <a:spcPts val="0"/>
+              </a:spcAft>
+              <a:buClr>
+                <a:schemeClr val="lt1"/>
+              </a:buClr>
+              <a:buSzPct val="25000"/>
+              <a:buFont typeface="Calibri"/>
+              <a:buNone/>
+              <a:defRPr/>
+            </a:pPr>
+            <a:r>
+              <a:rPr lang="ko-KR" sz="1600" b="1">
+                <a:solidFill>
+                  <a:schemeClr val="lt1"/>
+                </a:solidFill>
+                <a:latin typeface="Calibri"/>
+                <a:ea typeface="Calibri"/>
+                <a:cs typeface="Calibri"/>
+                <a:sym typeface="Calibri"/>
+              </a:rPr>
+              <a:t>화면개요</a:t>
+            </a:r>
+            <a:endParaRPr sz="1600" b="1">
+              <a:solidFill>
+                <a:schemeClr val="lt1"/>
+              </a:solidFill>
+              <a:latin typeface="Calibri"/>
+              <a:ea typeface="Calibri"/>
+              <a:cs typeface="Calibri"/>
+              <a:sym typeface="Calibri"/>
+            </a:endParaRPr>
+          </a:p>
+        </p:txBody>
+      </p:sp>
+      <p:pic>
+        <p:nvPicPr>
+          <p:cNvPr id="370" name="그림 369"/>
+          <p:cNvPicPr>
+            <a:picLocks noChangeAspect="1"/>
+          </p:cNvPicPr>
+          <p:nvPr/>
+        </p:nvPicPr>
+        <p:blipFill rotWithShape="1">
+          <a:blip r:embed="rId3"/>
+          <a:stretch>
+            <a:fillRect/>
+          </a:stretch>
+        </p:blipFill>
+        <p:spPr>
+          <a:xfrm>
+            <a:off x="3922000" y="1075027"/>
+            <a:ext cx="4800000" cy="3000000"/>
+          </a:xfrm>
+          <a:prstGeom prst="rect">
+            <a:avLst/>
+          </a:prstGeom>
+        </p:spPr>
+      </p:pic>
+    </p:spTree>
+    <p:extLst>
+      <p:ext uri="{BB962C8B-B14F-4D97-AF65-F5344CB8AC3E}">
+        <p14:creationId xmlns:p14="http://schemas.microsoft.com/office/powerpoint/2010/main" val="2759204891"/>
+      </p:ext>
+    </p:extLst>
+  </p:cSld>
+  <p:clrMapOvr>
+    <a:masterClrMapping/>
+  </p:clrMapOvr>
+</p:sld>
+</file>
+
+<file path=ppt/slides/slide21.xml><?xml version="1.0" encoding="utf-8"?>
+<p:sld xmlns:a="http://schemas.openxmlformats.org/drawingml/2006/main" xmlns:r="http://schemas.openxmlformats.org/officeDocument/2006/relationships" xmlns:p="http://schemas.openxmlformats.org/presentationml/2006/main">
+  <p:cSld>
+    <p:bg>
+      <p:bgPr>
+        <a:solidFill>
+          <a:srgbClr val="C0CDEF"/>
+        </a:solidFill>
+        <a:effectLst/>
+      </p:bgPr>
+    </p:bg>
+    <p:spTree>
+      <p:nvGrpSpPr>
+        <p:cNvPr id="1" name=""/>
+        <p:cNvGrpSpPr/>
+        <p:nvPr/>
+      </p:nvGrpSpPr>
+      <p:grpSpPr>
+        <a:xfrm>
+          <a:off x="0" y="0"/>
+          <a:ext cx="0" cy="0"/>
+          <a:chOff x="0" y="0"/>
+          <a:chExt cx="0" cy="0"/>
+        </a:xfrm>
+      </p:grpSpPr>
+      <p:sp>
+        <p:nvSpPr>
+          <p:cNvPr id="344" name="Google Shape;344;p10"/>
+          <p:cNvSpPr/>
+          <p:nvPr/>
+        </p:nvSpPr>
+        <p:spPr>
+          <a:xfrm>
+            <a:off x="0" y="0"/>
+            <a:ext cx="2743835" cy="6858635"/>
+          </a:xfrm>
+          <a:prstGeom prst="rect">
+            <a:avLst/>
+          </a:prstGeom>
+          <a:solidFill>
+            <a:srgbClr val="0090D0"/>
+          </a:solidFill>
+          <a:ln>
+            <a:noFill/>
+          </a:ln>
+        </p:spPr>
+        <p:txBody>
+          <a:bodyPr wrap="square" lIns="91425" tIns="45700" rIns="91425" bIns="45700" anchor="ctr" anchorCtr="0">
+            <a:noAutofit/>
+          </a:bodyPr>
+          <a:lstStyle/>
+          <a:p>
+            <a:pPr marL="0" marR="0" lvl="0" indent="0" algn="ctr" rtl="0">
+              <a:spcBef>
+                <a:spcPts val="0"/>
+              </a:spcBef>
+              <a:spcAft>
+                <a:spcPts val="0"/>
+              </a:spcAft>
+              <a:buClr>
+                <a:schemeClr val="lt1"/>
+              </a:buClr>
+              <a:buSzPct val="25000"/>
+              <a:buFont typeface="Calibri"/>
+              <a:buNone/>
+              <a:defRPr/>
+            </a:pPr>
+            <a:endParaRPr sz="1600">
+              <a:solidFill>
+                <a:schemeClr val="lt1"/>
+              </a:solidFill>
+              <a:latin typeface="Calibri"/>
+              <a:ea typeface="Calibri"/>
+              <a:cs typeface="Calibri"/>
+              <a:sym typeface="Calibri"/>
+            </a:endParaRPr>
+          </a:p>
+        </p:txBody>
+      </p:sp>
+      <p:sp>
+        <p:nvSpPr>
+          <p:cNvPr id="345" name="Google Shape;345;p10"/>
+          <p:cNvSpPr/>
+          <p:nvPr/>
+        </p:nvSpPr>
+        <p:spPr>
+          <a:xfrm>
+            <a:off x="2743200" y="5172075"/>
+            <a:ext cx="7163435" cy="1686560"/>
+          </a:xfrm>
+          <a:prstGeom prst="rect">
+            <a:avLst/>
+          </a:prstGeom>
+          <a:solidFill>
+            <a:srgbClr val="F2F2F2"/>
+          </a:solidFill>
+          <a:ln>
+            <a:noFill/>
+          </a:ln>
+        </p:spPr>
+        <p:txBody>
+          <a:bodyPr wrap="square" lIns="91425" tIns="45700" rIns="91425" bIns="45700" anchor="ctr" anchorCtr="0">
+            <a:noAutofit/>
+          </a:bodyPr>
+          <a:lstStyle/>
+          <a:p>
+            <a:pPr marL="0" marR="0" lvl="0" indent="0" algn="ctr" rtl="0">
+              <a:spcBef>
+                <a:spcPts val="0"/>
+              </a:spcBef>
+              <a:spcAft>
+                <a:spcPts val="0"/>
+              </a:spcAft>
+              <a:buClr>
+                <a:schemeClr val="lt1"/>
+              </a:buClr>
+              <a:buSzPct val="25000"/>
+              <a:buFont typeface="Calibri"/>
+              <a:buNone/>
+              <a:defRPr/>
+            </a:pPr>
+            <a:endParaRPr sz="1600">
+              <a:solidFill>
+                <a:schemeClr val="lt1"/>
+              </a:solidFill>
+              <a:latin typeface="Calibri"/>
+              <a:ea typeface="Calibri"/>
+              <a:cs typeface="Calibri"/>
+              <a:sym typeface="Calibri"/>
+            </a:endParaRPr>
+          </a:p>
+        </p:txBody>
+      </p:sp>
+      <p:sp>
+        <p:nvSpPr>
+          <p:cNvPr id="346" name="Google Shape;346;p10"/>
+          <p:cNvSpPr txBox="1"/>
+          <p:nvPr/>
+        </p:nvSpPr>
+        <p:spPr>
+          <a:xfrm>
+            <a:off x="3020060" y="5412740"/>
+            <a:ext cx="1005840" cy="339090"/>
+          </a:xfrm>
+          <a:prstGeom prst="rect">
+            <a:avLst/>
+          </a:prstGeom>
+          <a:noFill/>
+          <a:ln>
+            <a:noFill/>
+          </a:ln>
+        </p:spPr>
+        <p:txBody>
+          <a:bodyPr wrap="square" lIns="91425" tIns="45700" rIns="91425" bIns="45700" anchor="t" anchorCtr="0">
+            <a:spAutoFit/>
+          </a:bodyPr>
+          <a:lstStyle/>
+          <a:p>
+            <a:pPr marL="0" marR="0" lvl="0" indent="0" algn="l" rtl="0">
+              <a:spcBef>
+                <a:spcPts val="0"/>
+              </a:spcBef>
+              <a:spcAft>
+                <a:spcPts val="0"/>
+              </a:spcAft>
+              <a:buClr>
+                <a:schemeClr val="dk1"/>
+              </a:buClr>
+              <a:buSzPct val="25000"/>
+              <a:buFont typeface="Calibri"/>
+              <a:buNone/>
+              <a:defRPr/>
+            </a:pPr>
+            <a:r>
+              <a:rPr lang="ko-KR" sz="1600" b="1">
+                <a:solidFill>
+                  <a:schemeClr val="dk1"/>
+                </a:solidFill>
+                <a:latin typeface="맑은 고딕"/>
+                <a:ea typeface="맑은 고딕"/>
+                <a:cs typeface="Calibri"/>
+                <a:sym typeface="Calibri"/>
+              </a:rPr>
+              <a:t>화면설명</a:t>
+            </a:r>
+            <a:endParaRPr sz="1600" b="1">
+              <a:solidFill>
+                <a:schemeClr val="dk1"/>
+              </a:solidFill>
+              <a:latin typeface="맑은 고딕"/>
+              <a:ea typeface="맑은 고딕"/>
+              <a:cs typeface="Calibri"/>
+              <a:sym typeface="Calibri"/>
+            </a:endParaRPr>
+          </a:p>
+        </p:txBody>
+      </p:sp>
+      <p:sp>
+        <p:nvSpPr>
+          <p:cNvPr id="347" name="Google Shape;347;p10"/>
+          <p:cNvSpPr txBox="1"/>
+          <p:nvPr/>
+        </p:nvSpPr>
+        <p:spPr>
+          <a:xfrm>
+            <a:off x="3020060" y="5781675"/>
+            <a:ext cx="6688455" cy="998219"/>
+          </a:xfrm>
+          <a:prstGeom prst="rect">
+            <a:avLst/>
+          </a:prstGeom>
+          <a:noFill/>
+          <a:ln>
+            <a:noFill/>
+          </a:ln>
+        </p:spPr>
+        <p:txBody>
+          <a:bodyPr wrap="square" lIns="91425" tIns="45700" rIns="91425" bIns="45700" anchor="t" anchorCtr="0">
+            <a:spAutoFit/>
+          </a:bodyPr>
+          <a:lstStyle/>
+          <a:p>
+            <a:pPr marL="0" marR="0" lvl="0" indent="0" algn="l" rtl="0">
+              <a:spcBef>
+                <a:spcPts val="0"/>
+              </a:spcBef>
+              <a:spcAft>
+                <a:spcPts val="0"/>
+              </a:spcAft>
+              <a:buClr>
+                <a:schemeClr val="dk1"/>
+              </a:buClr>
+              <a:buSzPct val="25000"/>
+              <a:buFont typeface="Calibri"/>
+              <a:buNone/>
+              <a:defRPr/>
+            </a:pPr>
+            <a:r>
+              <a:rPr lang="ko-KR" sz="1200">
+                <a:solidFill>
+                  <a:schemeClr val="dk1"/>
+                </a:solidFill>
+                <a:latin typeface="맑은 고딕"/>
+                <a:cs typeface="Calibri"/>
+                <a:sym typeface="Calibri"/>
+              </a:rPr>
+              <a:t>❶</a:t>
+            </a:r>
+            <a:r>
+              <a:rPr lang="ko-KR" sz="1200">
+                <a:solidFill>
+                  <a:schemeClr val="dk1"/>
+                </a:solidFill>
+                <a:latin typeface="맑은 고딕"/>
+                <a:ea typeface="맑은 고딕"/>
+                <a:cs typeface="Calibri"/>
+                <a:sym typeface="Calibri"/>
+              </a:rPr>
+              <a:t> 위험도 분포 요약: 안정·주의·심각 인원수 집계</a:t>
+            </a:r>
+          </a:p>
+          <a:p>
+            <a:pPr marL="0" marR="0" lvl="0" indent="0" algn="l" rtl="0">
+              <a:spcBef>
+                <a:spcPts val="0"/>
+              </a:spcBef>
+              <a:spcAft>
+                <a:spcPts val="0"/>
+              </a:spcAft>
+              <a:buClr>
+                <a:schemeClr val="dk1"/>
+              </a:buClr>
+              <a:buSzPct val="25000"/>
+              <a:buFont typeface="Calibri"/>
+              <a:buNone/>
+              <a:defRPr/>
+            </a:pPr>
+            <a:r>
+              <a:rPr lang="ko-KR" sz="1200">
+                <a:solidFill>
+                  <a:schemeClr val="dk1"/>
+                </a:solidFill>
+                <a:latin typeface="맑은 고딕"/>
+                <a:cs typeface="Calibri"/>
+                <a:sym typeface="Calibri"/>
+              </a:rPr>
+              <a:t>❷</a:t>
+            </a:r>
+            <a:r>
+              <a:rPr lang="ko-KR" sz="1200">
+                <a:solidFill>
+                  <a:schemeClr val="dk1"/>
+                </a:solidFill>
+                <a:latin typeface="맑은 고딕"/>
+                <a:ea typeface="맑은 고딕"/>
+                <a:cs typeface="Calibri"/>
+                <a:sym typeface="Calibri"/>
+              </a:rPr>
+              <a:t> 대상자 목록: 심각·주의 우선 정렬, 평가일시·점수</a:t>
+            </a:r>
+          </a:p>
+          <a:p>
+            <a:pPr marL="0" marR="0" lvl="0" indent="0" algn="l" rtl="0">
+              <a:spcBef>
+                <a:spcPts val="0"/>
+              </a:spcBef>
+              <a:spcAft>
+                <a:spcPts val="0"/>
+              </a:spcAft>
+              <a:buClr>
+                <a:schemeClr val="dk1"/>
+              </a:buClr>
+              <a:buSzPct val="25000"/>
+              <a:buFont typeface="Calibri"/>
+              <a:buNone/>
+              <a:defRPr/>
+            </a:pPr>
+            <a:r>
+              <a:rPr lang="ko-KR" sz="1200">
+                <a:solidFill>
+                  <a:schemeClr val="dk1"/>
+                </a:solidFill>
+                <a:latin typeface="맑은 고딕"/>
+                <a:cs typeface="Calibri"/>
+                <a:sym typeface="Calibri"/>
+              </a:rPr>
+              <a:t>❸</a:t>
+            </a:r>
+            <a:r>
+              <a:rPr lang="ko-KR" sz="1200">
+                <a:solidFill>
+                  <a:schemeClr val="dk1"/>
+                </a:solidFill>
+                <a:latin typeface="맑은 고딕"/>
+                <a:ea typeface="맑은 고딕"/>
+                <a:cs typeface="Calibri"/>
+                <a:sym typeface="Calibri"/>
+              </a:rPr>
+              <a:t> 대상자 상세: 기간별 감정 스코어·라이프로그 차트</a:t>
+            </a:r>
+          </a:p>
+          <a:p>
+            <a:pPr marL="0" marR="0" lvl="0" indent="0" algn="l" rtl="0">
+              <a:spcBef>
+                <a:spcPts val="0"/>
+              </a:spcBef>
+              <a:spcAft>
+                <a:spcPts val="0"/>
+              </a:spcAft>
+              <a:buClr>
+                <a:schemeClr val="dk1"/>
+              </a:buClr>
+              <a:buSzPct val="25000"/>
+              <a:buFont typeface="Calibri"/>
+              <a:buNone/>
+              <a:defRPr/>
+            </a:pPr>
+            <a:r>
+              <a:rPr lang="ko-KR" sz="1200">
+                <a:solidFill>
+                  <a:schemeClr val="dk1"/>
+                </a:solidFill>
+                <a:latin typeface="맑은 고딕"/>
+                <a:cs typeface="Calibri"/>
+                <a:sym typeface="Calibri"/>
+              </a:rPr>
+              <a:t>❹</a:t>
+            </a:r>
+            <a:r>
+              <a:rPr lang="ko-KR" sz="1200">
+                <a:solidFill>
+                  <a:schemeClr val="dk1"/>
+                </a:solidFill>
+                <a:latin typeface="맑은 고딕"/>
+                <a:ea typeface="맑은 고딕"/>
+                <a:cs typeface="Calibri"/>
+                <a:sym typeface="Calibri"/>
+              </a:rPr>
+              <a:t> 위기 사건 조회: 긴급 상담 연결 노출 이력 확인</a:t>
+            </a:r>
+          </a:p>
+          <a:p>
+            <a:pPr marL="0" marR="0" lvl="0" indent="0" algn="l" rtl="0">
+              <a:spcBef>
+                <a:spcPts val="0"/>
+              </a:spcBef>
+              <a:spcAft>
+                <a:spcPts val="0"/>
+              </a:spcAft>
+              <a:buClr>
+                <a:schemeClr val="dk1"/>
+              </a:buClr>
+              <a:buSzPct val="25000"/>
+              <a:buFont typeface="Calibri"/>
+              <a:buNone/>
+              <a:defRPr/>
+            </a:pPr>
+            <a:r>
+              <a:rPr lang="ko-KR" sz="1200">
+                <a:solidFill>
+                  <a:schemeClr val="dk1"/>
+                </a:solidFill>
+                <a:latin typeface="맑은 고딕"/>
+                <a:cs typeface="Calibri"/>
+                <a:sym typeface="Calibri"/>
+              </a:rPr>
+              <a:t>❺</a:t>
+            </a:r>
+            <a:r>
+              <a:rPr lang="ko-KR" sz="1200">
+                <a:solidFill>
+                  <a:schemeClr val="dk1"/>
+                </a:solidFill>
+                <a:latin typeface="맑은 고딕"/>
+                <a:ea typeface="맑은 고딕"/>
+                <a:cs typeface="Calibri"/>
+                <a:sym typeface="Calibri"/>
+              </a:rPr>
+              <a:t> 관리자 권한 계정만 접근 가능</a:t>
+            </a:r>
+            <a:endParaRPr sz="1200">
+              <a:solidFill>
+                <a:schemeClr val="dk1"/>
+              </a:solidFill>
+              <a:latin typeface="맑은 고딕"/>
+              <a:ea typeface="맑은 고딕"/>
+              <a:cs typeface="Calibri"/>
+              <a:sym typeface="Calibri"/>
+            </a:endParaRPr>
+          </a:p>
+        </p:txBody>
+      </p:sp>
+      <p:sp>
+        <p:nvSpPr>
+          <p:cNvPr id="348" name="Google Shape;348;p10"/>
+          <p:cNvSpPr/>
+          <p:nvPr/>
+        </p:nvSpPr>
+        <p:spPr>
+          <a:xfrm>
+            <a:off x="0" y="0"/>
+            <a:ext cx="2743835" cy="6858635"/>
+          </a:xfrm>
+          <a:prstGeom prst="rect">
+            <a:avLst/>
+          </a:prstGeom>
+          <a:solidFill>
+            <a:srgbClr val="A5A5A5"/>
+          </a:solidFill>
+          <a:ln>
+            <a:noFill/>
+          </a:ln>
+        </p:spPr>
+        <p:txBody>
+          <a:bodyPr wrap="square" lIns="91425" tIns="45700" rIns="91425" bIns="45700" anchor="ctr" anchorCtr="0">
+            <a:noAutofit/>
+          </a:bodyPr>
+          <a:lstStyle/>
+          <a:p>
+            <a:pPr marL="0" marR="0" lvl="0" indent="0" algn="ctr" rtl="0">
+              <a:spcBef>
+                <a:spcPts val="0"/>
+              </a:spcBef>
+              <a:spcAft>
+                <a:spcPts val="0"/>
+              </a:spcAft>
+              <a:buClr>
+                <a:schemeClr val="lt1"/>
+              </a:buClr>
+              <a:buSzPct val="25000"/>
+              <a:buFont typeface="Calibri"/>
+              <a:buNone/>
+              <a:defRPr/>
+            </a:pPr>
+            <a:endParaRPr sz="1600">
+              <a:solidFill>
+                <a:schemeClr val="lt1"/>
+              </a:solidFill>
+              <a:latin typeface="Calibri"/>
+              <a:ea typeface="Calibri"/>
+              <a:cs typeface="Calibri"/>
+              <a:sym typeface="Calibri"/>
+            </a:endParaRPr>
+          </a:p>
+        </p:txBody>
+      </p:sp>
+      <p:grpSp>
+        <p:nvGrpSpPr>
+          <p:cNvPr id="349" name="Google Shape;349;p10"/>
+          <p:cNvGrpSpPr/>
+          <p:nvPr/>
+        </p:nvGrpSpPr>
+        <p:grpSpPr>
+          <a:xfrm>
+            <a:off x="285750" y="435610"/>
+            <a:ext cx="2171700" cy="607695"/>
+            <a:chOff x="285750" y="435610"/>
+            <a:chExt cx="2171700" cy="607695"/>
+          </a:xfrm>
+        </p:grpSpPr>
+        <p:sp>
+          <p:nvSpPr>
+            <p:cNvPr id="350" name="Google Shape;350;p10"/>
+            <p:cNvSpPr txBox="1"/>
+            <p:nvPr/>
+          </p:nvSpPr>
+          <p:spPr>
+            <a:xfrm>
+              <a:off x="285750" y="435610"/>
+              <a:ext cx="873125" cy="338455"/>
+            </a:xfrm>
+            <a:prstGeom prst="rect">
+              <a:avLst/>
+            </a:prstGeom>
+            <a:noFill/>
+            <a:ln>
+              <a:noFill/>
+            </a:ln>
+          </p:spPr>
+          <p:txBody>
+            <a:bodyPr wrap="square" lIns="91425" tIns="45700" rIns="91425" bIns="45700" anchor="t" anchorCtr="0">
+              <a:spAutoFit/>
+            </a:bodyPr>
+            <a:lstStyle/>
+            <a:p>
+              <a:pPr marL="0" marR="0" lvl="0" indent="0" algn="l" rtl="0">
+                <a:spcBef>
+                  <a:spcPts val="0"/>
+                </a:spcBef>
+                <a:spcAft>
+                  <a:spcPts val="0"/>
+                </a:spcAft>
+                <a:buClr>
+                  <a:schemeClr val="lt1"/>
+                </a:buClr>
+                <a:buSzPct val="25000"/>
+                <a:buFont typeface="Calibri"/>
+                <a:buNone/>
+                <a:defRPr/>
+              </a:pPr>
+              <a:r>
+                <a:rPr lang="ko-KR" sz="1600" b="1">
+                  <a:solidFill>
+                    <a:schemeClr val="lt1"/>
+                  </a:solidFill>
+                  <a:latin typeface="Calibri"/>
+                  <a:ea typeface="Calibri"/>
+                  <a:cs typeface="Calibri"/>
+                  <a:sym typeface="Calibri"/>
+                </a:rPr>
+                <a:t>화면 ID </a:t>
+              </a:r>
+              <a:endParaRPr sz="1600" b="1">
+                <a:solidFill>
+                  <a:schemeClr val="lt1"/>
+                </a:solidFill>
+                <a:latin typeface="Calibri"/>
+                <a:ea typeface="Calibri"/>
+                <a:cs typeface="Calibri"/>
+                <a:sym typeface="Calibri"/>
+              </a:endParaRPr>
+            </a:p>
+          </p:txBody>
+        </p:sp>
+        <p:sp>
+          <p:nvSpPr>
+            <p:cNvPr id="351" name="Google Shape;351;p10"/>
+            <p:cNvSpPr txBox="1"/>
+            <p:nvPr/>
+          </p:nvSpPr>
+          <p:spPr>
+            <a:xfrm>
+              <a:off x="285750" y="766445"/>
+              <a:ext cx="2171700" cy="276860"/>
+            </a:xfrm>
+            <a:prstGeom prst="rect">
+              <a:avLst/>
+            </a:prstGeom>
+            <a:noFill/>
+            <a:ln>
+              <a:noFill/>
+            </a:ln>
+          </p:spPr>
+          <p:txBody>
+            <a:bodyPr wrap="square" lIns="91425" tIns="45700" rIns="91425" bIns="45700" anchor="t" anchorCtr="0">
+              <a:spAutoFit/>
+            </a:bodyPr>
+            <a:lstStyle/>
+            <a:p>
+              <a:pPr marL="0" marR="0" lvl="0" indent="0" algn="l" rtl="0">
+                <a:spcBef>
+                  <a:spcPts val="0"/>
+                </a:spcBef>
+                <a:spcAft>
+                  <a:spcPts val="0"/>
+                </a:spcAft>
+                <a:buClr>
+                  <a:schemeClr val="lt1"/>
+                </a:buClr>
+                <a:buSzPct val="25000"/>
+                <a:buFont typeface="Calibri"/>
+                <a:buNone/>
+                <a:defRPr/>
+              </a:pPr>
+              <a:r>
+                <a:rPr lang="ko-KR" sz="1200">
+                  <a:solidFill>
+                    <a:schemeClr val="lt1"/>
+                  </a:solidFill>
+                  <a:latin typeface="Calibri"/>
+                  <a:ea typeface="Calibri"/>
+                  <a:cs typeface="Calibri"/>
+                  <a:sym typeface="Calibri"/>
+                </a:rPr>
+                <a:t>ADMIN_DASH_01</a:t>
+              </a:r>
+              <a:r>
+                <a:rPr lang="en-US" altLang="ko-KR" sz="1200">
+                  <a:solidFill>
+                    <a:schemeClr val="lt1"/>
+                  </a:solidFill>
+                  <a:latin typeface="Calibri"/>
+                  <a:ea typeface="Calibri"/>
+                  <a:cs typeface="Calibri"/>
+                  <a:sym typeface="Calibri"/>
+                </a:rPr>
+                <a:t/>
+              </a:r>
+              <a:r>
+                <a:rPr lang="ko-KR" sz="1200">
+                  <a:solidFill>
+                    <a:schemeClr val="lt1"/>
+                  </a:solidFill>
+                  <a:latin typeface="Calibri"/>
+                  <a:ea typeface="Calibri"/>
+                  <a:cs typeface="Calibri"/>
+                  <a:sym typeface="Calibri"/>
+                </a:rPr>
+                <a:t/>
+              </a:r>
+            </a:p>
+          </p:txBody>
+        </p:sp>
+      </p:grpSp>
+      <p:grpSp>
+        <p:nvGrpSpPr>
+          <p:cNvPr id="352" name="Google Shape;352;p10"/>
+          <p:cNvGrpSpPr/>
+          <p:nvPr/>
+        </p:nvGrpSpPr>
+        <p:grpSpPr>
+          <a:xfrm>
+            <a:off x="285750" y="1318260"/>
+            <a:ext cx="2171700" cy="594340"/>
+            <a:chOff x="285750" y="1318260"/>
+            <a:chExt cx="2171700" cy="594340"/>
+          </a:xfrm>
+        </p:grpSpPr>
+        <p:sp>
+          <p:nvSpPr>
+            <p:cNvPr id="353" name="Google Shape;353;p10"/>
+            <p:cNvSpPr txBox="1"/>
+            <p:nvPr/>
+          </p:nvSpPr>
+          <p:spPr>
+            <a:xfrm>
+              <a:off x="285750" y="1318260"/>
+              <a:ext cx="1005840" cy="338455"/>
+            </a:xfrm>
+            <a:prstGeom prst="rect">
+              <a:avLst/>
+            </a:prstGeom>
+            <a:noFill/>
+            <a:ln>
+              <a:noFill/>
+            </a:ln>
+          </p:spPr>
+          <p:txBody>
+            <a:bodyPr wrap="square" lIns="91425" tIns="45700" rIns="91425" bIns="45700" anchor="t" anchorCtr="0">
+              <a:spAutoFit/>
+            </a:bodyPr>
+            <a:lstStyle/>
+            <a:p>
+              <a:pPr marL="0" marR="0" lvl="0" indent="0" algn="l" rtl="0">
+                <a:spcBef>
+                  <a:spcPts val="0"/>
+                </a:spcBef>
+                <a:spcAft>
+                  <a:spcPts val="0"/>
+                </a:spcAft>
+                <a:buClr>
+                  <a:schemeClr val="lt1"/>
+                </a:buClr>
+                <a:buSzPct val="25000"/>
+                <a:buFont typeface="Calibri"/>
+                <a:buNone/>
+                <a:defRPr/>
+              </a:pPr>
+              <a:r>
+                <a:rPr lang="ko-KR" sz="1600" b="1">
+                  <a:solidFill>
+                    <a:schemeClr val="lt1"/>
+                  </a:solidFill>
+                  <a:latin typeface="Calibri"/>
+                  <a:ea typeface="Calibri"/>
+                  <a:cs typeface="Calibri"/>
+                  <a:sym typeface="Calibri"/>
+                </a:rPr>
+                <a:t>화면이름</a:t>
+              </a:r>
+              <a:endParaRPr sz="1600" b="1">
+                <a:solidFill>
+                  <a:schemeClr val="lt1"/>
+                </a:solidFill>
+                <a:latin typeface="Calibri"/>
+                <a:ea typeface="Calibri"/>
+                <a:cs typeface="Calibri"/>
+                <a:sym typeface="Calibri"/>
+              </a:endParaRPr>
+            </a:p>
+          </p:txBody>
+        </p:sp>
+        <p:sp>
+          <p:nvSpPr>
+            <p:cNvPr id="354" name="Google Shape;354;p10"/>
+            <p:cNvSpPr txBox="1"/>
+            <p:nvPr/>
+          </p:nvSpPr>
+          <p:spPr>
+            <a:xfrm>
+              <a:off x="285750" y="1649730"/>
+              <a:ext cx="2171700" cy="262870"/>
+            </a:xfrm>
+            <a:prstGeom prst="rect">
+              <a:avLst/>
+            </a:prstGeom>
+            <a:noFill/>
+            <a:ln>
+              <a:noFill/>
+            </a:ln>
+          </p:spPr>
+          <p:txBody>
+            <a:bodyPr wrap="square" lIns="91425" tIns="45700" rIns="91425" bIns="45700" anchor="t" anchorCtr="0">
+              <a:spAutoFit/>
+            </a:bodyPr>
+            <a:lstStyle/>
+            <a:p>
+              <a:pPr marL="0" marR="0" lvl="0" indent="0" algn="l" rtl="0">
+                <a:spcBef>
+                  <a:spcPts val="0"/>
+                </a:spcBef>
+                <a:spcAft>
+                  <a:spcPts val="0"/>
+                </a:spcAft>
+                <a:buClr>
+                  <a:schemeClr val="lt1"/>
+                </a:buClr>
+                <a:buSzPct val="25000"/>
+                <a:buFont typeface="Calibri"/>
+                <a:buNone/>
+                <a:defRPr/>
+              </a:pPr>
+              <a:r>
+                <a:rPr lang="ko-KR" altLang="en-US" sz="1200">
+                  <a:solidFill>
+                    <a:schemeClr val="lt1"/>
+                  </a:solidFill>
+                  <a:latin typeface="Calibri"/>
+                  <a:ea typeface="Calibri"/>
+                  <a:cs typeface="Calibri"/>
+                  <a:sym typeface="Calibri"/>
+                </a:rPr>
+                <a:t>관리자 관제 대시보드</a:t>
+              </a:r>
+            </a:p>
+          </p:txBody>
+        </p:sp>
+      </p:grpSp>
+      <p:grpSp>
+        <p:nvGrpSpPr>
+          <p:cNvPr id="355" name="Google Shape;355;p10"/>
+          <p:cNvGrpSpPr/>
+          <p:nvPr/>
+        </p:nvGrpSpPr>
+        <p:grpSpPr>
+          <a:xfrm>
+            <a:off x="285750" y="2148205"/>
+            <a:ext cx="2171700" cy="607695"/>
+            <a:chOff x="285750" y="2386330"/>
+            <a:chExt cx="2171700" cy="607695"/>
+          </a:xfrm>
+        </p:grpSpPr>
+        <p:sp>
+          <p:nvSpPr>
+            <p:cNvPr id="356" name="Google Shape;356;p10"/>
+            <p:cNvSpPr txBox="1"/>
+            <p:nvPr/>
+          </p:nvSpPr>
+          <p:spPr>
+            <a:xfrm>
+              <a:off x="285750" y="2386330"/>
+              <a:ext cx="1898650" cy="338455"/>
+            </a:xfrm>
+            <a:prstGeom prst="rect">
+              <a:avLst/>
+            </a:prstGeom>
+            <a:noFill/>
+            <a:ln>
+              <a:noFill/>
+            </a:ln>
+          </p:spPr>
+          <p:txBody>
+            <a:bodyPr wrap="square" lIns="91425" tIns="45700" rIns="91425" bIns="45700" anchor="t" anchorCtr="0">
+              <a:spAutoFit/>
+            </a:bodyPr>
+            <a:lstStyle/>
+            <a:p>
+              <a:pPr marL="0" marR="0" lvl="0" indent="0" algn="l" rtl="0">
+                <a:spcBef>
+                  <a:spcPts val="0"/>
+                </a:spcBef>
+                <a:spcAft>
+                  <a:spcPts val="0"/>
+                </a:spcAft>
+                <a:buClr>
+                  <a:schemeClr val="lt1"/>
+                </a:buClr>
+                <a:buSzPct val="25000"/>
+                <a:buFont typeface="Calibri"/>
+                <a:buNone/>
+                <a:defRPr/>
+              </a:pPr>
+              <a:r>
+                <a:rPr lang="ko-KR" sz="1600" b="1">
+                  <a:solidFill>
+                    <a:schemeClr val="lt1"/>
+                  </a:solidFill>
+                  <a:latin typeface="Calibri"/>
+                  <a:ea typeface="Calibri"/>
+                  <a:cs typeface="Calibri"/>
+                  <a:sym typeface="Calibri"/>
+                </a:rPr>
+                <a:t>관련 유스케이스 ID</a:t>
+              </a:r>
+              <a:endParaRPr sz="1600" b="1">
+                <a:solidFill>
+                  <a:schemeClr val="lt1"/>
+                </a:solidFill>
+                <a:latin typeface="Calibri"/>
+                <a:ea typeface="Calibri"/>
+                <a:cs typeface="Calibri"/>
+                <a:sym typeface="Calibri"/>
+              </a:endParaRPr>
+            </a:p>
+          </p:txBody>
+        </p:sp>
+        <p:sp>
+          <p:nvSpPr>
+            <p:cNvPr id="357" name="Google Shape;357;p10"/>
+            <p:cNvSpPr txBox="1"/>
+            <p:nvPr/>
+          </p:nvSpPr>
+          <p:spPr>
+            <a:xfrm>
+              <a:off x="285750" y="2717165"/>
+              <a:ext cx="2171700" cy="274320"/>
+            </a:xfrm>
+            <a:prstGeom prst="rect">
+              <a:avLst/>
+            </a:prstGeom>
+            <a:noFill/>
+            <a:ln>
+              <a:noFill/>
+            </a:ln>
+          </p:spPr>
+          <p:txBody>
+            <a:bodyPr wrap="square" lIns="91425" tIns="45700" rIns="91425" bIns="45700" anchor="t" anchorCtr="0">
+              <a:spAutoFit/>
+            </a:bodyPr>
+            <a:lstStyle/>
+            <a:p>
+              <a:pPr marL="0" marR="0" lvl="0" indent="0" algn="l" rtl="0">
+                <a:spcBef>
+                  <a:spcPts val="0"/>
+                </a:spcBef>
+                <a:spcAft>
+                  <a:spcPts val="0"/>
+                </a:spcAft>
+                <a:buClr>
+                  <a:schemeClr val="lt1"/>
+                </a:buClr>
+                <a:buSzPct val="25000"/>
+                <a:buFont typeface="Calibri"/>
+                <a:buNone/>
+                <a:defRPr/>
+              </a:pPr>
+              <a:r>
+                <a:rPr lang="ko-KR" sz="1200">
+                  <a:solidFill>
+                    <a:schemeClr val="lt1"/>
+                  </a:solidFill>
+                  <a:latin typeface="Calibri"/>
+                  <a:ea typeface="Calibri"/>
+                  <a:cs typeface="Calibri"/>
+                  <a:sym typeface="Calibri"/>
+                </a:rPr>
+                <a:t>MLCM_501</a:t>
+              </a:r>
+              <a:r>
+                <a:rPr lang="en-US" altLang="ko-KR" sz="1200">
+                  <a:solidFill>
+                    <a:schemeClr val="lt1"/>
+                  </a:solidFill>
+                  <a:latin typeface="Calibri"/>
+                  <a:ea typeface="Calibri"/>
+                  <a:cs typeface="Calibri"/>
+                  <a:sym typeface="Calibri"/>
+                </a:rPr>
+                <a:t/>
+              </a:r>
+              <a:endParaRPr sz="1200">
+                <a:solidFill>
+                  <a:schemeClr val="lt1"/>
+                </a:solidFill>
+                <a:latin typeface="Calibri"/>
+                <a:ea typeface="Calibri"/>
+                <a:cs typeface="Calibri"/>
+                <a:sym typeface="Calibri"/>
+              </a:endParaRPr>
+            </a:p>
+          </p:txBody>
+        </p:sp>
+      </p:grpSp>
+      <p:grpSp>
+        <p:nvGrpSpPr>
+          <p:cNvPr id="358" name="Google Shape;358;p10"/>
+          <p:cNvGrpSpPr/>
+          <p:nvPr/>
+        </p:nvGrpSpPr>
+        <p:grpSpPr>
+          <a:xfrm>
+            <a:off x="285750" y="5814695"/>
+            <a:ext cx="2171700" cy="607695"/>
+            <a:chOff x="285750" y="5814695"/>
+            <a:chExt cx="2171700" cy="607695"/>
+          </a:xfrm>
+        </p:grpSpPr>
+        <p:sp>
+          <p:nvSpPr>
+            <p:cNvPr id="359" name="Google Shape;359;p10"/>
+            <p:cNvSpPr txBox="1"/>
+            <p:nvPr/>
+          </p:nvSpPr>
+          <p:spPr>
+            <a:xfrm>
+              <a:off x="285750" y="5814695"/>
+              <a:ext cx="800735" cy="338455"/>
+            </a:xfrm>
+            <a:prstGeom prst="rect">
+              <a:avLst/>
+            </a:prstGeom>
+            <a:noFill/>
+            <a:ln>
+              <a:noFill/>
+            </a:ln>
+          </p:spPr>
+          <p:txBody>
+            <a:bodyPr wrap="square" lIns="91425" tIns="45700" rIns="91425" bIns="45700" anchor="t" anchorCtr="0">
+              <a:spAutoFit/>
+            </a:bodyPr>
+            <a:lstStyle/>
+            <a:p>
+              <a:pPr marL="0" marR="0" lvl="0" indent="0" algn="l" rtl="0">
+                <a:spcBef>
+                  <a:spcPts val="0"/>
+                </a:spcBef>
+                <a:spcAft>
+                  <a:spcPts val="0"/>
+                </a:spcAft>
+                <a:buClr>
+                  <a:schemeClr val="lt1"/>
+                </a:buClr>
+                <a:buSzPct val="25000"/>
+                <a:buFont typeface="Calibri"/>
+                <a:buNone/>
+                <a:defRPr/>
+              </a:pPr>
+              <a:r>
+                <a:rPr lang="ko-KR" sz="1600" b="1">
+                  <a:solidFill>
+                    <a:schemeClr val="lt1"/>
+                  </a:solidFill>
+                  <a:latin typeface="Calibri"/>
+                  <a:ea typeface="Calibri"/>
+                  <a:cs typeface="Calibri"/>
+                  <a:sym typeface="Calibri"/>
+                </a:rPr>
+                <a:t>작성자</a:t>
+              </a:r>
+              <a:endParaRPr sz="1600" b="1">
+                <a:solidFill>
+                  <a:schemeClr val="lt1"/>
+                </a:solidFill>
+                <a:latin typeface="Calibri"/>
+                <a:ea typeface="Calibri"/>
+                <a:cs typeface="Calibri"/>
+                <a:sym typeface="Calibri"/>
+              </a:endParaRPr>
+            </a:p>
+          </p:txBody>
+        </p:sp>
+        <p:sp>
+          <p:nvSpPr>
+            <p:cNvPr id="360" name="Google Shape;360;p10"/>
+            <p:cNvSpPr txBox="1"/>
+            <p:nvPr/>
+          </p:nvSpPr>
+          <p:spPr>
+            <a:xfrm>
+              <a:off x="285750" y="6145530"/>
+              <a:ext cx="2171700" cy="276860"/>
+            </a:xfrm>
+            <a:prstGeom prst="rect">
+              <a:avLst/>
+            </a:prstGeom>
+            <a:noFill/>
+            <a:ln>
+              <a:noFill/>
+            </a:ln>
+          </p:spPr>
+          <p:txBody>
+            <a:bodyPr wrap="square" lIns="91425" tIns="45700" rIns="91425" bIns="45700" anchor="t" anchorCtr="0">
+              <a:spAutoFit/>
+            </a:bodyPr>
+            <a:lstStyle/>
+            <a:p>
+              <a:pPr marL="0" marR="0" lvl="0" indent="0" algn="l" rtl="0">
+                <a:spcBef>
+                  <a:spcPts val="0"/>
+                </a:spcBef>
+                <a:spcAft>
+                  <a:spcPts val="0"/>
+                </a:spcAft>
+                <a:buClr>
+                  <a:schemeClr val="lt1"/>
+                </a:buClr>
+                <a:buSzPct val="25000"/>
+                <a:buFont typeface="Calibri"/>
+                <a:buNone/>
+                <a:defRPr/>
+              </a:pPr>
+              <a:r>
+                <a:rPr lang="ko-KR" sz="1200">
+                  <a:solidFill>
+                    <a:schemeClr val="lt1"/>
+                  </a:solidFill>
+                  <a:latin typeface="Calibri"/>
+                  <a:ea typeface="Calibri"/>
+                  <a:cs typeface="Calibri"/>
+                  <a:sym typeface="Calibri"/>
+                </a:rPr>
+                <a:t>팀장 – 이응균 / 팀원 - 함은선</a:t>
+              </a:r>
+              <a:endParaRPr sz="1200">
+                <a:solidFill>
+                  <a:schemeClr val="lt1"/>
+                </a:solidFill>
+                <a:latin typeface="Calibri"/>
+                <a:ea typeface="Calibri"/>
+                <a:cs typeface="Calibri"/>
+                <a:sym typeface="Calibri"/>
+              </a:endParaRPr>
+            </a:p>
+          </p:txBody>
+        </p:sp>
+      </p:grpSp>
+      <p:sp>
+        <p:nvSpPr>
+          <p:cNvPr id="361" name="Google Shape;361;p10"/>
+          <p:cNvSpPr txBox="1"/>
+          <p:nvPr/>
+        </p:nvSpPr>
+        <p:spPr>
+          <a:xfrm>
+            <a:off x="285750" y="3316605"/>
+            <a:ext cx="2380615" cy="634345"/>
+          </a:xfrm>
+          <a:prstGeom prst="rect">
+            <a:avLst/>
+          </a:prstGeom>
+          <a:noFill/>
+          <a:ln>
+            <a:noFill/>
+          </a:ln>
+        </p:spPr>
+        <p:txBody>
+          <a:bodyPr wrap="square" lIns="91425" tIns="45700" rIns="91425" bIns="45700" anchor="t" anchorCtr="0">
+            <a:spAutoFit/>
+          </a:bodyPr>
+          <a:lstStyle/>
+          <a:p>
+            <a:pPr marL="0" marR="0" lvl="0" indent="0" algn="l" rtl="0">
+              <a:spcBef>
+                <a:spcPts val="0"/>
+              </a:spcBef>
+              <a:spcAft>
+                <a:spcPts val="0"/>
+              </a:spcAft>
+              <a:buClr>
+                <a:schemeClr val="lt1"/>
+              </a:buClr>
+              <a:buSzPct val="25000"/>
+              <a:buFont typeface="Calibri"/>
+              <a:buNone/>
+              <a:defRPr/>
+            </a:pPr>
+            <a:endParaRPr lang="ko-KR" altLang="en-US" sz="1200">
+              <a:solidFill>
+                <a:schemeClr val="lt1"/>
+              </a:solidFill>
+              <a:latin typeface="Calibri"/>
+              <a:ea typeface="Calibri"/>
+              <a:cs typeface="Calibri"/>
+              <a:sym typeface="Calibri"/>
+            </a:endParaRPr>
+          </a:p>
+          <a:p>
+            <a:pPr marL="0" marR="0" lvl="0" indent="0" algn="l" rtl="0">
+              <a:spcBef>
+                <a:spcPts val="0"/>
+              </a:spcBef>
+              <a:spcAft>
+                <a:spcPts val="0"/>
+              </a:spcAft>
+              <a:buClr>
+                <a:schemeClr val="lt1"/>
+              </a:buClr>
+              <a:buSzPct val="25000"/>
+              <a:buFont typeface="Calibri"/>
+              <a:buNone/>
+              <a:defRPr/>
+            </a:pPr>
+            <a:r>
+              <a:rPr lang="ko-KR" altLang="en-US" sz="1200">
+                <a:solidFill>
+                  <a:schemeClr val="lt1"/>
+                </a:solidFill>
+                <a:latin typeface="Calibri"/>
+                <a:ea typeface="Calibri"/>
+                <a:cs typeface="Calibri"/>
+                <a:sym typeface="Calibri"/>
+              </a:rPr>
+              <a:t>관리자가 전체 사용자의 위험도 분포를 요약 조회하고 고위험군을 우선 식별하는 웹 화면</a:t>
+            </a:r>
+          </a:p>
+        </p:txBody>
+      </p:sp>
+      <p:grpSp>
+        <p:nvGrpSpPr>
+          <p:cNvPr id="362" name="Google Shape;362;p10"/>
+          <p:cNvGrpSpPr/>
+          <p:nvPr/>
+        </p:nvGrpSpPr>
+        <p:grpSpPr>
+          <a:xfrm>
+            <a:off x="285750" y="4504055"/>
+            <a:ext cx="2372360" cy="599440"/>
+            <a:chOff x="285750" y="4504055"/>
+            <a:chExt cx="2372360" cy="599440"/>
+          </a:xfrm>
+        </p:grpSpPr>
+        <p:sp>
+          <p:nvSpPr>
+            <p:cNvPr id="363" name="Google Shape;363;p10"/>
+            <p:cNvSpPr txBox="1"/>
+            <p:nvPr/>
+          </p:nvSpPr>
+          <p:spPr>
+            <a:xfrm>
+              <a:off x="285750" y="4504055"/>
+              <a:ext cx="1098550" cy="338455"/>
+            </a:xfrm>
+            <a:prstGeom prst="rect">
+              <a:avLst/>
+            </a:prstGeom>
+            <a:noFill/>
+            <a:ln>
+              <a:noFill/>
+            </a:ln>
+          </p:spPr>
+          <p:txBody>
+            <a:bodyPr wrap="square" lIns="91425" tIns="45700" rIns="91425" bIns="45700" anchor="t" anchorCtr="0">
+              <a:spAutoFit/>
+            </a:bodyPr>
+            <a:lstStyle/>
+            <a:p>
+              <a:pPr marL="0" marR="0" lvl="0" indent="0" algn="l" rtl="0">
+                <a:spcBef>
+                  <a:spcPts val="0"/>
+                </a:spcBef>
+                <a:spcAft>
+                  <a:spcPts val="0"/>
+                </a:spcAft>
+                <a:buClr>
+                  <a:schemeClr val="lt1"/>
+                </a:buClr>
+                <a:buSzPct val="25000"/>
+                <a:buFont typeface="Calibri"/>
+                <a:buNone/>
+                <a:defRPr/>
+              </a:pPr>
+              <a:r>
+                <a:rPr lang="ko-KR" sz="1600" b="1">
+                  <a:solidFill>
+                    <a:schemeClr val="lt1"/>
+                  </a:solidFill>
+                  <a:latin typeface="Calibri"/>
+                  <a:ea typeface="Calibri"/>
+                  <a:cs typeface="Calibri"/>
+                  <a:sym typeface="Calibri"/>
+                </a:rPr>
+                <a:t>메뉴경로</a:t>
+              </a:r>
+              <a:endParaRPr sz="1600" b="1">
+                <a:solidFill>
+                  <a:schemeClr val="lt1"/>
+                </a:solidFill>
+                <a:latin typeface="Calibri"/>
+                <a:ea typeface="Calibri"/>
+                <a:cs typeface="Calibri"/>
+                <a:sym typeface="Calibri"/>
+              </a:endParaRPr>
+            </a:p>
+          </p:txBody>
+        </p:sp>
+        <p:sp>
+          <p:nvSpPr>
+            <p:cNvPr id="364" name="Google Shape;364;p10"/>
+            <p:cNvSpPr txBox="1"/>
+            <p:nvPr/>
+          </p:nvSpPr>
+          <p:spPr>
+            <a:xfrm>
+              <a:off x="285750" y="4835525"/>
+              <a:ext cx="2372360" cy="267970"/>
+            </a:xfrm>
+            <a:prstGeom prst="rect">
+              <a:avLst/>
+            </a:prstGeom>
+            <a:noFill/>
+            <a:ln>
+              <a:noFill/>
+            </a:ln>
+          </p:spPr>
+          <p:txBody>
+            <a:bodyPr wrap="square" lIns="91425" tIns="45700" rIns="91425" bIns="45700" anchor="t" anchorCtr="0">
+              <a:spAutoFit/>
+            </a:bodyPr>
+            <a:lstStyle/>
+            <a:p>
+              <a:pPr marL="0" marR="0" lvl="0" indent="0" algn="l" rtl="0">
+                <a:spcBef>
+                  <a:spcPts val="0"/>
+                </a:spcBef>
+                <a:spcAft>
+                  <a:spcPts val="0"/>
+                </a:spcAft>
+                <a:buClr>
+                  <a:schemeClr val="lt1"/>
+                </a:buClr>
+                <a:buSzPct val="25000"/>
+                <a:buFont typeface="Calibri"/>
+                <a:buNone/>
+                <a:defRPr/>
+              </a:pPr>
+              <a:r>
+                <a:rPr lang="ko-KR" sz="1200">
+                  <a:solidFill>
+                    <a:schemeClr val="lt1"/>
+                  </a:solidFill>
+                  <a:latin typeface="Calibri"/>
+                  <a:ea typeface="Calibri"/>
+                  <a:cs typeface="Calibri"/>
+                  <a:sym typeface="Calibri"/>
+                </a:rPr>
+                <a:t>(관리자 웹) 관제 대시보드</a:t>
+              </a:r>
+              <a:endParaRPr sz="1200">
+                <a:solidFill>
+                  <a:schemeClr val="lt1"/>
+                </a:solidFill>
+                <a:latin typeface="Calibri"/>
+                <a:ea typeface="Calibri"/>
+                <a:cs typeface="Calibri"/>
+                <a:sym typeface="Calibri"/>
+              </a:endParaRPr>
+            </a:p>
+          </p:txBody>
+        </p:sp>
+      </p:grpSp>
+      <p:sp>
+        <p:nvSpPr>
+          <p:cNvPr id="365" name="Google Shape;365;p10"/>
+          <p:cNvSpPr txBox="1"/>
+          <p:nvPr/>
+        </p:nvSpPr>
+        <p:spPr>
+          <a:xfrm>
+            <a:off x="285750" y="2981960"/>
+            <a:ext cx="1005840" cy="338455"/>
+          </a:xfrm>
+          <a:prstGeom prst="rect">
+            <a:avLst/>
+          </a:prstGeom>
+          <a:noFill/>
+          <a:ln>
+            <a:noFill/>
+          </a:ln>
+        </p:spPr>
+        <p:txBody>
+          <a:bodyPr wrap="square" lIns="91425" tIns="45700" rIns="91425" bIns="45700" anchor="t" anchorCtr="0">
+            <a:spAutoFit/>
+          </a:bodyPr>
+          <a:lstStyle/>
+          <a:p>
+            <a:pPr marL="0" marR="0" lvl="0" indent="0" algn="l" rtl="0">
+              <a:spcBef>
+                <a:spcPts val="0"/>
+              </a:spcBef>
+              <a:spcAft>
+                <a:spcPts val="0"/>
+              </a:spcAft>
+              <a:buClr>
+                <a:schemeClr val="lt1"/>
+              </a:buClr>
+              <a:buSzPct val="25000"/>
+              <a:buFont typeface="Calibri"/>
+              <a:buNone/>
+              <a:defRPr/>
+            </a:pPr>
+            <a:r>
+              <a:rPr lang="ko-KR" sz="1600" b="1">
+                <a:solidFill>
+                  <a:schemeClr val="lt1"/>
+                </a:solidFill>
+                <a:latin typeface="Calibri"/>
+                <a:ea typeface="Calibri"/>
+                <a:cs typeface="Calibri"/>
+                <a:sym typeface="Calibri"/>
+              </a:rPr>
+              <a:t>화면개요</a:t>
+            </a:r>
+            <a:endParaRPr sz="1600" b="1">
+              <a:solidFill>
+                <a:schemeClr val="lt1"/>
+              </a:solidFill>
+              <a:latin typeface="Calibri"/>
+              <a:ea typeface="Calibri"/>
+              <a:cs typeface="Calibri"/>
+              <a:sym typeface="Calibri"/>
+            </a:endParaRPr>
+          </a:p>
+        </p:txBody>
+      </p:sp>
+      <p:pic>
+        <p:nvPicPr>
+          <p:cNvPr id="370" name="그림 369"/>
+          <p:cNvPicPr>
+            <a:picLocks noChangeAspect="1"/>
+          </p:cNvPicPr>
+          <p:nvPr/>
+        </p:nvPicPr>
+        <p:blipFill rotWithShape="1">
+          <a:blip r:embed="rId3"/>
+          <a:stretch>
+            <a:fillRect/>
+          </a:stretch>
+        </p:blipFill>
+        <p:spPr>
+          <a:xfrm>
+            <a:off x="3922000" y="1075027"/>
+            <a:ext cx="4800000" cy="3000000"/>
+          </a:xfrm>
+          <a:prstGeom prst="rect">
+            <a:avLst/>
+          </a:prstGeom>
+        </p:spPr>
+      </p:pic>
+    </p:spTree>
+    <p:extLst>
+      <p:ext uri="{BB962C8B-B14F-4D97-AF65-F5344CB8AC3E}">
+        <p14:creationId xmlns:p14="http://schemas.microsoft.com/office/powerpoint/2010/main" val="2759204891"/>
+      </p:ext>
+    </p:extLst>
+  </p:cSld>
+  <p:clrMapOvr>
+    <a:masterClrMapping/>
+  </p:clrMapOvr>
+</p:sld>
+</file>
+
 <file path=ppt/slides/slide3.xml><?xml version="1.0" encoding="utf-8"?>
 <p:sld xmlns:a="http://schemas.openxmlformats.org/drawingml/2006/main" xmlns:r="http://schemas.openxmlformats.org/officeDocument/2006/relationships" xmlns:p="http://schemas.openxmlformats.org/presentationml/2006/main">
   <p:cSld>
@@ -38833,7 +47245,7 @@
                 <a:cs typeface="Calibri"/>
                 <a:sym typeface="Calibri"/>
               </a:rPr>
-              <a:t>➑</a:t>
+              <a:t>❽</a:t>
             </a:r>
             <a:r>
               <a:rPr lang="ko-KR" sz="1200" b="0" i="0">

--- a/Documents/화면설계서_귀기울임.pptx
+++ b/Documents/화면설계서_귀기울임.pptx
@@ -15396,32 +15396,8 @@
         </p:blipFill>
         <p:spPr>
           <a:xfrm>
-            <a:off x="5213715" y="15620"/>
-            <a:ext cx="2355301" cy="5097114"/>
-          </a:xfrm>
-          <a:prstGeom prst="rect">
-            <a:avLst/>
-          </a:prstGeom>
-        </p:spPr>
-      </p:pic>
-      <p:pic>
-        <p:nvPicPr>
-          <p:cNvPr id="285" name="그림 284"/>
-          <p:cNvPicPr>
-            <a:picLocks noChangeAspect="1"/>
-          </p:cNvPicPr>
-          <p:nvPr/>
-        </p:nvPicPr>
-        <p:blipFill rotWithShape="1">
-          <a:blip r:embed="rId4"/>
-          <a:stretch>
-            <a:fillRect/>
-          </a:stretch>
-        </p:blipFill>
-        <p:spPr>
-          <a:xfrm>
-            <a:off x="5213715" y="11430"/>
-            <a:ext cx="2355302" cy="5097114"/>
+            <a:off x="5135035" y="0"/>
+            <a:ext cx="2379765" cy="5150055"/>
           </a:xfrm>
           <a:prstGeom prst="rect">
             <a:avLst/>
@@ -16927,32 +16903,8 @@
         </p:blipFill>
         <p:spPr>
           <a:xfrm>
-            <a:off x="3959059" y="28575"/>
-            <a:ext cx="2362358" cy="5112385"/>
-          </a:xfrm>
-          <a:prstGeom prst="rect">
-            <a:avLst/>
-          </a:prstGeom>
-        </p:spPr>
-      </p:pic>
-      <p:pic>
-        <p:nvPicPr>
-          <p:cNvPr id="312" name="그림 311"/>
-          <p:cNvPicPr>
-            <a:picLocks noChangeAspect="1"/>
-          </p:cNvPicPr>
-          <p:nvPr/>
-        </p:nvPicPr>
-        <p:blipFill rotWithShape="1">
-          <a:blip r:embed="rId4"/>
-          <a:stretch>
-            <a:fillRect/>
-          </a:stretch>
-        </p:blipFill>
-        <p:spPr>
-          <a:xfrm>
-            <a:off x="6345940" y="28575"/>
-            <a:ext cx="2363673" cy="5115230"/>
+            <a:off x="5135035" y="0"/>
+            <a:ext cx="2379765" cy="5150055"/>
           </a:xfrm>
           <a:prstGeom prst="rect">
             <a:avLst/>
@@ -16967,7 +16919,7 @@
         </p:nvSpPr>
         <p:spPr>
           <a:xfrm>
-            <a:off x="4167187" y="2121535"/>
+            <a:off x="5269278" y="1525490"/>
             <a:ext cx="266700" cy="264795"/>
           </a:xfrm>
           <a:prstGeom prst="rect">
@@ -17018,7 +16970,7 @@
         </p:nvSpPr>
         <p:spPr>
           <a:xfrm>
-            <a:off x="6565106" y="2121535"/>
+            <a:off x="6367631" y="1525490"/>
             <a:ext cx="266700" cy="266700"/>
           </a:xfrm>
           <a:prstGeom prst="rect">
@@ -17069,7 +17021,7 @@
         </p:nvSpPr>
         <p:spPr>
           <a:xfrm>
-            <a:off x="4320733" y="3604895"/>
+            <a:off x="5269278" y="4271372"/>
             <a:ext cx="266700" cy="272415"/>
           </a:xfrm>
           <a:prstGeom prst="rect">
@@ -17108,56 +17060,6 @@
               </a:rPr>
               <a:t>❸</a:t>
             </a:r>
-            <a:endParaRPr lang="ko-KR" altLang="en-US"/>
-          </a:p>
-        </p:txBody>
-      </p:sp>
-      <p:sp>
-        <p:nvSpPr>
-          <p:cNvPr id="316" name="직사각형 315"/>
-          <p:cNvSpPr/>
-          <p:nvPr/>
-        </p:nvSpPr>
-        <p:spPr>
-          <a:xfrm>
-            <a:off x="4953000" y="4343400"/>
-            <a:ext cx="412750" cy="234950"/>
-          </a:xfrm>
-          <a:prstGeom prst="rect">
-            <a:avLst/>
-          </a:prstGeom>
-          <a:solidFill>
-            <a:schemeClr val="lt1"/>
-          </a:solidFill>
-          <a:ln>
-            <a:solidFill>
-              <a:schemeClr val="lt1"/>
-            </a:solidFill>
-          </a:ln>
-        </p:spPr>
-        <p:style>
-          <a:lnRef idx="2">
-            <a:schemeClr val="accent1">
-              <a:shade val="20000"/>
-            </a:schemeClr>
-          </a:lnRef>
-          <a:fillRef idx="1">
-            <a:schemeClr val="accent1"/>
-          </a:fillRef>
-          <a:effectRef idx="0">
-            <a:schemeClr val="accent1"/>
-          </a:effectRef>
-          <a:fontRef idx="minor">
-            <a:schemeClr val="lt1"/>
-          </a:fontRef>
-        </p:style>
-        <p:txBody>
-          <a:bodyPr anchor="ctr"/>
-          <a:lstStyle/>
-          <a:p>
-            <a:pPr lvl="0" algn="ctr">
-              <a:defRPr/>
-            </a:pPr>
             <a:endParaRPr lang="ko-KR" altLang="en-US"/>
           </a:p>
         </p:txBody>
@@ -18626,8 +18528,8 @@
         </p:blipFill>
         <p:spPr>
           <a:xfrm>
-            <a:off x="5179337" y="19050"/>
-            <a:ext cx="2369899" cy="5128705"/>
+            <a:off x="5135035" y="0"/>
+            <a:ext cx="2379765" cy="5150055"/>
           </a:xfrm>
           <a:prstGeom prst="rect">
             <a:avLst/>
@@ -20198,8 +20100,8 @@
         </p:blipFill>
         <p:spPr>
           <a:xfrm>
-            <a:off x="5142593" y="19050"/>
-            <a:ext cx="2364648" cy="5117341"/>
+            <a:off x="5135035" y="0"/>
+            <a:ext cx="2379765" cy="5150055"/>
           </a:xfrm>
           <a:prstGeom prst="rect">
             <a:avLst/>
@@ -21568,8 +21470,8 @@
         </p:blipFill>
         <p:spPr>
           <a:xfrm>
-            <a:off x="5139442" y="19050"/>
-            <a:ext cx="2370951" cy="5130981"/>
+            <a:off x="5135035" y="0"/>
+            <a:ext cx="2379765" cy="5150055"/>
           </a:xfrm>
           <a:prstGeom prst="rect">
             <a:avLst/>
@@ -44598,8 +44500,8 @@
         </p:blipFill>
         <p:spPr>
           <a:xfrm>
-            <a:off x="5144058" y="19050"/>
-            <a:ext cx="2361084" cy="5109629"/>
+            <a:off x="5135035" y="0"/>
+            <a:ext cx="2379765" cy="5150055"/>
           </a:xfrm>
           <a:prstGeom prst="rect">
             <a:avLst/>
@@ -46269,8 +46171,8 @@
         </p:blipFill>
         <p:spPr>
           <a:xfrm>
-            <a:off x="5149950" y="23711"/>
-            <a:ext cx="2349934" cy="5085498"/>
+            <a:off x="5135035" y="0"/>
+            <a:ext cx="2379765" cy="5150055"/>
           </a:xfrm>
           <a:prstGeom prst="rect">
             <a:avLst/>
@@ -46683,8 +46585,8 @@
         </p:blipFill>
         <p:spPr>
           <a:xfrm>
-            <a:off x="5150002" y="26035"/>
-            <a:ext cx="2349831" cy="5085275"/>
+            <a:off x="5135035" y="0"/>
+            <a:ext cx="2379765" cy="5150055"/>
           </a:xfrm>
           <a:prstGeom prst="rect">
             <a:avLst/>

--- a/Documents/화면설계서_귀기울임.pptx
+++ b/Documents/화면설계서_귀기울임.pptx
@@ -15662,7 +15662,7 @@
                 <a:cs typeface="맑은 고딕"/>
                 <a:sym typeface="맑은 고딕"/>
               </a:rPr>
-              <a:t>-캐릭터 카드를 물리적으로</a:t>
+              <a:t>❶</a:t>
             </a:r>
             <a:r>
               <a:rPr lang="en-US" altLang="ko-KR" sz="1200" b="0" i="0">
@@ -15674,7 +15674,7 @@
                 <a:cs typeface="맑은 고딕"/>
                 <a:sym typeface="맑은 고딕"/>
               </a:rPr>
-              <a:t>(</a:t>
+              <a:t> [F] 따스한 공감형 : 감정 경청 및 따뜻한 위로 중심</a:t>
             </a:r>
             <a:r>
               <a:rPr lang="ko-KR" altLang="en-US" sz="1200" b="0" i="0">
@@ -15686,7 +15686,7 @@
                 <a:cs typeface="맑은 고딕"/>
                 <a:sym typeface="맑은 고딕"/>
               </a:rPr>
-              <a:t>스와이프 형식</a:t>
+              <a:t/>
             </a:r>
             <a:r>
               <a:rPr lang="en-US" altLang="ko-KR" sz="1200" b="0" i="0">
@@ -15698,7 +15698,7 @@
                 <a:cs typeface="맑은 고딕"/>
                 <a:sym typeface="맑은 고딕"/>
               </a:rPr>
-              <a:t>)</a:t>
+              <a:t/>
             </a:r>
             <a:r>
               <a:rPr lang="ko-KR" altLang="en-US" sz="1200" b="0" i="0">
@@ -15710,7 +15710,7 @@
                 <a:cs typeface="맑은 고딕"/>
                 <a:sym typeface="맑은 고딕"/>
               </a:rPr>
-              <a:t> </a:t>
+              <a:t/>
             </a:r>
             <a:r>
               <a:rPr lang="ko-KR" sz="1200" b="0" i="0">
@@ -15722,7 +15722,7 @@
                 <a:cs typeface="맑은 고딕"/>
                 <a:sym typeface="맑은 고딕"/>
               </a:rPr>
-              <a:t>선택하는 UI</a:t>
+              <a:t/>
             </a:r>
           </a:p>
           <a:p>
@@ -15750,7 +15750,7 @@
                 <a:cs typeface="맑은 고딕"/>
                 <a:sym typeface="맑은 고딕"/>
               </a:rPr>
-              <a:t>❶</a:t>
+              <a:t>❷</a:t>
             </a:r>
             <a:r>
               <a:rPr lang="ko-KR" sz="1200" b="0" i="0">
@@ -15762,7 +15762,7 @@
                 <a:cs typeface="맑은 고딕"/>
                 <a:sym typeface="맑은 고딕"/>
               </a:rPr>
-              <a:t> [F] 따</a:t>
+              <a:t> [T] 현실적인 조언형 : 객관적 상황 분석 및 문제 해결 중심</a:t>
             </a:r>
             <a:r>
               <a:rPr lang="ko-KR" altLang="en-US" sz="1200" b="0" i="0">
@@ -15774,7 +15774,7 @@
                 <a:cs typeface="맑은 고딕"/>
                 <a:sym typeface="맑은 고딕"/>
               </a:rPr>
-              <a:t>스한</a:t>
+              <a:t/>
             </a:r>
             <a:r>
               <a:rPr lang="ko-KR" sz="1200" b="0" i="0">
@@ -15786,7 +15786,7 @@
                 <a:cs typeface="맑은 고딕"/>
                 <a:sym typeface="맑은 고딕"/>
               </a:rPr>
-              <a:t> 공</a:t>
+              <a:t/>
             </a:r>
             <a:r>
               <a:rPr lang="ko-KR" altLang="en-US" sz="1200" b="0" i="0">
@@ -15798,7 +15798,7 @@
                 <a:cs typeface="맑은 고딕"/>
                 <a:sym typeface="맑은 고딕"/>
               </a:rPr>
-              <a:t>감형</a:t>
+              <a:t/>
             </a:r>
             <a:r>
               <a:rPr lang="en-US" altLang="ko-KR" sz="1200" b="0" i="0">
@@ -15810,7 +15810,7 @@
                 <a:cs typeface="맑은 고딕"/>
                 <a:sym typeface="맑은 고딕"/>
               </a:rPr>
-              <a:t> </a:t>
+              <a:t/>
             </a:r>
             <a:r>
               <a:rPr lang="ko-KR" sz="1200" b="0" i="0">
@@ -15822,7 +15822,7 @@
                 <a:cs typeface="맑은 고딕"/>
                 <a:sym typeface="맑은 고딕"/>
               </a:rPr>
-              <a:t>: 감정 경청 및 따뜻한 위로 중심  </a:t>
+              <a:t/>
             </a:r>
           </a:p>
           <a:p>
@@ -15850,7 +15850,7 @@
                 <a:cs typeface="맑은 고딕"/>
                 <a:sym typeface="맑은 고딕"/>
               </a:rPr>
-              <a:t>❷</a:t>
+              <a:t>❸</a:t>
             </a:r>
             <a:r>
               <a:rPr lang="ko-KR" sz="1200" b="0" i="0">
@@ -15862,7 +15862,7 @@
                 <a:cs typeface="맑은 고딕"/>
                 <a:sym typeface="맑은 고딕"/>
               </a:rPr>
-              <a:t> [T] </a:t>
+              <a:t> 대화 시작: 실시간 대화 화면(MAIN_CHAT_02)으로 이동</a:t>
             </a:r>
             <a:r>
               <a:rPr lang="ko-KR" altLang="en-US" sz="1200" b="0" i="0">
@@ -15874,7 +15874,7 @@
                 <a:cs typeface="맑은 고딕"/>
                 <a:sym typeface="맑은 고딕"/>
               </a:rPr>
-              <a:t>현실적인</a:t>
+              <a:t/>
             </a:r>
             <a:r>
               <a:rPr lang="en-US" altLang="ko-KR" sz="1200" b="0" i="0">
@@ -15886,7 +15886,7 @@
                 <a:cs typeface="맑은 고딕"/>
                 <a:sym typeface="맑은 고딕"/>
               </a:rPr>
-              <a:t> </a:t>
+              <a:t/>
             </a:r>
             <a:r>
               <a:rPr lang="ko-KR" altLang="en-US" sz="1200" b="0" i="0">
@@ -15898,7 +15898,7 @@
                 <a:cs typeface="맑은 고딕"/>
                 <a:sym typeface="맑은 고딕"/>
               </a:rPr>
-              <a:t>조언형</a:t>
+              <a:t/>
             </a:r>
             <a:r>
               <a:rPr lang="en-US" altLang="ko-KR" sz="1200" b="0" i="0">
@@ -15910,7 +15910,7 @@
                 <a:cs typeface="맑은 고딕"/>
                 <a:sym typeface="맑은 고딕"/>
               </a:rPr>
-              <a:t> </a:t>
+              <a:t/>
             </a:r>
             <a:r>
               <a:rPr lang="ko-KR" sz="1200" b="0" i="0">
@@ -15922,7 +15922,7 @@
                 <a:cs typeface="맑은 고딕"/>
                 <a:sym typeface="맑은 고딕"/>
               </a:rPr>
-              <a:t>: 객관적 상황 분석 및 문제 해결 중심 </a:t>
+              <a:t/>
             </a:r>
           </a:p>
           <a:p>
@@ -15950,7 +15950,7 @@
                 <a:cs typeface="맑은 고딕"/>
                 <a:sym typeface="맑은 고딕"/>
               </a:rPr>
-              <a:t>❸</a:t>
+              <a:t>❹</a:t>
             </a:r>
             <a:r>
               <a:rPr lang="ko-KR" sz="1200" b="0" i="0">
@@ -15962,7 +15962,7 @@
                 <a:cs typeface="맑은 고딕"/>
                 <a:sym typeface="맑은 고딕"/>
               </a:rPr>
-              <a:t> 대화 시작 버튼을 통해 실시간 대화 및 대화 기록 조회 화면으로 이동(MAIN_CHAT_02)</a:t>
+              <a:t> 최근 대화한 성격이 기본 표시되며 「최근 대화」 배지로 구분</a:t>
             </a:r>
             <a:endParaRPr sz="1200" b="0" i="0">
               <a:solidFill>
@@ -19004,7 +19004,7 @@
                 <a:cs typeface="Calibri"/>
                 <a:sym typeface="Calibri"/>
               </a:rPr>
-              <a:t> 오늘의 감정: 대표 감정 이모지, 정서 점수 및 긍정/중립/부정 상태 분포</a:t>
+              <a:t> 오늘의 마음 상태: 상태 안내 문구와 정서 점수 표시</a:t>
             </a:r>
           </a:p>
           <a:p>
@@ -21749,7 +21749,7 @@
                 <a:cs typeface="Calibri"/>
                 <a:sym typeface="Calibri"/>
               </a:rPr>
-              <a:t> 웨어러블 연동: 기기명·연동 여부 표시, 항목별(활동량·수면·체성분) 동의 개별 토글</a:t>
+              <a:t> 웨어러블 연동: 기기명·연동 여부, 항목별 동의 개별 토글</a:t>
             </a:r>
           </a:p>
           <a:p>
@@ -21789,7 +21789,7 @@
                 <a:cs typeface="Calibri"/>
                 <a:sym typeface="Calibri"/>
               </a:rPr>
-              <a:t> 알림 설정: 맞춤 케어 알림 수신 토글. 해제 시 추천 푸시 미발송</a:t>
+              <a:t> 알림 설정: 맞춤 케어 알림 수신 토글</a:t>
             </a:r>
           </a:p>
           <a:p>
@@ -21829,7 +21829,7 @@
                 <a:cs typeface="Calibri"/>
                 <a:sym typeface="Calibri"/>
               </a:rPr>
-              <a:t> 페르소나 변경: 현재 챗봇 성격 표시, 선택 시 성격 선택 화면(MAIN_CHAT_01) 이동</a:t>
+              <a:t> 계정 관리: 계정 관리·회원 탈퇴 화면(MAIN_SETTING_02) 이동</a:t>
             </a:r>
           </a:p>
           <a:p>
@@ -21869,7 +21869,7 @@
                 <a:cs typeface="Calibri"/>
                 <a:sym typeface="Calibri"/>
               </a:rPr>
-              <a:t> 계정 관리: 계정 관리·회원 탈퇴 화면(MAIN_SETTING_02)으로 이동</a:t>
+              <a:t> 로그아웃: 세션 무효화 후 로그인 화면(MAIN_LOGIN_01) 복귀</a:t>
             </a:r>
           </a:p>
           <a:p>
@@ -21897,7 +21897,7 @@
                 <a:cs typeface="Calibri"/>
                 <a:sym typeface="Calibri"/>
               </a:rPr>
-              <a:t>❺</a:t>
+              <a:t/>
             </a:r>
             <a:r>
               <a:rPr lang="ko-KR" sz="1200">
@@ -21909,7 +21909,7 @@
                 <a:cs typeface="Calibri"/>
                 <a:sym typeface="Calibri"/>
               </a:rPr>
-              <a:t> 로그아웃 버튼: 세션(JWT) 무효화 후 로그인 화면(MAIN_LOGIN_01)으로 복귀</a:t>
+              <a:t/>
             </a:r>
             <a:endParaRPr sz="1200">
               <a:solidFill>
@@ -22643,7 +22643,7 @@
                 <a:cs typeface="Calibri"/>
                 <a:sym typeface="Calibri"/>
               </a:rPr>
-              <a:t>웨어러블 연동과 항목별 수집 동의, 알림, 페르소나를 설정하고 계정 기능으로 진입하는 화면</a:t>
+              <a:t>웨어러블 연동과 항목별 수집 동의, 알림을 설정하고 계정 기능으로 진입하는 화면</a:t>
             </a:r>
           </a:p>
         </p:txBody>
@@ -33330,7 +33330,7 @@
                 <a:cs typeface="Calibri"/>
                 <a:sym typeface="Calibri"/>
               </a:rPr>
-              <a:t> 대상자 목록: 심각·주의 우선 정렬, 평가일시·점수</a:t>
+              <a:t>~❸ 조회 조건: 위험도 필터, 이름·이메일 검색</a:t>
             </a:r>
           </a:p>
           <a:p>
@@ -33358,7 +33358,7 @@
                 <a:cs typeface="Calibri"/>
                 <a:sym typeface="Calibri"/>
               </a:rPr>
-              <a:t>❸</a:t>
+              <a:t>❹</a:t>
             </a:r>
             <a:r>
               <a:rPr lang="ko-KR" sz="1200">
@@ -33370,7 +33370,7 @@
                 <a:cs typeface="Calibri"/>
                 <a:sym typeface="Calibri"/>
               </a:rPr>
-              <a:t> 대상자 상세: 기간별 감정 스코어·라이프로그 차트</a:t>
+              <a:t> 대상자 목록: 심각·주의 우선 정렬, 평가일시·점수</a:t>
             </a:r>
           </a:p>
           <a:p>
@@ -33398,7 +33398,7 @@
                 <a:cs typeface="Calibri"/>
                 <a:sym typeface="Calibri"/>
               </a:rPr>
-              <a:t>❹</a:t>
+              <a:t>❺</a:t>
             </a:r>
             <a:r>
               <a:rPr lang="ko-KR" sz="1200">
@@ -33410,7 +33410,7 @@
                 <a:cs typeface="Calibri"/>
                 <a:sym typeface="Calibri"/>
               </a:rPr>
-              <a:t> 위기 사건 조회: 긴급 상담 연결 노출 이력 확인</a:t>
+              <a:t> 대상자 상세: 기간별 감정 스코어·라이프로그 차트</a:t>
             </a:r>
           </a:p>
           <a:p>
@@ -33438,7 +33438,7 @@
                 <a:cs typeface="Calibri"/>
                 <a:sym typeface="Calibri"/>
               </a:rPr>
-              <a:t>❺</a:t>
+              <a:t>❻</a:t>
             </a:r>
             <a:r>
               <a:rPr lang="ko-KR" sz="1200">
@@ -33450,7 +33450,7 @@
                 <a:cs typeface="Calibri"/>
                 <a:sym typeface="Calibri"/>
               </a:rPr>
-              <a:t> 관리자 권한 계정만 접근 가능</a:t>
+              <a:t> 위기 사건 조회 · ❼ 관리자 권한 계정만 접근 가능</a:t>
             </a:r>
             <a:endParaRPr sz="1200">
               <a:solidFill>
@@ -45016,7 +45016,7 @@
                 <a:cs typeface="맑은 고딕"/>
                 <a:sym typeface="맑은 고딕"/>
               </a:rPr>
-              <a:t>~</a:t>
+              <a:t> 서비스 이용약관 · </a:t>
             </a:r>
             <a:r>
               <a:rPr lang="ko-KR" sz="1200" b="0" i="0">
@@ -45027,7 +45027,7 @@
                 <a:cs typeface="맑은 고딕"/>
                 <a:sym typeface="맑은 고딕"/>
               </a:rPr>
-              <a:t>❹</a:t>
+              <a:t>❸</a:t>
             </a:r>
             <a:r>
               <a:rPr lang="ko-KR" sz="1200" b="0" i="0">
@@ -45039,7 +45039,7 @@
                 <a:cs typeface="맑은 고딕"/>
                 <a:sym typeface="맑은 고딕"/>
               </a:rPr>
-              <a:t> 필수 동의</a:t>
+              <a:t> 개인정보 수집·이용 동의 (필수)</a:t>
             </a:r>
           </a:p>
           <a:p>
@@ -45067,7 +45067,7 @@
                 <a:cs typeface="맑은 고딕"/>
                 <a:sym typeface="맑은 고딕"/>
               </a:rPr>
-              <a:t>❺</a:t>
+              <a:t>❹</a:t>
             </a:r>
             <a:r>
               <a:rPr lang="ko-KR" sz="1200" b="0" i="0">
@@ -45079,7 +45079,7 @@
                 <a:cs typeface="맑은 고딕"/>
                 <a:sym typeface="맑은 고딕"/>
               </a:rPr>
-              <a:t> 선택 동의</a:t>
+              <a:t> 민감정보(생체·건강) 수집 동의: 별도 동의 (필수)</a:t>
             </a:r>
           </a:p>
           <a:p>
@@ -45107,7 +45107,7 @@
                 <a:cs typeface="맑은 고딕"/>
                 <a:sym typeface="맑은 고딕"/>
               </a:rPr>
-              <a:t>❻</a:t>
+              <a:t>❺</a:t>
             </a:r>
             <a:r>
               <a:rPr lang="ko-KR" sz="1200" b="0" i="0">
@@ -45119,7 +45119,7 @@
                 <a:cs typeface="맑은 고딕"/>
                 <a:sym typeface="맑은 고딕"/>
               </a:rPr>
-              <a:t> 약관에 대한 상세내용</a:t>
+              <a:t> 선택 동의 · ❻ 약관에 대한 상세내용</a:t>
             </a:r>
           </a:p>
           <a:p>
@@ -45159,7 +45159,7 @@
                 <a:cs typeface="맑은 고딕"/>
                 <a:sym typeface="맑은 고딕"/>
               </a:rPr>
-              <a:t> 필수 약관(</a:t>
+              <a:t> 필수 약관 모두 동의 시 기본정보 입력 단계로 이동</a:t>
             </a:r>
             <a:r>
               <a:rPr lang="ko-KR" sz="1200" b="0" i="0">
@@ -45170,7 +45170,7 @@
                 <a:cs typeface="맑은 고딕"/>
                 <a:sym typeface="맑은 고딕"/>
               </a:rPr>
-              <a:t>❷</a:t>
+              <a:t/>
             </a:r>
             <a:r>
               <a:rPr lang="ko-KR" sz="1200" b="0" i="0">
@@ -45182,7 +45182,7 @@
                 <a:cs typeface="맑은 고딕"/>
                 <a:sym typeface="맑은 고딕"/>
               </a:rPr>
-              <a:t>~</a:t>
+              <a:t/>
             </a:r>
             <a:r>
               <a:rPr lang="ko-KR" sz="1200" b="0" i="0">
@@ -45193,7 +45193,7 @@
                 <a:cs typeface="맑은 고딕"/>
                 <a:sym typeface="맑은 고딕"/>
               </a:rPr>
-              <a:t>❹</a:t>
+              <a:t/>
             </a:r>
             <a:r>
               <a:rPr lang="ko-KR" sz="1200" b="0" i="0">
@@ -45205,7 +45205,7 @@
                 <a:cs typeface="맑은 고딕"/>
                 <a:sym typeface="맑은 고딕"/>
               </a:rPr>
-              <a:t>) 모두 동의 시 활성화되어 기본정보 입력 단계로 이동</a:t>
+              <a:t/>
             </a:r>
             <a:endParaRPr sz="1200" b="0" i="0">
               <a:solidFill>
@@ -46187,7 +46187,7 @@
         </p:nvSpPr>
         <p:spPr>
           <a:xfrm>
-            <a:off x="5067300" y="1322914"/>
+            <a:off x="5184743" y="1050430"/>
             <a:ext cx="266700" cy="264795"/>
           </a:xfrm>
           <a:prstGeom prst="rect">
@@ -46238,7 +46238,7 @@
         </p:nvSpPr>
         <p:spPr>
           <a:xfrm>
-            <a:off x="5067300" y="1812290"/>
+            <a:off x="5184743" y="1416548"/>
             <a:ext cx="266700" cy="266700"/>
           </a:xfrm>
           <a:prstGeom prst="rect">
@@ -46289,7 +46289,7 @@
         </p:nvSpPr>
         <p:spPr>
           <a:xfrm>
-            <a:off x="5067300" y="2149475"/>
+            <a:off x="5184743" y="1669779"/>
             <a:ext cx="266700" cy="272415"/>
           </a:xfrm>
           <a:prstGeom prst="rect">
@@ -46340,7 +46340,7 @@
         </p:nvSpPr>
         <p:spPr>
           <a:xfrm>
-            <a:off x="5067300" y="2482850"/>
+            <a:off x="5184743" y="1919959"/>
             <a:ext cx="266700" cy="272415"/>
           </a:xfrm>
           <a:prstGeom prst="rect">
@@ -46391,7 +46391,7 @@
         </p:nvSpPr>
         <p:spPr>
           <a:xfrm>
-            <a:off x="5067300" y="2816225"/>
+            <a:off x="5184743" y="2652195"/>
             <a:ext cx="266700" cy="267970"/>
           </a:xfrm>
           <a:prstGeom prst="rect">
@@ -46442,7 +46442,7 @@
         </p:nvSpPr>
         <p:spPr>
           <a:xfrm>
-            <a:off x="5067300" y="3421380"/>
+            <a:off x="5184743" y="3061026"/>
             <a:ext cx="266700" cy="272415"/>
           </a:xfrm>
           <a:prstGeom prst="rect">
@@ -46493,7 +46493,7 @@
         </p:nvSpPr>
         <p:spPr>
           <a:xfrm>
-            <a:off x="6844394" y="1802765"/>
+            <a:off x="7183136" y="1416548"/>
             <a:ext cx="266700" cy="271780"/>
           </a:xfrm>
           <a:prstGeom prst="rect">

--- a/Documents/화면설계서_귀기울임.pptx
+++ b/Documents/화면설계서_귀기울임.pptx
@@ -18646,7 +18646,7 @@
         </p:nvSpPr>
         <p:spPr>
           <a:xfrm>
-            <a:off x="5091792" y="4155167"/>
+            <a:off x="5184743" y="4723810"/>
             <a:ext cx="266700" cy="272415"/>
           </a:xfrm>
           <a:prstGeom prst="rect">
@@ -18697,7 +18697,7 @@
         </p:nvSpPr>
         <p:spPr>
           <a:xfrm>
-            <a:off x="7282537" y="94189"/>
+            <a:off x="7137371" y="55810"/>
             <a:ext cx="266700" cy="267970"/>
           </a:xfrm>
           <a:prstGeom prst="rect">
@@ -47032,7 +47032,7 @@
                 <a:cs typeface="맑은 고딕"/>
                 <a:sym typeface="맑은 고딕"/>
               </a:rPr>
-              <a:t> 사용자 인적사항: 이름, 생년월일, 성별 입력</a:t>
+              <a:t> 사용자 인적사항: 이름, 생년월일, 성별, 키(선택) 입력</a:t>
             </a:r>
           </a:p>
           <a:p>
@@ -48121,7 +48121,7 @@
         </p:nvSpPr>
         <p:spPr>
           <a:xfrm>
-            <a:off x="5048250" y="1246714"/>
+            <a:off x="5184743" y="961951"/>
             <a:ext cx="266700" cy="264795"/>
           </a:xfrm>
           <a:prstGeom prst="rect">
@@ -48172,7 +48172,7 @@
         </p:nvSpPr>
         <p:spPr>
           <a:xfrm>
-            <a:off x="5048250" y="1793240"/>
+            <a:off x="5184743" y="1651473"/>
             <a:ext cx="266700" cy="266700"/>
           </a:xfrm>
           <a:prstGeom prst="rect">
@@ -48223,7 +48223,7 @@
         </p:nvSpPr>
         <p:spPr>
           <a:xfrm>
-            <a:off x="5048250" y="2339975"/>
+            <a:off x="5184743" y="2344046"/>
             <a:ext cx="266700" cy="267970"/>
           </a:xfrm>
           <a:prstGeom prst="rect">
@@ -48274,7 +48274,7 @@
         </p:nvSpPr>
         <p:spPr>
           <a:xfrm>
-            <a:off x="5048250" y="2873375"/>
+            <a:off x="5184743" y="2804744"/>
             <a:ext cx="266700" cy="267970"/>
           </a:xfrm>
           <a:prstGeom prst="rect">
@@ -48325,7 +48325,7 @@
         </p:nvSpPr>
         <p:spPr>
           <a:xfrm>
-            <a:off x="5048250" y="3368675"/>
+            <a:off x="5184743" y="3262391"/>
             <a:ext cx="266700" cy="267970"/>
           </a:xfrm>
           <a:prstGeom prst="rect">
@@ -48376,7 +48376,7 @@
         </p:nvSpPr>
         <p:spPr>
           <a:xfrm>
-            <a:off x="5048250" y="3916680"/>
+            <a:off x="5184743" y="3726140"/>
             <a:ext cx="266700" cy="272415"/>
           </a:xfrm>
           <a:prstGeom prst="rect">
@@ -48427,7 +48427,7 @@
         </p:nvSpPr>
         <p:spPr>
           <a:xfrm>
-            <a:off x="6581775" y="1246714"/>
+            <a:off x="6984822" y="961951"/>
             <a:ext cx="266700" cy="272415"/>
           </a:xfrm>
           <a:prstGeom prst="rect">
@@ -48465,6 +48465,57 @@
                 <a:sym typeface="맑은 고딕"/>
               </a:rPr>
               <a:t>❸</a:t>
+            </a:r>
+            <a:endParaRPr lang="ko-KR" altLang="en-US"/>
+          </a:p>
+        </p:txBody>
+      </p:sp>
+      <p:sp>
+        <p:nvSpPr>
+          <p:cNvPr id="296" name="가로 글상자 296"/>
+          <p:cNvSpPr txBox="1"/>
+          <p:nvPr/>
+        </p:nvSpPr>
+        <p:spPr>
+          <a:xfrm>
+            <a:off x="5184743" y="4110563"/>
+            <a:ext cx="266700" cy="272415"/>
+          </a:xfrm>
+          <a:prstGeom prst="rect">
+            <a:avLst/>
+          </a:prstGeom>
+        </p:spPr>
+        <p:txBody>
+          <a:bodyPr wrap="square">
+            <a:spAutoFit/>
+          </a:bodyPr>
+          <a:lstStyle/>
+          <a:p>
+            <a:pPr marL="0" marR="0" lvl="0" indent="0" algn="l" rtl="0">
+              <a:spcBef>
+                <a:spcPts val="0"/>
+              </a:spcBef>
+              <a:spcAft>
+                <a:spcPts val="0"/>
+              </a:spcAft>
+              <a:buClr>
+                <a:srgbClr val="31333F"/>
+              </a:buClr>
+              <a:buSzPct val="25000"/>
+              <a:buFont typeface="맑은 고딕"/>
+              <a:buNone/>
+              <a:defRPr/>
+            </a:pPr>
+            <a:r>
+              <a:rPr lang="ko-KR" sz="1200" b="0" i="0">
+                <a:solidFill>
+                  <a:srgbClr val="31333F"/>
+                </a:solidFill>
+                <a:latin typeface="맑은 고딕"/>
+                <a:cs typeface="맑은 고딕"/>
+                <a:sym typeface="맑은 고딕"/>
+              </a:rPr>
+              <a:t>❽</a:t>
             </a:r>
             <a:endParaRPr lang="ko-KR" altLang="en-US"/>
           </a:p>

--- a/Documents/화면설계서_귀기울임.pptx
+++ b/Documents/화면설계서_귀기울임.pptx
@@ -17368,7 +17368,7 @@
                 <a:cs typeface="Calibri"/>
                 <a:sym typeface="Calibri"/>
               </a:rPr>
-              <a:t> 대화 메세지 영역</a:t>
+              <a:t> 대화 메시지 영역</a:t>
             </a:r>
           </a:p>
           <a:p>
@@ -17448,7 +17448,7 @@
                 <a:cs typeface="Calibri"/>
                 <a:sym typeface="Calibri"/>
               </a:rPr>
-              <a:t> 대화종료 버튼을 통해 홈 화면(</a:t>
+              <a:t> 대화 기록: 세션 목록 최근순 조회·상세·삭제</a:t>
             </a:r>
             <a:r>
               <a:rPr lang="ko-KR" sz="1200" b="0" i="0">
@@ -17458,7 +17458,7 @@
                 <a:latin typeface="맑은 고딕"/>
                 <a:ea typeface="맑은 고딕"/>
               </a:rPr>
-              <a:t>MAIN_HOME_01)</a:t>
+              <a:t/>
             </a:r>
             <a:r>
               <a:rPr lang="ko-KR" sz="1200">
@@ -17470,7 +17470,69 @@
                 <a:cs typeface="Calibri"/>
                 <a:sym typeface="Calibri"/>
               </a:rPr>
-              <a:t>으로 이동</a:t>
+              <a:t/>
+            </a:r>
+          </a:p>
+          <a:p>
+            <a:pPr marL="0" marR="0" lvl="0" indent="0" algn="l" rtl="0">
+              <a:spcBef>
+                <a:spcPts val="0"/>
+              </a:spcBef>
+              <a:spcAft>
+                <a:spcPts val="0"/>
+              </a:spcAft>
+              <a:buClr>
+                <a:srgbClr val="31333F"/>
+              </a:buClr>
+              <a:buSzPct val="25000"/>
+              <a:buFont typeface="맑은 고딕"/>
+              <a:buNone/>
+              <a:defRPr/>
+            </a:pPr>
+            <a:r>
+              <a:rPr lang="ko-KR" sz="1200" b="0" i="0">
+                <a:solidFill>
+                  <a:srgbClr val="31333F"/>
+                </a:solidFill>
+                <a:latin typeface="맑은 고딕"/>
+                <a:cs typeface="맑은 고딕"/>
+                <a:sym typeface="맑은 고딕"/>
+              </a:rPr>
+              <a:t>❺</a:t>
+            </a:r>
+            <a:r>
+              <a:rPr lang="ko-KR" sz="1200">
+                <a:solidFill>
+                  <a:schemeClr val="dk1"/>
+                </a:solidFill>
+                <a:latin typeface="맑은 고딕"/>
+                <a:ea typeface="맑은 고딕"/>
+                <a:cs typeface="Calibri"/>
+                <a:sym typeface="Calibri"/>
+              </a:rPr>
+              <a:t> 대화종료: 홈 화면(MAIN_HOME_01)으로 이동</a:t>
+            </a:r>
+            <a:r>
+              <a:rPr lang="ko-KR" sz="1200" b="0" i="0">
+                <a:solidFill>
+                  <a:srgbClr val="31333F"/>
+                </a:solidFill>
+                <a:latin typeface="맑은 고딕"/>
+                <a:ea typeface="맑은 고딕"/>
+              </a:rPr>
+              <a:t/>
+            </a:r>
+            <a:r>
+              <a:rPr lang="ko-KR" sz="1200">
+                <a:solidFill>
+                  <a:schemeClr val="dk1"/>
+                </a:solidFill>
+                <a:latin typeface="맑은 고딕"/>
+                <a:ea typeface="맑은 고딕"/>
+                <a:cs typeface="Calibri"/>
+                <a:sym typeface="Calibri"/>
+              </a:rPr>
+              <a:t/>
             </a:r>
           </a:p>
           <a:p>
@@ -18498,7 +18560,7 @@
                 <a:cs typeface="Calibri"/>
                 <a:sym typeface="Calibri"/>
               </a:rPr>
-              <a:t>화면개요</a:t>
+              <a:t/>
             </a:r>
             <a:endParaRPr sz="1600" b="1">
               <a:solidFill>
@@ -18697,6 +18759,57 @@
         </p:nvSpPr>
         <p:spPr>
           <a:xfrm>
+            <a:off x="5184743" y="1697238"/>
+            <a:ext cx="266700" cy="267970"/>
+          </a:xfrm>
+          <a:prstGeom prst="rect">
+            <a:avLst/>
+          </a:prstGeom>
+        </p:spPr>
+        <p:txBody>
+          <a:bodyPr wrap="square">
+            <a:spAutoFit/>
+          </a:bodyPr>
+          <a:lstStyle/>
+          <a:p>
+            <a:pPr marL="0" marR="0" lvl="0" indent="0" algn="l" rtl="0">
+              <a:spcBef>
+                <a:spcPts val="0"/>
+              </a:spcBef>
+              <a:spcAft>
+                <a:spcPts val="0"/>
+              </a:spcAft>
+              <a:buClr>
+                <a:srgbClr val="31333F"/>
+              </a:buClr>
+              <a:buSzPct val="25000"/>
+              <a:buFont typeface="맑은 고딕"/>
+              <a:buNone/>
+              <a:defRPr/>
+            </a:pPr>
+            <a:r>
+              <a:rPr lang="ko-KR" sz="1200" b="0" i="0">
+                <a:solidFill>
+                  <a:srgbClr val="31333F"/>
+                </a:solidFill>
+                <a:latin typeface="맑은 고딕"/>
+                <a:cs typeface="맑은 고딕"/>
+                <a:sym typeface="맑은 고딕"/>
+              </a:rPr>
+              <a:t>❹</a:t>
+            </a:r>
+            <a:endParaRPr lang="ko-KR" altLang="en-US"/>
+          </a:p>
+        </p:txBody>
+      </p:sp>
+      <p:sp>
+        <p:nvSpPr>
+          <p:cNvPr id="346" name="가로 글상자 346"/>
+          <p:cNvSpPr txBox="1"/>
+          <p:nvPr/>
+        </p:nvSpPr>
+        <p:spPr>
+          <a:xfrm>
             <a:off x="7137371" y="55810"/>
             <a:ext cx="266700" cy="267970"/>
           </a:xfrm>
@@ -18734,7 +18847,7 @@
                 <a:cs typeface="맑은 고딕"/>
                 <a:sym typeface="맑은 고딕"/>
               </a:rPr>
-              <a:t>❹</a:t>
+              <a:t>❺</a:t>
             </a:r>
             <a:endParaRPr lang="ko-KR" altLang="en-US"/>
           </a:p>
@@ -34772,7 +34885,7 @@
                 <a:cs typeface="Calibri"/>
                 <a:sym typeface="Calibri"/>
               </a:rPr>
-              <a:t>귀기울임</a:t>
+              <a:t>귀기울임(LISN)</a:t>
             </a:r>
             <a:endParaRPr sz="1600">
               <a:solidFill>
@@ -36541,7 +36654,7 @@
                 <a:cs typeface="Calibri"/>
                 <a:sym typeface="Calibri"/>
               </a:rPr>
-              <a:t>감정 변화 기록</a:t>
+              <a:t>정서 리포트</a:t>
             </a:r>
             <a:endParaRPr sz="1000">
               <a:solidFill>
@@ -37178,6 +37291,280 @@
           </a:ln>
         </p:spPr>
       </p:cxnSp>
+      <p:sp>
+        <p:nvSpPr>
+          <p:cNvPr id="154" name="도형 154"/>
+          <p:cNvSpPr/>
+          <p:nvPr/>
+        </p:nvSpPr>
+        <p:spPr>
+          <a:xfrm>
+            <a:off x="8711565" y="4980112"/>
+            <a:ext cx="939165" cy="441960"/>
+          </a:xfrm>
+          <a:prstGeom prst="rect">
+            <a:avLst/>
+          </a:prstGeom>
+          <a:solidFill>
+            <a:srgbClr val="0090D0">
+              <a:alpha val="9804"/>
+            </a:srgbClr>
+          </a:solidFill>
+          <a:ln w="28575" cap="flat" cmpd="sng">
+            <a:solidFill>
+              <a:srgbClr val="0090D0"/>
+            </a:solidFill>
+            <a:prstDash val="dash"/>
+            <a:miter lim="8000"/>
+            <a:headEnd type="none" w="sm" len="sm"/>
+            <a:tailEnd type="none" w="sm" len="sm"/>
+          </a:ln>
+        </p:spPr>
+        <p:txBody>
+          <a:bodyPr spcFirstLastPara="1" wrap="square" lIns="91425" tIns="45700" rIns="91425" bIns="45700" anchor="ctr" anchorCtr="0">
+            <a:noAutofit/>
+          </a:bodyPr>
+          <a:lstStyle/>
+          <a:p>
+            <a:pPr marL="0" marR="0" lvl="0" indent="0" algn="ctr" rtl="0">
+              <a:spcBef>
+                <a:spcPts val="0"/>
+              </a:spcBef>
+              <a:spcAft>
+                <a:spcPts val="0"/>
+              </a:spcAft>
+              <a:buClr>
+                <a:schemeClr val="lt1"/>
+              </a:buClr>
+              <a:buSzPts val="1800"/>
+              <a:buFont typeface="Calibri"/>
+              <a:buNone/>
+            </a:pPr>
+            <a:endParaRPr sz="1800">
+              <a:solidFill>
+                <a:schemeClr val="lt1"/>
+              </a:solidFill>
+              <a:latin typeface="Calibri"/>
+              <a:ea typeface="Calibri"/>
+              <a:cs typeface="Calibri"/>
+              <a:sym typeface="Calibri"/>
+            </a:endParaRPr>
+          </a:p>
+        </p:txBody>
+      </p:sp>
+      <p:sp>
+        <p:nvSpPr>
+          <p:cNvPr id="155" name="도형 155"/>
+          <p:cNvSpPr/>
+          <p:nvPr/>
+        </p:nvSpPr>
+        <p:spPr>
+          <a:xfrm>
+            <a:off x="8749665" y="5029007"/>
+            <a:ext cx="862965" cy="344170"/>
+          </a:xfrm>
+          <a:prstGeom prst="rect">
+            <a:avLst/>
+          </a:prstGeom>
+          <a:solidFill>
+            <a:schemeClr val="lt1"/>
+          </a:solidFill>
+          <a:ln w="12700" cap="flat" cmpd="sng">
+            <a:solidFill>
+              <a:srgbClr val="0090D0"/>
+            </a:solidFill>
+            <a:prstDash val="solid"/>
+            <a:miter lim="8000"/>
+            <a:headEnd type="none" w="sm" len="sm"/>
+            <a:tailEnd type="none" w="sm" len="sm"/>
+          </a:ln>
+        </p:spPr>
+        <p:txBody>
+          <a:bodyPr spcFirstLastPara="1" wrap="square" lIns="91425" tIns="45700" rIns="91425" bIns="45700" anchor="ctr" anchorCtr="0">
+            <a:noAutofit/>
+          </a:bodyPr>
+          <a:lstStyle/>
+          <a:p>
+            <a:pPr marL="0" marR="0" lvl="0" indent="0" algn="ctr" rtl="0">
+              <a:spcBef>
+                <a:spcPts val="0"/>
+              </a:spcBef>
+              <a:spcAft>
+                <a:spcPts val="0"/>
+              </a:spcAft>
+              <a:buClr>
+                <a:schemeClr val="dk1"/>
+              </a:buClr>
+              <a:buSzPts val="1000"/>
+              <a:buFont typeface="Calibri"/>
+              <a:buNone/>
+            </a:pPr>
+            <a:r>
+              <a:rPr lang="ko-KR" sz="1000">
+                <a:solidFill>
+                  <a:schemeClr val="dk1"/>
+                </a:solidFill>
+                <a:latin typeface="Calibri"/>
+                <a:ea typeface="Calibri"/>
+                <a:cs typeface="Calibri"/>
+                <a:sym typeface="Calibri"/>
+              </a:rPr>
+              <a:t>회원 탈퇴</a:t>
+            </a:r>
+            <a:endParaRPr sz="1000">
+              <a:solidFill>
+                <a:schemeClr val="dk1"/>
+              </a:solidFill>
+              <a:latin typeface="Calibri"/>
+              <a:ea typeface="Calibri"/>
+              <a:cs typeface="Calibri"/>
+              <a:sym typeface="Calibri"/>
+            </a:endParaRPr>
+          </a:p>
+        </p:txBody>
+      </p:sp>
+      <p:sp>
+        <p:nvSpPr>
+          <p:cNvPr id="156" name="도형 156"/>
+          <p:cNvSpPr/>
+          <p:nvPr/>
+        </p:nvSpPr>
+        <p:spPr>
+          <a:xfrm>
+            <a:off x="805744" y="4600575"/>
+            <a:ext cx="875700" cy="349200"/>
+          </a:xfrm>
+          <a:prstGeom prst="rect">
+            <a:avLst/>
+          </a:prstGeom>
+          <a:solidFill>
+            <a:schemeClr val="lt1"/>
+          </a:solidFill>
+          <a:ln w="12700" cap="flat" cmpd="sng">
+            <a:solidFill>
+              <a:srgbClr val="0090D0"/>
+            </a:solidFill>
+            <a:prstDash val="solid"/>
+            <a:miter lim="8000"/>
+            <a:headEnd type="none" w="sm" len="sm"/>
+            <a:tailEnd type="none" w="sm" len="sm"/>
+          </a:ln>
+        </p:spPr>
+        <p:txBody>
+          <a:bodyPr spcFirstLastPara="1" wrap="square" lIns="91425" tIns="45700" rIns="91425" bIns="45700" anchor="ctr" anchorCtr="0">
+            <a:noAutofit/>
+          </a:bodyPr>
+          <a:lstStyle/>
+          <a:p>
+            <a:pPr marL="0" marR="0" lvl="0" indent="0" algn="ctr" rtl="0">
+              <a:spcBef>
+                <a:spcPts val="0"/>
+              </a:spcBef>
+              <a:spcAft>
+                <a:spcPts val="0"/>
+              </a:spcAft>
+              <a:buClr>
+                <a:schemeClr val="dk1"/>
+              </a:buClr>
+              <a:buSzPts val="1000"/>
+              <a:buFont typeface="Calibri"/>
+              <a:buNone/>
+            </a:pPr>
+            <a:r>
+              <a:rPr lang="ko-KR" sz="1000">
+                <a:solidFill>
+                  <a:schemeClr val="dk1"/>
+                </a:solidFill>
+                <a:latin typeface="Calibri"/>
+                <a:ea typeface="Calibri"/>
+                <a:cs typeface="Calibri"/>
+                <a:sym typeface="Calibri"/>
+              </a:rPr>
+              <a:t>비밀번호 재설정</a:t>
+            </a:r>
+            <a:endParaRPr sz="1000">
+              <a:solidFill>
+                <a:schemeClr val="dk1"/>
+              </a:solidFill>
+              <a:latin typeface="Calibri"/>
+              <a:ea typeface="Calibri"/>
+              <a:cs typeface="Calibri"/>
+              <a:sym typeface="Calibri"/>
+            </a:endParaRPr>
+          </a:p>
+        </p:txBody>
+      </p:sp>
+      <p:sp>
+        <p:nvSpPr>
+          <p:cNvPr id="157" name="도형 157"/>
+          <p:cNvSpPr/>
+          <p:nvPr/>
+        </p:nvSpPr>
+        <p:spPr>
+          <a:xfrm>
+            <a:off x="805744" y="5460365"/>
+            <a:ext cx="875700" cy="349200"/>
+          </a:xfrm>
+          <a:prstGeom prst="rect">
+            <a:avLst/>
+          </a:prstGeom>
+          <a:solidFill>
+            <a:schemeClr val="lt1"/>
+          </a:solidFill>
+          <a:ln w="12700" cap="flat" cmpd="sng">
+            <a:solidFill>
+              <a:srgbClr val="0090D0"/>
+            </a:solidFill>
+            <a:prstDash val="solid"/>
+            <a:miter lim="8000"/>
+            <a:headEnd type="none" w="sm" len="sm"/>
+            <a:tailEnd type="none" w="sm" len="sm"/>
+          </a:ln>
+        </p:spPr>
+        <p:txBody>
+          <a:bodyPr spcFirstLastPara="1" wrap="square" lIns="91425" tIns="45700" rIns="91425" bIns="45700" anchor="ctr" anchorCtr="0">
+            <a:noAutofit/>
+          </a:bodyPr>
+          <a:lstStyle/>
+          <a:p>
+            <a:pPr marL="0" marR="0" lvl="0" indent="0" algn="ctr" rtl="0">
+              <a:spcBef>
+                <a:spcPts val="0"/>
+              </a:spcBef>
+              <a:spcAft>
+                <a:spcPts val="0"/>
+              </a:spcAft>
+              <a:buClr>
+                <a:schemeClr val="dk1"/>
+              </a:buClr>
+              <a:buSzPts val="1000"/>
+              <a:buFont typeface="Calibri"/>
+              <a:buNone/>
+            </a:pPr>
+            <a:r>
+              <a:rPr lang="ko-KR" sz="1000">
+                <a:solidFill>
+                  <a:schemeClr val="dk1"/>
+                </a:solidFill>
+                <a:latin typeface="Calibri"/>
+                <a:ea typeface="Calibri"/>
+                <a:cs typeface="Calibri"/>
+                <a:sym typeface="Calibri"/>
+              </a:rPr>
+              <a:t>긴급 상담 연결(전역)</a:t>
+            </a:r>
+            <a:endParaRPr sz="1000">
+              <a:solidFill>
+                <a:schemeClr val="dk1"/>
+              </a:solidFill>
+              <a:latin typeface="Calibri"/>
+              <a:ea typeface="Calibri"/>
+              <a:cs typeface="Calibri"/>
+              <a:sym typeface="Calibri"/>
+            </a:endParaRPr>
+          </a:p>
+        </p:txBody>
+      </p:sp>
     </p:spTree>
   </p:cSld>
   <p:clrMapOvr>
@@ -43379,7 +43766,7 @@
                 <a:cs typeface="맑은 고딕"/>
                 <a:sym typeface="맑은 고딕"/>
               </a:rPr>
-              <a:t> </a:t>
+              <a:t> 이메일 입력창: 계정 이메일 입력</a:t>
             </a:r>
             <a:r>
               <a:rPr lang="ko-KR" altLang="en-US" sz="1200" b="0" i="0">
@@ -43391,7 +43778,7 @@
                 <a:cs typeface="맑은 고딕"/>
                 <a:sym typeface="맑은 고딕"/>
               </a:rPr>
-              <a:t>이메일</a:t>
+              <a:t/>
             </a:r>
             <a:r>
               <a:rPr lang="ko-KR" sz="1200" b="0" i="0">
@@ -43403,7 +43790,7 @@
                 <a:cs typeface="맑은 고딕"/>
                 <a:sym typeface="맑은 고딕"/>
               </a:rPr>
-              <a:t> 입력창: 계정 </a:t>
+              <a:t/>
             </a:r>
             <a:r>
               <a:rPr lang="ko-KR" altLang="en-US" sz="1200" b="0" i="0">
@@ -43415,7 +43802,7 @@
                 <a:cs typeface="맑은 고딕"/>
                 <a:sym typeface="맑은 고딕"/>
               </a:rPr>
-              <a:t>이메일을</a:t>
+              <a:t/>
             </a:r>
             <a:r>
               <a:rPr lang="ko-KR" sz="1200" b="0" i="0">
@@ -43427,7 +43814,7 @@
                 <a:cs typeface="맑은 고딕"/>
                 <a:sym typeface="맑은 고딕"/>
               </a:rPr>
-              <a:t> 입력받는 인풋 박스</a:t>
+              <a:t/>
             </a:r>
           </a:p>
           <a:p>
@@ -43467,7 +43854,7 @@
                 <a:cs typeface="맑은 고딕"/>
                 <a:sym typeface="맑은 고딕"/>
               </a:rPr>
-              <a:t> 비밀번호 입력창: 비밀번호 입력용 마스킹 인풋 박스</a:t>
+              <a:t> 비밀번호 입력창: 마스킹 처리 입력</a:t>
             </a:r>
           </a:p>
           <a:p>
@@ -43507,7 +43894,7 @@
                 <a:cs typeface="맑은 고딕"/>
                 <a:sym typeface="맑은 고딕"/>
               </a:rPr>
-              <a:t> 로그인 버튼: JWT 토큰 발급 및 홈 화면(MAIN_HOME_01) 이동</a:t>
+              <a:t> 로그인 버튼: JWT 발급 후 MAIN_HOME_01 이동</a:t>
             </a:r>
           </a:p>
           <a:p>
@@ -43547,7 +43934,56 @@
                 <a:cs typeface="맑은 고딕"/>
                 <a:sym typeface="맑은 고딕"/>
               </a:rPr>
-              <a:t> 회원가입 버튼: 약관동의 화면(MAIN_JOIN_01)으로 이동</a:t>
+              <a:t> 비밀번호 찾기: MAIN_LOGIN_02 이동</a:t>
+            </a:r>
+            <a:endParaRPr sz="1200" b="0" i="0">
+              <a:solidFill>
+                <a:srgbClr val="31333F"/>
+              </a:solidFill>
+              <a:latin typeface="맑은 고딕"/>
+              <a:ea typeface="맑은 고딕"/>
+              <a:cs typeface="맑은 고딕"/>
+              <a:sym typeface="맑은 고딕"/>
+            </a:endParaRPr>
+          </a:p>
+          <a:p>
+            <a:pPr marL="0" marR="0" lvl="0" indent="0" algn="l" rtl="0">
+              <a:spcBef>
+                <a:spcPts val="0"/>
+              </a:spcBef>
+              <a:spcAft>
+                <a:spcPts val="0"/>
+              </a:spcAft>
+              <a:buClr>
+                <a:srgbClr val="31333F"/>
+              </a:buClr>
+              <a:buSzPct val="25000"/>
+              <a:buFont typeface="맑은 고딕"/>
+              <a:buNone/>
+              <a:defRPr/>
+            </a:pPr>
+            <a:r>
+              <a:rPr lang="ko-KR" sz="1200" b="0" i="0">
+                <a:solidFill>
+                  <a:srgbClr val="31333F"/>
+                </a:solidFill>
+                <a:latin typeface="맑은 고딕"/>
+                <a:cs typeface="맑은 고딕"/>
+                <a:sym typeface="맑은 고딕"/>
+              </a:rPr>
+              <a:t>❺</a:t>
+            </a:r>
+            <a:r>
+              <a:rPr lang="ko-KR" sz="1200" b="0" i="0">
+                <a:solidFill>
+                  <a:srgbClr val="31333F"/>
+                </a:solidFill>
+                <a:latin typeface="맑은 고딕"/>
+                <a:ea typeface="맑은 고딕"/>
+                <a:cs typeface="맑은 고딕"/>
+                <a:sym typeface="맑은 고딕"/>
+              </a:rPr>
+              <a:t> 회원가입 버튼: MAIN_JOIN_01 이동</a:t>
             </a:r>
             <a:endParaRPr sz="1200" b="0" i="0">
               <a:solidFill>
@@ -44022,7 +44458,7 @@
                   <a:cs typeface="Calibri"/>
                   <a:sym typeface="Calibri"/>
                 </a:rPr>
-                <a:t>MLCM_100</a:t>
+                <a:t>MLCM_100 / MLCM_102</a:t>
               </a:r>
               <a:endParaRPr sz="1200">
                 <a:solidFill>
@@ -44618,7 +45054,7 @@
         </p:nvSpPr>
         <p:spPr>
           <a:xfrm>
-            <a:off x="5010708" y="3354705"/>
+            <a:off x="5154234" y="3189167"/>
             <a:ext cx="266700" cy="272415"/>
           </a:xfrm>
           <a:prstGeom prst="rect">
@@ -44669,7 +45105,7 @@
         </p:nvSpPr>
         <p:spPr>
           <a:xfrm>
-            <a:off x="5010708" y="3764280"/>
+            <a:off x="5154234" y="3475959"/>
             <a:ext cx="266700" cy="272415"/>
           </a:xfrm>
           <a:prstGeom prst="rect">
@@ -44707,6 +45143,57 @@
                 <a:sym typeface="맑은 고딕"/>
               </a:rPr>
               <a:t>❹</a:t>
+            </a:r>
+            <a:endParaRPr lang="ko-KR" altLang="en-US"/>
+          </a:p>
+        </p:txBody>
+      </p:sp>
+      <p:sp>
+        <p:nvSpPr>
+          <p:cNvPr id="233" name="가로 글상자 233"/>
+          <p:cNvSpPr txBox="1"/>
+          <p:nvPr/>
+        </p:nvSpPr>
+        <p:spPr>
+          <a:xfrm>
+            <a:off x="5154234" y="3762752"/>
+            <a:ext cx="266700" cy="272415"/>
+          </a:xfrm>
+          <a:prstGeom prst="rect">
+            <a:avLst/>
+          </a:prstGeom>
+        </p:spPr>
+        <p:txBody>
+          <a:bodyPr wrap="square">
+            <a:spAutoFit/>
+          </a:bodyPr>
+          <a:lstStyle/>
+          <a:p>
+            <a:pPr marL="0" marR="0" lvl="0" indent="0" algn="l" rtl="0">
+              <a:spcBef>
+                <a:spcPts val="0"/>
+              </a:spcBef>
+              <a:spcAft>
+                <a:spcPts val="0"/>
+              </a:spcAft>
+              <a:buClr>
+                <a:srgbClr val="31333F"/>
+              </a:buClr>
+              <a:buSzPct val="25000"/>
+              <a:buFont typeface="맑은 고딕"/>
+              <a:buNone/>
+              <a:defRPr/>
+            </a:pPr>
+            <a:r>
+              <a:rPr lang="ko-KR" sz="1200" b="0" i="0">
+                <a:solidFill>
+                  <a:srgbClr val="31333F"/>
+                </a:solidFill>
+                <a:latin typeface="맑은 고딕"/>
+                <a:cs typeface="맑은 고딕"/>
+                <a:sym typeface="맑은 고딕"/>
+              </a:rPr>
+              <a:t>❺</a:t>
             </a:r>
             <a:endParaRPr lang="ko-KR" altLang="en-US"/>
           </a:p>

--- a/Documents/화면설계서_귀기울임.pptx
+++ b/Documents/화면설계서_귀기울임.pptx
@@ -17408,7 +17408,7 @@
                 <a:cs typeface="Calibri"/>
                 <a:sym typeface="Calibri"/>
               </a:rPr>
-              <a:t> 대화 글자 및 음성 입력</a:t>
+              <a:t> 대화 입력: 텍스트 입력 후 전송</a:t>
             </a:r>
           </a:p>
           <a:p>
